--- a/final/SUNUM_FINAL.pptx
+++ b/final/SUNUM_FINAL.pptx
@@ -23,6 +23,9 @@
     <p:sldId id="271" r:id="rId22"/>
     <p:sldId id="272" r:id="rId23"/>
     <p:sldId id="273" r:id="rId24"/>
+    <p:sldId id="274" r:id="rId25"/>
+    <p:sldId id="275" r:id="rId26"/>
+    <p:sldId id="276" r:id="rId27"/>
   </p:sldIdLst>
   <p:sldSz cx="12191695" cy="6858000" type="screen4x3"/>
   <p:notesSz cx="6858000" cy="9144000"/>
@@ -3759,7 +3762,7 @@
                 </a:solidFill>
                 <a:latin typeface="Segoe UI"/>
               </a:rPr>
-              <a:t>04 • SONUÇLAR</a:t>
+              <a:t>03 • DENEY SÜRECİ</a:t>
             </a:r>
           </a:p>
           <a:p>
@@ -3775,35 +3778,57 @@
                 </a:solidFill>
                 <a:latin typeface="Segoe UI"/>
               </a:rPr>
-              <a:t>Öğrenme Eğrileri — Erken Durdurma İş Başında</a:t>
-            </a:r>
-          </a:p>
-        </p:txBody>
-      </p:sp>
-      <p:pic>
-        <p:nvPicPr>
-          <p:cNvPr id="5" name="Picture 4" descr="winner_learning_curve.png"/>
-          <p:cNvPicPr>
-            <a:picLocks noChangeAspect="1"/>
-          </p:cNvPicPr>
-          <p:nvPr/>
-        </p:nvPicPr>
-        <p:blipFill>
-          <a:blip r:embed="rId2"/>
-          <a:stretch>
-            <a:fillRect/>
-          </a:stretch>
-        </p:blipFill>
-        <p:spPr>
-          <a:xfrm>
-            <a:off x="502920" y="1463040"/>
-            <a:ext cx="5440680" cy="2176272"/>
-          </a:xfrm>
-          <a:prstGeom prst="rect">
-            <a:avLst/>
-          </a:prstGeom>
-        </p:spPr>
-      </p:pic>
+              <a:t>Eğitim Protokolü — Her İki Yöntem</a:t>
+            </a:r>
+          </a:p>
+        </p:txBody>
+      </p:sp>
+      <p:sp>
+        <p:nvSpPr>
+          <p:cNvPr id="5" name="Rounded Rectangle 4"/>
+          <p:cNvSpPr/>
+          <p:nvPr/>
+        </p:nvSpPr>
+        <p:spPr>
+          <a:xfrm>
+            <a:off x="685800" y="1463040"/>
+            <a:ext cx="5257800" cy="4206240"/>
+          </a:xfrm>
+          <a:prstGeom prst="roundRect">
+            <a:avLst>
+              <a:gd name="adj" fmla="val 8000"/>
+            </a:avLst>
+          </a:prstGeom>
+          <a:solidFill>
+            <a:srgbClr val="F4F8FC"/>
+          </a:solidFill>
+          <a:ln>
+            <a:noFill/>
+          </a:ln>
+          <a:effectLst/>
+        </p:spPr>
+        <p:style>
+          <a:lnRef idx="1">
+            <a:schemeClr val="accent1"/>
+          </a:lnRef>
+          <a:fillRef idx="3">
+            <a:schemeClr val="accent1"/>
+          </a:fillRef>
+          <a:effectRef idx="2">
+            <a:schemeClr val="accent1"/>
+          </a:effectRef>
+          <a:fontRef idx="minor">
+            <a:schemeClr val="lt1"/>
+          </a:fontRef>
+        </p:style>
+        <p:txBody>
+          <a:bodyPr rtlCol="0" anchor="ctr"/>
+          <a:lstStyle/>
+          <a:p>
+            <a:pPr algn="ctr"/>
+          </a:p>
+        </p:txBody>
+      </p:sp>
       <p:sp>
         <p:nvSpPr>
           <p:cNvPr id="6" name="TextBox 5"/>
@@ -3812,8 +3837,8 @@
         </p:nvSpPr>
         <p:spPr>
           <a:xfrm>
-            <a:off x="502920" y="5440680"/>
-            <a:ext cx="5440680" cy="731520"/>
+            <a:off x="960120" y="1691640"/>
+            <a:ext cx="4754880" cy="457200"/>
           </a:xfrm>
           <a:prstGeom prst="rect">
             <a:avLst/>
@@ -3826,57 +3851,166 @@
           </a:bodyPr>
           <a:lstStyle/>
           <a:p>
-            <a:pPr algn="ctr">
-              <a:spcAft>
-                <a:spcPts val="400"/>
-              </a:spcAft>
-            </a:pPr>
-            <a:r>
-              <a:rPr sz="1200" b="0" i="1">
-                <a:solidFill>
-                  <a:srgbClr val="6B7A90"/>
-                </a:solidFill>
-                <a:latin typeface="Segoe UI"/>
-              </a:rPr>
-              <a:t>Yöntem 1 (CNN): geçerleme kaybı ~12. epoch'ta döndü; erken durdurma aşırı öğrenmeyi kesti</a:t>
-            </a:r>
-          </a:p>
-        </p:txBody>
-      </p:sp>
-      <p:pic>
-        <p:nvPicPr>
-          <p:cNvPr id="7" name="Picture 6" descr="winner_learning_curve.png"/>
-          <p:cNvPicPr>
-            <a:picLocks noChangeAspect="1"/>
-          </p:cNvPicPr>
-          <p:nvPr/>
-        </p:nvPicPr>
-        <p:blipFill>
-          <a:blip r:embed="rId3"/>
-          <a:stretch>
-            <a:fillRect/>
-          </a:stretch>
-        </p:blipFill>
-        <p:spPr>
-          <a:xfrm>
-            <a:off x="6217920" y="1463040"/>
-            <a:ext cx="5440680" cy="2176272"/>
-          </a:xfrm>
-          <a:prstGeom prst="rect">
-            <a:avLst/>
-          </a:prstGeom>
-        </p:spPr>
-      </p:pic>
-      <p:sp>
-        <p:nvSpPr>
-          <p:cNvPr id="8" name="TextBox 7"/>
+            <a:pPr algn="l">
+              <a:spcAft>
+                <a:spcPts val="400"/>
+              </a:spcAft>
+            </a:pPr>
+            <a:r>
+              <a:rPr sz="1700" b="1" i="0">
+                <a:solidFill>
+                  <a:srgbClr val="1F3B57"/>
+                </a:solidFill>
+                <a:latin typeface="Segoe UI"/>
+              </a:rPr>
+              <a:t>Optimizasyon</a:t>
+            </a:r>
+          </a:p>
+        </p:txBody>
+      </p:sp>
+      <p:sp>
+        <p:nvSpPr>
+          <p:cNvPr id="7" name="TextBox 6"/>
           <p:cNvSpPr txBox="1"/>
           <p:nvPr/>
         </p:nvSpPr>
         <p:spPr>
           <a:xfrm>
-            <a:off x="6217920" y="5440680"/>
-            <a:ext cx="5440680" cy="731520"/>
+            <a:off x="960120" y="2240280"/>
+            <a:ext cx="4754880" cy="3291840"/>
+          </a:xfrm>
+          <a:prstGeom prst="rect">
+            <a:avLst/>
+          </a:prstGeom>
+          <a:noFill/>
+        </p:spPr>
+        <p:txBody>
+          <a:bodyPr wrap="square">
+            <a:spAutoFit/>
+          </a:bodyPr>
+          <a:lstStyle/>
+          <a:p>
+            <a:pPr>
+              <a:spcAft>
+                <a:spcPts val="900"/>
+              </a:spcAft>
+            </a:pPr>
+            <a:r>
+              <a:rPr sz="1350">
+                <a:solidFill>
+                  <a:srgbClr val="242B35"/>
+                </a:solidFill>
+                <a:latin typeface="Segoe UI"/>
+              </a:rPr>
+              <a:t>▪  AdamW + weight decay, gradyan kırpma (norm 5)</a:t>
+            </a:r>
+          </a:p>
+          <a:p>
+            <a:pPr>
+              <a:spcAft>
+                <a:spcPts val="900"/>
+              </a:spcAft>
+            </a:pPr>
+            <a:r>
+              <a:rPr sz="1350">
+                <a:solidFill>
+                  <a:srgbClr val="242B35"/>
+                </a:solidFill>
+                <a:latin typeface="Segoe UI"/>
+              </a:rPr>
+              <a:t>▪  Karışık hassasiyet (AMP) — GPU'da hızlı denemeler</a:t>
+            </a:r>
+          </a:p>
+          <a:p>
+            <a:pPr>
+              <a:spcAft>
+                <a:spcPts val="900"/>
+              </a:spcAft>
+            </a:pPr>
+            <a:r>
+              <a:rPr sz="1350">
+                <a:solidFill>
+                  <a:srgbClr val="242B35"/>
+                </a:solidFill>
+                <a:latin typeface="Segoe UI"/>
+              </a:rPr>
+              <a:t>▪  Sınıf sayısıyla ters orantılı ağırlıklı cross-entropy</a:t>
+            </a:r>
+          </a:p>
+          <a:p>
+            <a:pPr>
+              <a:spcAft>
+                <a:spcPts val="900"/>
+              </a:spcAft>
+            </a:pPr>
+            <a:r>
+              <a:rPr sz="1350">
+                <a:solidFill>
+                  <a:srgbClr val="242B35"/>
+                </a:solidFill>
+                <a:latin typeface="Segoe UI"/>
+              </a:rPr>
+              <a:t>▪  Erken durdurma: geçerleme macro-F1, sabır 8; en iyi epoch geri yüklenir</a:t>
+            </a:r>
+          </a:p>
+        </p:txBody>
+      </p:sp>
+      <p:sp>
+        <p:nvSpPr>
+          <p:cNvPr id="8" name="Rounded Rectangle 7"/>
+          <p:cNvSpPr/>
+          <p:nvPr/>
+        </p:nvSpPr>
+        <p:spPr>
+          <a:xfrm>
+            <a:off x="6309360" y="1463040"/>
+            <a:ext cx="5257800" cy="4206240"/>
+          </a:xfrm>
+          <a:prstGeom prst="roundRect">
+            <a:avLst>
+              <a:gd name="adj" fmla="val 8000"/>
+            </a:avLst>
+          </a:prstGeom>
+          <a:solidFill>
+            <a:srgbClr val="F4F8FC"/>
+          </a:solidFill>
+          <a:ln>
+            <a:noFill/>
+          </a:ln>
+          <a:effectLst/>
+        </p:spPr>
+        <p:style>
+          <a:lnRef idx="1">
+            <a:schemeClr val="accent1"/>
+          </a:lnRef>
+          <a:fillRef idx="3">
+            <a:schemeClr val="accent1"/>
+          </a:fillRef>
+          <a:effectRef idx="2">
+            <a:schemeClr val="accent1"/>
+          </a:effectRef>
+          <a:fontRef idx="minor">
+            <a:schemeClr val="lt1"/>
+          </a:fontRef>
+        </p:style>
+        <p:txBody>
+          <a:bodyPr rtlCol="0" anchor="ctr"/>
+          <a:lstStyle/>
+          <a:p>
+            <a:pPr algn="ctr"/>
+          </a:p>
+        </p:txBody>
+      </p:sp>
+      <p:sp>
+        <p:nvSpPr>
+          <p:cNvPr id="9" name="TextBox 8"/>
+          <p:cNvSpPr txBox="1"/>
+          <p:nvPr/>
+        </p:nvSpPr>
+        <p:spPr>
+          <a:xfrm>
+            <a:off x="6583680" y="1691640"/>
+            <a:ext cx="4754880" cy="457200"/>
           </a:xfrm>
           <a:prstGeom prst="rect">
             <a:avLst/>
@@ -3889,26 +4023,152 @@
           </a:bodyPr>
           <a:lstStyle/>
           <a:p>
-            <a:pPr algn="ctr">
-              <a:spcAft>
-                <a:spcPts val="400"/>
-              </a:spcAft>
-            </a:pPr>
-            <a:r>
-              <a:rPr sz="1200" b="0" i="1">
+            <a:pPr algn="l">
+              <a:spcAft>
+                <a:spcPts val="400"/>
+              </a:spcAft>
+            </a:pPr>
+            <a:r>
+              <a:rPr sz="1700" b="1" i="0">
+                <a:solidFill>
+                  <a:srgbClr val="1F3B57"/>
+                </a:solidFill>
+                <a:latin typeface="Segoe UI"/>
+              </a:rPr>
+              <a:t>Dürüstlük önlemleri</a:t>
+            </a:r>
+          </a:p>
+        </p:txBody>
+      </p:sp>
+      <p:sp>
+        <p:nvSpPr>
+          <p:cNvPr id="10" name="TextBox 9"/>
+          <p:cNvSpPr txBox="1"/>
+          <p:nvPr/>
+        </p:nvSpPr>
+        <p:spPr>
+          <a:xfrm>
+            <a:off x="6583680" y="2240280"/>
+            <a:ext cx="4754880" cy="3291840"/>
+          </a:xfrm>
+          <a:prstGeom prst="rect">
+            <a:avLst/>
+          </a:prstGeom>
+          <a:noFill/>
+        </p:spPr>
+        <p:txBody>
+          <a:bodyPr wrap="square">
+            <a:spAutoFit/>
+          </a:bodyPr>
+          <a:lstStyle/>
+          <a:p>
+            <a:pPr>
+              <a:spcAft>
+                <a:spcPts val="900"/>
+              </a:spcAft>
+            </a:pPr>
+            <a:r>
+              <a:rPr sz="1350">
+                <a:solidFill>
+                  <a:srgbClr val="242B35"/>
+                </a:solidFill>
+                <a:latin typeface="Segoe UI"/>
+              </a:rPr>
+              <a:t>▪  Z-skor normalizasyonu YALNIZ eğitim istatistikleriyle (sızıntı yok)</a:t>
+            </a:r>
+          </a:p>
+          <a:p>
+            <a:pPr>
+              <a:spcAft>
+                <a:spcPts val="900"/>
+              </a:spcAft>
+            </a:pPr>
+            <a:r>
+              <a:rPr sz="1350">
+                <a:solidFill>
+                  <a:srgbClr val="242B35"/>
+                </a:solidFill>
+                <a:latin typeface="Segoe UI"/>
+              </a:rPr>
+              <a:t>▪  Hiperparametre seçimi yalnız geçerlemede; test'e tek dokunuş</a:t>
+            </a:r>
+          </a:p>
+          <a:p>
+            <a:pPr>
+              <a:spcAft>
+                <a:spcPts val="900"/>
+              </a:spcAft>
+            </a:pPr>
+            <a:r>
+              <a:rPr sz="1350">
+                <a:solidFill>
+                  <a:srgbClr val="242B35"/>
+                </a:solidFill>
+                <a:latin typeface="Segoe UI"/>
+              </a:rPr>
+              <a:t>▪  Sabit tohum (42), deterministik aday listeleri</a:t>
+            </a:r>
+          </a:p>
+          <a:p>
+            <a:pPr>
+              <a:spcAft>
+                <a:spcPts val="900"/>
+              </a:spcAft>
+            </a:pPr>
+            <a:r>
+              <a:rPr sz="1350">
+                <a:solidFill>
+                  <a:srgbClr val="242B35"/>
+                </a:solidFill>
+                <a:latin typeface="Segoe UI"/>
+              </a:rPr>
+              <a:t>▪  Freeze aşaması yok: aktarmalı öğrenme yasak → sıfırdan eğitim, erken durdurma doğrudan</a:t>
+            </a:r>
+          </a:p>
+        </p:txBody>
+      </p:sp>
+      <p:sp>
+        <p:nvSpPr>
+          <p:cNvPr id="11" name="TextBox 10"/>
+          <p:cNvSpPr txBox="1"/>
+          <p:nvPr/>
+        </p:nvSpPr>
+        <p:spPr>
+          <a:xfrm>
+            <a:off x="685800" y="5852160"/>
+            <a:ext cx="10881360" cy="457200"/>
+          </a:xfrm>
+          <a:prstGeom prst="rect">
+            <a:avLst/>
+          </a:prstGeom>
+          <a:noFill/>
+        </p:spPr>
+        <p:txBody>
+          <a:bodyPr wrap="square" anchor="t">
+            <a:spAutoFit/>
+          </a:bodyPr>
+          <a:lstStyle/>
+          <a:p>
+            <a:pPr algn="l">
+              <a:spcAft>
+                <a:spcPts val="400"/>
+              </a:spcAft>
+            </a:pPr>
+            <a:r>
+              <a:rPr sz="1350" b="0" i="1">
                 <a:solidFill>
                   <a:srgbClr val="6B7A90"/>
                 </a:solidFill>
                 <a:latin typeface="Segoe UI"/>
               </a:rPr>
-              <a:t>Yöntem 2 (BiGRU): en iyi epoch 9 — küçük girdiyle hızlı yakınsama</a:t>
-            </a:r>
-          </a:p>
-        </p:txBody>
-      </p:sp>
-      <p:sp>
-        <p:nvSpPr>
-          <p:cNvPr id="9" name="Rectangle 8"/>
+              <a:t>Toplam 43 aday eğitildi: 19 CNN + 24 RNN (arama + yerel iyileştirme + geliştirme aşaması).</a:t>
+            </a:r>
+          </a:p>
+        </p:txBody>
+      </p:sp>
+      <p:sp>
+        <p:nvSpPr>
+          <p:cNvPr id="12" name="Rectangle 11"/>
           <p:cNvSpPr/>
           <p:nvPr/>
         </p:nvSpPr>
@@ -3952,7 +4212,7 @@
       </p:sp>
       <p:sp>
         <p:nvSpPr>
-          <p:cNvPr id="10" name="TextBox 9"/>
+          <p:cNvPr id="13" name="TextBox 12"/>
           <p:cNvSpPr txBox="1"/>
           <p:nvPr/>
         </p:nvSpPr>
@@ -3991,7 +4251,7 @@
       </p:sp>
       <p:sp>
         <p:nvSpPr>
-          <p:cNvPr id="11" name="TextBox 10"/>
+          <p:cNvPr id="14" name="TextBox 13"/>
           <p:cNvSpPr txBox="1"/>
           <p:nvPr/>
         </p:nvSpPr>
@@ -4184,147 +4444,21 @@
                 </a:solidFill>
                 <a:latin typeface="Segoe UI"/>
               </a:rPr>
-              <a:t>Karışıklık Matrisleri ve Hata Analizi</a:t>
-            </a:r>
-          </a:p>
-        </p:txBody>
-      </p:sp>
-      <p:pic>
-        <p:nvPicPr>
-          <p:cNvPr id="5" name="Picture 4" descr="test_confusion_matrix.png"/>
-          <p:cNvPicPr>
-            <a:picLocks noChangeAspect="1"/>
-          </p:cNvPicPr>
-          <p:nvPr/>
-        </p:nvPicPr>
-        <p:blipFill>
-          <a:blip r:embed="rId2"/>
-          <a:stretch>
-            <a:fillRect/>
-          </a:stretch>
-        </p:blipFill>
-        <p:spPr>
-          <a:xfrm>
-            <a:off x="502920" y="1325880"/>
-            <a:ext cx="4916978" cy="4160520"/>
-          </a:xfrm>
-          <a:prstGeom prst="rect">
-            <a:avLst/>
-          </a:prstGeom>
-        </p:spPr>
-      </p:pic>
-      <p:sp>
-        <p:nvSpPr>
-          <p:cNvPr id="6" name="TextBox 5"/>
-          <p:cNvSpPr txBox="1"/>
-          <p:nvPr/>
-        </p:nvSpPr>
-        <p:spPr>
-          <a:xfrm>
-            <a:off x="502920" y="5504688"/>
-            <a:ext cx="5440680" cy="411480"/>
-          </a:xfrm>
-          <a:prstGeom prst="rect">
-            <a:avLst/>
-          </a:prstGeom>
-          <a:noFill/>
-        </p:spPr>
-        <p:txBody>
-          <a:bodyPr wrap="square" anchor="t">
-            <a:spAutoFit/>
-          </a:bodyPr>
-          <a:lstStyle/>
-          <a:p>
-            <a:pPr algn="ctr">
-              <a:spcAft>
-                <a:spcPts val="400"/>
-              </a:spcAft>
-            </a:pPr>
-            <a:r>
-              <a:rPr sz="1200" b="0" i="1">
-                <a:solidFill>
-                  <a:srgbClr val="6B7A90"/>
-                </a:solidFill>
-                <a:latin typeface="Segoe UI"/>
-              </a:rPr>
-              <a:t>Yöntem 1 (CNN)</a:t>
-            </a:r>
-          </a:p>
-        </p:txBody>
-      </p:sp>
-      <p:pic>
-        <p:nvPicPr>
-          <p:cNvPr id="7" name="Picture 6" descr="test_confusion_matrix.png"/>
-          <p:cNvPicPr>
-            <a:picLocks noChangeAspect="1"/>
-          </p:cNvPicPr>
-          <p:nvPr/>
-        </p:nvPicPr>
-        <p:blipFill>
-          <a:blip r:embed="rId3"/>
-          <a:stretch>
-            <a:fillRect/>
-          </a:stretch>
-        </p:blipFill>
-        <p:spPr>
-          <a:xfrm>
-            <a:off x="6217920" y="1325880"/>
-            <a:ext cx="4916978" cy="4160520"/>
-          </a:xfrm>
-          <a:prstGeom prst="rect">
-            <a:avLst/>
-          </a:prstGeom>
-        </p:spPr>
-      </p:pic>
-      <p:sp>
-        <p:nvSpPr>
-          <p:cNvPr id="8" name="TextBox 7"/>
-          <p:cNvSpPr txBox="1"/>
-          <p:nvPr/>
-        </p:nvSpPr>
-        <p:spPr>
-          <a:xfrm>
-            <a:off x="6217920" y="5504688"/>
-            <a:ext cx="5440680" cy="411480"/>
-          </a:xfrm>
-          <a:prstGeom prst="rect">
-            <a:avLst/>
-          </a:prstGeom>
-          <a:noFill/>
-        </p:spPr>
-        <p:txBody>
-          <a:bodyPr wrap="square" anchor="t">
-            <a:spAutoFit/>
-          </a:bodyPr>
-          <a:lstStyle/>
-          <a:p>
-            <a:pPr algn="ctr">
-              <a:spcAft>
-                <a:spcPts val="400"/>
-              </a:spcAft>
-            </a:pPr>
-            <a:r>
-              <a:rPr sz="1200" b="0" i="1">
-                <a:solidFill>
-                  <a:srgbClr val="6B7A90"/>
-                </a:solidFill>
-                <a:latin typeface="Segoe UI"/>
-              </a:rPr>
-              <a:t>Yöntem 2 (BiGRU) — köşegen 0,61-0,67, altı sınıfta dengeli</a:t>
-            </a:r>
-          </a:p>
-        </p:txBody>
-      </p:sp>
-      <p:sp>
-        <p:nvSpPr>
-          <p:cNvPr id="9" name="Rounded Rectangle 8"/>
+              <a:t>Sonuçlar — CREMA-D Test Kümesi</a:t>
+            </a:r>
+          </a:p>
+        </p:txBody>
+      </p:sp>
+      <p:sp>
+        <p:nvSpPr>
+          <p:cNvPr id="5" name="Rounded Rectangle 4"/>
           <p:cNvSpPr/>
           <p:nvPr/>
         </p:nvSpPr>
         <p:spPr>
           <a:xfrm>
-            <a:off x="685800" y="5897880"/>
-            <a:ext cx="10881360" cy="502920"/>
+            <a:off x="685800" y="1417320"/>
+            <a:ext cx="3429000" cy="1600200"/>
           </a:xfrm>
           <a:prstGeom prst="roundRect">
             <a:avLst>
@@ -4332,7 +4466,7 @@
             </a:avLst>
           </a:prstGeom>
           <a:solidFill>
-            <a:srgbClr val="E8F1FA"/>
+            <a:srgbClr val="F4F8FC"/>
           </a:solidFill>
           <a:ln>
             <a:noFill/>
@@ -4363,14 +4497,58 @@
       </p:sp>
       <p:sp>
         <p:nvSpPr>
-          <p:cNvPr id="10" name="TextBox 9"/>
+          <p:cNvPr id="6" name="Rectangle 5"/>
+          <p:cNvSpPr/>
+          <p:nvPr/>
+        </p:nvSpPr>
+        <p:spPr>
+          <a:xfrm>
+            <a:off x="685800" y="1417320"/>
+            <a:ext cx="82296" cy="1600200"/>
+          </a:xfrm>
+          <a:prstGeom prst="rect">
+            <a:avLst/>
+          </a:prstGeom>
+          <a:solidFill>
+            <a:srgbClr val="2F74C0"/>
+          </a:solidFill>
+          <a:ln>
+            <a:noFill/>
+          </a:ln>
+          <a:effectLst/>
+        </p:spPr>
+        <p:style>
+          <a:lnRef idx="1">
+            <a:schemeClr val="accent1"/>
+          </a:lnRef>
+          <a:fillRef idx="3">
+            <a:schemeClr val="accent1"/>
+          </a:fillRef>
+          <a:effectRef idx="2">
+            <a:schemeClr val="accent1"/>
+          </a:effectRef>
+          <a:fontRef idx="minor">
+            <a:schemeClr val="lt1"/>
+          </a:fontRef>
+        </p:style>
+        <p:txBody>
+          <a:bodyPr rtlCol="0" anchor="ctr"/>
+          <a:lstStyle/>
+          <a:p>
+            <a:pPr algn="ctr"/>
+          </a:p>
+        </p:txBody>
+      </p:sp>
+      <p:sp>
+        <p:nvSpPr>
+          <p:cNvPr id="7" name="TextBox 6"/>
           <p:cNvSpPr txBox="1"/>
           <p:nvPr/>
         </p:nvSpPr>
         <p:spPr>
           <a:xfrm>
-            <a:off x="914400" y="5943600"/>
-            <a:ext cx="10515600" cy="411480"/>
+            <a:off x="914400" y="1581912"/>
+            <a:ext cx="3063240" cy="1325880"/>
           </a:xfrm>
           <a:prstGeom prst="rect">
             <a:avLst/>
@@ -4389,20 +4567,392 @@
               </a:spcAft>
             </a:pPr>
             <a:r>
-              <a:rPr sz="1250" b="0" i="0">
-                <a:solidFill>
-                  <a:srgbClr val="1F3B57"/>
-                </a:solidFill>
-                <a:latin typeface="Segoe UI"/>
-              </a:rPr>
-              <a:t>En belirgin karışmalar: Mutlu → Korku (%21,5)  •  Korku → Üzgün (%20,4)  — benzer uyarılma düzeyindeki duyguların bilinen örtüşmesi [6].</a:t>
-            </a:r>
-          </a:p>
-        </p:txBody>
-      </p:sp>
-      <p:sp>
-        <p:nvSpPr>
-          <p:cNvPr id="11" name="Rectangle 10"/>
+              <a:rPr sz="1250" b="1" i="0">
+                <a:solidFill>
+                  <a:srgbClr val="6B7A90"/>
+                </a:solidFill>
+                <a:latin typeface="Segoe UI"/>
+              </a:rPr>
+              <a:t>YÖNTEM 1 • CNN</a:t>
+            </a:r>
+          </a:p>
+          <a:p>
+            <a:pPr algn="l">
+              <a:spcAft>
+                <a:spcPts val="400"/>
+              </a:spcAft>
+            </a:pPr>
+            <a:r>
+              <a:rPr sz="3000" b="1" i="0">
+                <a:solidFill>
+                  <a:srgbClr val="2F74C0"/>
+                </a:solidFill>
+                <a:latin typeface="Segoe UI"/>
+              </a:rPr>
+              <a:t>%62,6</a:t>
+            </a:r>
+          </a:p>
+          <a:p>
+            <a:pPr algn="l">
+              <a:spcAft>
+                <a:spcPts val="400"/>
+              </a:spcAft>
+            </a:pPr>
+            <a:r>
+              <a:rPr sz="1150" b="0" i="0">
+                <a:solidFill>
+                  <a:srgbClr val="242B35"/>
+                </a:solidFill>
+                <a:latin typeface="Segoe UI"/>
+              </a:rPr>
+              <a:t>macro-F1 0,6282</a:t>
+            </a:r>
+          </a:p>
+        </p:txBody>
+      </p:sp>
+      <p:sp>
+        <p:nvSpPr>
+          <p:cNvPr id="8" name="Rounded Rectangle 7"/>
+          <p:cNvSpPr/>
+          <p:nvPr/>
+        </p:nvSpPr>
+        <p:spPr>
+          <a:xfrm>
+            <a:off x="4389120" y="1417320"/>
+            <a:ext cx="3429000" cy="1600200"/>
+          </a:xfrm>
+          <a:prstGeom prst="roundRect">
+            <a:avLst>
+              <a:gd name="adj" fmla="val 8000"/>
+            </a:avLst>
+          </a:prstGeom>
+          <a:solidFill>
+            <a:srgbClr val="F4F8FC"/>
+          </a:solidFill>
+          <a:ln>
+            <a:noFill/>
+          </a:ln>
+          <a:effectLst/>
+        </p:spPr>
+        <p:style>
+          <a:lnRef idx="1">
+            <a:schemeClr val="accent1"/>
+          </a:lnRef>
+          <a:fillRef idx="3">
+            <a:schemeClr val="accent1"/>
+          </a:fillRef>
+          <a:effectRef idx="2">
+            <a:schemeClr val="accent1"/>
+          </a:effectRef>
+          <a:fontRef idx="minor">
+            <a:schemeClr val="lt1"/>
+          </a:fontRef>
+        </p:style>
+        <p:txBody>
+          <a:bodyPr rtlCol="0" anchor="ctr"/>
+          <a:lstStyle/>
+          <a:p>
+            <a:pPr algn="ctr"/>
+          </a:p>
+        </p:txBody>
+      </p:sp>
+      <p:sp>
+        <p:nvSpPr>
+          <p:cNvPr id="9" name="Rectangle 8"/>
+          <p:cNvSpPr/>
+          <p:nvPr/>
+        </p:nvSpPr>
+        <p:spPr>
+          <a:xfrm>
+            <a:off x="4389120" y="1417320"/>
+            <a:ext cx="82296" cy="1600200"/>
+          </a:xfrm>
+          <a:prstGeom prst="rect">
+            <a:avLst/>
+          </a:prstGeom>
+          <a:solidFill>
+            <a:srgbClr val="C26A1D"/>
+          </a:solidFill>
+          <a:ln>
+            <a:noFill/>
+          </a:ln>
+          <a:effectLst/>
+        </p:spPr>
+        <p:style>
+          <a:lnRef idx="1">
+            <a:schemeClr val="accent1"/>
+          </a:lnRef>
+          <a:fillRef idx="3">
+            <a:schemeClr val="accent1"/>
+          </a:fillRef>
+          <a:effectRef idx="2">
+            <a:schemeClr val="accent1"/>
+          </a:effectRef>
+          <a:fontRef idx="minor">
+            <a:schemeClr val="lt1"/>
+          </a:fontRef>
+        </p:style>
+        <p:txBody>
+          <a:bodyPr rtlCol="0" anchor="ctr"/>
+          <a:lstStyle/>
+          <a:p>
+            <a:pPr algn="ctr"/>
+          </a:p>
+        </p:txBody>
+      </p:sp>
+      <p:sp>
+        <p:nvSpPr>
+          <p:cNvPr id="10" name="TextBox 9"/>
+          <p:cNvSpPr txBox="1"/>
+          <p:nvPr/>
+        </p:nvSpPr>
+        <p:spPr>
+          <a:xfrm>
+            <a:off x="4617720" y="1581912"/>
+            <a:ext cx="3063240" cy="1325880"/>
+          </a:xfrm>
+          <a:prstGeom prst="rect">
+            <a:avLst/>
+          </a:prstGeom>
+          <a:noFill/>
+        </p:spPr>
+        <p:txBody>
+          <a:bodyPr wrap="square" anchor="t">
+            <a:spAutoFit/>
+          </a:bodyPr>
+          <a:lstStyle/>
+          <a:p>
+            <a:pPr algn="l">
+              <a:spcAft>
+                <a:spcPts val="400"/>
+              </a:spcAft>
+            </a:pPr>
+            <a:r>
+              <a:rPr sz="1250" b="1" i="0">
+                <a:solidFill>
+                  <a:srgbClr val="6B7A90"/>
+                </a:solidFill>
+                <a:latin typeface="Segoe UI"/>
+              </a:rPr>
+              <a:t>CNN + SPECAUGMENT</a:t>
+            </a:r>
+          </a:p>
+          <a:p>
+            <a:pPr algn="l">
+              <a:spcAft>
+                <a:spcPts val="400"/>
+              </a:spcAft>
+            </a:pPr>
+            <a:r>
+              <a:rPr sz="3000" b="1" i="0">
+                <a:solidFill>
+                  <a:srgbClr val="C26A1D"/>
+                </a:solidFill>
+                <a:latin typeface="Segoe UI"/>
+              </a:rPr>
+              <a:t>%62,9</a:t>
+            </a:r>
+          </a:p>
+          <a:p>
+            <a:pPr algn="l">
+              <a:spcAft>
+                <a:spcPts val="400"/>
+              </a:spcAft>
+            </a:pPr>
+            <a:r>
+              <a:rPr sz="1150" b="0" i="0">
+                <a:solidFill>
+                  <a:srgbClr val="242B35"/>
+                </a:solidFill>
+                <a:latin typeface="Segoe UI"/>
+              </a:rPr>
+              <a:t>macro-F1 0,6301</a:t>
+            </a:r>
+          </a:p>
+        </p:txBody>
+      </p:sp>
+      <p:sp>
+        <p:nvSpPr>
+          <p:cNvPr id="11" name="Rounded Rectangle 10"/>
+          <p:cNvSpPr/>
+          <p:nvPr/>
+        </p:nvSpPr>
+        <p:spPr>
+          <a:xfrm>
+            <a:off x="8092440" y="1417320"/>
+            <a:ext cx="3429000" cy="1600200"/>
+          </a:xfrm>
+          <a:prstGeom prst="roundRect">
+            <a:avLst>
+              <a:gd name="adj" fmla="val 8000"/>
+            </a:avLst>
+          </a:prstGeom>
+          <a:solidFill>
+            <a:srgbClr val="E9F6EF"/>
+          </a:solidFill>
+          <a:ln>
+            <a:noFill/>
+          </a:ln>
+          <a:effectLst/>
+        </p:spPr>
+        <p:style>
+          <a:lnRef idx="1">
+            <a:schemeClr val="accent1"/>
+          </a:lnRef>
+          <a:fillRef idx="3">
+            <a:schemeClr val="accent1"/>
+          </a:fillRef>
+          <a:effectRef idx="2">
+            <a:schemeClr val="accent1"/>
+          </a:effectRef>
+          <a:fontRef idx="minor">
+            <a:schemeClr val="lt1"/>
+          </a:fontRef>
+        </p:style>
+        <p:txBody>
+          <a:bodyPr rtlCol="0" anchor="ctr"/>
+          <a:lstStyle/>
+          <a:p>
+            <a:pPr algn="ctr"/>
+          </a:p>
+        </p:txBody>
+      </p:sp>
+      <p:sp>
+        <p:nvSpPr>
+          <p:cNvPr id="12" name="Rectangle 11"/>
+          <p:cNvSpPr/>
+          <p:nvPr/>
+        </p:nvSpPr>
+        <p:spPr>
+          <a:xfrm>
+            <a:off x="8092440" y="1417320"/>
+            <a:ext cx="82296" cy="1600200"/>
+          </a:xfrm>
+          <a:prstGeom prst="rect">
+            <a:avLst/>
+          </a:prstGeom>
+          <a:solidFill>
+            <a:srgbClr val="1F7A4D"/>
+          </a:solidFill>
+          <a:ln>
+            <a:noFill/>
+          </a:ln>
+          <a:effectLst/>
+        </p:spPr>
+        <p:style>
+          <a:lnRef idx="1">
+            <a:schemeClr val="accent1"/>
+          </a:lnRef>
+          <a:fillRef idx="3">
+            <a:schemeClr val="accent1"/>
+          </a:fillRef>
+          <a:effectRef idx="2">
+            <a:schemeClr val="accent1"/>
+          </a:effectRef>
+          <a:fontRef idx="minor">
+            <a:schemeClr val="lt1"/>
+          </a:fontRef>
+        </p:style>
+        <p:txBody>
+          <a:bodyPr rtlCol="0" anchor="ctr"/>
+          <a:lstStyle/>
+          <a:p>
+            <a:pPr algn="ctr"/>
+          </a:p>
+        </p:txBody>
+      </p:sp>
+      <p:sp>
+        <p:nvSpPr>
+          <p:cNvPr id="13" name="TextBox 12"/>
+          <p:cNvSpPr txBox="1"/>
+          <p:nvPr/>
+        </p:nvSpPr>
+        <p:spPr>
+          <a:xfrm>
+            <a:off x="8321040" y="1581912"/>
+            <a:ext cx="3063240" cy="1325880"/>
+          </a:xfrm>
+          <a:prstGeom prst="rect">
+            <a:avLst/>
+          </a:prstGeom>
+          <a:noFill/>
+        </p:spPr>
+        <p:txBody>
+          <a:bodyPr wrap="square" anchor="t">
+            <a:spAutoFit/>
+          </a:bodyPr>
+          <a:lstStyle/>
+          <a:p>
+            <a:pPr algn="l">
+              <a:spcAft>
+                <a:spcPts val="400"/>
+              </a:spcAft>
+            </a:pPr>
+            <a:r>
+              <a:rPr sz="1250" b="1" i="0">
+                <a:solidFill>
+                  <a:srgbClr val="6B7A90"/>
+                </a:solidFill>
+                <a:latin typeface="Segoe UI"/>
+              </a:rPr>
+              <a:t>YÖNTEM 2 • BiGRU  ★</a:t>
+            </a:r>
+          </a:p>
+          <a:p>
+            <a:pPr algn="l">
+              <a:spcAft>
+                <a:spcPts val="400"/>
+              </a:spcAft>
+            </a:pPr>
+            <a:r>
+              <a:rPr sz="3000" b="1" i="0">
+                <a:solidFill>
+                  <a:srgbClr val="1F7A4D"/>
+                </a:solidFill>
+                <a:latin typeface="Segoe UI"/>
+              </a:rPr>
+              <a:t>%63,8</a:t>
+            </a:r>
+          </a:p>
+          <a:p>
+            <a:pPr algn="l">
+              <a:spcAft>
+                <a:spcPts val="400"/>
+              </a:spcAft>
+            </a:pPr>
+            <a:r>
+              <a:rPr sz="1150" b="0" i="0">
+                <a:solidFill>
+                  <a:srgbClr val="242B35"/>
+                </a:solidFill>
+                <a:latin typeface="Segoe UI"/>
+              </a:rPr>
+              <a:t>macro-F1 0,6440</a:t>
+            </a:r>
+          </a:p>
+        </p:txBody>
+      </p:sp>
+      <p:graphicFrame>
+        <p:nvGraphicFramePr>
+          <p:cNvPr id="14" name="Chart 13"/>
+          <p:cNvGraphicFramePr>
+            <a:graphicFrameLocks noGrp="1"/>
+          </p:cNvGraphicFramePr>
+          <p:nvPr/>
+        </p:nvGraphicFramePr>
+        <p:xfrm>
+          <a:off x="685800" y="3246120"/>
+          <a:ext cx="10881360" cy="2834640"/>
+        </p:xfrm>
+        <a:graphic>
+          <a:graphicData uri="http://schemas.openxmlformats.org/drawingml/2006/chart">
+            <c:chart xmlns:c="http://schemas.openxmlformats.org/drawingml/2006/chart" r:id="rId2"/>
+          </a:graphicData>
+        </a:graphic>
+      </p:graphicFrame>
+      <p:sp>
+        <p:nvSpPr>
+          <p:cNvPr id="15" name="Rectangle 14"/>
           <p:cNvSpPr/>
           <p:nvPr/>
         </p:nvSpPr>
@@ -4446,7 +4996,7 @@
       </p:sp>
       <p:sp>
         <p:nvSpPr>
-          <p:cNvPr id="12" name="TextBox 11"/>
+          <p:cNvPr id="16" name="TextBox 15"/>
           <p:cNvSpPr txBox="1"/>
           <p:nvPr/>
         </p:nvSpPr>
@@ -4485,7 +5035,7 @@
       </p:sp>
       <p:sp>
         <p:nvSpPr>
-          <p:cNvPr id="13" name="TextBox 12"/>
+          <p:cNvPr id="17" name="TextBox 16"/>
           <p:cNvSpPr txBox="1"/>
           <p:nvPr/>
         </p:nvSpPr>
@@ -4662,7 +5212,7 @@
                 </a:solidFill>
                 <a:latin typeface="Segoe UI"/>
               </a:rPr>
-              <a:t>03 • DENEY SÜRECİ</a:t>
+              <a:t>04 • SONUÇLAR</a:t>
             </a:r>
           </a:p>
           <a:p>
@@ -4678,57 +5228,35 @@
                 </a:solidFill>
                 <a:latin typeface="Segoe UI"/>
               </a:rPr>
-              <a:t>Geliştirme Aşaması — Ne İşe Yaradı, Ne Yaramadı</a:t>
-            </a:r>
-          </a:p>
-        </p:txBody>
-      </p:sp>
-      <p:sp>
-        <p:nvSpPr>
-          <p:cNvPr id="5" name="Rounded Rectangle 4"/>
-          <p:cNvSpPr/>
-          <p:nvPr/>
-        </p:nvSpPr>
-        <p:spPr>
-          <a:xfrm>
-            <a:off x="685800" y="1463040"/>
-            <a:ext cx="5257800" cy="3931920"/>
-          </a:xfrm>
-          <a:prstGeom prst="roundRect">
-            <a:avLst>
-              <a:gd name="adj" fmla="val 8000"/>
-            </a:avLst>
-          </a:prstGeom>
-          <a:solidFill>
-            <a:srgbClr val="E9F6EF"/>
-          </a:solidFill>
-          <a:ln>
-            <a:noFill/>
-          </a:ln>
-          <a:effectLst/>
-        </p:spPr>
-        <p:style>
-          <a:lnRef idx="1">
-            <a:schemeClr val="accent1"/>
-          </a:lnRef>
-          <a:fillRef idx="3">
-            <a:schemeClr val="accent1"/>
-          </a:fillRef>
-          <a:effectRef idx="2">
-            <a:schemeClr val="accent1"/>
-          </a:effectRef>
-          <a:fontRef idx="minor">
-            <a:schemeClr val="lt1"/>
-          </a:fontRef>
-        </p:style>
-        <p:txBody>
-          <a:bodyPr rtlCol="0" anchor="ctr"/>
-          <a:lstStyle/>
-          <a:p>
-            <a:pPr algn="ctr"/>
-          </a:p>
-        </p:txBody>
-      </p:sp>
+              <a:t>Öğrenme Eğrileri — Erken Durdurma İş Başında</a:t>
+            </a:r>
+          </a:p>
+        </p:txBody>
+      </p:sp>
+      <p:pic>
+        <p:nvPicPr>
+          <p:cNvPr id="5" name="Picture 4" descr="winner_learning_curve.png"/>
+          <p:cNvPicPr>
+            <a:picLocks noChangeAspect="1"/>
+          </p:cNvPicPr>
+          <p:nvPr/>
+        </p:nvPicPr>
+        <p:blipFill>
+          <a:blip r:embed="rId2"/>
+          <a:stretch>
+            <a:fillRect/>
+          </a:stretch>
+        </p:blipFill>
+        <p:spPr>
+          <a:xfrm>
+            <a:off x="502920" y="1463040"/>
+            <a:ext cx="5440680" cy="2176272"/>
+          </a:xfrm>
+          <a:prstGeom prst="rect">
+            <a:avLst/>
+          </a:prstGeom>
+        </p:spPr>
+      </p:pic>
       <p:sp>
         <p:nvSpPr>
           <p:cNvPr id="6" name="TextBox 5"/>
@@ -4737,8 +5265,8 @@
         </p:nvSpPr>
         <p:spPr>
           <a:xfrm>
-            <a:off x="960120" y="1645920"/>
-            <a:ext cx="4754880" cy="457200"/>
+            <a:off x="502920" y="5440680"/>
+            <a:ext cx="5440680" cy="731520"/>
           </a:xfrm>
           <a:prstGeom prst="rect">
             <a:avLst/>
@@ -4751,166 +5279,57 @@
           </a:bodyPr>
           <a:lstStyle/>
           <a:p>
-            <a:pPr algn="l">
-              <a:spcAft>
-                <a:spcPts val="400"/>
-              </a:spcAft>
-            </a:pPr>
-            <a:r>
-              <a:rPr sz="1650" b="1" i="0">
-                <a:solidFill>
-                  <a:srgbClr val="1F7A4D"/>
-                </a:solidFill>
-                <a:latin typeface="Segoe UI"/>
-              </a:rPr>
-              <a:t>✓  CNN + SpecAugment [10]</a:t>
-            </a:r>
-          </a:p>
-        </p:txBody>
-      </p:sp>
-      <p:sp>
-        <p:nvSpPr>
-          <p:cNvPr id="7" name="TextBox 6"/>
+            <a:pPr algn="ctr">
+              <a:spcAft>
+                <a:spcPts val="400"/>
+              </a:spcAft>
+            </a:pPr>
+            <a:r>
+              <a:rPr sz="1200" b="0" i="1">
+                <a:solidFill>
+                  <a:srgbClr val="6B7A90"/>
+                </a:solidFill>
+                <a:latin typeface="Segoe UI"/>
+              </a:rPr>
+              <a:t>Yöntem 1 (CNN): geçerleme kaybı ~12. epoch'ta döndü; erken durdurma aşırı öğrenmeyi kesti</a:t>
+            </a:r>
+          </a:p>
+        </p:txBody>
+      </p:sp>
+      <p:pic>
+        <p:nvPicPr>
+          <p:cNvPr id="7" name="Picture 6" descr="winner_learning_curve.png"/>
+          <p:cNvPicPr>
+            <a:picLocks noChangeAspect="1"/>
+          </p:cNvPicPr>
+          <p:nvPr/>
+        </p:nvPicPr>
+        <p:blipFill>
+          <a:blip r:embed="rId3"/>
+          <a:stretch>
+            <a:fillRect/>
+          </a:stretch>
+        </p:blipFill>
+        <p:spPr>
+          <a:xfrm>
+            <a:off x="6217920" y="1463040"/>
+            <a:ext cx="5440680" cy="2176272"/>
+          </a:xfrm>
+          <a:prstGeom prst="rect">
+            <a:avLst/>
+          </a:prstGeom>
+        </p:spPr>
+      </p:pic>
+      <p:sp>
+        <p:nvSpPr>
+          <p:cNvPr id="8" name="TextBox 7"/>
           <p:cNvSpPr txBox="1"/>
           <p:nvPr/>
         </p:nvSpPr>
         <p:spPr>
           <a:xfrm>
-            <a:off x="960120" y="2240280"/>
-            <a:ext cx="4754880" cy="2926080"/>
-          </a:xfrm>
-          <a:prstGeom prst="rect">
-            <a:avLst/>
-          </a:prstGeom>
-          <a:noFill/>
-        </p:spPr>
-        <p:txBody>
-          <a:bodyPr wrap="square">
-            <a:spAutoFit/>
-          </a:bodyPr>
-          <a:lstStyle/>
-          <a:p>
-            <a:pPr>
-              <a:spcAft>
-                <a:spcPts val="800"/>
-              </a:spcAft>
-            </a:pPr>
-            <a:r>
-              <a:rPr sz="1350">
-                <a:solidFill>
-                  <a:srgbClr val="242B35"/>
-                </a:solidFill>
-                <a:latin typeface="Segoe UI"/>
-              </a:rPr>
-              <a:t>▪  Geçerleme macro-F1: 0,5531 → 0,5606</a:t>
-            </a:r>
-          </a:p>
-          <a:p>
-            <a:pPr>
-              <a:spcAft>
-                <a:spcPts val="800"/>
-              </a:spcAft>
-            </a:pPr>
-            <a:r>
-              <a:rPr sz="1350">
-                <a:solidFill>
-                  <a:srgbClr val="242B35"/>
-                </a:solidFill>
-                <a:latin typeface="Segoe UI"/>
-              </a:rPr>
-              <a:t>▪  Test doğruluğu: 0,6264 → 0,6292</a:t>
-            </a:r>
-          </a:p>
-          <a:p>
-            <a:pPr>
-              <a:spcAft>
-                <a:spcPts val="800"/>
-              </a:spcAft>
-            </a:pPr>
-            <a:r>
-              <a:rPr sz="1350">
-                <a:solidFill>
-                  <a:srgbClr val="242B35"/>
-                </a:solidFill>
-                <a:latin typeface="Segoe UI"/>
-              </a:rPr>
-              <a:t>▪  Zaman/frekans maskeleme yalnız eğitim yığınlarına</a:t>
-            </a:r>
-          </a:p>
-          <a:p>
-            <a:pPr>
-              <a:spcAft>
-                <a:spcPts val="800"/>
-              </a:spcAft>
-            </a:pPr>
-            <a:r>
-              <a:rPr sz="1350">
-                <a:solidFill>
-                  <a:srgbClr val="242B35"/>
-                </a:solidFill>
-                <a:latin typeface="Segoe UI"/>
-              </a:rPr>
-              <a:t>▪  Hafif varyant işe yaramadı — maskeleme gücü önemli</a:t>
-            </a:r>
-          </a:p>
-        </p:txBody>
-      </p:sp>
-      <p:sp>
-        <p:nvSpPr>
-          <p:cNvPr id="8" name="Rounded Rectangle 7"/>
-          <p:cNvSpPr/>
-          <p:nvPr/>
-        </p:nvSpPr>
-        <p:spPr>
-          <a:xfrm>
-            <a:off x="6309360" y="1463040"/>
-            <a:ext cx="5257800" cy="3931920"/>
-          </a:xfrm>
-          <a:prstGeom prst="roundRect">
-            <a:avLst>
-              <a:gd name="adj" fmla="val 8000"/>
-            </a:avLst>
-          </a:prstGeom>
-          <a:solidFill>
-            <a:srgbClr val="FBEEEC"/>
-          </a:solidFill>
-          <a:ln>
-            <a:noFill/>
-          </a:ln>
-          <a:effectLst/>
-        </p:spPr>
-        <p:style>
-          <a:lnRef idx="1">
-            <a:schemeClr val="accent1"/>
-          </a:lnRef>
-          <a:fillRef idx="3">
-            <a:schemeClr val="accent1"/>
-          </a:fillRef>
-          <a:effectRef idx="2">
-            <a:schemeClr val="accent1"/>
-          </a:effectRef>
-          <a:fontRef idx="minor">
-            <a:schemeClr val="lt1"/>
-          </a:fontRef>
-        </p:style>
-        <p:txBody>
-          <a:bodyPr rtlCol="0" anchor="ctr"/>
-          <a:lstStyle/>
-          <a:p>
-            <a:pPr algn="ctr"/>
-          </a:p>
-        </p:txBody>
-      </p:sp>
-      <p:sp>
-        <p:nvSpPr>
-          <p:cNvPr id="9" name="TextBox 8"/>
-          <p:cNvSpPr txBox="1"/>
-          <p:nvPr/>
-        </p:nvSpPr>
-        <p:spPr>
-          <a:xfrm>
-            <a:off x="6583680" y="1645920"/>
-            <a:ext cx="4754880" cy="457200"/>
+            <a:off x="6217920" y="5440680"/>
+            <a:ext cx="5440680" cy="731520"/>
           </a:xfrm>
           <a:prstGeom prst="rect">
             <a:avLst/>
@@ -4923,198 +5342,26 @@
           </a:bodyPr>
           <a:lstStyle/>
           <a:p>
-            <a:pPr algn="l">
-              <a:spcAft>
-                <a:spcPts val="400"/>
-              </a:spcAft>
-            </a:pPr>
-            <a:r>
-              <a:rPr sz="1650" b="1" i="0">
-                <a:solidFill>
-                  <a:srgbClr val="B43A2E"/>
-                </a:solidFill>
-                <a:latin typeface="Segoe UI"/>
-              </a:rPr>
-              <a:t>✗  BiGRU varyantları</a:t>
-            </a:r>
-          </a:p>
-        </p:txBody>
-      </p:sp>
-      <p:sp>
-        <p:nvSpPr>
-          <p:cNvPr id="10" name="TextBox 9"/>
-          <p:cNvSpPr txBox="1"/>
-          <p:nvPr/>
-        </p:nvSpPr>
-        <p:spPr>
-          <a:xfrm>
-            <a:off x="6583680" y="2240280"/>
-            <a:ext cx="4754880" cy="2926080"/>
-          </a:xfrm>
-          <a:prstGeom prst="rect">
-            <a:avLst/>
-          </a:prstGeom>
-          <a:noFill/>
-        </p:spPr>
-        <p:txBody>
-          <a:bodyPr wrap="square">
-            <a:spAutoFit/>
-          </a:bodyPr>
-          <a:lstStyle/>
-          <a:p>
-            <a:pPr>
-              <a:spcAft>
-                <a:spcPts val="800"/>
-              </a:spcAft>
-            </a:pPr>
-            <a:r>
-              <a:rPr sz="1350">
-                <a:solidFill>
-                  <a:srgbClr val="242B35"/>
-                </a:solidFill>
-                <a:latin typeface="Segoe UI"/>
-              </a:rPr>
-              <a:t>▪  Dikkat havuzlama: 0,5542 (-0,0096)</a:t>
-            </a:r>
-          </a:p>
-          <a:p>
-            <a:pPr>
-              <a:spcAft>
-                <a:spcPts val="800"/>
-              </a:spcAft>
-            </a:pPr>
-            <a:r>
-              <a:rPr sz="1350">
-                <a:solidFill>
-                  <a:srgbClr val="242B35"/>
-                </a:solidFill>
-                <a:latin typeface="Segoe UI"/>
-              </a:rPr>
-              <a:t>▪  Öznitelik gürültüsü: 0,5602 (-0,0036)</a:t>
-            </a:r>
-          </a:p>
-          <a:p>
-            <a:pPr>
-              <a:spcAft>
-                <a:spcPts val="800"/>
-              </a:spcAft>
-            </a:pPr>
-            <a:r>
-              <a:rPr sz="1350">
-                <a:solidFill>
-                  <a:srgbClr val="242B35"/>
-                </a:solidFill>
-                <a:latin typeface="Segoe UI"/>
-              </a:rPr>
-              <a:t>▪  Dikkat + gürültü: 0,5597 (-0,0041)</a:t>
-            </a:r>
-          </a:p>
-          <a:p>
-            <a:pPr>
-              <a:spcAft>
-                <a:spcPts val="800"/>
-              </a:spcAft>
-            </a:pPr>
-            <a:r>
-              <a:rPr sz="1350">
-                <a:solidFill>
-                  <a:srgbClr val="242B35"/>
-                </a:solidFill>
-                <a:latin typeface="Segoe UI"/>
-              </a:rPr>
-              <a:t>▪  Hiçbiri geçerlemede kazananı geçemedi → test tekrarı YAPILMADI</a:t>
-            </a:r>
-          </a:p>
-        </p:txBody>
-      </p:sp>
-      <p:sp>
-        <p:nvSpPr>
-          <p:cNvPr id="11" name="Rounded Rectangle 10"/>
-          <p:cNvSpPr/>
-          <p:nvPr/>
-        </p:nvSpPr>
-        <p:spPr>
-          <a:xfrm>
-            <a:off x="685800" y="5623560"/>
-            <a:ext cx="10881360" cy="685800"/>
-          </a:xfrm>
-          <a:prstGeom prst="roundRect">
-            <a:avLst>
-              <a:gd name="adj" fmla="val 8000"/>
-            </a:avLst>
-          </a:prstGeom>
-          <a:solidFill>
-            <a:srgbClr val="F4F8FC"/>
-          </a:solidFill>
-          <a:ln>
-            <a:noFill/>
-          </a:ln>
-          <a:effectLst/>
-        </p:spPr>
-        <p:style>
-          <a:lnRef idx="1">
-            <a:schemeClr val="accent1"/>
-          </a:lnRef>
-          <a:fillRef idx="3">
-            <a:schemeClr val="accent1"/>
-          </a:fillRef>
-          <a:effectRef idx="2">
-            <a:schemeClr val="accent1"/>
-          </a:effectRef>
-          <a:fontRef idx="minor">
-            <a:schemeClr val="lt1"/>
-          </a:fontRef>
-        </p:style>
-        <p:txBody>
-          <a:bodyPr rtlCol="0" anchor="ctr"/>
-          <a:lstStyle/>
-          <a:p>
-            <a:pPr algn="ctr"/>
-          </a:p>
-        </p:txBody>
-      </p:sp>
-      <p:sp>
-        <p:nvSpPr>
-          <p:cNvPr id="12" name="TextBox 11"/>
-          <p:cNvSpPr txBox="1"/>
-          <p:nvPr/>
-        </p:nvSpPr>
-        <p:spPr>
-          <a:xfrm>
-            <a:off x="914400" y="5705856"/>
-            <a:ext cx="10515600" cy="548640"/>
-          </a:xfrm>
-          <a:prstGeom prst="rect">
-            <a:avLst/>
-          </a:prstGeom>
-          <a:noFill/>
-        </p:spPr>
-        <p:txBody>
-          <a:bodyPr wrap="square" anchor="t">
-            <a:spAutoFit/>
-          </a:bodyPr>
-          <a:lstStyle/>
-          <a:p>
-            <a:pPr algn="l">
-              <a:spcAft>
-                <a:spcPts val="400"/>
-              </a:spcAft>
-            </a:pPr>
-            <a:r>
-              <a:rPr sz="1300" b="1" i="0">
-                <a:solidFill>
-                  <a:srgbClr val="1F3B57"/>
-                </a:solidFill>
-                <a:latin typeface="Segoe UI"/>
-              </a:rPr>
-              <a:t>Olumsuz sonuçlar da rapora girdi: geliştirme kararları yalnız geçerlemeyle verildi; test disiplini korundu.</a:t>
-            </a:r>
-          </a:p>
-        </p:txBody>
-      </p:sp>
-      <p:sp>
-        <p:nvSpPr>
-          <p:cNvPr id="13" name="Rectangle 12"/>
+            <a:pPr algn="ctr">
+              <a:spcAft>
+                <a:spcPts val="400"/>
+              </a:spcAft>
+            </a:pPr>
+            <a:r>
+              <a:rPr sz="1200" b="0" i="1">
+                <a:solidFill>
+                  <a:srgbClr val="6B7A90"/>
+                </a:solidFill>
+                <a:latin typeface="Segoe UI"/>
+              </a:rPr>
+              <a:t>Yöntem 2 (BiGRU): en iyi epoch 9 — küçük girdiyle hızlı yakınsama</a:t>
+            </a:r>
+          </a:p>
+        </p:txBody>
+      </p:sp>
+      <p:sp>
+        <p:nvSpPr>
+          <p:cNvPr id="9" name="Rectangle 8"/>
           <p:cNvSpPr/>
           <p:nvPr/>
         </p:nvSpPr>
@@ -5158,7 +5405,7 @@
       </p:sp>
       <p:sp>
         <p:nvSpPr>
-          <p:cNvPr id="14" name="TextBox 13"/>
+          <p:cNvPr id="10" name="TextBox 9"/>
           <p:cNvSpPr txBox="1"/>
           <p:nvPr/>
         </p:nvSpPr>
@@ -5197,7 +5444,7 @@
       </p:sp>
       <p:sp>
         <p:nvSpPr>
-          <p:cNvPr id="15" name="TextBox 14"/>
+          <p:cNvPr id="11" name="TextBox 10"/>
           <p:cNvSpPr txBox="1"/>
           <p:nvPr/>
         </p:nvSpPr>
@@ -5390,111 +5637,45 @@
                 </a:solidFill>
                 <a:latin typeface="Segoe UI"/>
               </a:rPr>
-              <a:t>Genelleme Testi — Aynı Kod, MELD Üzerinde</a:t>
-            </a:r>
-          </a:p>
-        </p:txBody>
-      </p:sp>
-      <p:sp>
-        <p:nvSpPr>
-          <p:cNvPr id="5" name="Rounded Rectangle 4"/>
-          <p:cNvSpPr/>
-          <p:nvPr/>
-        </p:nvSpPr>
-        <p:spPr>
-          <a:xfrm>
-            <a:off x="685800" y="1463040"/>
-            <a:ext cx="3429000" cy="1554480"/>
-          </a:xfrm>
-          <a:prstGeom prst="roundRect">
-            <a:avLst>
-              <a:gd name="adj" fmla="val 8000"/>
-            </a:avLst>
-          </a:prstGeom>
-          <a:solidFill>
-            <a:srgbClr val="F4F8FC"/>
-          </a:solidFill>
-          <a:ln>
-            <a:noFill/>
-          </a:ln>
-          <a:effectLst/>
-        </p:spPr>
-        <p:style>
-          <a:lnRef idx="1">
-            <a:schemeClr val="accent1"/>
-          </a:lnRef>
-          <a:fillRef idx="3">
-            <a:schemeClr val="accent1"/>
-          </a:fillRef>
-          <a:effectRef idx="2">
-            <a:schemeClr val="accent1"/>
-          </a:effectRef>
-          <a:fontRef idx="minor">
-            <a:schemeClr val="lt1"/>
-          </a:fontRef>
-        </p:style>
-        <p:txBody>
-          <a:bodyPr rtlCol="0" anchor="ctr"/>
-          <a:lstStyle/>
-          <a:p>
-            <a:pPr algn="ctr"/>
-          </a:p>
-        </p:txBody>
-      </p:sp>
-      <p:sp>
-        <p:nvSpPr>
-          <p:cNvPr id="6" name="Rectangle 5"/>
-          <p:cNvSpPr/>
-          <p:nvPr/>
-        </p:nvSpPr>
-        <p:spPr>
-          <a:xfrm>
-            <a:off x="685800" y="1463040"/>
-            <a:ext cx="82296" cy="1554480"/>
-          </a:xfrm>
-          <a:prstGeom prst="rect">
-            <a:avLst/>
-          </a:prstGeom>
-          <a:solidFill>
-            <a:srgbClr val="2F74C0"/>
-          </a:solidFill>
-          <a:ln>
-            <a:noFill/>
-          </a:ln>
-          <a:effectLst/>
-        </p:spPr>
-        <p:style>
-          <a:lnRef idx="1">
-            <a:schemeClr val="accent1"/>
-          </a:lnRef>
-          <a:fillRef idx="3">
-            <a:schemeClr val="accent1"/>
-          </a:fillRef>
-          <a:effectRef idx="2">
-            <a:schemeClr val="accent1"/>
-          </a:effectRef>
-          <a:fontRef idx="minor">
-            <a:schemeClr val="lt1"/>
-          </a:fontRef>
-        </p:style>
-        <p:txBody>
-          <a:bodyPr rtlCol="0" anchor="ctr"/>
-          <a:lstStyle/>
-          <a:p>
-            <a:pPr algn="ctr"/>
-          </a:p>
-        </p:txBody>
-      </p:sp>
-      <p:sp>
-        <p:nvSpPr>
-          <p:cNvPr id="7" name="TextBox 6"/>
+              <a:t>Early Stopping İş Başında — Canlı</a:t>
+            </a:r>
+          </a:p>
+        </p:txBody>
+      </p:sp>
+      <p:pic>
+        <p:nvPicPr>
+          <p:cNvPr id="5" name="Picture 4" descr="early_stopping.gif"/>
+          <p:cNvPicPr>
+            <a:picLocks noChangeAspect="1"/>
+          </p:cNvPicPr>
+          <p:nvPr/>
+        </p:nvPicPr>
+        <p:blipFill>
+          <a:blip r:embed="rId2"/>
+          <a:stretch>
+            <a:fillRect/>
+          </a:stretch>
+        </p:blipFill>
+        <p:spPr>
+          <a:xfrm>
+            <a:off x="1051560" y="1417320"/>
+            <a:ext cx="10058400" cy="4023360"/>
+          </a:xfrm>
+          <a:prstGeom prst="rect">
+            <a:avLst/>
+          </a:prstGeom>
+        </p:spPr>
+      </p:pic>
+      <p:sp>
+        <p:nvSpPr>
+          <p:cNvPr id="6" name="TextBox 5"/>
           <p:cNvSpPr txBox="1"/>
           <p:nvPr/>
         </p:nvSpPr>
         <p:spPr>
           <a:xfrm>
-            <a:off x="914400" y="1627632"/>
-            <a:ext cx="3063240" cy="1280160"/>
+            <a:off x="685800" y="5897880"/>
+            <a:ext cx="10881360" cy="502920"/>
           </a:xfrm>
           <a:prstGeom prst="rect">
             <a:avLst/>
@@ -5513,461 +5694,20 @@
               </a:spcAft>
             </a:pPr>
             <a:r>
-              <a:rPr sz="1250" b="1" i="0">
+              <a:rPr sz="1250" b="0" i="1">
                 <a:solidFill>
                   <a:srgbClr val="6B7A90"/>
                 </a:solidFill>
                 <a:latin typeface="Segoe UI"/>
               </a:rPr>
-              <a:t>MELD • CNN</a:t>
-            </a:r>
-          </a:p>
-          <a:p>
-            <a:pPr algn="l">
-              <a:spcAft>
-                <a:spcPts val="400"/>
-              </a:spcAft>
-            </a:pPr>
-            <a:r>
-              <a:rPr sz="3000" b="1" i="0">
-                <a:solidFill>
-                  <a:srgbClr val="2F74C0"/>
-                </a:solidFill>
-                <a:latin typeface="Segoe UI"/>
-              </a:rPr>
-              <a:t>%44,3</a:t>
-            </a:r>
-          </a:p>
-          <a:p>
-            <a:pPr algn="l">
-              <a:spcAft>
-                <a:spcPts val="400"/>
-              </a:spcAft>
-            </a:pPr>
-            <a:r>
-              <a:rPr sz="1150" b="0" i="0">
-                <a:solidFill>
-                  <a:srgbClr val="242B35"/>
-                </a:solidFill>
-                <a:latin typeface="Segoe UI"/>
-              </a:rPr>
-              <a:t>dengeli doğruluk 0,2303</a:t>
-            </a:r>
-          </a:p>
-        </p:txBody>
-      </p:sp>
-      <p:sp>
-        <p:nvSpPr>
-          <p:cNvPr id="8" name="Rounded Rectangle 7"/>
-          <p:cNvSpPr/>
-          <p:nvPr/>
-        </p:nvSpPr>
-        <p:spPr>
-          <a:xfrm>
-            <a:off x="4389120" y="1463040"/>
-            <a:ext cx="3429000" cy="1554480"/>
-          </a:xfrm>
-          <a:prstGeom prst="roundRect">
-            <a:avLst>
-              <a:gd name="adj" fmla="val 8000"/>
-            </a:avLst>
-          </a:prstGeom>
-          <a:solidFill>
-            <a:srgbClr val="F4F8FC"/>
-          </a:solidFill>
-          <a:ln>
-            <a:noFill/>
-          </a:ln>
-          <a:effectLst/>
-        </p:spPr>
-        <p:style>
-          <a:lnRef idx="1">
-            <a:schemeClr val="accent1"/>
-          </a:lnRef>
-          <a:fillRef idx="3">
-            <a:schemeClr val="accent1"/>
-          </a:fillRef>
-          <a:effectRef idx="2">
-            <a:schemeClr val="accent1"/>
-          </a:effectRef>
-          <a:fontRef idx="minor">
-            <a:schemeClr val="lt1"/>
-          </a:fontRef>
-        </p:style>
-        <p:txBody>
-          <a:bodyPr rtlCol="0" anchor="ctr"/>
-          <a:lstStyle/>
-          <a:p>
-            <a:pPr algn="ctr"/>
-          </a:p>
-        </p:txBody>
-      </p:sp>
-      <p:sp>
-        <p:nvSpPr>
-          <p:cNvPr id="9" name="Rectangle 8"/>
-          <p:cNvSpPr/>
-          <p:nvPr/>
-        </p:nvSpPr>
-        <p:spPr>
-          <a:xfrm>
-            <a:off x="4389120" y="1463040"/>
-            <a:ext cx="82296" cy="1554480"/>
-          </a:xfrm>
-          <a:prstGeom prst="rect">
-            <a:avLst/>
-          </a:prstGeom>
-          <a:solidFill>
-            <a:srgbClr val="2F74C0"/>
-          </a:solidFill>
-          <a:ln>
-            <a:noFill/>
-          </a:ln>
-          <a:effectLst/>
-        </p:spPr>
-        <p:style>
-          <a:lnRef idx="1">
-            <a:schemeClr val="accent1"/>
-          </a:lnRef>
-          <a:fillRef idx="3">
-            <a:schemeClr val="accent1"/>
-          </a:fillRef>
-          <a:effectRef idx="2">
-            <a:schemeClr val="accent1"/>
-          </a:effectRef>
-          <a:fontRef idx="minor">
-            <a:schemeClr val="lt1"/>
-          </a:fontRef>
-        </p:style>
-        <p:txBody>
-          <a:bodyPr rtlCol="0" anchor="ctr"/>
-          <a:lstStyle/>
-          <a:p>
-            <a:pPr algn="ctr"/>
-          </a:p>
-        </p:txBody>
-      </p:sp>
-      <p:sp>
-        <p:nvSpPr>
-          <p:cNvPr id="10" name="TextBox 9"/>
-          <p:cNvSpPr txBox="1"/>
-          <p:nvPr/>
-        </p:nvSpPr>
-        <p:spPr>
-          <a:xfrm>
-            <a:off x="4617720" y="1627632"/>
-            <a:ext cx="3063240" cy="1280160"/>
-          </a:xfrm>
-          <a:prstGeom prst="rect">
-            <a:avLst/>
-          </a:prstGeom>
-          <a:noFill/>
-        </p:spPr>
-        <p:txBody>
-          <a:bodyPr wrap="square" anchor="t">
-            <a:spAutoFit/>
-          </a:bodyPr>
-          <a:lstStyle/>
-          <a:p>
-            <a:pPr algn="l">
-              <a:spcAft>
-                <a:spcPts val="400"/>
-              </a:spcAft>
-            </a:pPr>
-            <a:r>
-              <a:rPr sz="1250" b="1" i="0">
-                <a:solidFill>
-                  <a:srgbClr val="6B7A90"/>
-                </a:solidFill>
-                <a:latin typeface="Segoe UI"/>
-              </a:rPr>
-              <a:t>MELD • BiGRU</a:t>
-            </a:r>
-          </a:p>
-          <a:p>
-            <a:pPr algn="l">
-              <a:spcAft>
-                <a:spcPts val="400"/>
-              </a:spcAft>
-            </a:pPr>
-            <a:r>
-              <a:rPr sz="3000" b="1" i="0">
-                <a:solidFill>
-                  <a:srgbClr val="2F74C0"/>
-                </a:solidFill>
-                <a:latin typeface="Segoe UI"/>
-              </a:rPr>
-              <a:t>%38,4</a:t>
-            </a:r>
-          </a:p>
-          <a:p>
-            <a:pPr algn="l">
-              <a:spcAft>
-                <a:spcPts val="400"/>
-              </a:spcAft>
-            </a:pPr>
-            <a:r>
-              <a:rPr sz="1150" b="0" i="0">
-                <a:solidFill>
-                  <a:srgbClr val="242B35"/>
-                </a:solidFill>
-                <a:latin typeface="Segoe UI"/>
-              </a:rPr>
-              <a:t>dengeli doğruluk 0,2036</a:t>
-            </a:r>
-          </a:p>
-        </p:txBody>
-      </p:sp>
-      <p:sp>
-        <p:nvSpPr>
-          <p:cNvPr id="11" name="Rounded Rectangle 10"/>
-          <p:cNvSpPr/>
-          <p:nvPr/>
-        </p:nvSpPr>
-        <p:spPr>
-          <a:xfrm>
-            <a:off x="8092440" y="1463040"/>
-            <a:ext cx="3429000" cy="1554480"/>
-          </a:xfrm>
-          <a:prstGeom prst="roundRect">
-            <a:avLst>
-              <a:gd name="adj" fmla="val 8000"/>
-            </a:avLst>
-          </a:prstGeom>
-          <a:solidFill>
-            <a:srgbClr val="F4F8FC"/>
-          </a:solidFill>
-          <a:ln>
-            <a:noFill/>
-          </a:ln>
-          <a:effectLst/>
-        </p:spPr>
-        <p:style>
-          <a:lnRef idx="1">
-            <a:schemeClr val="accent1"/>
-          </a:lnRef>
-          <a:fillRef idx="3">
-            <a:schemeClr val="accent1"/>
-          </a:fillRef>
-          <a:effectRef idx="2">
-            <a:schemeClr val="accent1"/>
-          </a:effectRef>
-          <a:fontRef idx="minor">
-            <a:schemeClr val="lt1"/>
-          </a:fontRef>
-        </p:style>
-        <p:txBody>
-          <a:bodyPr rtlCol="0" anchor="ctr"/>
-          <a:lstStyle/>
-          <a:p>
-            <a:pPr algn="ctr"/>
-          </a:p>
-        </p:txBody>
-      </p:sp>
-      <p:sp>
-        <p:nvSpPr>
-          <p:cNvPr id="12" name="Rectangle 11"/>
-          <p:cNvSpPr/>
-          <p:nvPr/>
-        </p:nvSpPr>
-        <p:spPr>
-          <a:xfrm>
-            <a:off x="8092440" y="1463040"/>
-            <a:ext cx="82296" cy="1554480"/>
-          </a:xfrm>
-          <a:prstGeom prst="rect">
-            <a:avLst/>
-          </a:prstGeom>
-          <a:solidFill>
-            <a:srgbClr val="6B7A90"/>
-          </a:solidFill>
-          <a:ln>
-            <a:noFill/>
-          </a:ln>
-          <a:effectLst/>
-        </p:spPr>
-        <p:style>
-          <a:lnRef idx="1">
-            <a:schemeClr val="accent1"/>
-          </a:lnRef>
-          <a:fillRef idx="3">
-            <a:schemeClr val="accent1"/>
-          </a:fillRef>
-          <a:effectRef idx="2">
-            <a:schemeClr val="accent1"/>
-          </a:effectRef>
-          <a:fontRef idx="minor">
-            <a:schemeClr val="lt1"/>
-          </a:fontRef>
-        </p:style>
-        <p:txBody>
-          <a:bodyPr rtlCol="0" anchor="ctr"/>
-          <a:lstStyle/>
-          <a:p>
-            <a:pPr algn="ctr"/>
-          </a:p>
-        </p:txBody>
-      </p:sp>
-      <p:sp>
-        <p:nvSpPr>
-          <p:cNvPr id="13" name="TextBox 12"/>
-          <p:cNvSpPr txBox="1"/>
-          <p:nvPr/>
-        </p:nvSpPr>
-        <p:spPr>
-          <a:xfrm>
-            <a:off x="8321040" y="1627632"/>
-            <a:ext cx="3063240" cy="1280160"/>
-          </a:xfrm>
-          <a:prstGeom prst="rect">
-            <a:avLst/>
-          </a:prstGeom>
-          <a:noFill/>
-        </p:spPr>
-        <p:txBody>
-          <a:bodyPr wrap="square" anchor="t">
-            <a:spAutoFit/>
-          </a:bodyPr>
-          <a:lstStyle/>
-          <a:p>
-            <a:pPr algn="l">
-              <a:spcAft>
-                <a:spcPts val="400"/>
-              </a:spcAft>
-            </a:pPr>
-            <a:r>
-              <a:rPr sz="1250" b="1" i="0">
-                <a:solidFill>
-                  <a:srgbClr val="6B7A90"/>
-                </a:solidFill>
-                <a:latin typeface="Segoe UI"/>
-              </a:rPr>
-              <a:t>MELD KAYIT</a:t>
-            </a:r>
-          </a:p>
-          <a:p>
-            <a:pPr algn="l">
-              <a:spcAft>
-                <a:spcPts val="400"/>
-              </a:spcAft>
-            </a:pPr>
-            <a:r>
-              <a:rPr sz="3000" b="1" i="0">
-                <a:solidFill>
-                  <a:srgbClr val="6B7A90"/>
-                </a:solidFill>
-                <a:latin typeface="Segoe UI"/>
-              </a:rPr>
-              <a:t>12.070</a:t>
-            </a:r>
-          </a:p>
-          <a:p>
-            <a:pPr algn="l">
-              <a:spcAft>
-                <a:spcPts val="400"/>
-              </a:spcAft>
-            </a:pPr>
-            <a:r>
-              <a:rPr sz="1150" b="0" i="0">
-                <a:solidFill>
-                  <a:srgbClr val="242B35"/>
-                </a:solidFill>
-                <a:latin typeface="Segoe UI"/>
-              </a:rPr>
-              <a:t>dizi diyalogları • 295 konuşmacı</a:t>
-            </a:r>
-          </a:p>
-        </p:txBody>
-      </p:sp>
-      <p:sp>
-        <p:nvSpPr>
-          <p:cNvPr id="14" name="TextBox 13"/>
-          <p:cNvSpPr txBox="1"/>
-          <p:nvPr/>
-        </p:nvSpPr>
-        <p:spPr>
-          <a:xfrm>
-            <a:off x="685800" y="3383280"/>
-            <a:ext cx="10881360" cy="4754880"/>
-          </a:xfrm>
-          <a:prstGeom prst="rect">
-            <a:avLst/>
-          </a:prstGeom>
-          <a:noFill/>
-        </p:spPr>
-        <p:txBody>
-          <a:bodyPr wrap="square">
-            <a:spAutoFit/>
-          </a:bodyPr>
-          <a:lstStyle/>
-          <a:p>
-            <a:pPr>
-              <a:spcAft>
-                <a:spcPts val="900"/>
-              </a:spcAft>
-            </a:pPr>
-            <a:r>
-              <a:rPr sz="1450">
-                <a:solidFill>
-                  <a:srgbClr val="242B35"/>
-                </a:solidFill>
-                <a:latin typeface="Segoe UI"/>
-              </a:rPr>
-              <a:t>▪  MELD: gürültü, gülüşmeler, çok kısa kayıtlar — stüdyo kaydı CREMA-D'den çok daha zor koşullar.</a:t>
-            </a:r>
-          </a:p>
-          <a:p>
-            <a:pPr>
-              <a:spcAft>
-                <a:spcPts val="900"/>
-              </a:spcAft>
-            </a:pPr>
-            <a:r>
-              <a:rPr sz="1450">
-                <a:solidFill>
-                  <a:srgbClr val="242B35"/>
-                </a:solidFill>
-                <a:latin typeface="Segoe UI"/>
-              </a:rPr>
-              <a:t>▪  Ham doğruluk ile dengeli doğruluk arasındaki büyük fark nötr sınıf baskınlığını gösteriyor.</a:t>
-            </a:r>
-          </a:p>
-          <a:p>
-            <a:pPr>
-              <a:spcAft>
-                <a:spcPts val="900"/>
-              </a:spcAft>
-            </a:pPr>
-            <a:r>
-              <a:rPr sz="1450">
-                <a:solidFill>
-                  <a:srgbClr val="242B35"/>
-                </a:solidFill>
-                <a:latin typeface="Segoe UI"/>
-              </a:rPr>
-              <a:t>▪  Ses-tek-kipli MELD'in düşük kalması literatürde bilinen durum [11] — bu yüzden metin/görüntü kipleri eklenir.</a:t>
-            </a:r>
-          </a:p>
-          <a:p>
-            <a:pPr>
-              <a:spcAft>
-                <a:spcPts val="900"/>
-              </a:spcAft>
-            </a:pPr>
-            <a:r>
-              <a:rPr sz="1450">
-                <a:solidFill>
-                  <a:srgbClr val="242B35"/>
-                </a:solidFill>
-                <a:latin typeface="Segoe UI"/>
-              </a:rPr>
-              <a:t>▪  Çıkarım: yöntemler kod değişikliği olmadan yeni corpus'a taşınıyor; sınır, veri koşullarının kendisi.</a:t>
-            </a:r>
-          </a:p>
-        </p:txBody>
-      </p:sp>
-      <p:sp>
-        <p:nvSpPr>
-          <p:cNvPr id="15" name="Rectangle 14"/>
+              <a:t>Geçerleme hatası dönünce sabır sayacı işler; 8 epoch iyileşme yoksa durur ve ★ en iyi anın modeli geri yüklenir — ezber kesilir.</a:t>
+            </a:r>
+          </a:p>
+        </p:txBody>
+      </p:sp>
+      <p:sp>
+        <p:nvSpPr>
+          <p:cNvPr id="7" name="Rectangle 6"/>
           <p:cNvSpPr/>
           <p:nvPr/>
         </p:nvSpPr>
@@ -6011,7 +5751,7 @@
       </p:sp>
       <p:sp>
         <p:nvSpPr>
-          <p:cNvPr id="16" name="TextBox 15"/>
+          <p:cNvPr id="8" name="TextBox 7"/>
           <p:cNvSpPr txBox="1"/>
           <p:nvPr/>
         </p:nvSpPr>
@@ -6050,7 +5790,7 @@
       </p:sp>
       <p:sp>
         <p:nvSpPr>
-          <p:cNvPr id="17" name="TextBox 16"/>
+          <p:cNvPr id="9" name="TextBox 8"/>
           <p:cNvSpPr txBox="1"/>
           <p:nvPr/>
         </p:nvSpPr>
@@ -6227,7 +5967,7 @@
                 </a:solidFill>
                 <a:latin typeface="Segoe UI"/>
               </a:rPr>
-              <a:t>05 • ÇIKARIMLAR</a:t>
+              <a:t>04 • SONUÇLAR</a:t>
             </a:r>
           </a:p>
           <a:p>
@@ -6243,27 +5983,155 @@
                 </a:solidFill>
                 <a:latin typeface="Segoe UI"/>
               </a:rPr>
-              <a:t>Literatürde Neredeyiz? (CREMA-D, konuşmacı-bağımsız)</a:t>
-            </a:r>
-          </a:p>
-        </p:txBody>
-      </p:sp>
-      <p:sp>
-        <p:nvSpPr>
-          <p:cNvPr id="5" name="Rectangle 4"/>
+              <a:t>Karışıklık Matrisleri ve Hata Analizi</a:t>
+            </a:r>
+          </a:p>
+        </p:txBody>
+      </p:sp>
+      <p:pic>
+        <p:nvPicPr>
+          <p:cNvPr id="5" name="Picture 4" descr="test_confusion_matrix.png"/>
+          <p:cNvPicPr>
+            <a:picLocks noChangeAspect="1"/>
+          </p:cNvPicPr>
+          <p:nvPr/>
+        </p:nvPicPr>
+        <p:blipFill>
+          <a:blip r:embed="rId2"/>
+          <a:stretch>
+            <a:fillRect/>
+          </a:stretch>
+        </p:blipFill>
+        <p:spPr>
+          <a:xfrm>
+            <a:off x="502920" y="1325880"/>
+            <a:ext cx="4916978" cy="4160520"/>
+          </a:xfrm>
+          <a:prstGeom prst="rect">
+            <a:avLst/>
+          </a:prstGeom>
+        </p:spPr>
+      </p:pic>
+      <p:sp>
+        <p:nvSpPr>
+          <p:cNvPr id="6" name="TextBox 5"/>
+          <p:cNvSpPr txBox="1"/>
+          <p:nvPr/>
+        </p:nvSpPr>
+        <p:spPr>
+          <a:xfrm>
+            <a:off x="502920" y="5504688"/>
+            <a:ext cx="5440680" cy="411480"/>
+          </a:xfrm>
+          <a:prstGeom prst="rect">
+            <a:avLst/>
+          </a:prstGeom>
+          <a:noFill/>
+        </p:spPr>
+        <p:txBody>
+          <a:bodyPr wrap="square" anchor="t">
+            <a:spAutoFit/>
+          </a:bodyPr>
+          <a:lstStyle/>
+          <a:p>
+            <a:pPr algn="ctr">
+              <a:spcAft>
+                <a:spcPts val="400"/>
+              </a:spcAft>
+            </a:pPr>
+            <a:r>
+              <a:rPr sz="1200" b="0" i="1">
+                <a:solidFill>
+                  <a:srgbClr val="6B7A90"/>
+                </a:solidFill>
+                <a:latin typeface="Segoe UI"/>
+              </a:rPr>
+              <a:t>Yöntem 1 (CNN)</a:t>
+            </a:r>
+          </a:p>
+        </p:txBody>
+      </p:sp>
+      <p:pic>
+        <p:nvPicPr>
+          <p:cNvPr id="7" name="Picture 6" descr="test_confusion_matrix.png"/>
+          <p:cNvPicPr>
+            <a:picLocks noChangeAspect="1"/>
+          </p:cNvPicPr>
+          <p:nvPr/>
+        </p:nvPicPr>
+        <p:blipFill>
+          <a:blip r:embed="rId3"/>
+          <a:stretch>
+            <a:fillRect/>
+          </a:stretch>
+        </p:blipFill>
+        <p:spPr>
+          <a:xfrm>
+            <a:off x="6217920" y="1325880"/>
+            <a:ext cx="4916978" cy="4160520"/>
+          </a:xfrm>
+          <a:prstGeom prst="rect">
+            <a:avLst/>
+          </a:prstGeom>
+        </p:spPr>
+      </p:pic>
+      <p:sp>
+        <p:nvSpPr>
+          <p:cNvPr id="8" name="TextBox 7"/>
+          <p:cNvSpPr txBox="1"/>
+          <p:nvPr/>
+        </p:nvSpPr>
+        <p:spPr>
+          <a:xfrm>
+            <a:off x="6217920" y="5504688"/>
+            <a:ext cx="5440680" cy="411480"/>
+          </a:xfrm>
+          <a:prstGeom prst="rect">
+            <a:avLst/>
+          </a:prstGeom>
+          <a:noFill/>
+        </p:spPr>
+        <p:txBody>
+          <a:bodyPr wrap="square" anchor="t">
+            <a:spAutoFit/>
+          </a:bodyPr>
+          <a:lstStyle/>
+          <a:p>
+            <a:pPr algn="ctr">
+              <a:spcAft>
+                <a:spcPts val="400"/>
+              </a:spcAft>
+            </a:pPr>
+            <a:r>
+              <a:rPr sz="1200" b="0" i="1">
+                <a:solidFill>
+                  <a:srgbClr val="6B7A90"/>
+                </a:solidFill>
+                <a:latin typeface="Segoe UI"/>
+              </a:rPr>
+              <a:t>Yöntem 2 (BiGRU) — köşegen 0,61-0,67, altı sınıfta dengeli</a:t>
+            </a:r>
+          </a:p>
+        </p:txBody>
+      </p:sp>
+      <p:sp>
+        <p:nvSpPr>
+          <p:cNvPr id="9" name="Rounded Rectangle 8"/>
           <p:cNvSpPr/>
           <p:nvPr/>
         </p:nvSpPr>
         <p:spPr>
           <a:xfrm>
-            <a:off x="914400" y="3291840"/>
-            <a:ext cx="10332720" cy="45720"/>
-          </a:xfrm>
-          <a:prstGeom prst="rect">
-            <a:avLst/>
+            <a:off x="685800" y="5897880"/>
+            <a:ext cx="10881360" cy="502920"/>
+          </a:xfrm>
+          <a:prstGeom prst="roundRect">
+            <a:avLst>
+              <a:gd name="adj" fmla="val 8000"/>
+            </a:avLst>
           </a:prstGeom>
           <a:solidFill>
-            <a:srgbClr val="C8D6E6"/>
+            <a:srgbClr val="E8F1FA"/>
           </a:solidFill>
           <a:ln>
             <a:noFill/>
@@ -6294,60 +6162,14 @@
       </p:sp>
       <p:sp>
         <p:nvSpPr>
-          <p:cNvPr id="6" name="Oval 5"/>
-          <p:cNvSpPr/>
-          <p:nvPr/>
-        </p:nvSpPr>
-        <p:spPr>
-          <a:xfrm>
-            <a:off x="1750771" y="3186684"/>
-            <a:ext cx="256032" cy="256032"/>
-          </a:xfrm>
-          <a:prstGeom prst="ellipse">
-            <a:avLst/>
-          </a:prstGeom>
-          <a:solidFill>
-            <a:srgbClr val="6B7A90"/>
-          </a:solidFill>
-          <a:ln w="25400">
-            <a:solidFill>
-              <a:srgbClr val="FFFFFF"/>
-            </a:solidFill>
-          </a:ln>
-          <a:effectLst/>
-        </p:spPr>
-        <p:style>
-          <a:lnRef idx="1">
-            <a:schemeClr val="accent1"/>
-          </a:lnRef>
-          <a:fillRef idx="3">
-            <a:schemeClr val="accent1"/>
-          </a:fillRef>
-          <a:effectRef idx="2">
-            <a:schemeClr val="accent1"/>
-          </a:effectRef>
-          <a:fontRef idx="minor">
-            <a:schemeClr val="lt1"/>
-          </a:fontRef>
-        </p:style>
-        <p:txBody>
-          <a:bodyPr rtlCol="0" anchor="ctr"/>
-          <a:lstStyle/>
-          <a:p>
-            <a:pPr algn="ctr"/>
-          </a:p>
-        </p:txBody>
-      </p:sp>
-      <p:sp>
-        <p:nvSpPr>
-          <p:cNvPr id="7" name="TextBox 6"/>
+          <p:cNvPr id="10" name="TextBox 9"/>
           <p:cNvSpPr txBox="1"/>
           <p:nvPr/>
         </p:nvSpPr>
         <p:spPr>
           <a:xfrm>
-            <a:off x="644347" y="2148840"/>
-            <a:ext cx="2468880" cy="914400"/>
+            <a:off x="914400" y="5943600"/>
+            <a:ext cx="10515600" cy="411480"/>
           </a:xfrm>
           <a:prstGeom prst="rect">
             <a:avLst/>
@@ -6360,501 +6182,26 @@
           </a:bodyPr>
           <a:lstStyle/>
           <a:p>
-            <a:pPr algn="ctr">
-              <a:spcAft>
-                <a:spcPts val="400"/>
-              </a:spcAft>
-            </a:pPr>
-            <a:r>
-              <a:rPr sz="1400" b="1" i="0">
-                <a:solidFill>
-                  <a:srgbClr val="6B7A90"/>
-                </a:solidFill>
-                <a:latin typeface="Segoe UI"/>
-              </a:rPr>
-              <a:t>%17</a:t>
-            </a:r>
-          </a:p>
-          <a:p>
-            <a:pPr algn="ctr">
-              <a:spcAft>
-                <a:spcPts val="400"/>
-              </a:spcAft>
-            </a:pPr>
-            <a:r>
-              <a:rPr sz="1100" b="0" i="0">
-                <a:solidFill>
-                  <a:srgbClr val="6B7A90"/>
-                </a:solidFill>
-                <a:latin typeface="Segoe UI"/>
-              </a:rPr>
-              <a:t>Şans</a:t>
-            </a:r>
-          </a:p>
-        </p:txBody>
-      </p:sp>
-      <p:sp>
-        <p:nvSpPr>
-          <p:cNvPr id="8" name="Oval 7"/>
-          <p:cNvSpPr/>
-          <p:nvPr/>
-        </p:nvSpPr>
-        <p:spPr>
-          <a:xfrm>
-            <a:off x="5043464" y="3186684"/>
-            <a:ext cx="256032" cy="256032"/>
-          </a:xfrm>
-          <a:prstGeom prst="ellipse">
-            <a:avLst/>
-          </a:prstGeom>
-          <a:solidFill>
-            <a:srgbClr val="C26A1D"/>
-          </a:solidFill>
-          <a:ln w="25400">
-            <a:solidFill>
-              <a:srgbClr val="FFFFFF"/>
-            </a:solidFill>
-          </a:ln>
-          <a:effectLst/>
-        </p:spPr>
-        <p:style>
-          <a:lnRef idx="1">
-            <a:schemeClr val="accent1"/>
-          </a:lnRef>
-          <a:fillRef idx="3">
-            <a:schemeClr val="accent1"/>
-          </a:fillRef>
-          <a:effectRef idx="2">
-            <a:schemeClr val="accent1"/>
-          </a:effectRef>
-          <a:fontRef idx="minor">
-            <a:schemeClr val="lt1"/>
-          </a:fontRef>
-        </p:style>
-        <p:txBody>
-          <a:bodyPr rtlCol="0" anchor="ctr"/>
-          <a:lstStyle/>
-          <a:p>
-            <a:pPr algn="ctr"/>
-          </a:p>
-        </p:txBody>
-      </p:sp>
-      <p:sp>
-        <p:nvSpPr>
-          <p:cNvPr id="9" name="TextBox 8"/>
-          <p:cNvSpPr txBox="1"/>
-          <p:nvPr/>
-        </p:nvSpPr>
-        <p:spPr>
-          <a:xfrm>
-            <a:off x="3937040" y="3703320"/>
-            <a:ext cx="2468880" cy="914400"/>
-          </a:xfrm>
-          <a:prstGeom prst="rect">
-            <a:avLst/>
-          </a:prstGeom>
-          <a:noFill/>
-        </p:spPr>
-        <p:txBody>
-          <a:bodyPr wrap="square" anchor="t">
-            <a:spAutoFit/>
-          </a:bodyPr>
-          <a:lstStyle/>
-          <a:p>
-            <a:pPr algn="ctr">
-              <a:spcAft>
-                <a:spcPts val="400"/>
-              </a:spcAft>
-            </a:pPr>
-            <a:r>
-              <a:rPr sz="1400" b="1" i="0">
-                <a:solidFill>
-                  <a:srgbClr val="C26A1D"/>
-                </a:solidFill>
-                <a:latin typeface="Segoe UI"/>
-              </a:rPr>
-              <a:t>%40,9</a:t>
-            </a:r>
-          </a:p>
-          <a:p>
-            <a:pPr algn="ctr">
-              <a:spcAft>
-                <a:spcPts val="400"/>
-              </a:spcAft>
-            </a:pPr>
-            <a:r>
-              <a:rPr sz="1100" b="0" i="0">
-                <a:solidFill>
-                  <a:srgbClr val="6B7A90"/>
-                </a:solidFill>
-                <a:latin typeface="Segoe UI"/>
-              </a:rPr>
-              <a:t>İnsan (yalnız ses) [1]</a:t>
-            </a:r>
-          </a:p>
-        </p:txBody>
-      </p:sp>
-      <p:sp>
-        <p:nvSpPr>
-          <p:cNvPr id="10" name="Oval 9"/>
-          <p:cNvSpPr/>
-          <p:nvPr/>
-        </p:nvSpPr>
-        <p:spPr>
-          <a:xfrm>
-            <a:off x="8139885" y="3131820"/>
-            <a:ext cx="365760" cy="365760"/>
-          </a:xfrm>
-          <a:prstGeom prst="ellipse">
-            <a:avLst/>
-          </a:prstGeom>
-          <a:solidFill>
-            <a:srgbClr val="1F7A4D"/>
-          </a:solidFill>
-          <a:ln w="25400">
-            <a:solidFill>
-              <a:srgbClr val="FFFFFF"/>
-            </a:solidFill>
-          </a:ln>
-          <a:effectLst/>
-        </p:spPr>
-        <p:style>
-          <a:lnRef idx="1">
-            <a:schemeClr val="accent1"/>
-          </a:lnRef>
-          <a:fillRef idx="3">
-            <a:schemeClr val="accent1"/>
-          </a:fillRef>
-          <a:effectRef idx="2">
-            <a:schemeClr val="accent1"/>
-          </a:effectRef>
-          <a:fontRef idx="minor">
-            <a:schemeClr val="lt1"/>
-          </a:fontRef>
-        </p:style>
-        <p:txBody>
-          <a:bodyPr rtlCol="0" anchor="ctr"/>
-          <a:lstStyle/>
-          <a:p>
-            <a:pPr algn="ctr"/>
-          </a:p>
-        </p:txBody>
-      </p:sp>
-      <p:sp>
-        <p:nvSpPr>
-          <p:cNvPr id="11" name="TextBox 10"/>
-          <p:cNvSpPr txBox="1"/>
-          <p:nvPr/>
-        </p:nvSpPr>
-        <p:spPr>
-          <a:xfrm>
-            <a:off x="7088325" y="2148840"/>
-            <a:ext cx="2468880" cy="914400"/>
-          </a:xfrm>
-          <a:prstGeom prst="rect">
-            <a:avLst/>
-          </a:prstGeom>
-          <a:noFill/>
-        </p:spPr>
-        <p:txBody>
-          <a:bodyPr wrap="square" anchor="t">
-            <a:spAutoFit/>
-          </a:bodyPr>
-          <a:lstStyle/>
-          <a:p>
-            <a:pPr algn="ctr">
-              <a:spcAft>
-                <a:spcPts val="400"/>
-              </a:spcAft>
-            </a:pPr>
-            <a:r>
-              <a:rPr sz="1700" b="1" i="0">
-                <a:solidFill>
-                  <a:srgbClr val="1F7A4D"/>
-                </a:solidFill>
-                <a:latin typeface="Segoe UI"/>
-              </a:rPr>
-              <a:t>%63,8</a:t>
-            </a:r>
-          </a:p>
-          <a:p>
-            <a:pPr algn="ctr">
-              <a:spcAft>
-                <a:spcPts val="400"/>
-              </a:spcAft>
-            </a:pPr>
-            <a:r>
-              <a:rPr sz="1100" b="1" i="0">
-                <a:solidFill>
-                  <a:srgbClr val="242B35"/>
-                </a:solidFill>
-                <a:latin typeface="Segoe UI"/>
-              </a:rPr>
-              <a:t>BU PROJE — BiGRU</a:t>
-            </a:r>
-          </a:p>
-        </p:txBody>
-      </p:sp>
-      <p:sp>
-        <p:nvSpPr>
-          <p:cNvPr id="12" name="Oval 11"/>
-          <p:cNvSpPr/>
-          <p:nvPr/>
-        </p:nvSpPr>
-        <p:spPr>
-          <a:xfrm>
-            <a:off x="8790797" y="3186684"/>
-            <a:ext cx="256032" cy="256032"/>
-          </a:xfrm>
-          <a:prstGeom prst="ellipse">
-            <a:avLst/>
-          </a:prstGeom>
-          <a:solidFill>
-            <a:srgbClr val="2F74C0"/>
-          </a:solidFill>
-          <a:ln w="25400">
-            <a:solidFill>
-              <a:srgbClr val="FFFFFF"/>
-            </a:solidFill>
-          </a:ln>
-          <a:effectLst/>
-        </p:spPr>
-        <p:style>
-          <a:lnRef idx="1">
-            <a:schemeClr val="accent1"/>
-          </a:lnRef>
-          <a:fillRef idx="3">
-            <a:schemeClr val="accent1"/>
-          </a:fillRef>
-          <a:effectRef idx="2">
-            <a:schemeClr val="accent1"/>
-          </a:effectRef>
-          <a:fontRef idx="minor">
-            <a:schemeClr val="lt1"/>
-          </a:fontRef>
-        </p:style>
-        <p:txBody>
-          <a:bodyPr rtlCol="0" anchor="ctr"/>
-          <a:lstStyle/>
-          <a:p>
-            <a:pPr algn="ctr"/>
-          </a:p>
-        </p:txBody>
-      </p:sp>
-      <p:sp>
-        <p:nvSpPr>
-          <p:cNvPr id="13" name="TextBox 12"/>
-          <p:cNvSpPr txBox="1"/>
-          <p:nvPr/>
-        </p:nvSpPr>
-        <p:spPr>
-          <a:xfrm>
-            <a:off x="7684373" y="3703320"/>
-            <a:ext cx="2468880" cy="914400"/>
-          </a:xfrm>
-          <a:prstGeom prst="rect">
-            <a:avLst/>
-          </a:prstGeom>
-          <a:noFill/>
-        </p:spPr>
-        <p:txBody>
-          <a:bodyPr wrap="square" anchor="t">
-            <a:spAutoFit/>
-          </a:bodyPr>
-          <a:lstStyle/>
-          <a:p>
-            <a:pPr algn="ctr">
-              <a:spcAft>
-                <a:spcPts val="400"/>
-              </a:spcAft>
-            </a:pPr>
-            <a:r>
-              <a:rPr sz="1400" b="1" i="0">
-                <a:solidFill>
-                  <a:srgbClr val="2F74C0"/>
-                </a:solidFill>
-                <a:latin typeface="Segoe UI"/>
-              </a:rPr>
-              <a:t>%68,1</a:t>
-            </a:r>
-          </a:p>
-          <a:p>
-            <a:pPr algn="ctr">
-              <a:spcAft>
-                <a:spcPts val="400"/>
-              </a:spcAft>
-            </a:pPr>
-            <a:r>
-              <a:rPr sz="1100" b="0" i="0">
-                <a:solidFill>
-                  <a:srgbClr val="6B7A90"/>
-                </a:solidFill>
-                <a:latin typeface="Segoe UI"/>
-              </a:rPr>
-              <a:t>Sıfırdan tavan (5'li ansambl) [4]</a:t>
-            </a:r>
-          </a:p>
-        </p:txBody>
-      </p:sp>
-      <p:sp>
-        <p:nvSpPr>
-          <p:cNvPr id="14" name="Oval 13"/>
-          <p:cNvSpPr/>
-          <p:nvPr/>
-        </p:nvSpPr>
-        <p:spPr>
-          <a:xfrm>
-            <a:off x="9989393" y="3186684"/>
-            <a:ext cx="256032" cy="256032"/>
-          </a:xfrm>
-          <a:prstGeom prst="ellipse">
-            <a:avLst/>
-          </a:prstGeom>
-          <a:solidFill>
-            <a:srgbClr val="6B7A90"/>
-          </a:solidFill>
-          <a:ln w="25400">
-            <a:solidFill>
-              <a:srgbClr val="FFFFFF"/>
-            </a:solidFill>
-          </a:ln>
-          <a:effectLst/>
-        </p:spPr>
-        <p:style>
-          <a:lnRef idx="1">
-            <a:schemeClr val="accent1"/>
-          </a:lnRef>
-          <a:fillRef idx="3">
-            <a:schemeClr val="accent1"/>
-          </a:fillRef>
-          <a:effectRef idx="2">
-            <a:schemeClr val="accent1"/>
-          </a:effectRef>
-          <a:fontRef idx="minor">
-            <a:schemeClr val="lt1"/>
-          </a:fontRef>
-        </p:style>
-        <p:txBody>
-          <a:bodyPr rtlCol="0" anchor="ctr"/>
-          <a:lstStyle/>
-          <a:p>
-            <a:pPr algn="ctr"/>
-          </a:p>
-        </p:txBody>
-      </p:sp>
-      <p:sp>
-        <p:nvSpPr>
-          <p:cNvPr id="15" name="TextBox 14"/>
-          <p:cNvSpPr txBox="1"/>
-          <p:nvPr/>
-        </p:nvSpPr>
-        <p:spPr>
-          <a:xfrm>
-            <a:off x="8882969" y="2148840"/>
-            <a:ext cx="2468880" cy="914400"/>
-          </a:xfrm>
-          <a:prstGeom prst="rect">
-            <a:avLst/>
-          </a:prstGeom>
-          <a:noFill/>
-        </p:spPr>
-        <p:txBody>
-          <a:bodyPr wrap="square" anchor="t">
-            <a:spAutoFit/>
-          </a:bodyPr>
-          <a:lstStyle/>
-          <a:p>
-            <a:pPr algn="ctr">
-              <a:spcAft>
-                <a:spcPts val="400"/>
-              </a:spcAft>
-            </a:pPr>
-            <a:r>
-              <a:rPr sz="1400" b="1" i="0">
-                <a:solidFill>
-                  <a:srgbClr val="6B7A90"/>
-                </a:solidFill>
-                <a:latin typeface="Segoe UI"/>
-              </a:rPr>
-              <a:t>~%77</a:t>
-            </a:r>
-          </a:p>
-          <a:p>
-            <a:pPr algn="ctr">
-              <a:spcAft>
-                <a:spcPts val="400"/>
-              </a:spcAft>
-            </a:pPr>
-            <a:r>
-              <a:rPr sz="1100" b="0" i="0">
-                <a:solidFill>
-                  <a:srgbClr val="6B7A90"/>
-                </a:solidFill>
-                <a:latin typeface="Segoe UI"/>
-              </a:rPr>
-              <a:t>Ön eğitimli SSL üst ucu [11]</a:t>
-            </a:r>
-          </a:p>
-        </p:txBody>
-      </p:sp>
-      <p:sp>
-        <p:nvSpPr>
-          <p:cNvPr id="16" name="TextBox 15"/>
-          <p:cNvSpPr txBox="1"/>
-          <p:nvPr/>
-        </p:nvSpPr>
-        <p:spPr>
-          <a:xfrm>
-            <a:off x="685800" y="5029200"/>
-            <a:ext cx="10881360" cy="1280160"/>
-          </a:xfrm>
-          <a:prstGeom prst="rect">
-            <a:avLst/>
-          </a:prstGeom>
-          <a:noFill/>
-        </p:spPr>
-        <p:txBody>
-          <a:bodyPr wrap="square">
-            <a:spAutoFit/>
-          </a:bodyPr>
-          <a:lstStyle/>
-          <a:p>
-            <a:pPr>
-              <a:spcAft>
-                <a:spcPts val="800"/>
-              </a:spcAft>
-            </a:pPr>
-            <a:r>
-              <a:rPr sz="1500">
-                <a:solidFill>
-                  <a:srgbClr val="242B35"/>
-                </a:solidFill>
-                <a:latin typeface="Segoe UI"/>
-              </a:rPr>
-              <a:t>▪  İnsan referansının 22+ puan üzerinde; sıfırdan-tek-model için yayınlanmış tavana 4 puan mesafede.</a:t>
-            </a:r>
-          </a:p>
-          <a:p>
-            <a:pPr>
-              <a:spcAft>
-                <a:spcPts val="800"/>
-              </a:spcAft>
-            </a:pPr>
-            <a:r>
-              <a:rPr sz="1500">
-                <a:solidFill>
-                  <a:srgbClr val="242B35"/>
-                </a:solidFill>
-                <a:latin typeface="Segoe UI"/>
-              </a:rPr>
-              <a:t>▪  %80+ iddialar rastgele bölme/sızıntı ürünü [12] — kıyas ölçütü değil.</a:t>
-            </a:r>
-          </a:p>
-        </p:txBody>
-      </p:sp>
-      <p:sp>
-        <p:nvSpPr>
-          <p:cNvPr id="17" name="Rectangle 16"/>
+            <a:pPr algn="l">
+              <a:spcAft>
+                <a:spcPts val="400"/>
+              </a:spcAft>
+            </a:pPr>
+            <a:r>
+              <a:rPr sz="1250" b="0" i="0">
+                <a:solidFill>
+                  <a:srgbClr val="1F3B57"/>
+                </a:solidFill>
+                <a:latin typeface="Segoe UI"/>
+              </a:rPr>
+              <a:t>En belirgin karışmalar: Mutlu → Korku (%21,5)  •  Korku → Üzgün (%20,4)  — benzer uyarılma düzeyindeki duyguların bilinen örtüşmesi [6].</a:t>
+            </a:r>
+          </a:p>
+        </p:txBody>
+      </p:sp>
+      <p:sp>
+        <p:nvSpPr>
+          <p:cNvPr id="11" name="Rectangle 10"/>
           <p:cNvSpPr/>
           <p:nvPr/>
         </p:nvSpPr>
@@ -6898,7 +6245,7 @@
       </p:sp>
       <p:sp>
         <p:nvSpPr>
-          <p:cNvPr id="18" name="TextBox 17"/>
+          <p:cNvPr id="12" name="TextBox 11"/>
           <p:cNvSpPr txBox="1"/>
           <p:nvPr/>
         </p:nvSpPr>
@@ -6937,7 +6284,7 @@
       </p:sp>
       <p:sp>
         <p:nvSpPr>
-          <p:cNvPr id="19" name="TextBox 18"/>
+          <p:cNvPr id="13" name="TextBox 12"/>
           <p:cNvSpPr txBox="1"/>
           <p:nvPr/>
         </p:nvSpPr>
@@ -7114,7 +6461,7 @@
                 </a:solidFill>
                 <a:latin typeface="Segoe UI"/>
               </a:rPr>
-              <a:t>05 • ÇIKARIMLAR</a:t>
+              <a:t>03 • DENEY SÜRECİ</a:t>
             </a:r>
           </a:p>
           <a:p>
@@ -7130,21 +6477,106 @@
                 </a:solidFill>
                 <a:latin typeface="Segoe UI"/>
               </a:rPr>
-              <a:t>Sonuç</a:t>
-            </a:r>
-          </a:p>
-        </p:txBody>
-      </p:sp>
-      <p:sp>
-        <p:nvSpPr>
-          <p:cNvPr id="5" name="TextBox 4"/>
+              <a:t>Geliştirme Aşaması — Ne İşe Yaradı, Ne Yaramadı</a:t>
+            </a:r>
+          </a:p>
+        </p:txBody>
+      </p:sp>
+      <p:sp>
+        <p:nvSpPr>
+          <p:cNvPr id="5" name="Rounded Rectangle 4"/>
+          <p:cNvSpPr/>
+          <p:nvPr/>
+        </p:nvSpPr>
+        <p:spPr>
+          <a:xfrm>
+            <a:off x="685800" y="1463040"/>
+            <a:ext cx="5257800" cy="3931920"/>
+          </a:xfrm>
+          <a:prstGeom prst="roundRect">
+            <a:avLst>
+              <a:gd name="adj" fmla="val 8000"/>
+            </a:avLst>
+          </a:prstGeom>
+          <a:solidFill>
+            <a:srgbClr val="E9F6EF"/>
+          </a:solidFill>
+          <a:ln>
+            <a:noFill/>
+          </a:ln>
+          <a:effectLst/>
+        </p:spPr>
+        <p:style>
+          <a:lnRef idx="1">
+            <a:schemeClr val="accent1"/>
+          </a:lnRef>
+          <a:fillRef idx="3">
+            <a:schemeClr val="accent1"/>
+          </a:fillRef>
+          <a:effectRef idx="2">
+            <a:schemeClr val="accent1"/>
+          </a:effectRef>
+          <a:fontRef idx="minor">
+            <a:schemeClr val="lt1"/>
+          </a:fontRef>
+        </p:style>
+        <p:txBody>
+          <a:bodyPr rtlCol="0" anchor="ctr"/>
+          <a:lstStyle/>
+          <a:p>
+            <a:pPr algn="ctr"/>
+          </a:p>
+        </p:txBody>
+      </p:sp>
+      <p:sp>
+        <p:nvSpPr>
+          <p:cNvPr id="6" name="TextBox 5"/>
           <p:cNvSpPr txBox="1"/>
           <p:nvPr/>
         </p:nvSpPr>
         <p:spPr>
           <a:xfrm>
-            <a:off x="685800" y="1645920"/>
-            <a:ext cx="10881360" cy="4754880"/>
+            <a:off x="960120" y="1645920"/>
+            <a:ext cx="4754880" cy="457200"/>
+          </a:xfrm>
+          <a:prstGeom prst="rect">
+            <a:avLst/>
+          </a:prstGeom>
+          <a:noFill/>
+        </p:spPr>
+        <p:txBody>
+          <a:bodyPr wrap="square" anchor="t">
+            <a:spAutoFit/>
+          </a:bodyPr>
+          <a:lstStyle/>
+          <a:p>
+            <a:pPr algn="l">
+              <a:spcAft>
+                <a:spcPts val="400"/>
+              </a:spcAft>
+            </a:pPr>
+            <a:r>
+              <a:rPr sz="1650" b="1" i="0">
+                <a:solidFill>
+                  <a:srgbClr val="1F7A4D"/>
+                </a:solidFill>
+                <a:latin typeface="Segoe UI"/>
+              </a:rPr>
+              <a:t>✓  CNN + SpecAugment [10]</a:t>
+            </a:r>
+          </a:p>
+        </p:txBody>
+      </p:sp>
+      <p:sp>
+        <p:nvSpPr>
+          <p:cNvPr id="7" name="TextBox 6"/>
+          <p:cNvSpPr txBox="1"/>
+          <p:nvPr/>
+        </p:nvSpPr>
+        <p:spPr>
+          <a:xfrm>
+            <a:off x="960120" y="2240280"/>
+            <a:ext cx="4754880" cy="2926080"/>
           </a:xfrm>
           <a:prstGeom prst="rect">
             <a:avLst/>
@@ -7159,88 +6591,329 @@
           <a:p>
             <a:pPr>
               <a:spcAft>
-                <a:spcPts val="1400"/>
-              </a:spcAft>
-            </a:pPr>
-            <a:r>
-              <a:rPr sz="1700">
+                <a:spcPts val="800"/>
+              </a:spcAft>
+            </a:pPr>
+            <a:r>
+              <a:rPr sz="1350">
                 <a:solidFill>
                   <a:srgbClr val="242B35"/>
                 </a:solidFill>
                 <a:latin typeface="Segoe UI"/>
               </a:rPr>
-              <a:t>▪  İki yöntem de sıfırdan, aynı konuşmacı-bağımsız protokolde: CNN %62,6 • BiGRU %63,8.</a:t>
+              <a:t>▪  Geçerleme macro-F1: 0,5531 → 0,5606</a:t>
             </a:r>
           </a:p>
           <a:p>
             <a:pPr>
               <a:spcAft>
-                <a:spcPts val="1400"/>
-              </a:spcAft>
-            </a:pPr>
-            <a:r>
-              <a:rPr sz="1700">
+                <a:spcPts val="800"/>
+              </a:spcAft>
+            </a:pPr>
+            <a:r>
+              <a:rPr sz="1350">
                 <a:solidFill>
                   <a:srgbClr val="242B35"/>
                 </a:solidFill>
                 <a:latin typeface="Segoe UI"/>
               </a:rPr>
-              <a:t>▪  Kazananı hiperparametre araması belirledi: aralık düzeni (32×200 ms) tek başına sıralamayı değiştirdi.</a:t>
+              <a:t>▪  Test doğruluğu: 0,6264 → 0,6292</a:t>
             </a:r>
           </a:p>
           <a:p>
             <a:pPr>
               <a:spcAft>
-                <a:spcPts val="1400"/>
-              </a:spcAft>
-            </a:pPr>
-            <a:r>
-              <a:rPr sz="1700">
+                <a:spcPts val="800"/>
+              </a:spcAft>
+            </a:pPr>
+            <a:r>
+              <a:rPr sz="1350">
                 <a:solidFill>
                   <a:srgbClr val="242B35"/>
                 </a:solidFill>
                 <a:latin typeface="Segoe UI"/>
               </a:rPr>
-              <a:t>▪  SpecAugment CNN'i geçerlemede ve testte iyileştirdi; RNN geliştirmeleri dürüstçe 'işe yaramadı' olarak raporlandı.</a:t>
+              <a:t>▪  Zaman/frekans maskeleme yalnız eğitim yığınlarına</a:t>
             </a:r>
           </a:p>
           <a:p>
             <a:pPr>
               <a:spcAft>
-                <a:spcPts val="1400"/>
-              </a:spcAft>
-            </a:pPr>
-            <a:r>
-              <a:rPr sz="1700">
+                <a:spcPts val="800"/>
+              </a:spcAft>
+            </a:pPr>
+            <a:r>
+              <a:rPr sz="1350">
                 <a:solidFill>
                   <a:srgbClr val="242B35"/>
                 </a:solidFill>
                 <a:latin typeface="Segoe UI"/>
               </a:rPr>
-              <a:t>▪  MELD genellemesi: kod değişmeden koştu; fark veri koşullarından, yöntemden değil.</a:t>
-            </a:r>
-          </a:p>
+              <a:t>▪  Hafif varyant işe yaramadı — maskeleme gücü önemli</a:t>
+            </a:r>
+          </a:p>
+        </p:txBody>
+      </p:sp>
+      <p:sp>
+        <p:nvSpPr>
+          <p:cNvPr id="8" name="Rounded Rectangle 7"/>
+          <p:cNvSpPr/>
+          <p:nvPr/>
+        </p:nvSpPr>
+        <p:spPr>
+          <a:xfrm>
+            <a:off x="6309360" y="1463040"/>
+            <a:ext cx="5257800" cy="3931920"/>
+          </a:xfrm>
+          <a:prstGeom prst="roundRect">
+            <a:avLst>
+              <a:gd name="adj" fmla="val 8000"/>
+            </a:avLst>
+          </a:prstGeom>
+          <a:solidFill>
+            <a:srgbClr val="FBEEEC"/>
+          </a:solidFill>
+          <a:ln>
+            <a:noFill/>
+          </a:ln>
+          <a:effectLst/>
+        </p:spPr>
+        <p:style>
+          <a:lnRef idx="1">
+            <a:schemeClr val="accent1"/>
+          </a:lnRef>
+          <a:fillRef idx="3">
+            <a:schemeClr val="accent1"/>
+          </a:fillRef>
+          <a:effectRef idx="2">
+            <a:schemeClr val="accent1"/>
+          </a:effectRef>
+          <a:fontRef idx="minor">
+            <a:schemeClr val="lt1"/>
+          </a:fontRef>
+        </p:style>
+        <p:txBody>
+          <a:bodyPr rtlCol="0" anchor="ctr"/>
+          <a:lstStyle/>
+          <a:p>
+            <a:pPr algn="ctr"/>
+          </a:p>
+        </p:txBody>
+      </p:sp>
+      <p:sp>
+        <p:nvSpPr>
+          <p:cNvPr id="9" name="TextBox 8"/>
+          <p:cNvSpPr txBox="1"/>
+          <p:nvPr/>
+        </p:nvSpPr>
+        <p:spPr>
+          <a:xfrm>
+            <a:off x="6583680" y="1645920"/>
+            <a:ext cx="4754880" cy="457200"/>
+          </a:xfrm>
+          <a:prstGeom prst="rect">
+            <a:avLst/>
+          </a:prstGeom>
+          <a:noFill/>
+        </p:spPr>
+        <p:txBody>
+          <a:bodyPr wrap="square" anchor="t">
+            <a:spAutoFit/>
+          </a:bodyPr>
+          <a:lstStyle/>
+          <a:p>
+            <a:pPr algn="l">
+              <a:spcAft>
+                <a:spcPts val="400"/>
+              </a:spcAft>
+            </a:pPr>
+            <a:r>
+              <a:rPr sz="1650" b="1" i="0">
+                <a:solidFill>
+                  <a:srgbClr val="B43A2E"/>
+                </a:solidFill>
+                <a:latin typeface="Segoe UI"/>
+              </a:rPr>
+              <a:t>✗  BiGRU varyantları</a:t>
+            </a:r>
+          </a:p>
+        </p:txBody>
+      </p:sp>
+      <p:sp>
+        <p:nvSpPr>
+          <p:cNvPr id="10" name="TextBox 9"/>
+          <p:cNvSpPr txBox="1"/>
+          <p:nvPr/>
+        </p:nvSpPr>
+        <p:spPr>
+          <a:xfrm>
+            <a:off x="6583680" y="2240280"/>
+            <a:ext cx="4754880" cy="2926080"/>
+          </a:xfrm>
+          <a:prstGeom prst="rect">
+            <a:avLst/>
+          </a:prstGeom>
+          <a:noFill/>
+        </p:spPr>
+        <p:txBody>
+          <a:bodyPr wrap="square">
+            <a:spAutoFit/>
+          </a:bodyPr>
+          <a:lstStyle/>
           <a:p>
             <a:pPr>
               <a:spcAft>
-                <a:spcPts val="1400"/>
-              </a:spcAft>
-            </a:pPr>
-            <a:r>
-              <a:rPr sz="1700">
+                <a:spcPts val="800"/>
+              </a:spcAft>
+            </a:pPr>
+            <a:r>
+              <a:rPr sz="1350">
                 <a:solidFill>
                   <a:srgbClr val="242B35"/>
                 </a:solidFill>
                 <a:latin typeface="Segoe UI"/>
               </a:rPr>
-              <a:t>▪  Tüm sayılar, tablolar ve bu sunum deney artefaktlarından üretildi — uçtan uca tekrarlanabilir.</a:t>
-            </a:r>
-          </a:p>
-        </p:txBody>
-      </p:sp>
-      <p:sp>
-        <p:nvSpPr>
-          <p:cNvPr id="6" name="Rectangle 5"/>
+              <a:t>▪  Dikkat havuzlama: 0,5542 (-0,0096)</a:t>
+            </a:r>
+          </a:p>
+          <a:p>
+            <a:pPr>
+              <a:spcAft>
+                <a:spcPts val="800"/>
+              </a:spcAft>
+            </a:pPr>
+            <a:r>
+              <a:rPr sz="1350">
+                <a:solidFill>
+                  <a:srgbClr val="242B35"/>
+                </a:solidFill>
+                <a:latin typeface="Segoe UI"/>
+              </a:rPr>
+              <a:t>▪  Öznitelik gürültüsü: 0,5602 (-0,0036)</a:t>
+            </a:r>
+          </a:p>
+          <a:p>
+            <a:pPr>
+              <a:spcAft>
+                <a:spcPts val="800"/>
+              </a:spcAft>
+            </a:pPr>
+            <a:r>
+              <a:rPr sz="1350">
+                <a:solidFill>
+                  <a:srgbClr val="242B35"/>
+                </a:solidFill>
+                <a:latin typeface="Segoe UI"/>
+              </a:rPr>
+              <a:t>▪  Dikkat + gürültü: 0,5597 (-0,0041)</a:t>
+            </a:r>
+          </a:p>
+          <a:p>
+            <a:pPr>
+              <a:spcAft>
+                <a:spcPts val="800"/>
+              </a:spcAft>
+            </a:pPr>
+            <a:r>
+              <a:rPr sz="1350">
+                <a:solidFill>
+                  <a:srgbClr val="242B35"/>
+                </a:solidFill>
+                <a:latin typeface="Segoe UI"/>
+              </a:rPr>
+              <a:t>▪  Hiçbiri geçerlemede kazananı geçemedi → test tekrarı YAPILMADI</a:t>
+            </a:r>
+          </a:p>
+        </p:txBody>
+      </p:sp>
+      <p:sp>
+        <p:nvSpPr>
+          <p:cNvPr id="11" name="Rounded Rectangle 10"/>
+          <p:cNvSpPr/>
+          <p:nvPr/>
+        </p:nvSpPr>
+        <p:spPr>
+          <a:xfrm>
+            <a:off x="685800" y="5623560"/>
+            <a:ext cx="10881360" cy="685800"/>
+          </a:xfrm>
+          <a:prstGeom prst="roundRect">
+            <a:avLst>
+              <a:gd name="adj" fmla="val 8000"/>
+            </a:avLst>
+          </a:prstGeom>
+          <a:solidFill>
+            <a:srgbClr val="F4F8FC"/>
+          </a:solidFill>
+          <a:ln>
+            <a:noFill/>
+          </a:ln>
+          <a:effectLst/>
+        </p:spPr>
+        <p:style>
+          <a:lnRef idx="1">
+            <a:schemeClr val="accent1"/>
+          </a:lnRef>
+          <a:fillRef idx="3">
+            <a:schemeClr val="accent1"/>
+          </a:fillRef>
+          <a:effectRef idx="2">
+            <a:schemeClr val="accent1"/>
+          </a:effectRef>
+          <a:fontRef idx="minor">
+            <a:schemeClr val="lt1"/>
+          </a:fontRef>
+        </p:style>
+        <p:txBody>
+          <a:bodyPr rtlCol="0" anchor="ctr"/>
+          <a:lstStyle/>
+          <a:p>
+            <a:pPr algn="ctr"/>
+          </a:p>
+        </p:txBody>
+      </p:sp>
+      <p:sp>
+        <p:nvSpPr>
+          <p:cNvPr id="12" name="TextBox 11"/>
+          <p:cNvSpPr txBox="1"/>
+          <p:nvPr/>
+        </p:nvSpPr>
+        <p:spPr>
+          <a:xfrm>
+            <a:off x="914400" y="5705856"/>
+            <a:ext cx="10515600" cy="548640"/>
+          </a:xfrm>
+          <a:prstGeom prst="rect">
+            <a:avLst/>
+          </a:prstGeom>
+          <a:noFill/>
+        </p:spPr>
+        <p:txBody>
+          <a:bodyPr wrap="square" anchor="t">
+            <a:spAutoFit/>
+          </a:bodyPr>
+          <a:lstStyle/>
+          <a:p>
+            <a:pPr algn="l">
+              <a:spcAft>
+                <a:spcPts val="400"/>
+              </a:spcAft>
+            </a:pPr>
+            <a:r>
+              <a:rPr sz="1300" b="1" i="0">
+                <a:solidFill>
+                  <a:srgbClr val="1F3B57"/>
+                </a:solidFill>
+                <a:latin typeface="Segoe UI"/>
+              </a:rPr>
+              <a:t>Olumsuz sonuçlar da rapora girdi: geliştirme kararları yalnız geçerlemeyle verildi; test disiplini korundu.</a:t>
+            </a:r>
+          </a:p>
+        </p:txBody>
+      </p:sp>
+      <p:sp>
+        <p:nvSpPr>
+          <p:cNvPr id="13" name="Rectangle 12"/>
           <p:cNvSpPr/>
           <p:nvPr/>
         </p:nvSpPr>
@@ -7284,7 +6957,7 @@
       </p:sp>
       <p:sp>
         <p:nvSpPr>
-          <p:cNvPr id="7" name="TextBox 6"/>
+          <p:cNvPr id="14" name="TextBox 13"/>
           <p:cNvSpPr txBox="1"/>
           <p:nvPr/>
         </p:nvSpPr>
@@ -7323,7 +6996,7 @@
       </p:sp>
       <p:sp>
         <p:nvSpPr>
-          <p:cNvPr id="8" name="TextBox 7"/>
+          <p:cNvPr id="15" name="TextBox 14"/>
           <p:cNvSpPr txBox="1"/>
           <p:nvPr/>
         </p:nvSpPr>
@@ -7494,26 +7167,525 @@
               </a:spcAft>
             </a:pPr>
             <a:r>
+              <a:rPr sz="1100" b="0" i="0">
+                <a:solidFill>
+                  <a:srgbClr val="9DC1E4"/>
+                </a:solidFill>
+                <a:latin typeface="Segoe UI"/>
+              </a:rPr>
+              <a:t>04 • SONUÇLAR</a:t>
+            </a:r>
+          </a:p>
+          <a:p>
+            <a:pPr algn="l">
+              <a:spcAft>
+                <a:spcPts val="400"/>
+              </a:spcAft>
+            </a:pPr>
+            <a:r>
               <a:rPr sz="2500" b="1" i="0">
                 <a:solidFill>
                   <a:srgbClr val="FFFFFF"/>
                 </a:solidFill>
                 <a:latin typeface="Segoe UI"/>
               </a:rPr>
-              <a:t>Kaynaklar (1/2)</a:t>
-            </a:r>
-          </a:p>
-        </p:txBody>
-      </p:sp>
-      <p:sp>
-        <p:nvSpPr>
-          <p:cNvPr id="5" name="TextBox 4"/>
+              <a:t>Genelleme Testi — Aynı Kod, MELD Üzerinde</a:t>
+            </a:r>
+          </a:p>
+        </p:txBody>
+      </p:sp>
+      <p:sp>
+        <p:nvSpPr>
+          <p:cNvPr id="5" name="Rounded Rectangle 4"/>
+          <p:cNvSpPr/>
+          <p:nvPr/>
+        </p:nvSpPr>
+        <p:spPr>
+          <a:xfrm>
+            <a:off x="685800" y="1463040"/>
+            <a:ext cx="3429000" cy="1554480"/>
+          </a:xfrm>
+          <a:prstGeom prst="roundRect">
+            <a:avLst>
+              <a:gd name="adj" fmla="val 8000"/>
+            </a:avLst>
+          </a:prstGeom>
+          <a:solidFill>
+            <a:srgbClr val="F4F8FC"/>
+          </a:solidFill>
+          <a:ln>
+            <a:noFill/>
+          </a:ln>
+          <a:effectLst/>
+        </p:spPr>
+        <p:style>
+          <a:lnRef idx="1">
+            <a:schemeClr val="accent1"/>
+          </a:lnRef>
+          <a:fillRef idx="3">
+            <a:schemeClr val="accent1"/>
+          </a:fillRef>
+          <a:effectRef idx="2">
+            <a:schemeClr val="accent1"/>
+          </a:effectRef>
+          <a:fontRef idx="minor">
+            <a:schemeClr val="lt1"/>
+          </a:fontRef>
+        </p:style>
+        <p:txBody>
+          <a:bodyPr rtlCol="0" anchor="ctr"/>
+          <a:lstStyle/>
+          <a:p>
+            <a:pPr algn="ctr"/>
+          </a:p>
+        </p:txBody>
+      </p:sp>
+      <p:sp>
+        <p:nvSpPr>
+          <p:cNvPr id="6" name="Rectangle 5"/>
+          <p:cNvSpPr/>
+          <p:nvPr/>
+        </p:nvSpPr>
+        <p:spPr>
+          <a:xfrm>
+            <a:off x="685800" y="1463040"/>
+            <a:ext cx="82296" cy="1554480"/>
+          </a:xfrm>
+          <a:prstGeom prst="rect">
+            <a:avLst/>
+          </a:prstGeom>
+          <a:solidFill>
+            <a:srgbClr val="2F74C0"/>
+          </a:solidFill>
+          <a:ln>
+            <a:noFill/>
+          </a:ln>
+          <a:effectLst/>
+        </p:spPr>
+        <p:style>
+          <a:lnRef idx="1">
+            <a:schemeClr val="accent1"/>
+          </a:lnRef>
+          <a:fillRef idx="3">
+            <a:schemeClr val="accent1"/>
+          </a:fillRef>
+          <a:effectRef idx="2">
+            <a:schemeClr val="accent1"/>
+          </a:effectRef>
+          <a:fontRef idx="minor">
+            <a:schemeClr val="lt1"/>
+          </a:fontRef>
+        </p:style>
+        <p:txBody>
+          <a:bodyPr rtlCol="0" anchor="ctr"/>
+          <a:lstStyle/>
+          <a:p>
+            <a:pPr algn="ctr"/>
+          </a:p>
+        </p:txBody>
+      </p:sp>
+      <p:sp>
+        <p:nvSpPr>
+          <p:cNvPr id="7" name="TextBox 6"/>
           <p:cNvSpPr txBox="1"/>
           <p:nvPr/>
         </p:nvSpPr>
         <p:spPr>
           <a:xfrm>
-            <a:off x="685800" y="1508760"/>
+            <a:off x="914400" y="1627632"/>
+            <a:ext cx="3063240" cy="1280160"/>
+          </a:xfrm>
+          <a:prstGeom prst="rect">
+            <a:avLst/>
+          </a:prstGeom>
+          <a:noFill/>
+        </p:spPr>
+        <p:txBody>
+          <a:bodyPr wrap="square" anchor="t">
+            <a:spAutoFit/>
+          </a:bodyPr>
+          <a:lstStyle/>
+          <a:p>
+            <a:pPr algn="l">
+              <a:spcAft>
+                <a:spcPts val="400"/>
+              </a:spcAft>
+            </a:pPr>
+            <a:r>
+              <a:rPr sz="1250" b="1" i="0">
+                <a:solidFill>
+                  <a:srgbClr val="6B7A90"/>
+                </a:solidFill>
+                <a:latin typeface="Segoe UI"/>
+              </a:rPr>
+              <a:t>MELD • CNN</a:t>
+            </a:r>
+          </a:p>
+          <a:p>
+            <a:pPr algn="l">
+              <a:spcAft>
+                <a:spcPts val="400"/>
+              </a:spcAft>
+            </a:pPr>
+            <a:r>
+              <a:rPr sz="3000" b="1" i="0">
+                <a:solidFill>
+                  <a:srgbClr val="2F74C0"/>
+                </a:solidFill>
+                <a:latin typeface="Segoe UI"/>
+              </a:rPr>
+              <a:t>%44,3</a:t>
+            </a:r>
+          </a:p>
+          <a:p>
+            <a:pPr algn="l">
+              <a:spcAft>
+                <a:spcPts val="400"/>
+              </a:spcAft>
+            </a:pPr>
+            <a:r>
+              <a:rPr sz="1150" b="0" i="0">
+                <a:solidFill>
+                  <a:srgbClr val="242B35"/>
+                </a:solidFill>
+                <a:latin typeface="Segoe UI"/>
+              </a:rPr>
+              <a:t>dengeli doğruluk 0,2303</a:t>
+            </a:r>
+          </a:p>
+        </p:txBody>
+      </p:sp>
+      <p:sp>
+        <p:nvSpPr>
+          <p:cNvPr id="8" name="Rounded Rectangle 7"/>
+          <p:cNvSpPr/>
+          <p:nvPr/>
+        </p:nvSpPr>
+        <p:spPr>
+          <a:xfrm>
+            <a:off x="4389120" y="1463040"/>
+            <a:ext cx="3429000" cy="1554480"/>
+          </a:xfrm>
+          <a:prstGeom prst="roundRect">
+            <a:avLst>
+              <a:gd name="adj" fmla="val 8000"/>
+            </a:avLst>
+          </a:prstGeom>
+          <a:solidFill>
+            <a:srgbClr val="F4F8FC"/>
+          </a:solidFill>
+          <a:ln>
+            <a:noFill/>
+          </a:ln>
+          <a:effectLst/>
+        </p:spPr>
+        <p:style>
+          <a:lnRef idx="1">
+            <a:schemeClr val="accent1"/>
+          </a:lnRef>
+          <a:fillRef idx="3">
+            <a:schemeClr val="accent1"/>
+          </a:fillRef>
+          <a:effectRef idx="2">
+            <a:schemeClr val="accent1"/>
+          </a:effectRef>
+          <a:fontRef idx="minor">
+            <a:schemeClr val="lt1"/>
+          </a:fontRef>
+        </p:style>
+        <p:txBody>
+          <a:bodyPr rtlCol="0" anchor="ctr"/>
+          <a:lstStyle/>
+          <a:p>
+            <a:pPr algn="ctr"/>
+          </a:p>
+        </p:txBody>
+      </p:sp>
+      <p:sp>
+        <p:nvSpPr>
+          <p:cNvPr id="9" name="Rectangle 8"/>
+          <p:cNvSpPr/>
+          <p:nvPr/>
+        </p:nvSpPr>
+        <p:spPr>
+          <a:xfrm>
+            <a:off x="4389120" y="1463040"/>
+            <a:ext cx="82296" cy="1554480"/>
+          </a:xfrm>
+          <a:prstGeom prst="rect">
+            <a:avLst/>
+          </a:prstGeom>
+          <a:solidFill>
+            <a:srgbClr val="2F74C0"/>
+          </a:solidFill>
+          <a:ln>
+            <a:noFill/>
+          </a:ln>
+          <a:effectLst/>
+        </p:spPr>
+        <p:style>
+          <a:lnRef idx="1">
+            <a:schemeClr val="accent1"/>
+          </a:lnRef>
+          <a:fillRef idx="3">
+            <a:schemeClr val="accent1"/>
+          </a:fillRef>
+          <a:effectRef idx="2">
+            <a:schemeClr val="accent1"/>
+          </a:effectRef>
+          <a:fontRef idx="minor">
+            <a:schemeClr val="lt1"/>
+          </a:fontRef>
+        </p:style>
+        <p:txBody>
+          <a:bodyPr rtlCol="0" anchor="ctr"/>
+          <a:lstStyle/>
+          <a:p>
+            <a:pPr algn="ctr"/>
+          </a:p>
+        </p:txBody>
+      </p:sp>
+      <p:sp>
+        <p:nvSpPr>
+          <p:cNvPr id="10" name="TextBox 9"/>
+          <p:cNvSpPr txBox="1"/>
+          <p:nvPr/>
+        </p:nvSpPr>
+        <p:spPr>
+          <a:xfrm>
+            <a:off x="4617720" y="1627632"/>
+            <a:ext cx="3063240" cy="1280160"/>
+          </a:xfrm>
+          <a:prstGeom prst="rect">
+            <a:avLst/>
+          </a:prstGeom>
+          <a:noFill/>
+        </p:spPr>
+        <p:txBody>
+          <a:bodyPr wrap="square" anchor="t">
+            <a:spAutoFit/>
+          </a:bodyPr>
+          <a:lstStyle/>
+          <a:p>
+            <a:pPr algn="l">
+              <a:spcAft>
+                <a:spcPts val="400"/>
+              </a:spcAft>
+            </a:pPr>
+            <a:r>
+              <a:rPr sz="1250" b="1" i="0">
+                <a:solidFill>
+                  <a:srgbClr val="6B7A90"/>
+                </a:solidFill>
+                <a:latin typeface="Segoe UI"/>
+              </a:rPr>
+              <a:t>MELD • BiGRU</a:t>
+            </a:r>
+          </a:p>
+          <a:p>
+            <a:pPr algn="l">
+              <a:spcAft>
+                <a:spcPts val="400"/>
+              </a:spcAft>
+            </a:pPr>
+            <a:r>
+              <a:rPr sz="3000" b="1" i="0">
+                <a:solidFill>
+                  <a:srgbClr val="2F74C0"/>
+                </a:solidFill>
+                <a:latin typeface="Segoe UI"/>
+              </a:rPr>
+              <a:t>%38,4</a:t>
+            </a:r>
+          </a:p>
+          <a:p>
+            <a:pPr algn="l">
+              <a:spcAft>
+                <a:spcPts val="400"/>
+              </a:spcAft>
+            </a:pPr>
+            <a:r>
+              <a:rPr sz="1150" b="0" i="0">
+                <a:solidFill>
+                  <a:srgbClr val="242B35"/>
+                </a:solidFill>
+                <a:latin typeface="Segoe UI"/>
+              </a:rPr>
+              <a:t>dengeli doğruluk 0,2036</a:t>
+            </a:r>
+          </a:p>
+        </p:txBody>
+      </p:sp>
+      <p:sp>
+        <p:nvSpPr>
+          <p:cNvPr id="11" name="Rounded Rectangle 10"/>
+          <p:cNvSpPr/>
+          <p:nvPr/>
+        </p:nvSpPr>
+        <p:spPr>
+          <a:xfrm>
+            <a:off x="8092440" y="1463040"/>
+            <a:ext cx="3429000" cy="1554480"/>
+          </a:xfrm>
+          <a:prstGeom prst="roundRect">
+            <a:avLst>
+              <a:gd name="adj" fmla="val 8000"/>
+            </a:avLst>
+          </a:prstGeom>
+          <a:solidFill>
+            <a:srgbClr val="F4F8FC"/>
+          </a:solidFill>
+          <a:ln>
+            <a:noFill/>
+          </a:ln>
+          <a:effectLst/>
+        </p:spPr>
+        <p:style>
+          <a:lnRef idx="1">
+            <a:schemeClr val="accent1"/>
+          </a:lnRef>
+          <a:fillRef idx="3">
+            <a:schemeClr val="accent1"/>
+          </a:fillRef>
+          <a:effectRef idx="2">
+            <a:schemeClr val="accent1"/>
+          </a:effectRef>
+          <a:fontRef idx="minor">
+            <a:schemeClr val="lt1"/>
+          </a:fontRef>
+        </p:style>
+        <p:txBody>
+          <a:bodyPr rtlCol="0" anchor="ctr"/>
+          <a:lstStyle/>
+          <a:p>
+            <a:pPr algn="ctr"/>
+          </a:p>
+        </p:txBody>
+      </p:sp>
+      <p:sp>
+        <p:nvSpPr>
+          <p:cNvPr id="12" name="Rectangle 11"/>
+          <p:cNvSpPr/>
+          <p:nvPr/>
+        </p:nvSpPr>
+        <p:spPr>
+          <a:xfrm>
+            <a:off x="8092440" y="1463040"/>
+            <a:ext cx="82296" cy="1554480"/>
+          </a:xfrm>
+          <a:prstGeom prst="rect">
+            <a:avLst/>
+          </a:prstGeom>
+          <a:solidFill>
+            <a:srgbClr val="6B7A90"/>
+          </a:solidFill>
+          <a:ln>
+            <a:noFill/>
+          </a:ln>
+          <a:effectLst/>
+        </p:spPr>
+        <p:style>
+          <a:lnRef idx="1">
+            <a:schemeClr val="accent1"/>
+          </a:lnRef>
+          <a:fillRef idx="3">
+            <a:schemeClr val="accent1"/>
+          </a:fillRef>
+          <a:effectRef idx="2">
+            <a:schemeClr val="accent1"/>
+          </a:effectRef>
+          <a:fontRef idx="minor">
+            <a:schemeClr val="lt1"/>
+          </a:fontRef>
+        </p:style>
+        <p:txBody>
+          <a:bodyPr rtlCol="0" anchor="ctr"/>
+          <a:lstStyle/>
+          <a:p>
+            <a:pPr algn="ctr"/>
+          </a:p>
+        </p:txBody>
+      </p:sp>
+      <p:sp>
+        <p:nvSpPr>
+          <p:cNvPr id="13" name="TextBox 12"/>
+          <p:cNvSpPr txBox="1"/>
+          <p:nvPr/>
+        </p:nvSpPr>
+        <p:spPr>
+          <a:xfrm>
+            <a:off x="8321040" y="1627632"/>
+            <a:ext cx="3063240" cy="1280160"/>
+          </a:xfrm>
+          <a:prstGeom prst="rect">
+            <a:avLst/>
+          </a:prstGeom>
+          <a:noFill/>
+        </p:spPr>
+        <p:txBody>
+          <a:bodyPr wrap="square" anchor="t">
+            <a:spAutoFit/>
+          </a:bodyPr>
+          <a:lstStyle/>
+          <a:p>
+            <a:pPr algn="l">
+              <a:spcAft>
+                <a:spcPts val="400"/>
+              </a:spcAft>
+            </a:pPr>
+            <a:r>
+              <a:rPr sz="1250" b="1" i="0">
+                <a:solidFill>
+                  <a:srgbClr val="6B7A90"/>
+                </a:solidFill>
+                <a:latin typeface="Segoe UI"/>
+              </a:rPr>
+              <a:t>MELD KAYIT</a:t>
+            </a:r>
+          </a:p>
+          <a:p>
+            <a:pPr algn="l">
+              <a:spcAft>
+                <a:spcPts val="400"/>
+              </a:spcAft>
+            </a:pPr>
+            <a:r>
+              <a:rPr sz="3000" b="1" i="0">
+                <a:solidFill>
+                  <a:srgbClr val="6B7A90"/>
+                </a:solidFill>
+                <a:latin typeface="Segoe UI"/>
+              </a:rPr>
+              <a:t>12.070</a:t>
+            </a:r>
+          </a:p>
+          <a:p>
+            <a:pPr algn="l">
+              <a:spcAft>
+                <a:spcPts val="400"/>
+              </a:spcAft>
+            </a:pPr>
+            <a:r>
+              <a:rPr sz="1150" b="0" i="0">
+                <a:solidFill>
+                  <a:srgbClr val="242B35"/>
+                </a:solidFill>
+                <a:latin typeface="Segoe UI"/>
+              </a:rPr>
+              <a:t>dizi diyalogları • 295 konuşmacı</a:t>
+            </a:r>
+          </a:p>
+        </p:txBody>
+      </p:sp>
+      <p:sp>
+        <p:nvSpPr>
+          <p:cNvPr id="14" name="TextBox 13"/>
+          <p:cNvSpPr txBox="1"/>
+          <p:nvPr/>
+        </p:nvSpPr>
+        <p:spPr>
+          <a:xfrm>
+            <a:off x="685800" y="3383280"/>
             <a:ext cx="10881360" cy="4754880"/>
           </a:xfrm>
           <a:prstGeom prst="rect">
@@ -7529,104 +7701,72 @@
           <a:p>
             <a:pPr>
               <a:spcAft>
-                <a:spcPts val="1000"/>
-              </a:spcAft>
-            </a:pPr>
-            <a:r>
-              <a:rPr sz="1250">
+                <a:spcPts val="900"/>
+              </a:spcAft>
+            </a:pPr>
+            <a:r>
+              <a:rPr sz="1450">
                 <a:solidFill>
                   <a:srgbClr val="242B35"/>
                 </a:solidFill>
                 <a:latin typeface="Segoe UI"/>
               </a:rPr>
-              <a:t>▪  [1] Cao vd. (2014). CREMA-D: Crowd-sourced Emotional Multimodal Actors Dataset. IEEE Trans. Affective Computing 5(4):377-390.</a:t>
+              <a:t>▪  MELD: gürültü, gülüşmeler, çok kısa kayıtlar — stüdyo kaydı CREMA-D'den çok daha zor koşullar.</a:t>
             </a:r>
           </a:p>
           <a:p>
             <a:pPr>
               <a:spcAft>
-                <a:spcPts val="1000"/>
-              </a:spcAft>
-            </a:pPr>
-            <a:r>
-              <a:rPr sz="1250">
+                <a:spcPts val="900"/>
+              </a:spcAft>
+            </a:pPr>
+            <a:r>
+              <a:rPr sz="1450">
                 <a:solidFill>
                   <a:srgbClr val="242B35"/>
                 </a:solidFill>
                 <a:latin typeface="Segoe UI"/>
               </a:rPr>
-              <a:t>▪  [2] Satt, Rozenberg, Hoory (2017). Efficient Emotion Recognition from Speech Using Deep Learning on Spectrograms. Interspeech 2017.</a:t>
+              <a:t>▪  Ham doğruluk ile dengeli doğruluk arasındaki büyük fark nötr sınıf baskınlığını gösteriyor.</a:t>
             </a:r>
           </a:p>
           <a:p>
             <a:pPr>
               <a:spcAft>
-                <a:spcPts val="1000"/>
-              </a:spcAft>
-            </a:pPr>
-            <a:r>
-              <a:rPr sz="1250">
+                <a:spcPts val="900"/>
+              </a:spcAft>
+            </a:pPr>
+            <a:r>
+              <a:rPr sz="1450">
                 <a:solidFill>
                   <a:srgbClr val="242B35"/>
                 </a:solidFill>
                 <a:latin typeface="Segoe UI"/>
               </a:rPr>
-              <a:t>▪  [3] Etienne vd. (2018). CNN+LSTM Architecture for Speech Emotion Recognition with Data Augmentation. arXiv:1802.05630.</a:t>
+              <a:t>▪  Ses-tek-kipli MELD'in düşük kalması literatürde bilinen durum [11] — bu yüzden metin/görüntü kipleri eklenir.</a:t>
             </a:r>
           </a:p>
           <a:p>
             <a:pPr>
               <a:spcAft>
-                <a:spcPts val="1000"/>
-              </a:spcAft>
-            </a:pPr>
-            <a:r>
-              <a:rPr sz="1250">
+                <a:spcPts val="900"/>
+              </a:spcAft>
+            </a:pPr>
+            <a:r>
+              <a:rPr sz="1450">
                 <a:solidFill>
                   <a:srgbClr val="242B35"/>
                 </a:solidFill>
                 <a:latin typeface="Segoe UI"/>
               </a:rPr>
-              <a:t>▪  [4] Ristea, Ionescu (2021). Self-Paced Ensemble Learning for Speech and Audio Classification. Interspeech 2021 (CREMA-D 6 sınıf %68,1).</a:t>
-            </a:r>
-          </a:p>
-          <a:p>
-            <a:pPr>
-              <a:spcAft>
-                <a:spcPts val="1000"/>
-              </a:spcAft>
-            </a:pPr>
-            <a:r>
-              <a:rPr sz="1250">
-                <a:solidFill>
-                  <a:srgbClr val="242B35"/>
-                </a:solidFill>
-                <a:latin typeface="Segoe UI"/>
-              </a:rPr>
-              <a:t>▪  [5] Evaluating raw waveforms with deep learning frameworks for speech emotion recognition (2023). arXiv:2307.02820.</a:t>
-            </a:r>
-          </a:p>
-          <a:p>
-            <a:pPr>
-              <a:spcAft>
-                <a:spcPts val="1000"/>
-              </a:spcAft>
-            </a:pPr>
-            <a:r>
-              <a:rPr sz="1250">
-                <a:solidFill>
-                  <a:srgbClr val="242B35"/>
-                </a:solidFill>
-                <a:latin typeface="Segoe UI"/>
-              </a:rPr>
-              <a:t>▪  [6] Mirsamadi, Barsoum, Zhang (2017). Automatic speech emotion recognition using recurrent neural networks with local attention. ICASSP 2017.</a:t>
-            </a:r>
-          </a:p>
-        </p:txBody>
-      </p:sp>
-      <p:sp>
-        <p:nvSpPr>
-          <p:cNvPr id="6" name="Rectangle 5"/>
+              <a:t>▪  Çıkarım: yöntemler kod değişikliği olmadan yeni corpus'a taşınıyor; sınır, veri koşullarının kendisi.</a:t>
+            </a:r>
+          </a:p>
+        </p:txBody>
+      </p:sp>
+      <p:sp>
+        <p:nvSpPr>
+          <p:cNvPr id="15" name="Rectangle 14"/>
           <p:cNvSpPr/>
           <p:nvPr/>
         </p:nvSpPr>
@@ -7670,7 +7810,7 @@
       </p:sp>
       <p:sp>
         <p:nvSpPr>
-          <p:cNvPr id="7" name="TextBox 6"/>
+          <p:cNvPr id="16" name="TextBox 15"/>
           <p:cNvSpPr txBox="1"/>
           <p:nvPr/>
         </p:nvSpPr>
@@ -7709,7 +7849,7 @@
       </p:sp>
       <p:sp>
         <p:nvSpPr>
-          <p:cNvPr id="8" name="TextBox 7"/>
+          <p:cNvPr id="17" name="TextBox 16"/>
           <p:cNvSpPr txBox="1"/>
           <p:nvPr/>
         </p:nvSpPr>
@@ -7880,27 +8020,592 @@
               </a:spcAft>
             </a:pPr>
             <a:r>
+              <a:rPr sz="1100" b="0" i="0">
+                <a:solidFill>
+                  <a:srgbClr val="9DC1E4"/>
+                </a:solidFill>
+                <a:latin typeface="Segoe UI"/>
+              </a:rPr>
+              <a:t>05 • ÇIKARIMLAR</a:t>
+            </a:r>
+          </a:p>
+          <a:p>
+            <a:pPr algn="l">
+              <a:spcAft>
+                <a:spcPts val="400"/>
+              </a:spcAft>
+            </a:pPr>
+            <a:r>
               <a:rPr sz="2500" b="1" i="0">
                 <a:solidFill>
                   <a:srgbClr val="FFFFFF"/>
                 </a:solidFill>
                 <a:latin typeface="Segoe UI"/>
               </a:rPr>
-              <a:t>Kaynaklar (2/2)</a:t>
-            </a:r>
-          </a:p>
-        </p:txBody>
-      </p:sp>
-      <p:sp>
-        <p:nvSpPr>
-          <p:cNvPr id="5" name="TextBox 4"/>
+              <a:t>Literatürde Neredeyiz? (CREMA-D, konuşmacı-bağımsız)</a:t>
+            </a:r>
+          </a:p>
+        </p:txBody>
+      </p:sp>
+      <p:sp>
+        <p:nvSpPr>
+          <p:cNvPr id="5" name="Rectangle 4"/>
+          <p:cNvSpPr/>
+          <p:nvPr/>
+        </p:nvSpPr>
+        <p:spPr>
+          <a:xfrm>
+            <a:off x="914400" y="3291840"/>
+            <a:ext cx="10332720" cy="45720"/>
+          </a:xfrm>
+          <a:prstGeom prst="rect">
+            <a:avLst/>
+          </a:prstGeom>
+          <a:solidFill>
+            <a:srgbClr val="C8D6E6"/>
+          </a:solidFill>
+          <a:ln>
+            <a:noFill/>
+          </a:ln>
+          <a:effectLst/>
+        </p:spPr>
+        <p:style>
+          <a:lnRef idx="1">
+            <a:schemeClr val="accent1"/>
+          </a:lnRef>
+          <a:fillRef idx="3">
+            <a:schemeClr val="accent1"/>
+          </a:fillRef>
+          <a:effectRef idx="2">
+            <a:schemeClr val="accent1"/>
+          </a:effectRef>
+          <a:fontRef idx="minor">
+            <a:schemeClr val="lt1"/>
+          </a:fontRef>
+        </p:style>
+        <p:txBody>
+          <a:bodyPr rtlCol="0" anchor="ctr"/>
+          <a:lstStyle/>
+          <a:p>
+            <a:pPr algn="ctr"/>
+          </a:p>
+        </p:txBody>
+      </p:sp>
+      <p:sp>
+        <p:nvSpPr>
+          <p:cNvPr id="6" name="Oval 5"/>
+          <p:cNvSpPr/>
+          <p:nvPr/>
+        </p:nvSpPr>
+        <p:spPr>
+          <a:xfrm>
+            <a:off x="1750771" y="3186684"/>
+            <a:ext cx="256032" cy="256032"/>
+          </a:xfrm>
+          <a:prstGeom prst="ellipse">
+            <a:avLst/>
+          </a:prstGeom>
+          <a:solidFill>
+            <a:srgbClr val="6B7A90"/>
+          </a:solidFill>
+          <a:ln w="25400">
+            <a:solidFill>
+              <a:srgbClr val="FFFFFF"/>
+            </a:solidFill>
+          </a:ln>
+          <a:effectLst/>
+        </p:spPr>
+        <p:style>
+          <a:lnRef idx="1">
+            <a:schemeClr val="accent1"/>
+          </a:lnRef>
+          <a:fillRef idx="3">
+            <a:schemeClr val="accent1"/>
+          </a:fillRef>
+          <a:effectRef idx="2">
+            <a:schemeClr val="accent1"/>
+          </a:effectRef>
+          <a:fontRef idx="minor">
+            <a:schemeClr val="lt1"/>
+          </a:fontRef>
+        </p:style>
+        <p:txBody>
+          <a:bodyPr rtlCol="0" anchor="ctr"/>
+          <a:lstStyle/>
+          <a:p>
+            <a:pPr algn="ctr"/>
+          </a:p>
+        </p:txBody>
+      </p:sp>
+      <p:sp>
+        <p:nvSpPr>
+          <p:cNvPr id="7" name="TextBox 6"/>
           <p:cNvSpPr txBox="1"/>
           <p:nvPr/>
         </p:nvSpPr>
         <p:spPr>
           <a:xfrm>
-            <a:off x="685800" y="1508760"/>
-            <a:ext cx="10881360" cy="4754880"/>
+            <a:off x="644347" y="2148840"/>
+            <a:ext cx="2468880" cy="914400"/>
+          </a:xfrm>
+          <a:prstGeom prst="rect">
+            <a:avLst/>
+          </a:prstGeom>
+          <a:noFill/>
+        </p:spPr>
+        <p:txBody>
+          <a:bodyPr wrap="square" anchor="t">
+            <a:spAutoFit/>
+          </a:bodyPr>
+          <a:lstStyle/>
+          <a:p>
+            <a:pPr algn="ctr">
+              <a:spcAft>
+                <a:spcPts val="400"/>
+              </a:spcAft>
+            </a:pPr>
+            <a:r>
+              <a:rPr sz="1400" b="1" i="0">
+                <a:solidFill>
+                  <a:srgbClr val="6B7A90"/>
+                </a:solidFill>
+                <a:latin typeface="Segoe UI"/>
+              </a:rPr>
+              <a:t>%17</a:t>
+            </a:r>
+          </a:p>
+          <a:p>
+            <a:pPr algn="ctr">
+              <a:spcAft>
+                <a:spcPts val="400"/>
+              </a:spcAft>
+            </a:pPr>
+            <a:r>
+              <a:rPr sz="1100" b="0" i="0">
+                <a:solidFill>
+                  <a:srgbClr val="6B7A90"/>
+                </a:solidFill>
+                <a:latin typeface="Segoe UI"/>
+              </a:rPr>
+              <a:t>Şans</a:t>
+            </a:r>
+          </a:p>
+        </p:txBody>
+      </p:sp>
+      <p:sp>
+        <p:nvSpPr>
+          <p:cNvPr id="8" name="Oval 7"/>
+          <p:cNvSpPr/>
+          <p:nvPr/>
+        </p:nvSpPr>
+        <p:spPr>
+          <a:xfrm>
+            <a:off x="5043464" y="3186684"/>
+            <a:ext cx="256032" cy="256032"/>
+          </a:xfrm>
+          <a:prstGeom prst="ellipse">
+            <a:avLst/>
+          </a:prstGeom>
+          <a:solidFill>
+            <a:srgbClr val="C26A1D"/>
+          </a:solidFill>
+          <a:ln w="25400">
+            <a:solidFill>
+              <a:srgbClr val="FFFFFF"/>
+            </a:solidFill>
+          </a:ln>
+          <a:effectLst/>
+        </p:spPr>
+        <p:style>
+          <a:lnRef idx="1">
+            <a:schemeClr val="accent1"/>
+          </a:lnRef>
+          <a:fillRef idx="3">
+            <a:schemeClr val="accent1"/>
+          </a:fillRef>
+          <a:effectRef idx="2">
+            <a:schemeClr val="accent1"/>
+          </a:effectRef>
+          <a:fontRef idx="minor">
+            <a:schemeClr val="lt1"/>
+          </a:fontRef>
+        </p:style>
+        <p:txBody>
+          <a:bodyPr rtlCol="0" anchor="ctr"/>
+          <a:lstStyle/>
+          <a:p>
+            <a:pPr algn="ctr"/>
+          </a:p>
+        </p:txBody>
+      </p:sp>
+      <p:sp>
+        <p:nvSpPr>
+          <p:cNvPr id="9" name="TextBox 8"/>
+          <p:cNvSpPr txBox="1"/>
+          <p:nvPr/>
+        </p:nvSpPr>
+        <p:spPr>
+          <a:xfrm>
+            <a:off x="3937040" y="3703320"/>
+            <a:ext cx="2468880" cy="914400"/>
+          </a:xfrm>
+          <a:prstGeom prst="rect">
+            <a:avLst/>
+          </a:prstGeom>
+          <a:noFill/>
+        </p:spPr>
+        <p:txBody>
+          <a:bodyPr wrap="square" anchor="t">
+            <a:spAutoFit/>
+          </a:bodyPr>
+          <a:lstStyle/>
+          <a:p>
+            <a:pPr algn="ctr">
+              <a:spcAft>
+                <a:spcPts val="400"/>
+              </a:spcAft>
+            </a:pPr>
+            <a:r>
+              <a:rPr sz="1400" b="1" i="0">
+                <a:solidFill>
+                  <a:srgbClr val="C26A1D"/>
+                </a:solidFill>
+                <a:latin typeface="Segoe UI"/>
+              </a:rPr>
+              <a:t>%40,9</a:t>
+            </a:r>
+          </a:p>
+          <a:p>
+            <a:pPr algn="ctr">
+              <a:spcAft>
+                <a:spcPts val="400"/>
+              </a:spcAft>
+            </a:pPr>
+            <a:r>
+              <a:rPr sz="1100" b="0" i="0">
+                <a:solidFill>
+                  <a:srgbClr val="6B7A90"/>
+                </a:solidFill>
+                <a:latin typeface="Segoe UI"/>
+              </a:rPr>
+              <a:t>İnsan (yalnız ses) [1]</a:t>
+            </a:r>
+          </a:p>
+        </p:txBody>
+      </p:sp>
+      <p:sp>
+        <p:nvSpPr>
+          <p:cNvPr id="10" name="Oval 9"/>
+          <p:cNvSpPr/>
+          <p:nvPr/>
+        </p:nvSpPr>
+        <p:spPr>
+          <a:xfrm>
+            <a:off x="8139885" y="3131820"/>
+            <a:ext cx="365760" cy="365760"/>
+          </a:xfrm>
+          <a:prstGeom prst="ellipse">
+            <a:avLst/>
+          </a:prstGeom>
+          <a:solidFill>
+            <a:srgbClr val="1F7A4D"/>
+          </a:solidFill>
+          <a:ln w="25400">
+            <a:solidFill>
+              <a:srgbClr val="FFFFFF"/>
+            </a:solidFill>
+          </a:ln>
+          <a:effectLst/>
+        </p:spPr>
+        <p:style>
+          <a:lnRef idx="1">
+            <a:schemeClr val="accent1"/>
+          </a:lnRef>
+          <a:fillRef idx="3">
+            <a:schemeClr val="accent1"/>
+          </a:fillRef>
+          <a:effectRef idx="2">
+            <a:schemeClr val="accent1"/>
+          </a:effectRef>
+          <a:fontRef idx="minor">
+            <a:schemeClr val="lt1"/>
+          </a:fontRef>
+        </p:style>
+        <p:txBody>
+          <a:bodyPr rtlCol="0" anchor="ctr"/>
+          <a:lstStyle/>
+          <a:p>
+            <a:pPr algn="ctr"/>
+          </a:p>
+        </p:txBody>
+      </p:sp>
+      <p:sp>
+        <p:nvSpPr>
+          <p:cNvPr id="11" name="TextBox 10"/>
+          <p:cNvSpPr txBox="1"/>
+          <p:nvPr/>
+        </p:nvSpPr>
+        <p:spPr>
+          <a:xfrm>
+            <a:off x="7088325" y="2148840"/>
+            <a:ext cx="2468880" cy="914400"/>
+          </a:xfrm>
+          <a:prstGeom prst="rect">
+            <a:avLst/>
+          </a:prstGeom>
+          <a:noFill/>
+        </p:spPr>
+        <p:txBody>
+          <a:bodyPr wrap="square" anchor="t">
+            <a:spAutoFit/>
+          </a:bodyPr>
+          <a:lstStyle/>
+          <a:p>
+            <a:pPr algn="ctr">
+              <a:spcAft>
+                <a:spcPts val="400"/>
+              </a:spcAft>
+            </a:pPr>
+            <a:r>
+              <a:rPr sz="1700" b="1" i="0">
+                <a:solidFill>
+                  <a:srgbClr val="1F7A4D"/>
+                </a:solidFill>
+                <a:latin typeface="Segoe UI"/>
+              </a:rPr>
+              <a:t>%63,8</a:t>
+            </a:r>
+          </a:p>
+          <a:p>
+            <a:pPr algn="ctr">
+              <a:spcAft>
+                <a:spcPts val="400"/>
+              </a:spcAft>
+            </a:pPr>
+            <a:r>
+              <a:rPr sz="1100" b="1" i="0">
+                <a:solidFill>
+                  <a:srgbClr val="242B35"/>
+                </a:solidFill>
+                <a:latin typeface="Segoe UI"/>
+              </a:rPr>
+              <a:t>BU PROJE — BiGRU</a:t>
+            </a:r>
+          </a:p>
+        </p:txBody>
+      </p:sp>
+      <p:sp>
+        <p:nvSpPr>
+          <p:cNvPr id="12" name="Oval 11"/>
+          <p:cNvSpPr/>
+          <p:nvPr/>
+        </p:nvSpPr>
+        <p:spPr>
+          <a:xfrm>
+            <a:off x="8790797" y="3186684"/>
+            <a:ext cx="256032" cy="256032"/>
+          </a:xfrm>
+          <a:prstGeom prst="ellipse">
+            <a:avLst/>
+          </a:prstGeom>
+          <a:solidFill>
+            <a:srgbClr val="2F74C0"/>
+          </a:solidFill>
+          <a:ln w="25400">
+            <a:solidFill>
+              <a:srgbClr val="FFFFFF"/>
+            </a:solidFill>
+          </a:ln>
+          <a:effectLst/>
+        </p:spPr>
+        <p:style>
+          <a:lnRef idx="1">
+            <a:schemeClr val="accent1"/>
+          </a:lnRef>
+          <a:fillRef idx="3">
+            <a:schemeClr val="accent1"/>
+          </a:fillRef>
+          <a:effectRef idx="2">
+            <a:schemeClr val="accent1"/>
+          </a:effectRef>
+          <a:fontRef idx="minor">
+            <a:schemeClr val="lt1"/>
+          </a:fontRef>
+        </p:style>
+        <p:txBody>
+          <a:bodyPr rtlCol="0" anchor="ctr"/>
+          <a:lstStyle/>
+          <a:p>
+            <a:pPr algn="ctr"/>
+          </a:p>
+        </p:txBody>
+      </p:sp>
+      <p:sp>
+        <p:nvSpPr>
+          <p:cNvPr id="13" name="TextBox 12"/>
+          <p:cNvSpPr txBox="1"/>
+          <p:nvPr/>
+        </p:nvSpPr>
+        <p:spPr>
+          <a:xfrm>
+            <a:off x="7684373" y="3703320"/>
+            <a:ext cx="2468880" cy="914400"/>
+          </a:xfrm>
+          <a:prstGeom prst="rect">
+            <a:avLst/>
+          </a:prstGeom>
+          <a:noFill/>
+        </p:spPr>
+        <p:txBody>
+          <a:bodyPr wrap="square" anchor="t">
+            <a:spAutoFit/>
+          </a:bodyPr>
+          <a:lstStyle/>
+          <a:p>
+            <a:pPr algn="ctr">
+              <a:spcAft>
+                <a:spcPts val="400"/>
+              </a:spcAft>
+            </a:pPr>
+            <a:r>
+              <a:rPr sz="1400" b="1" i="0">
+                <a:solidFill>
+                  <a:srgbClr val="2F74C0"/>
+                </a:solidFill>
+                <a:latin typeface="Segoe UI"/>
+              </a:rPr>
+              <a:t>%68,1</a:t>
+            </a:r>
+          </a:p>
+          <a:p>
+            <a:pPr algn="ctr">
+              <a:spcAft>
+                <a:spcPts val="400"/>
+              </a:spcAft>
+            </a:pPr>
+            <a:r>
+              <a:rPr sz="1100" b="0" i="0">
+                <a:solidFill>
+                  <a:srgbClr val="6B7A90"/>
+                </a:solidFill>
+                <a:latin typeface="Segoe UI"/>
+              </a:rPr>
+              <a:t>Sıfırdan tavan (5'li ansambl) [4]</a:t>
+            </a:r>
+          </a:p>
+        </p:txBody>
+      </p:sp>
+      <p:sp>
+        <p:nvSpPr>
+          <p:cNvPr id="14" name="Oval 13"/>
+          <p:cNvSpPr/>
+          <p:nvPr/>
+        </p:nvSpPr>
+        <p:spPr>
+          <a:xfrm>
+            <a:off x="9989393" y="3186684"/>
+            <a:ext cx="256032" cy="256032"/>
+          </a:xfrm>
+          <a:prstGeom prst="ellipse">
+            <a:avLst/>
+          </a:prstGeom>
+          <a:solidFill>
+            <a:srgbClr val="6B7A90"/>
+          </a:solidFill>
+          <a:ln w="25400">
+            <a:solidFill>
+              <a:srgbClr val="FFFFFF"/>
+            </a:solidFill>
+          </a:ln>
+          <a:effectLst/>
+        </p:spPr>
+        <p:style>
+          <a:lnRef idx="1">
+            <a:schemeClr val="accent1"/>
+          </a:lnRef>
+          <a:fillRef idx="3">
+            <a:schemeClr val="accent1"/>
+          </a:fillRef>
+          <a:effectRef idx="2">
+            <a:schemeClr val="accent1"/>
+          </a:effectRef>
+          <a:fontRef idx="minor">
+            <a:schemeClr val="lt1"/>
+          </a:fontRef>
+        </p:style>
+        <p:txBody>
+          <a:bodyPr rtlCol="0" anchor="ctr"/>
+          <a:lstStyle/>
+          <a:p>
+            <a:pPr algn="ctr"/>
+          </a:p>
+        </p:txBody>
+      </p:sp>
+      <p:sp>
+        <p:nvSpPr>
+          <p:cNvPr id="15" name="TextBox 14"/>
+          <p:cNvSpPr txBox="1"/>
+          <p:nvPr/>
+        </p:nvSpPr>
+        <p:spPr>
+          <a:xfrm>
+            <a:off x="8882969" y="2148840"/>
+            <a:ext cx="2468880" cy="914400"/>
+          </a:xfrm>
+          <a:prstGeom prst="rect">
+            <a:avLst/>
+          </a:prstGeom>
+          <a:noFill/>
+        </p:spPr>
+        <p:txBody>
+          <a:bodyPr wrap="square" anchor="t">
+            <a:spAutoFit/>
+          </a:bodyPr>
+          <a:lstStyle/>
+          <a:p>
+            <a:pPr algn="ctr">
+              <a:spcAft>
+                <a:spcPts val="400"/>
+              </a:spcAft>
+            </a:pPr>
+            <a:r>
+              <a:rPr sz="1400" b="1" i="0">
+                <a:solidFill>
+                  <a:srgbClr val="6B7A90"/>
+                </a:solidFill>
+                <a:latin typeface="Segoe UI"/>
+              </a:rPr>
+              <a:t>~%77</a:t>
+            </a:r>
+          </a:p>
+          <a:p>
+            <a:pPr algn="ctr">
+              <a:spcAft>
+                <a:spcPts val="400"/>
+              </a:spcAft>
+            </a:pPr>
+            <a:r>
+              <a:rPr sz="1100" b="0" i="0">
+                <a:solidFill>
+                  <a:srgbClr val="6B7A90"/>
+                </a:solidFill>
+                <a:latin typeface="Segoe UI"/>
+              </a:rPr>
+              <a:t>Ön eğitimli SSL üst ucu [11]</a:t>
+            </a:r>
+          </a:p>
+        </p:txBody>
+      </p:sp>
+      <p:sp>
+        <p:nvSpPr>
+          <p:cNvPr id="16" name="TextBox 15"/>
+          <p:cNvSpPr txBox="1"/>
+          <p:nvPr/>
+        </p:nvSpPr>
+        <p:spPr>
+          <a:xfrm>
+            <a:off x="685800" y="5029200"/>
+            <a:ext cx="10881360" cy="1280160"/>
           </a:xfrm>
           <a:prstGeom prst="rect">
             <a:avLst/>
@@ -7915,104 +8620,40 @@
           <a:p>
             <a:pPr>
               <a:spcAft>
-                <a:spcPts val="1000"/>
-              </a:spcAft>
-            </a:pPr>
-            <a:r>
-              <a:rPr sz="1250">
+                <a:spcPts val="800"/>
+              </a:spcAft>
+            </a:pPr>
+            <a:r>
+              <a:rPr sz="1500">
                 <a:solidFill>
                   <a:srgbClr val="242B35"/>
                 </a:solidFill>
                 <a:latin typeface="Segoe UI"/>
               </a:rPr>
-              <a:t>▪  [7] Lee, Tashev (2015). High-level feature representation using recurrent neural network for speech emotion recognition. Interspeech 2015.</a:t>
+              <a:t>▪  İnsan referansının 22+ puan üzerinde; sıfırdan-tek-model için yayınlanmış tavana 4 puan mesafede.</a:t>
             </a:r>
           </a:p>
           <a:p>
             <a:pPr>
               <a:spcAft>
-                <a:spcPts val="1000"/>
-              </a:spcAft>
-            </a:pPr>
-            <a:r>
-              <a:rPr sz="1250">
+                <a:spcPts val="800"/>
+              </a:spcAft>
+            </a:pPr>
+            <a:r>
+              <a:rPr sz="1500">
                 <a:solidFill>
                   <a:srgbClr val="242B35"/>
                 </a:solidFill>
                 <a:latin typeface="Segoe UI"/>
               </a:rPr>
-              <a:t>▪  [8] Kesim, Helli, Cavsak (2023). A Comparison of Time-based Models for Multimodal Emotion Recognition. arXiv:2306.13076.</a:t>
-            </a:r>
-          </a:p>
-          <a:p>
-            <a:pPr>
-              <a:spcAft>
-                <a:spcPts val="1000"/>
-              </a:spcAft>
-            </a:pPr>
-            <a:r>
-              <a:rPr sz="1250">
-                <a:solidFill>
-                  <a:srgbClr val="242B35"/>
-                </a:solidFill>
-                <a:latin typeface="Segoe UI"/>
-              </a:rPr>
-              <a:t>▪  [9] Eyben vd. (2016). The Geneva Minimalistic Acoustic Parameter Set (GeMAPS). IEEE TAFFC 7(2).</a:t>
-            </a:r>
-          </a:p>
-          <a:p>
-            <a:pPr>
-              <a:spcAft>
-                <a:spcPts val="1000"/>
-              </a:spcAft>
-            </a:pPr>
-            <a:r>
-              <a:rPr sz="1250">
-                <a:solidFill>
-                  <a:srgbClr val="242B35"/>
-                </a:solidFill>
-                <a:latin typeface="Segoe UI"/>
-              </a:rPr>
-              <a:t>▪  [10] Park vd. (2019). SpecAugment: A Simple Data Augmentation Method for ASR. Interspeech 2019.</a:t>
-            </a:r>
-          </a:p>
-          <a:p>
-            <a:pPr>
-              <a:spcAft>
-                <a:spcPts val="1000"/>
-              </a:spcAft>
-            </a:pPr>
-            <a:r>
-              <a:rPr sz="1250">
-                <a:solidFill>
-                  <a:srgbClr val="242B35"/>
-                </a:solidFill>
-                <a:latin typeface="Segoe UI"/>
-              </a:rPr>
-              <a:t>▪  [11] Ma vd. (2024). EmoBox: Multilingual Multi-corpus Speech Emotion Recognition Toolkit and Benchmark. Interspeech 2024.</a:t>
-            </a:r>
-          </a:p>
-          <a:p>
-            <a:pPr>
-              <a:spcAft>
-                <a:spcPts val="1000"/>
-              </a:spcAft>
-            </a:pPr>
-            <a:r>
-              <a:rPr sz="1250">
-                <a:solidFill>
-                  <a:srgbClr val="242B35"/>
-                </a:solidFill>
-                <a:latin typeface="Segoe UI"/>
-              </a:rPr>
-              <a:t>▪  [12] Speech emotion recognition with light weight deep neural ensemble model using hand crafted features. Sci. Reports (2025) — rastgele bölme şişkinliğine örnek.</a:t>
-            </a:r>
-          </a:p>
-        </p:txBody>
-      </p:sp>
-      <p:sp>
-        <p:nvSpPr>
-          <p:cNvPr id="6" name="Rectangle 5"/>
+              <a:t>▪  %80+ iddialar rastgele bölme/sızıntı ürünü [12] — kıyas ölçütü değil.</a:t>
+            </a:r>
+          </a:p>
+        </p:txBody>
+      </p:sp>
+      <p:sp>
+        <p:nvSpPr>
+          <p:cNvPr id="17" name="Rectangle 16"/>
           <p:cNvSpPr/>
           <p:nvPr/>
         </p:nvSpPr>
@@ -8056,7 +8697,7 @@
       </p:sp>
       <p:sp>
         <p:nvSpPr>
-          <p:cNvPr id="7" name="TextBox 6"/>
+          <p:cNvPr id="18" name="TextBox 17"/>
           <p:cNvSpPr txBox="1"/>
           <p:nvPr/>
         </p:nvSpPr>
@@ -8095,7 +8736,7 @@
       </p:sp>
       <p:sp>
         <p:nvSpPr>
-          <p:cNvPr id="8" name="TextBox 7"/>
+          <p:cNvPr id="19" name="TextBox 18"/>
           <p:cNvSpPr txBox="1"/>
           <p:nvPr/>
         </p:nvSpPr>
@@ -8159,7 +8800,7 @@
         <p:spPr>
           <a:xfrm>
             <a:off x="0" y="0"/>
-            <a:ext cx="12191695" cy="6858000"/>
+            <a:ext cx="12191695" cy="1078992"/>
           </a:xfrm>
           <a:prstGeom prst="rect">
             <a:avLst/>
@@ -8202,8 +8843,8 @@
         </p:nvSpPr>
         <p:spPr>
           <a:xfrm>
-            <a:off x="0" y="3310128"/>
-            <a:ext cx="12191695" cy="27432"/>
+            <a:off x="0" y="1078992"/>
+            <a:ext cx="12191695" cy="41148"/>
           </a:xfrm>
           <a:prstGeom prst="rect">
             <a:avLst/>
@@ -8246,8 +8887,210 @@
         </p:nvSpPr>
         <p:spPr>
           <a:xfrm>
-            <a:off x="822960" y="2286000"/>
-            <a:ext cx="10515600" cy="914400"/>
+            <a:off x="502920" y="128016"/>
+            <a:ext cx="11155680" cy="868680"/>
+          </a:xfrm>
+          <a:prstGeom prst="rect">
+            <a:avLst/>
+          </a:prstGeom>
+          <a:noFill/>
+        </p:spPr>
+        <p:txBody>
+          <a:bodyPr wrap="square" anchor="ctr">
+            <a:spAutoFit/>
+          </a:bodyPr>
+          <a:lstStyle/>
+          <a:p>
+            <a:pPr algn="l">
+              <a:spcAft>
+                <a:spcPts val="400"/>
+              </a:spcAft>
+            </a:pPr>
+            <a:r>
+              <a:rPr sz="1100" b="0" i="0">
+                <a:solidFill>
+                  <a:srgbClr val="9DC1E4"/>
+                </a:solidFill>
+                <a:latin typeface="Segoe UI"/>
+              </a:rPr>
+              <a:t>05 • ÇIKARIMLAR</a:t>
+            </a:r>
+          </a:p>
+          <a:p>
+            <a:pPr algn="l">
+              <a:spcAft>
+                <a:spcPts val="400"/>
+              </a:spcAft>
+            </a:pPr>
+            <a:r>
+              <a:rPr sz="2500" b="1" i="0">
+                <a:solidFill>
+                  <a:srgbClr val="FFFFFF"/>
+                </a:solidFill>
+                <a:latin typeface="Segoe UI"/>
+              </a:rPr>
+              <a:t>Sonuç</a:t>
+            </a:r>
+          </a:p>
+        </p:txBody>
+      </p:sp>
+      <p:sp>
+        <p:nvSpPr>
+          <p:cNvPr id="5" name="TextBox 4"/>
+          <p:cNvSpPr txBox="1"/>
+          <p:nvPr/>
+        </p:nvSpPr>
+        <p:spPr>
+          <a:xfrm>
+            <a:off x="685800" y="1645920"/>
+            <a:ext cx="10881360" cy="4754880"/>
+          </a:xfrm>
+          <a:prstGeom prst="rect">
+            <a:avLst/>
+          </a:prstGeom>
+          <a:noFill/>
+        </p:spPr>
+        <p:txBody>
+          <a:bodyPr wrap="square">
+            <a:spAutoFit/>
+          </a:bodyPr>
+          <a:lstStyle/>
+          <a:p>
+            <a:pPr>
+              <a:spcAft>
+                <a:spcPts val="1400"/>
+              </a:spcAft>
+            </a:pPr>
+            <a:r>
+              <a:rPr sz="1700">
+                <a:solidFill>
+                  <a:srgbClr val="242B35"/>
+                </a:solidFill>
+                <a:latin typeface="Segoe UI"/>
+              </a:rPr>
+              <a:t>▪  İki yöntem de sıfırdan, aynı konuşmacı-bağımsız protokolde: CNN %62,6 • BiGRU %63,8.</a:t>
+            </a:r>
+          </a:p>
+          <a:p>
+            <a:pPr>
+              <a:spcAft>
+                <a:spcPts val="1400"/>
+              </a:spcAft>
+            </a:pPr>
+            <a:r>
+              <a:rPr sz="1700">
+                <a:solidFill>
+                  <a:srgbClr val="242B35"/>
+                </a:solidFill>
+                <a:latin typeface="Segoe UI"/>
+              </a:rPr>
+              <a:t>▪  Kazananı hiperparametre araması belirledi: aralık düzeni (32×200 ms) tek başına sıralamayı değiştirdi.</a:t>
+            </a:r>
+          </a:p>
+          <a:p>
+            <a:pPr>
+              <a:spcAft>
+                <a:spcPts val="1400"/>
+              </a:spcAft>
+            </a:pPr>
+            <a:r>
+              <a:rPr sz="1700">
+                <a:solidFill>
+                  <a:srgbClr val="242B35"/>
+                </a:solidFill>
+                <a:latin typeface="Segoe UI"/>
+              </a:rPr>
+              <a:t>▪  SpecAugment CNN'i geçerlemede ve testte iyileştirdi; RNN geliştirmeleri dürüstçe 'işe yaramadı' olarak raporlandı.</a:t>
+            </a:r>
+          </a:p>
+          <a:p>
+            <a:pPr>
+              <a:spcAft>
+                <a:spcPts val="1400"/>
+              </a:spcAft>
+            </a:pPr>
+            <a:r>
+              <a:rPr sz="1700">
+                <a:solidFill>
+                  <a:srgbClr val="242B35"/>
+                </a:solidFill>
+                <a:latin typeface="Segoe UI"/>
+              </a:rPr>
+              <a:t>▪  MELD genellemesi: kod değişmeden koştu; fark veri koşullarından, yöntemden değil.</a:t>
+            </a:r>
+          </a:p>
+          <a:p>
+            <a:pPr>
+              <a:spcAft>
+                <a:spcPts val="1400"/>
+              </a:spcAft>
+            </a:pPr>
+            <a:r>
+              <a:rPr sz="1700">
+                <a:solidFill>
+                  <a:srgbClr val="242B35"/>
+                </a:solidFill>
+                <a:latin typeface="Segoe UI"/>
+              </a:rPr>
+              <a:t>▪  Tüm sayılar, tablolar ve bu sunum deney artefaktlarından üretildi — uçtan uca tekrarlanabilir.</a:t>
+            </a:r>
+          </a:p>
+        </p:txBody>
+      </p:sp>
+      <p:sp>
+        <p:nvSpPr>
+          <p:cNvPr id="6" name="Rectangle 5"/>
+          <p:cNvSpPr/>
+          <p:nvPr/>
+        </p:nvSpPr>
+        <p:spPr>
+          <a:xfrm>
+            <a:off x="502920" y="6473952"/>
+            <a:ext cx="11183112" cy="10972"/>
+          </a:xfrm>
+          <a:prstGeom prst="rect">
+            <a:avLst/>
+          </a:prstGeom>
+          <a:solidFill>
+            <a:srgbClr val="D5DFEA"/>
+          </a:solidFill>
+          <a:ln>
+            <a:noFill/>
+          </a:ln>
+          <a:effectLst/>
+        </p:spPr>
+        <p:style>
+          <a:lnRef idx="1">
+            <a:schemeClr val="accent1"/>
+          </a:lnRef>
+          <a:fillRef idx="3">
+            <a:schemeClr val="accent1"/>
+          </a:fillRef>
+          <a:effectRef idx="2">
+            <a:schemeClr val="accent1"/>
+          </a:effectRef>
+          <a:fontRef idx="minor">
+            <a:schemeClr val="lt1"/>
+          </a:fontRef>
+        </p:style>
+        <p:txBody>
+          <a:bodyPr rtlCol="0" anchor="ctr"/>
+          <a:lstStyle/>
+          <a:p>
+            <a:pPr algn="ctr"/>
+          </a:p>
+        </p:txBody>
+      </p:sp>
+      <p:sp>
+        <p:nvSpPr>
+          <p:cNvPr id="7" name="TextBox 6"/>
+          <p:cNvSpPr txBox="1"/>
+          <p:nvPr/>
+        </p:nvSpPr>
+        <p:spPr>
+          <a:xfrm>
+            <a:off x="502920" y="6510528"/>
+            <a:ext cx="11183112" cy="274320"/>
           </a:xfrm>
           <a:prstGeom prst="rect">
             <a:avLst/>
@@ -8260,33 +9103,33 @@
           </a:bodyPr>
           <a:lstStyle/>
           <a:p>
-            <a:pPr algn="ctr">
-              <a:spcAft>
-                <a:spcPts val="400"/>
-              </a:spcAft>
-            </a:pPr>
-            <a:r>
-              <a:rPr sz="4000" b="1" i="0">
-                <a:solidFill>
-                  <a:srgbClr val="FFFFFF"/>
-                </a:solidFill>
-                <a:latin typeface="Segoe UI"/>
-              </a:rPr>
-              <a:t>Teşekkürler — Sorular?</a:t>
-            </a:r>
-          </a:p>
-        </p:txBody>
-      </p:sp>
-      <p:sp>
-        <p:nvSpPr>
-          <p:cNvPr id="5" name="TextBox 4"/>
+            <a:pPr algn="l">
+              <a:spcAft>
+                <a:spcPts val="400"/>
+              </a:spcAft>
+            </a:pPr>
+            <a:r>
+              <a:rPr sz="950" b="0" i="0">
+                <a:solidFill>
+                  <a:srgbClr val="6B7A90"/>
+                </a:solidFill>
+                <a:latin typeface="Segoe UI"/>
+              </a:rPr>
+              <a:t>Ahmet Babagil  •  211101067</a:t>
+            </a:r>
+          </a:p>
+        </p:txBody>
+      </p:sp>
+      <p:sp>
+        <p:nvSpPr>
+          <p:cNvPr id="8" name="TextBox 7"/>
           <p:cNvSpPr txBox="1"/>
           <p:nvPr/>
         </p:nvSpPr>
         <p:spPr>
           <a:xfrm>
-            <a:off x="822960" y="3657600"/>
-            <a:ext cx="10515600" cy="548640"/>
+            <a:off x="10607040" y="6510528"/>
+            <a:ext cx="1078992" cy="274320"/>
           </a:xfrm>
           <a:prstGeom prst="rect">
             <a:avLst/>
@@ -8299,19 +9142,405 @@
           </a:bodyPr>
           <a:lstStyle/>
           <a:p>
-            <a:pPr algn="ctr">
-              <a:spcAft>
-                <a:spcPts val="400"/>
-              </a:spcAft>
-            </a:pPr>
-            <a:r>
-              <a:rPr sz="1500" b="0" i="0">
-                <a:solidFill>
-                  <a:srgbClr val="9DC1E4"/>
+            <a:pPr algn="r">
+              <a:spcAft>
+                <a:spcPts val="400"/>
+              </a:spcAft>
+            </a:pPr>
+            <a:r>
+              <a:rPr sz="950" b="0" i="0">
+                <a:solidFill>
+                  <a:srgbClr val="6B7A90"/>
+                </a:solidFill>
+                <a:latin typeface="Segoe UI"/>
+              </a:rPr>
+              <a:t>18</a:t>
+            </a:r>
+          </a:p>
+        </p:txBody>
+      </p:sp>
+    </p:spTree>
+  </p:cSld>
+  <p:clrMapOvr>
+    <a:masterClrMapping/>
+  </p:clrMapOvr>
+</p:sld>
+</file>
+
+<file path=ppt/slides/slide19.xml><?xml version="1.0" encoding="utf-8"?>
+<p:sld xmlns:a="http://schemas.openxmlformats.org/drawingml/2006/main" xmlns:p="http://schemas.openxmlformats.org/presentationml/2006/main" xmlns:r="http://schemas.openxmlformats.org/officeDocument/2006/relationships">
+  <p:cSld>
+    <p:spTree>
+      <p:nvGrpSpPr>
+        <p:cNvPr id="1" name=""/>
+        <p:cNvGrpSpPr/>
+        <p:nvPr/>
+      </p:nvGrpSpPr>
+      <p:grpSpPr/>
+      <p:sp>
+        <p:nvSpPr>
+          <p:cNvPr id="2" name="Rectangle 1"/>
+          <p:cNvSpPr/>
+          <p:nvPr/>
+        </p:nvSpPr>
+        <p:spPr>
+          <a:xfrm>
+            <a:off x="0" y="0"/>
+            <a:ext cx="12191695" cy="1078992"/>
+          </a:xfrm>
+          <a:prstGeom prst="rect">
+            <a:avLst/>
+          </a:prstGeom>
+          <a:solidFill>
+            <a:srgbClr val="162E47"/>
+          </a:solidFill>
+          <a:ln>
+            <a:noFill/>
+          </a:ln>
+          <a:effectLst/>
+        </p:spPr>
+        <p:style>
+          <a:lnRef idx="1">
+            <a:schemeClr val="accent1"/>
+          </a:lnRef>
+          <a:fillRef idx="3">
+            <a:schemeClr val="accent1"/>
+          </a:fillRef>
+          <a:effectRef idx="2">
+            <a:schemeClr val="accent1"/>
+          </a:effectRef>
+          <a:fontRef idx="minor">
+            <a:schemeClr val="lt1"/>
+          </a:fontRef>
+        </p:style>
+        <p:txBody>
+          <a:bodyPr rtlCol="0" anchor="ctr"/>
+          <a:lstStyle/>
+          <a:p>
+            <a:pPr algn="ctr"/>
+          </a:p>
+        </p:txBody>
+      </p:sp>
+      <p:sp>
+        <p:nvSpPr>
+          <p:cNvPr id="3" name="Rectangle 2"/>
+          <p:cNvSpPr/>
+          <p:nvPr/>
+        </p:nvSpPr>
+        <p:spPr>
+          <a:xfrm>
+            <a:off x="0" y="1078992"/>
+            <a:ext cx="12191695" cy="41148"/>
+          </a:xfrm>
+          <a:prstGeom prst="rect">
+            <a:avLst/>
+          </a:prstGeom>
+          <a:solidFill>
+            <a:srgbClr val="2F74C0"/>
+          </a:solidFill>
+          <a:ln>
+            <a:noFill/>
+          </a:ln>
+          <a:effectLst/>
+        </p:spPr>
+        <p:style>
+          <a:lnRef idx="1">
+            <a:schemeClr val="accent1"/>
+          </a:lnRef>
+          <a:fillRef idx="3">
+            <a:schemeClr val="accent1"/>
+          </a:fillRef>
+          <a:effectRef idx="2">
+            <a:schemeClr val="accent1"/>
+          </a:effectRef>
+          <a:fontRef idx="minor">
+            <a:schemeClr val="lt1"/>
+          </a:fontRef>
+        </p:style>
+        <p:txBody>
+          <a:bodyPr rtlCol="0" anchor="ctr"/>
+          <a:lstStyle/>
+          <a:p>
+            <a:pPr algn="ctr"/>
+          </a:p>
+        </p:txBody>
+      </p:sp>
+      <p:sp>
+        <p:nvSpPr>
+          <p:cNvPr id="4" name="TextBox 3"/>
+          <p:cNvSpPr txBox="1"/>
+          <p:nvPr/>
+        </p:nvSpPr>
+        <p:spPr>
+          <a:xfrm>
+            <a:off x="502920" y="128016"/>
+            <a:ext cx="11155680" cy="868680"/>
+          </a:xfrm>
+          <a:prstGeom prst="rect">
+            <a:avLst/>
+          </a:prstGeom>
+          <a:noFill/>
+        </p:spPr>
+        <p:txBody>
+          <a:bodyPr wrap="square" anchor="ctr">
+            <a:spAutoFit/>
+          </a:bodyPr>
+          <a:lstStyle/>
+          <a:p>
+            <a:pPr algn="l">
+              <a:spcAft>
+                <a:spcPts val="400"/>
+              </a:spcAft>
+            </a:pPr>
+            <a:r>
+              <a:rPr sz="2500" b="1" i="0">
+                <a:solidFill>
+                  <a:srgbClr val="FFFFFF"/>
+                </a:solidFill>
+                <a:latin typeface="Segoe UI"/>
+              </a:rPr>
+              <a:t>Kaynaklar (1/2)</a:t>
+            </a:r>
+          </a:p>
+        </p:txBody>
+      </p:sp>
+      <p:sp>
+        <p:nvSpPr>
+          <p:cNvPr id="5" name="TextBox 4"/>
+          <p:cNvSpPr txBox="1"/>
+          <p:nvPr/>
+        </p:nvSpPr>
+        <p:spPr>
+          <a:xfrm>
+            <a:off x="685800" y="1508760"/>
+            <a:ext cx="10881360" cy="4754880"/>
+          </a:xfrm>
+          <a:prstGeom prst="rect">
+            <a:avLst/>
+          </a:prstGeom>
+          <a:noFill/>
+        </p:spPr>
+        <p:txBody>
+          <a:bodyPr wrap="square">
+            <a:spAutoFit/>
+          </a:bodyPr>
+          <a:lstStyle/>
+          <a:p>
+            <a:pPr>
+              <a:spcAft>
+                <a:spcPts val="1000"/>
+              </a:spcAft>
+            </a:pPr>
+            <a:r>
+              <a:rPr sz="1250">
+                <a:solidFill>
+                  <a:srgbClr val="242B35"/>
+                </a:solidFill>
+                <a:latin typeface="Segoe UI"/>
+              </a:rPr>
+              <a:t>▪  [1] Cao vd. (2014). CREMA-D: Crowd-sourced Emotional Multimodal Actors Dataset. IEEE Trans. Affective Computing 5(4):377-390.</a:t>
+            </a:r>
+          </a:p>
+          <a:p>
+            <a:pPr>
+              <a:spcAft>
+                <a:spcPts val="1000"/>
+              </a:spcAft>
+            </a:pPr>
+            <a:r>
+              <a:rPr sz="1250">
+                <a:solidFill>
+                  <a:srgbClr val="242B35"/>
+                </a:solidFill>
+                <a:latin typeface="Segoe UI"/>
+              </a:rPr>
+              <a:t>▪  [2] Satt, Rozenberg, Hoory (2017). Efficient Emotion Recognition from Speech Using Deep Learning on Spectrograms. Interspeech 2017.</a:t>
+            </a:r>
+          </a:p>
+          <a:p>
+            <a:pPr>
+              <a:spcAft>
+                <a:spcPts val="1000"/>
+              </a:spcAft>
+            </a:pPr>
+            <a:r>
+              <a:rPr sz="1250">
+                <a:solidFill>
+                  <a:srgbClr val="242B35"/>
+                </a:solidFill>
+                <a:latin typeface="Segoe UI"/>
+              </a:rPr>
+              <a:t>▪  [3] Etienne vd. (2018). CNN+LSTM Architecture for Speech Emotion Recognition with Data Augmentation. arXiv:1802.05630.</a:t>
+            </a:r>
+          </a:p>
+          <a:p>
+            <a:pPr>
+              <a:spcAft>
+                <a:spcPts val="1000"/>
+              </a:spcAft>
+            </a:pPr>
+            <a:r>
+              <a:rPr sz="1250">
+                <a:solidFill>
+                  <a:srgbClr val="242B35"/>
+                </a:solidFill>
+                <a:latin typeface="Segoe UI"/>
+              </a:rPr>
+              <a:t>▪  [4] Ristea, Ionescu (2021). Self-Paced Ensemble Learning for Speech and Audio Classification. Interspeech 2021 (CREMA-D 6 sınıf %68,1).</a:t>
+            </a:r>
+          </a:p>
+          <a:p>
+            <a:pPr>
+              <a:spcAft>
+                <a:spcPts val="1000"/>
+              </a:spcAft>
+            </a:pPr>
+            <a:r>
+              <a:rPr sz="1250">
+                <a:solidFill>
+                  <a:srgbClr val="242B35"/>
+                </a:solidFill>
+                <a:latin typeface="Segoe UI"/>
+              </a:rPr>
+              <a:t>▪  [5] Evaluating raw waveforms with deep learning frameworks for speech emotion recognition (2023). arXiv:2307.02820.</a:t>
+            </a:r>
+          </a:p>
+          <a:p>
+            <a:pPr>
+              <a:spcAft>
+                <a:spcPts val="1000"/>
+              </a:spcAft>
+            </a:pPr>
+            <a:r>
+              <a:rPr sz="1250">
+                <a:solidFill>
+                  <a:srgbClr val="242B35"/>
+                </a:solidFill>
+                <a:latin typeface="Segoe UI"/>
+              </a:rPr>
+              <a:t>▪  [6] Mirsamadi, Barsoum, Zhang (2017). Automatic speech emotion recognition using recurrent neural networks with local attention. ICASSP 2017.</a:t>
+            </a:r>
+          </a:p>
+        </p:txBody>
+      </p:sp>
+      <p:sp>
+        <p:nvSpPr>
+          <p:cNvPr id="6" name="Rectangle 5"/>
+          <p:cNvSpPr/>
+          <p:nvPr/>
+        </p:nvSpPr>
+        <p:spPr>
+          <a:xfrm>
+            <a:off x="502920" y="6473952"/>
+            <a:ext cx="11183112" cy="10972"/>
+          </a:xfrm>
+          <a:prstGeom prst="rect">
+            <a:avLst/>
+          </a:prstGeom>
+          <a:solidFill>
+            <a:srgbClr val="D5DFEA"/>
+          </a:solidFill>
+          <a:ln>
+            <a:noFill/>
+          </a:ln>
+          <a:effectLst/>
+        </p:spPr>
+        <p:style>
+          <a:lnRef idx="1">
+            <a:schemeClr val="accent1"/>
+          </a:lnRef>
+          <a:fillRef idx="3">
+            <a:schemeClr val="accent1"/>
+          </a:fillRef>
+          <a:effectRef idx="2">
+            <a:schemeClr val="accent1"/>
+          </a:effectRef>
+          <a:fontRef idx="minor">
+            <a:schemeClr val="lt1"/>
+          </a:fontRef>
+        </p:style>
+        <p:txBody>
+          <a:bodyPr rtlCol="0" anchor="ctr"/>
+          <a:lstStyle/>
+          <a:p>
+            <a:pPr algn="ctr"/>
+          </a:p>
+        </p:txBody>
+      </p:sp>
+      <p:sp>
+        <p:nvSpPr>
+          <p:cNvPr id="7" name="TextBox 6"/>
+          <p:cNvSpPr txBox="1"/>
+          <p:nvPr/>
+        </p:nvSpPr>
+        <p:spPr>
+          <a:xfrm>
+            <a:off x="502920" y="6510528"/>
+            <a:ext cx="11183112" cy="274320"/>
+          </a:xfrm>
+          <a:prstGeom prst="rect">
+            <a:avLst/>
+          </a:prstGeom>
+          <a:noFill/>
+        </p:spPr>
+        <p:txBody>
+          <a:bodyPr wrap="square" anchor="t">
+            <a:spAutoFit/>
+          </a:bodyPr>
+          <a:lstStyle/>
+          <a:p>
+            <a:pPr algn="l">
+              <a:spcAft>
+                <a:spcPts val="400"/>
+              </a:spcAft>
+            </a:pPr>
+            <a:r>
+              <a:rPr sz="950" b="0" i="0">
+                <a:solidFill>
+                  <a:srgbClr val="6B7A90"/>
                 </a:solidFill>
                 <a:latin typeface="Segoe UI"/>
               </a:rPr>
               <a:t>Ahmet Babagil  •  211101067</a:t>
+            </a:r>
+          </a:p>
+        </p:txBody>
+      </p:sp>
+      <p:sp>
+        <p:nvSpPr>
+          <p:cNvPr id="8" name="TextBox 7"/>
+          <p:cNvSpPr txBox="1"/>
+          <p:nvPr/>
+        </p:nvSpPr>
+        <p:spPr>
+          <a:xfrm>
+            <a:off x="10607040" y="6510528"/>
+            <a:ext cx="1078992" cy="274320"/>
+          </a:xfrm>
+          <a:prstGeom prst="rect">
+            <a:avLst/>
+          </a:prstGeom>
+          <a:noFill/>
+        </p:spPr>
+        <p:txBody>
+          <a:bodyPr wrap="square" anchor="t">
+            <a:spAutoFit/>
+          </a:bodyPr>
+          <a:lstStyle/>
+          <a:p>
+            <a:pPr algn="r">
+              <a:spcAft>
+                <a:spcPts val="400"/>
+              </a:spcAft>
+            </a:pPr>
+            <a:r>
+              <a:rPr sz="950" b="0" i="0">
+                <a:solidFill>
+                  <a:srgbClr val="6B7A90"/>
+                </a:solidFill>
+                <a:latin typeface="Segoe UI"/>
+              </a:rPr>
+              <a:t>19</a:t>
             </a:r>
           </a:p>
         </p:txBody>
@@ -9034,6 +10263,576 @@
 </p:sld>
 </file>
 
+<file path=ppt/slides/slide20.xml><?xml version="1.0" encoding="utf-8"?>
+<p:sld xmlns:a="http://schemas.openxmlformats.org/drawingml/2006/main" xmlns:p="http://schemas.openxmlformats.org/presentationml/2006/main" xmlns:r="http://schemas.openxmlformats.org/officeDocument/2006/relationships">
+  <p:cSld>
+    <p:spTree>
+      <p:nvGrpSpPr>
+        <p:cNvPr id="1" name=""/>
+        <p:cNvGrpSpPr/>
+        <p:nvPr/>
+      </p:nvGrpSpPr>
+      <p:grpSpPr/>
+      <p:sp>
+        <p:nvSpPr>
+          <p:cNvPr id="2" name="Rectangle 1"/>
+          <p:cNvSpPr/>
+          <p:nvPr/>
+        </p:nvSpPr>
+        <p:spPr>
+          <a:xfrm>
+            <a:off x="0" y="0"/>
+            <a:ext cx="12191695" cy="1078992"/>
+          </a:xfrm>
+          <a:prstGeom prst="rect">
+            <a:avLst/>
+          </a:prstGeom>
+          <a:solidFill>
+            <a:srgbClr val="162E47"/>
+          </a:solidFill>
+          <a:ln>
+            <a:noFill/>
+          </a:ln>
+          <a:effectLst/>
+        </p:spPr>
+        <p:style>
+          <a:lnRef idx="1">
+            <a:schemeClr val="accent1"/>
+          </a:lnRef>
+          <a:fillRef idx="3">
+            <a:schemeClr val="accent1"/>
+          </a:fillRef>
+          <a:effectRef idx="2">
+            <a:schemeClr val="accent1"/>
+          </a:effectRef>
+          <a:fontRef idx="minor">
+            <a:schemeClr val="lt1"/>
+          </a:fontRef>
+        </p:style>
+        <p:txBody>
+          <a:bodyPr rtlCol="0" anchor="ctr"/>
+          <a:lstStyle/>
+          <a:p>
+            <a:pPr algn="ctr"/>
+          </a:p>
+        </p:txBody>
+      </p:sp>
+      <p:sp>
+        <p:nvSpPr>
+          <p:cNvPr id="3" name="Rectangle 2"/>
+          <p:cNvSpPr/>
+          <p:nvPr/>
+        </p:nvSpPr>
+        <p:spPr>
+          <a:xfrm>
+            <a:off x="0" y="1078992"/>
+            <a:ext cx="12191695" cy="41148"/>
+          </a:xfrm>
+          <a:prstGeom prst="rect">
+            <a:avLst/>
+          </a:prstGeom>
+          <a:solidFill>
+            <a:srgbClr val="2F74C0"/>
+          </a:solidFill>
+          <a:ln>
+            <a:noFill/>
+          </a:ln>
+          <a:effectLst/>
+        </p:spPr>
+        <p:style>
+          <a:lnRef idx="1">
+            <a:schemeClr val="accent1"/>
+          </a:lnRef>
+          <a:fillRef idx="3">
+            <a:schemeClr val="accent1"/>
+          </a:fillRef>
+          <a:effectRef idx="2">
+            <a:schemeClr val="accent1"/>
+          </a:effectRef>
+          <a:fontRef idx="minor">
+            <a:schemeClr val="lt1"/>
+          </a:fontRef>
+        </p:style>
+        <p:txBody>
+          <a:bodyPr rtlCol="0" anchor="ctr"/>
+          <a:lstStyle/>
+          <a:p>
+            <a:pPr algn="ctr"/>
+          </a:p>
+        </p:txBody>
+      </p:sp>
+      <p:sp>
+        <p:nvSpPr>
+          <p:cNvPr id="4" name="TextBox 3"/>
+          <p:cNvSpPr txBox="1"/>
+          <p:nvPr/>
+        </p:nvSpPr>
+        <p:spPr>
+          <a:xfrm>
+            <a:off x="502920" y="128016"/>
+            <a:ext cx="11155680" cy="868680"/>
+          </a:xfrm>
+          <a:prstGeom prst="rect">
+            <a:avLst/>
+          </a:prstGeom>
+          <a:noFill/>
+        </p:spPr>
+        <p:txBody>
+          <a:bodyPr wrap="square" anchor="ctr">
+            <a:spAutoFit/>
+          </a:bodyPr>
+          <a:lstStyle/>
+          <a:p>
+            <a:pPr algn="l">
+              <a:spcAft>
+                <a:spcPts val="400"/>
+              </a:spcAft>
+            </a:pPr>
+            <a:r>
+              <a:rPr sz="2500" b="1" i="0">
+                <a:solidFill>
+                  <a:srgbClr val="FFFFFF"/>
+                </a:solidFill>
+                <a:latin typeface="Segoe UI"/>
+              </a:rPr>
+              <a:t>Kaynaklar (2/2)</a:t>
+            </a:r>
+          </a:p>
+        </p:txBody>
+      </p:sp>
+      <p:sp>
+        <p:nvSpPr>
+          <p:cNvPr id="5" name="TextBox 4"/>
+          <p:cNvSpPr txBox="1"/>
+          <p:nvPr/>
+        </p:nvSpPr>
+        <p:spPr>
+          <a:xfrm>
+            <a:off x="685800" y="1508760"/>
+            <a:ext cx="10881360" cy="4754880"/>
+          </a:xfrm>
+          <a:prstGeom prst="rect">
+            <a:avLst/>
+          </a:prstGeom>
+          <a:noFill/>
+        </p:spPr>
+        <p:txBody>
+          <a:bodyPr wrap="square">
+            <a:spAutoFit/>
+          </a:bodyPr>
+          <a:lstStyle/>
+          <a:p>
+            <a:pPr>
+              <a:spcAft>
+                <a:spcPts val="1000"/>
+              </a:spcAft>
+            </a:pPr>
+            <a:r>
+              <a:rPr sz="1250">
+                <a:solidFill>
+                  <a:srgbClr val="242B35"/>
+                </a:solidFill>
+                <a:latin typeface="Segoe UI"/>
+              </a:rPr>
+              <a:t>▪  [7] Lee, Tashev (2015). High-level feature representation using recurrent neural network for speech emotion recognition. Interspeech 2015.</a:t>
+            </a:r>
+          </a:p>
+          <a:p>
+            <a:pPr>
+              <a:spcAft>
+                <a:spcPts val="1000"/>
+              </a:spcAft>
+            </a:pPr>
+            <a:r>
+              <a:rPr sz="1250">
+                <a:solidFill>
+                  <a:srgbClr val="242B35"/>
+                </a:solidFill>
+                <a:latin typeface="Segoe UI"/>
+              </a:rPr>
+              <a:t>▪  [8] Kesim, Helli, Cavsak (2023). A Comparison of Time-based Models for Multimodal Emotion Recognition. arXiv:2306.13076.</a:t>
+            </a:r>
+          </a:p>
+          <a:p>
+            <a:pPr>
+              <a:spcAft>
+                <a:spcPts val="1000"/>
+              </a:spcAft>
+            </a:pPr>
+            <a:r>
+              <a:rPr sz="1250">
+                <a:solidFill>
+                  <a:srgbClr val="242B35"/>
+                </a:solidFill>
+                <a:latin typeface="Segoe UI"/>
+              </a:rPr>
+              <a:t>▪  [9] Eyben vd. (2016). The Geneva Minimalistic Acoustic Parameter Set (GeMAPS). IEEE TAFFC 7(2).</a:t>
+            </a:r>
+          </a:p>
+          <a:p>
+            <a:pPr>
+              <a:spcAft>
+                <a:spcPts val="1000"/>
+              </a:spcAft>
+            </a:pPr>
+            <a:r>
+              <a:rPr sz="1250">
+                <a:solidFill>
+                  <a:srgbClr val="242B35"/>
+                </a:solidFill>
+                <a:latin typeface="Segoe UI"/>
+              </a:rPr>
+              <a:t>▪  [10] Park vd. (2019). SpecAugment: A Simple Data Augmentation Method for ASR. Interspeech 2019.</a:t>
+            </a:r>
+          </a:p>
+          <a:p>
+            <a:pPr>
+              <a:spcAft>
+                <a:spcPts val="1000"/>
+              </a:spcAft>
+            </a:pPr>
+            <a:r>
+              <a:rPr sz="1250">
+                <a:solidFill>
+                  <a:srgbClr val="242B35"/>
+                </a:solidFill>
+                <a:latin typeface="Segoe UI"/>
+              </a:rPr>
+              <a:t>▪  [11] Ma vd. (2024). EmoBox: Multilingual Multi-corpus Speech Emotion Recognition Toolkit and Benchmark. Interspeech 2024.</a:t>
+            </a:r>
+          </a:p>
+          <a:p>
+            <a:pPr>
+              <a:spcAft>
+                <a:spcPts val="1000"/>
+              </a:spcAft>
+            </a:pPr>
+            <a:r>
+              <a:rPr sz="1250">
+                <a:solidFill>
+                  <a:srgbClr val="242B35"/>
+                </a:solidFill>
+                <a:latin typeface="Segoe UI"/>
+              </a:rPr>
+              <a:t>▪  [12] Speech emotion recognition with light weight deep neural ensemble model using hand crafted features. Sci. Reports (2025) — rastgele bölme şişkinliğine örnek.</a:t>
+            </a:r>
+          </a:p>
+        </p:txBody>
+      </p:sp>
+      <p:sp>
+        <p:nvSpPr>
+          <p:cNvPr id="6" name="Rectangle 5"/>
+          <p:cNvSpPr/>
+          <p:nvPr/>
+        </p:nvSpPr>
+        <p:spPr>
+          <a:xfrm>
+            <a:off x="502920" y="6473952"/>
+            <a:ext cx="11183112" cy="10972"/>
+          </a:xfrm>
+          <a:prstGeom prst="rect">
+            <a:avLst/>
+          </a:prstGeom>
+          <a:solidFill>
+            <a:srgbClr val="D5DFEA"/>
+          </a:solidFill>
+          <a:ln>
+            <a:noFill/>
+          </a:ln>
+          <a:effectLst/>
+        </p:spPr>
+        <p:style>
+          <a:lnRef idx="1">
+            <a:schemeClr val="accent1"/>
+          </a:lnRef>
+          <a:fillRef idx="3">
+            <a:schemeClr val="accent1"/>
+          </a:fillRef>
+          <a:effectRef idx="2">
+            <a:schemeClr val="accent1"/>
+          </a:effectRef>
+          <a:fontRef idx="minor">
+            <a:schemeClr val="lt1"/>
+          </a:fontRef>
+        </p:style>
+        <p:txBody>
+          <a:bodyPr rtlCol="0" anchor="ctr"/>
+          <a:lstStyle/>
+          <a:p>
+            <a:pPr algn="ctr"/>
+          </a:p>
+        </p:txBody>
+      </p:sp>
+      <p:sp>
+        <p:nvSpPr>
+          <p:cNvPr id="7" name="TextBox 6"/>
+          <p:cNvSpPr txBox="1"/>
+          <p:nvPr/>
+        </p:nvSpPr>
+        <p:spPr>
+          <a:xfrm>
+            <a:off x="502920" y="6510528"/>
+            <a:ext cx="11183112" cy="274320"/>
+          </a:xfrm>
+          <a:prstGeom prst="rect">
+            <a:avLst/>
+          </a:prstGeom>
+          <a:noFill/>
+        </p:spPr>
+        <p:txBody>
+          <a:bodyPr wrap="square" anchor="t">
+            <a:spAutoFit/>
+          </a:bodyPr>
+          <a:lstStyle/>
+          <a:p>
+            <a:pPr algn="l">
+              <a:spcAft>
+                <a:spcPts val="400"/>
+              </a:spcAft>
+            </a:pPr>
+            <a:r>
+              <a:rPr sz="950" b="0" i="0">
+                <a:solidFill>
+                  <a:srgbClr val="6B7A90"/>
+                </a:solidFill>
+                <a:latin typeface="Segoe UI"/>
+              </a:rPr>
+              <a:t>Ahmet Babagil  •  211101067</a:t>
+            </a:r>
+          </a:p>
+        </p:txBody>
+      </p:sp>
+      <p:sp>
+        <p:nvSpPr>
+          <p:cNvPr id="8" name="TextBox 7"/>
+          <p:cNvSpPr txBox="1"/>
+          <p:nvPr/>
+        </p:nvSpPr>
+        <p:spPr>
+          <a:xfrm>
+            <a:off x="10607040" y="6510528"/>
+            <a:ext cx="1078992" cy="274320"/>
+          </a:xfrm>
+          <a:prstGeom prst="rect">
+            <a:avLst/>
+          </a:prstGeom>
+          <a:noFill/>
+        </p:spPr>
+        <p:txBody>
+          <a:bodyPr wrap="square" anchor="t">
+            <a:spAutoFit/>
+          </a:bodyPr>
+          <a:lstStyle/>
+          <a:p>
+            <a:pPr algn="r">
+              <a:spcAft>
+                <a:spcPts val="400"/>
+              </a:spcAft>
+            </a:pPr>
+            <a:r>
+              <a:rPr sz="950" b="0" i="0">
+                <a:solidFill>
+                  <a:srgbClr val="6B7A90"/>
+                </a:solidFill>
+                <a:latin typeface="Segoe UI"/>
+              </a:rPr>
+              <a:t>20</a:t>
+            </a:r>
+          </a:p>
+        </p:txBody>
+      </p:sp>
+    </p:spTree>
+  </p:cSld>
+  <p:clrMapOvr>
+    <a:masterClrMapping/>
+  </p:clrMapOvr>
+</p:sld>
+</file>
+
+<file path=ppt/slides/slide21.xml><?xml version="1.0" encoding="utf-8"?>
+<p:sld xmlns:a="http://schemas.openxmlformats.org/drawingml/2006/main" xmlns:p="http://schemas.openxmlformats.org/presentationml/2006/main" xmlns:r="http://schemas.openxmlformats.org/officeDocument/2006/relationships">
+  <p:cSld>
+    <p:spTree>
+      <p:nvGrpSpPr>
+        <p:cNvPr id="1" name=""/>
+        <p:cNvGrpSpPr/>
+        <p:nvPr/>
+      </p:nvGrpSpPr>
+      <p:grpSpPr/>
+      <p:sp>
+        <p:nvSpPr>
+          <p:cNvPr id="2" name="Rectangle 1"/>
+          <p:cNvSpPr/>
+          <p:nvPr/>
+        </p:nvSpPr>
+        <p:spPr>
+          <a:xfrm>
+            <a:off x="0" y="0"/>
+            <a:ext cx="12191695" cy="6858000"/>
+          </a:xfrm>
+          <a:prstGeom prst="rect">
+            <a:avLst/>
+          </a:prstGeom>
+          <a:solidFill>
+            <a:srgbClr val="162E47"/>
+          </a:solidFill>
+          <a:ln>
+            <a:noFill/>
+          </a:ln>
+          <a:effectLst/>
+        </p:spPr>
+        <p:style>
+          <a:lnRef idx="1">
+            <a:schemeClr val="accent1"/>
+          </a:lnRef>
+          <a:fillRef idx="3">
+            <a:schemeClr val="accent1"/>
+          </a:fillRef>
+          <a:effectRef idx="2">
+            <a:schemeClr val="accent1"/>
+          </a:effectRef>
+          <a:fontRef idx="minor">
+            <a:schemeClr val="lt1"/>
+          </a:fontRef>
+        </p:style>
+        <p:txBody>
+          <a:bodyPr rtlCol="0" anchor="ctr"/>
+          <a:lstStyle/>
+          <a:p>
+            <a:pPr algn="ctr"/>
+          </a:p>
+        </p:txBody>
+      </p:sp>
+      <p:sp>
+        <p:nvSpPr>
+          <p:cNvPr id="3" name="Rectangle 2"/>
+          <p:cNvSpPr/>
+          <p:nvPr/>
+        </p:nvSpPr>
+        <p:spPr>
+          <a:xfrm>
+            <a:off x="0" y="3310128"/>
+            <a:ext cx="12191695" cy="27432"/>
+          </a:xfrm>
+          <a:prstGeom prst="rect">
+            <a:avLst/>
+          </a:prstGeom>
+          <a:solidFill>
+            <a:srgbClr val="2F74C0"/>
+          </a:solidFill>
+          <a:ln>
+            <a:noFill/>
+          </a:ln>
+          <a:effectLst/>
+        </p:spPr>
+        <p:style>
+          <a:lnRef idx="1">
+            <a:schemeClr val="accent1"/>
+          </a:lnRef>
+          <a:fillRef idx="3">
+            <a:schemeClr val="accent1"/>
+          </a:fillRef>
+          <a:effectRef idx="2">
+            <a:schemeClr val="accent1"/>
+          </a:effectRef>
+          <a:fontRef idx="minor">
+            <a:schemeClr val="lt1"/>
+          </a:fontRef>
+        </p:style>
+        <p:txBody>
+          <a:bodyPr rtlCol="0" anchor="ctr"/>
+          <a:lstStyle/>
+          <a:p>
+            <a:pPr algn="ctr"/>
+          </a:p>
+        </p:txBody>
+      </p:sp>
+      <p:sp>
+        <p:nvSpPr>
+          <p:cNvPr id="4" name="TextBox 3"/>
+          <p:cNvSpPr txBox="1"/>
+          <p:nvPr/>
+        </p:nvSpPr>
+        <p:spPr>
+          <a:xfrm>
+            <a:off x="822960" y="2286000"/>
+            <a:ext cx="10515600" cy="914400"/>
+          </a:xfrm>
+          <a:prstGeom prst="rect">
+            <a:avLst/>
+          </a:prstGeom>
+          <a:noFill/>
+        </p:spPr>
+        <p:txBody>
+          <a:bodyPr wrap="square" anchor="t">
+            <a:spAutoFit/>
+          </a:bodyPr>
+          <a:lstStyle/>
+          <a:p>
+            <a:pPr algn="ctr">
+              <a:spcAft>
+                <a:spcPts val="400"/>
+              </a:spcAft>
+            </a:pPr>
+            <a:r>
+              <a:rPr sz="4000" b="1" i="0">
+                <a:solidFill>
+                  <a:srgbClr val="FFFFFF"/>
+                </a:solidFill>
+                <a:latin typeface="Segoe UI"/>
+              </a:rPr>
+              <a:t>Teşekkürler — Sorular?</a:t>
+            </a:r>
+          </a:p>
+        </p:txBody>
+      </p:sp>
+      <p:sp>
+        <p:nvSpPr>
+          <p:cNvPr id="5" name="TextBox 4"/>
+          <p:cNvSpPr txBox="1"/>
+          <p:nvPr/>
+        </p:nvSpPr>
+        <p:spPr>
+          <a:xfrm>
+            <a:off x="822960" y="3657600"/>
+            <a:ext cx="10515600" cy="548640"/>
+          </a:xfrm>
+          <a:prstGeom prst="rect">
+            <a:avLst/>
+          </a:prstGeom>
+          <a:noFill/>
+        </p:spPr>
+        <p:txBody>
+          <a:bodyPr wrap="square" anchor="t">
+            <a:spAutoFit/>
+          </a:bodyPr>
+          <a:lstStyle/>
+          <a:p>
+            <a:pPr algn="ctr">
+              <a:spcAft>
+                <a:spcPts val="400"/>
+              </a:spcAft>
+            </a:pPr>
+            <a:r>
+              <a:rPr sz="1500" b="0" i="0">
+                <a:solidFill>
+                  <a:srgbClr val="9DC1E4"/>
+                </a:solidFill>
+                <a:latin typeface="Segoe UI"/>
+              </a:rPr>
+              <a:t>Ahmet Babagil  •  211101067</a:t>
+            </a:r>
+          </a:p>
+        </p:txBody>
+      </p:sp>
+    </p:spTree>
+  </p:cSld>
+  <p:clrMapOvr>
+    <a:masterClrMapping/>
+  </p:clrMapOvr>
+</p:sld>
+</file>
+
 <file path=ppt/slides/slide3.xml><?xml version="1.0" encoding="utf-8"?>
 <p:sld xmlns:a="http://schemas.openxmlformats.org/drawingml/2006/main" xmlns:p="http://schemas.openxmlformats.org/presentationml/2006/main" xmlns:r="http://schemas.openxmlformats.org/officeDocument/2006/relationships">
   <p:cSld>
@@ -13501,59 +15300,35 @@
                 </a:solidFill>
                 <a:latin typeface="Segoe UI"/>
               </a:rPr>
-              <a:t>Yöntem 2 — Aralık Öznitelik Serisi + BiGRU</a:t>
-            </a:r>
-          </a:p>
-        </p:txBody>
-      </p:sp>
-      <p:sp>
-        <p:nvSpPr>
-          <p:cNvPr id="5" name="Rounded Rectangle 4"/>
-          <p:cNvSpPr/>
-          <p:nvPr/>
-        </p:nvSpPr>
-        <p:spPr>
-          <a:xfrm>
-            <a:off x="548640" y="1600200"/>
-            <a:ext cx="1954987" cy="1371600"/>
-          </a:xfrm>
-          <a:prstGeom prst="roundRect">
-            <a:avLst>
-              <a:gd name="adj" fmla="val 8000"/>
-            </a:avLst>
-          </a:prstGeom>
-          <a:solidFill>
-            <a:srgbClr val="F4F8FC"/>
-          </a:solidFill>
-          <a:ln w="12700">
-            <a:solidFill>
-              <a:srgbClr val="C8D6E6"/>
-            </a:solidFill>
-          </a:ln>
-          <a:effectLst/>
-        </p:spPr>
-        <p:style>
-          <a:lnRef idx="1">
-            <a:schemeClr val="accent1"/>
-          </a:lnRef>
-          <a:fillRef idx="3">
-            <a:schemeClr val="accent1"/>
-          </a:fillRef>
-          <a:effectRef idx="2">
-            <a:schemeClr val="accent1"/>
-          </a:effectRef>
-          <a:fontRef idx="minor">
-            <a:schemeClr val="lt1"/>
-          </a:fontRef>
-        </p:style>
-        <p:txBody>
-          <a:bodyPr rtlCol="0" anchor="ctr"/>
-          <a:lstStyle/>
-          <a:p>
-            <a:pPr algn="ctr"/>
-          </a:p>
-        </p:txBody>
-      </p:sp>
+              <a:t>Sesin 'Resme' Dönüşümü — Canlı</a:t>
+            </a:r>
+          </a:p>
+        </p:txBody>
+      </p:sp>
+      <p:pic>
+        <p:nvPicPr>
+          <p:cNvPr id="5" name="Picture 4" descr="spectrogram_olusum.gif"/>
+          <p:cNvPicPr>
+            <a:picLocks noChangeAspect="1"/>
+          </p:cNvPicPr>
+          <p:nvPr/>
+        </p:nvPicPr>
+        <p:blipFill>
+          <a:blip r:embed="rId2"/>
+          <a:stretch>
+            <a:fillRect/>
+          </a:stretch>
+        </p:blipFill>
+        <p:spPr>
+          <a:xfrm>
+            <a:off x="1280160" y="1325880"/>
+            <a:ext cx="9601200" cy="4693920"/>
+          </a:xfrm>
+          <a:prstGeom prst="rect">
+            <a:avLst/>
+          </a:prstGeom>
+        </p:spPr>
+      </p:pic>
       <p:sp>
         <p:nvSpPr>
           <p:cNvPr id="6" name="TextBox 5"/>
@@ -13562,8 +15337,8 @@
         </p:nvSpPr>
         <p:spPr>
           <a:xfrm>
-            <a:off x="658368" y="1728216"/>
-            <a:ext cx="1735531" cy="1143000"/>
+            <a:off x="685800" y="5943600"/>
+            <a:ext cx="10881360" cy="457200"/>
           </a:xfrm>
           <a:prstGeom prst="rect">
             <a:avLst/>
@@ -13582,780 +15357,20 @@
               </a:spcAft>
             </a:pPr>
             <a:r>
-              <a:rPr sz="1350" b="1" i="0">
-                <a:solidFill>
-                  <a:srgbClr val="1F3B57"/>
-                </a:solidFill>
-                <a:latin typeface="Segoe UI"/>
-              </a:rPr>
-              <a:t>Ses (16 kHz)</a:t>
-            </a:r>
-          </a:p>
-          <a:p>
-            <a:pPr algn="l">
-              <a:spcAft>
-                <a:spcPts val="400"/>
-              </a:spcAft>
-            </a:pPr>
-            <a:r>
-              <a:rPr sz="1100" b="0" i="0">
+              <a:rPr sz="1250" b="0" i="1">
                 <a:solidFill>
                   <a:srgbClr val="6B7A90"/>
                 </a:solidFill>
                 <a:latin typeface="Segoe UI"/>
               </a:rPr>
-              <a:t>mono, tam kayıt</a:t>
-            </a:r>
-          </a:p>
-        </p:txBody>
-      </p:sp>
-      <p:sp>
-        <p:nvSpPr>
-          <p:cNvPr id="7" name="Right Arrow 6"/>
-          <p:cNvSpPr/>
-          <p:nvPr/>
-        </p:nvSpPr>
-        <p:spPr>
-          <a:xfrm>
-            <a:off x="2544775" y="2157984"/>
-            <a:ext cx="246888" cy="274320"/>
-          </a:xfrm>
-          <a:prstGeom prst="rightArrow">
-            <a:avLst/>
-          </a:prstGeom>
-          <a:solidFill>
-            <a:srgbClr val="2F74C0"/>
-          </a:solidFill>
-          <a:ln>
-            <a:noFill/>
-          </a:ln>
-          <a:effectLst/>
-        </p:spPr>
-        <p:style>
-          <a:lnRef idx="1">
-            <a:schemeClr val="accent1"/>
-          </a:lnRef>
-          <a:fillRef idx="3">
-            <a:schemeClr val="accent1"/>
-          </a:fillRef>
-          <a:effectRef idx="2">
-            <a:schemeClr val="accent1"/>
-          </a:effectRef>
-          <a:fontRef idx="minor">
-            <a:schemeClr val="lt1"/>
-          </a:fontRef>
-        </p:style>
-        <p:txBody>
-          <a:bodyPr rtlCol="0" anchor="ctr"/>
-          <a:lstStyle/>
-          <a:p>
-            <a:pPr algn="ctr"/>
-          </a:p>
-        </p:txBody>
-      </p:sp>
-      <p:sp>
-        <p:nvSpPr>
-          <p:cNvPr id="8" name="Rounded Rectangle 7"/>
-          <p:cNvSpPr/>
-          <p:nvPr/>
-        </p:nvSpPr>
-        <p:spPr>
-          <a:xfrm>
-            <a:off x="2832811" y="1600200"/>
-            <a:ext cx="1954987" cy="1371600"/>
-          </a:xfrm>
-          <a:prstGeom prst="roundRect">
-            <a:avLst>
-              <a:gd name="adj" fmla="val 8000"/>
-            </a:avLst>
-          </a:prstGeom>
-          <a:solidFill>
-            <a:srgbClr val="F4F8FC"/>
-          </a:solidFill>
-          <a:ln w="12700">
-            <a:solidFill>
-              <a:srgbClr val="C8D6E6"/>
-            </a:solidFill>
-          </a:ln>
-          <a:effectLst/>
-        </p:spPr>
-        <p:style>
-          <a:lnRef idx="1">
-            <a:schemeClr val="accent1"/>
-          </a:lnRef>
-          <a:fillRef idx="3">
-            <a:schemeClr val="accent1"/>
-          </a:fillRef>
-          <a:effectRef idx="2">
-            <a:schemeClr val="accent1"/>
-          </a:effectRef>
-          <a:fontRef idx="minor">
-            <a:schemeClr val="lt1"/>
-          </a:fontRef>
-        </p:style>
-        <p:txBody>
-          <a:bodyPr rtlCol="0" anchor="ctr"/>
-          <a:lstStyle/>
-          <a:p>
-            <a:pPr algn="ctr"/>
-          </a:p>
-        </p:txBody>
-      </p:sp>
-      <p:sp>
-        <p:nvSpPr>
-          <p:cNvPr id="9" name="TextBox 8"/>
-          <p:cNvSpPr txBox="1"/>
-          <p:nvPr/>
-        </p:nvSpPr>
-        <p:spPr>
-          <a:xfrm>
-            <a:off x="2942539" y="1728216"/>
-            <a:ext cx="1735531" cy="1143000"/>
-          </a:xfrm>
-          <a:prstGeom prst="rect">
-            <a:avLst/>
-          </a:prstGeom>
-          <a:noFill/>
-        </p:spPr>
-        <p:txBody>
-          <a:bodyPr wrap="square" anchor="t">
-            <a:spAutoFit/>
-          </a:bodyPr>
-          <a:lstStyle/>
-          <a:p>
-            <a:pPr algn="l">
-              <a:spcAft>
-                <a:spcPts val="400"/>
-              </a:spcAft>
-            </a:pPr>
-            <a:r>
-              <a:rPr sz="1350" b="1" i="0">
-                <a:solidFill>
-                  <a:srgbClr val="1F3B57"/>
-                </a:solidFill>
-                <a:latin typeface="Segoe UI"/>
-              </a:rPr>
-              <a:t>32 aralık × 200 ms</a:t>
-            </a:r>
-          </a:p>
-          <a:p>
-            <a:pPr algn="l">
-              <a:spcAft>
-                <a:spcPts val="400"/>
-              </a:spcAft>
-            </a:pPr>
-            <a:r>
-              <a:rPr sz="1100" b="0" i="0">
-                <a:solidFill>
-                  <a:srgbClr val="6B7A90"/>
-                </a:solidFill>
-                <a:latin typeface="Segoe UI"/>
-              </a:rPr>
-              <a:t>sayı + genişlik HİPERPARAMETRE</a:t>
-            </a:r>
-          </a:p>
-        </p:txBody>
-      </p:sp>
-      <p:sp>
-        <p:nvSpPr>
-          <p:cNvPr id="10" name="Right Arrow 9"/>
-          <p:cNvSpPr/>
-          <p:nvPr/>
-        </p:nvSpPr>
-        <p:spPr>
-          <a:xfrm>
-            <a:off x="4828946" y="2157984"/>
-            <a:ext cx="246888" cy="274320"/>
-          </a:xfrm>
-          <a:prstGeom prst="rightArrow">
-            <a:avLst/>
-          </a:prstGeom>
-          <a:solidFill>
-            <a:srgbClr val="2F74C0"/>
-          </a:solidFill>
-          <a:ln>
-            <a:noFill/>
-          </a:ln>
-          <a:effectLst/>
-        </p:spPr>
-        <p:style>
-          <a:lnRef idx="1">
-            <a:schemeClr val="accent1"/>
-          </a:lnRef>
-          <a:fillRef idx="3">
-            <a:schemeClr val="accent1"/>
-          </a:fillRef>
-          <a:effectRef idx="2">
-            <a:schemeClr val="accent1"/>
-          </a:effectRef>
-          <a:fontRef idx="minor">
-            <a:schemeClr val="lt1"/>
-          </a:fontRef>
-        </p:style>
-        <p:txBody>
-          <a:bodyPr rtlCol="0" anchor="ctr"/>
-          <a:lstStyle/>
-          <a:p>
-            <a:pPr algn="ctr"/>
-          </a:p>
-        </p:txBody>
-      </p:sp>
-      <p:sp>
-        <p:nvSpPr>
-          <p:cNvPr id="11" name="Rounded Rectangle 10"/>
-          <p:cNvSpPr/>
-          <p:nvPr/>
-        </p:nvSpPr>
-        <p:spPr>
-          <a:xfrm>
-            <a:off x="5116982" y="1600200"/>
-            <a:ext cx="1954987" cy="1371600"/>
-          </a:xfrm>
-          <a:prstGeom prst="roundRect">
-            <a:avLst>
-              <a:gd name="adj" fmla="val 8000"/>
-            </a:avLst>
-          </a:prstGeom>
-          <a:solidFill>
-            <a:srgbClr val="F4F8FC"/>
-          </a:solidFill>
-          <a:ln w="12700">
-            <a:solidFill>
-              <a:srgbClr val="C8D6E6"/>
-            </a:solidFill>
-          </a:ln>
-          <a:effectLst/>
-        </p:spPr>
-        <p:style>
-          <a:lnRef idx="1">
-            <a:schemeClr val="accent1"/>
-          </a:lnRef>
-          <a:fillRef idx="3">
-            <a:schemeClr val="accent1"/>
-          </a:fillRef>
-          <a:effectRef idx="2">
-            <a:schemeClr val="accent1"/>
-          </a:effectRef>
-          <a:fontRef idx="minor">
-            <a:schemeClr val="lt1"/>
-          </a:fontRef>
-        </p:style>
-        <p:txBody>
-          <a:bodyPr rtlCol="0" anchor="ctr"/>
-          <a:lstStyle/>
-          <a:p>
-            <a:pPr algn="ctr"/>
-          </a:p>
-        </p:txBody>
-      </p:sp>
-      <p:sp>
-        <p:nvSpPr>
-          <p:cNvPr id="12" name="TextBox 11"/>
-          <p:cNvSpPr txBox="1"/>
-          <p:nvPr/>
-        </p:nvSpPr>
-        <p:spPr>
-          <a:xfrm>
-            <a:off x="5226710" y="1728216"/>
-            <a:ext cx="1735531" cy="1143000"/>
-          </a:xfrm>
-          <a:prstGeom prst="rect">
-            <a:avLst/>
-          </a:prstGeom>
-          <a:noFill/>
-        </p:spPr>
-        <p:txBody>
-          <a:bodyPr wrap="square" anchor="t">
-            <a:spAutoFit/>
-          </a:bodyPr>
-          <a:lstStyle/>
-          <a:p>
-            <a:pPr algn="l">
-              <a:spcAft>
-                <a:spcPts val="400"/>
-              </a:spcAft>
-            </a:pPr>
-            <a:r>
-              <a:rPr sz="1350" b="1" i="0">
-                <a:solidFill>
-                  <a:srgbClr val="1F3B57"/>
-                </a:solidFill>
-                <a:latin typeface="Segoe UI"/>
-              </a:rPr>
-              <a:t>44 öznitelik / aralık</a:t>
-            </a:r>
-          </a:p>
-          <a:p>
-            <a:pPr algn="l">
-              <a:spcAft>
-                <a:spcPts val="400"/>
-              </a:spcAft>
-            </a:pPr>
-            <a:r>
-              <a:rPr sz="1100" b="0" i="0">
-                <a:solidFill>
-                  <a:srgbClr val="6B7A90"/>
-                </a:solidFill>
-                <a:latin typeface="Segoe UI"/>
-              </a:rPr>
-              <a:t>MFCC μ/σ + ΔMFCC + RMS + ZCR + centroid/rolloff</a:t>
-            </a:r>
-          </a:p>
-        </p:txBody>
-      </p:sp>
-      <p:sp>
-        <p:nvSpPr>
-          <p:cNvPr id="13" name="Right Arrow 12"/>
-          <p:cNvSpPr/>
-          <p:nvPr/>
-        </p:nvSpPr>
-        <p:spPr>
-          <a:xfrm>
-            <a:off x="7113117" y="2157984"/>
-            <a:ext cx="246888" cy="274320"/>
-          </a:xfrm>
-          <a:prstGeom prst="rightArrow">
-            <a:avLst/>
-          </a:prstGeom>
-          <a:solidFill>
-            <a:srgbClr val="2F74C0"/>
-          </a:solidFill>
-          <a:ln>
-            <a:noFill/>
-          </a:ln>
-          <a:effectLst/>
-        </p:spPr>
-        <p:style>
-          <a:lnRef idx="1">
-            <a:schemeClr val="accent1"/>
-          </a:lnRef>
-          <a:fillRef idx="3">
-            <a:schemeClr val="accent1"/>
-          </a:fillRef>
-          <a:effectRef idx="2">
-            <a:schemeClr val="accent1"/>
-          </a:effectRef>
-          <a:fontRef idx="minor">
-            <a:schemeClr val="lt1"/>
-          </a:fontRef>
-        </p:style>
-        <p:txBody>
-          <a:bodyPr rtlCol="0" anchor="ctr"/>
-          <a:lstStyle/>
-          <a:p>
-            <a:pPr algn="ctr"/>
-          </a:p>
-        </p:txBody>
-      </p:sp>
-      <p:sp>
-        <p:nvSpPr>
-          <p:cNvPr id="14" name="Rounded Rectangle 13"/>
-          <p:cNvSpPr/>
-          <p:nvPr/>
-        </p:nvSpPr>
-        <p:spPr>
-          <a:xfrm>
-            <a:off x="7401153" y="1600200"/>
-            <a:ext cx="1954987" cy="1371600"/>
-          </a:xfrm>
-          <a:prstGeom prst="roundRect">
-            <a:avLst>
-              <a:gd name="adj" fmla="val 8000"/>
-            </a:avLst>
-          </a:prstGeom>
-          <a:solidFill>
-            <a:srgbClr val="F4F8FC"/>
-          </a:solidFill>
-          <a:ln w="12700">
-            <a:solidFill>
-              <a:srgbClr val="C8D6E6"/>
-            </a:solidFill>
-          </a:ln>
-          <a:effectLst/>
-        </p:spPr>
-        <p:style>
-          <a:lnRef idx="1">
-            <a:schemeClr val="accent1"/>
-          </a:lnRef>
-          <a:fillRef idx="3">
-            <a:schemeClr val="accent1"/>
-          </a:fillRef>
-          <a:effectRef idx="2">
-            <a:schemeClr val="accent1"/>
-          </a:effectRef>
-          <a:fontRef idx="minor">
-            <a:schemeClr val="lt1"/>
-          </a:fontRef>
-        </p:style>
-        <p:txBody>
-          <a:bodyPr rtlCol="0" anchor="ctr"/>
-          <a:lstStyle/>
-          <a:p>
-            <a:pPr algn="ctr"/>
-          </a:p>
-        </p:txBody>
-      </p:sp>
-      <p:sp>
-        <p:nvSpPr>
-          <p:cNvPr id="15" name="TextBox 14"/>
-          <p:cNvSpPr txBox="1"/>
-          <p:nvPr/>
-        </p:nvSpPr>
-        <p:spPr>
-          <a:xfrm>
-            <a:off x="7510881" y="1728216"/>
-            <a:ext cx="1735531" cy="1143000"/>
-          </a:xfrm>
-          <a:prstGeom prst="rect">
-            <a:avLst/>
-          </a:prstGeom>
-          <a:noFill/>
-        </p:spPr>
-        <p:txBody>
-          <a:bodyPr wrap="square" anchor="t">
-            <a:spAutoFit/>
-          </a:bodyPr>
-          <a:lstStyle/>
-          <a:p>
-            <a:pPr algn="l">
-              <a:spcAft>
-                <a:spcPts val="400"/>
-              </a:spcAft>
-            </a:pPr>
-            <a:r>
-              <a:rPr sz="1350" b="1" i="0">
-                <a:solidFill>
-                  <a:srgbClr val="1F3B57"/>
-                </a:solidFill>
-                <a:latin typeface="Segoe UI"/>
-              </a:rPr>
-              <a:t>GRU 192×2</a:t>
-            </a:r>
-          </a:p>
-          <a:p>
-            <a:pPr algn="l">
-              <a:spcAft>
-                <a:spcPts val="400"/>
-              </a:spcAft>
-            </a:pPr>
-            <a:r>
-              <a:rPr sz="1100" b="0" i="0">
-                <a:solidFill>
-                  <a:srgbClr val="6B7A90"/>
-                </a:solidFill>
-                <a:latin typeface="Segoe UI"/>
-              </a:rPr>
-              <a:t>çift yönlü</a:t>
-            </a:r>
-          </a:p>
-        </p:txBody>
-      </p:sp>
-      <p:sp>
-        <p:nvSpPr>
-          <p:cNvPr id="16" name="Right Arrow 15"/>
-          <p:cNvSpPr/>
-          <p:nvPr/>
-        </p:nvSpPr>
-        <p:spPr>
-          <a:xfrm>
-            <a:off x="9397288" y="2157984"/>
-            <a:ext cx="246888" cy="274320"/>
-          </a:xfrm>
-          <a:prstGeom prst="rightArrow">
-            <a:avLst/>
-          </a:prstGeom>
-          <a:solidFill>
-            <a:srgbClr val="2F74C0"/>
-          </a:solidFill>
-          <a:ln>
-            <a:noFill/>
-          </a:ln>
-          <a:effectLst/>
-        </p:spPr>
-        <p:style>
-          <a:lnRef idx="1">
-            <a:schemeClr val="accent1"/>
-          </a:lnRef>
-          <a:fillRef idx="3">
-            <a:schemeClr val="accent1"/>
-          </a:fillRef>
-          <a:effectRef idx="2">
-            <a:schemeClr val="accent1"/>
-          </a:effectRef>
-          <a:fontRef idx="minor">
-            <a:schemeClr val="lt1"/>
-          </a:fontRef>
-        </p:style>
-        <p:txBody>
-          <a:bodyPr rtlCol="0" anchor="ctr"/>
-          <a:lstStyle/>
-          <a:p>
-            <a:pPr algn="ctr"/>
-          </a:p>
-        </p:txBody>
-      </p:sp>
-      <p:sp>
-        <p:nvSpPr>
-          <p:cNvPr id="17" name="Rounded Rectangle 16"/>
-          <p:cNvSpPr/>
-          <p:nvPr/>
-        </p:nvSpPr>
-        <p:spPr>
-          <a:xfrm>
-            <a:off x="9685324" y="1600200"/>
-            <a:ext cx="1954987" cy="1371600"/>
-          </a:xfrm>
-          <a:prstGeom prst="roundRect">
-            <a:avLst>
-              <a:gd name="adj" fmla="val 8000"/>
-            </a:avLst>
-          </a:prstGeom>
-          <a:solidFill>
-            <a:srgbClr val="F4F8FC"/>
-          </a:solidFill>
-          <a:ln w="12700">
-            <a:solidFill>
-              <a:srgbClr val="C8D6E6"/>
-            </a:solidFill>
-          </a:ln>
-          <a:effectLst/>
-        </p:spPr>
-        <p:style>
-          <a:lnRef idx="1">
-            <a:schemeClr val="accent1"/>
-          </a:lnRef>
-          <a:fillRef idx="3">
-            <a:schemeClr val="accent1"/>
-          </a:fillRef>
-          <a:effectRef idx="2">
-            <a:schemeClr val="accent1"/>
-          </a:effectRef>
-          <a:fontRef idx="minor">
-            <a:schemeClr val="lt1"/>
-          </a:fontRef>
-        </p:style>
-        <p:txBody>
-          <a:bodyPr rtlCol="0" anchor="ctr"/>
-          <a:lstStyle/>
-          <a:p>
-            <a:pPr algn="ctr"/>
-          </a:p>
-        </p:txBody>
-      </p:sp>
-      <p:sp>
-        <p:nvSpPr>
-          <p:cNvPr id="18" name="TextBox 17"/>
-          <p:cNvSpPr txBox="1"/>
-          <p:nvPr/>
-        </p:nvSpPr>
-        <p:spPr>
-          <a:xfrm>
-            <a:off x="9795052" y="1728216"/>
-            <a:ext cx="1735531" cy="1143000"/>
-          </a:xfrm>
-          <a:prstGeom prst="rect">
-            <a:avLst/>
-          </a:prstGeom>
-          <a:noFill/>
-        </p:spPr>
-        <p:txBody>
-          <a:bodyPr wrap="square" anchor="t">
-            <a:spAutoFit/>
-          </a:bodyPr>
-          <a:lstStyle/>
-          <a:p>
-            <a:pPr algn="l">
-              <a:spcAft>
-                <a:spcPts val="400"/>
-              </a:spcAft>
-            </a:pPr>
-            <a:r>
-              <a:rPr sz="1350" b="1" i="0">
-                <a:solidFill>
-                  <a:srgbClr val="1F3B57"/>
-                </a:solidFill>
-                <a:latin typeface="Segoe UI"/>
-              </a:rPr>
-              <a:t>mean pooling → Softmax</a:t>
-            </a:r>
-          </a:p>
-          <a:p>
-            <a:pPr algn="l">
-              <a:spcAft>
-                <a:spcPts val="400"/>
-              </a:spcAft>
-            </a:pPr>
-            <a:r>
-              <a:rPr sz="1100" b="0" i="0">
-                <a:solidFill>
-                  <a:srgbClr val="6B7A90"/>
-                </a:solidFill>
-                <a:latin typeface="Segoe UI"/>
-              </a:rPr>
-              <a:t>zaman özeti + ağırlıklı CE</a:t>
-            </a:r>
-          </a:p>
-        </p:txBody>
-      </p:sp>
-      <p:sp>
-        <p:nvSpPr>
-          <p:cNvPr id="19" name="TextBox 18"/>
-          <p:cNvSpPr txBox="1"/>
-          <p:nvPr/>
-        </p:nvSpPr>
-        <p:spPr>
-          <a:xfrm>
-            <a:off x="685800" y="3429000"/>
-            <a:ext cx="10881360" cy="1371600"/>
-          </a:xfrm>
-          <a:prstGeom prst="rect">
-            <a:avLst/>
-          </a:prstGeom>
-          <a:noFill/>
-        </p:spPr>
-        <p:txBody>
-          <a:bodyPr wrap="square">
-            <a:spAutoFit/>
-          </a:bodyPr>
-          <a:lstStyle/>
-          <a:p>
-            <a:pPr>
-              <a:spcAft>
-                <a:spcPts val="700"/>
-              </a:spcAft>
-            </a:pPr>
-            <a:r>
-              <a:rPr sz="1500">
-                <a:solidFill>
-                  <a:srgbClr val="242B35"/>
-                </a:solidFill>
-                <a:latin typeface="Segoe UI"/>
-              </a:rPr>
-              <a:t>▪  Aralıklar eşit yayılır: kısa kayıtta örtüşür, uzun kayıtta boşluk bırakır → her kayıttan sabit uzunlukta seri.</a:t>
-            </a:r>
-          </a:p>
-          <a:p>
-            <a:pPr>
-              <a:spcAft>
-                <a:spcPts val="700"/>
-              </a:spcAft>
-            </a:pPr>
-            <a:r>
-              <a:rPr sz="1500">
-                <a:solidFill>
-                  <a:srgbClr val="242B35"/>
-                </a:solidFill>
-                <a:latin typeface="Segoe UI"/>
-              </a:rPr>
-              <a:t>▪  Dayanak: çerçeve-düzeyi akustik öznitelik + BLSTM şablonu [6, 7]; öznitelik seçimi eGeMAPS pratiği [9].</a:t>
-            </a:r>
-          </a:p>
-        </p:txBody>
-      </p:sp>
-      <p:sp>
-        <p:nvSpPr>
-          <p:cNvPr id="20" name="Rounded Rectangle 19"/>
-          <p:cNvSpPr/>
-          <p:nvPr/>
-        </p:nvSpPr>
-        <p:spPr>
-          <a:xfrm>
-            <a:off x="685800" y="4754880"/>
-            <a:ext cx="10881360" cy="1051560"/>
-          </a:xfrm>
-          <a:prstGeom prst="roundRect">
-            <a:avLst>
-              <a:gd name="adj" fmla="val 8000"/>
-            </a:avLst>
-          </a:prstGeom>
-          <a:solidFill>
-            <a:srgbClr val="E9F6EF"/>
-          </a:solidFill>
-          <a:ln>
-            <a:noFill/>
-          </a:ln>
-          <a:effectLst/>
-        </p:spPr>
-        <p:style>
-          <a:lnRef idx="1">
-            <a:schemeClr val="accent1"/>
-          </a:lnRef>
-          <a:fillRef idx="3">
-            <a:schemeClr val="accent1"/>
-          </a:fillRef>
-          <a:effectRef idx="2">
-            <a:schemeClr val="accent1"/>
-          </a:effectRef>
-          <a:fontRef idx="minor">
-            <a:schemeClr val="lt1"/>
-          </a:fontRef>
-        </p:style>
-        <p:txBody>
-          <a:bodyPr rtlCol="0" anchor="ctr"/>
-          <a:lstStyle/>
-          <a:p>
-            <a:pPr algn="ctr"/>
-          </a:p>
-        </p:txBody>
-      </p:sp>
-      <p:sp>
-        <p:nvSpPr>
-          <p:cNvPr id="21" name="TextBox 20"/>
-          <p:cNvSpPr txBox="1"/>
-          <p:nvPr/>
-        </p:nvSpPr>
-        <p:spPr>
-          <a:xfrm>
-            <a:off x="914400" y="4873752"/>
-            <a:ext cx="10515600" cy="822960"/>
-          </a:xfrm>
-          <a:prstGeom prst="rect">
-            <a:avLst/>
-          </a:prstGeom>
-          <a:noFill/>
-        </p:spPr>
-        <p:txBody>
-          <a:bodyPr wrap="square" anchor="t">
-            <a:spAutoFit/>
-          </a:bodyPr>
-          <a:lstStyle/>
-          <a:p>
-            <a:pPr algn="l">
-              <a:spcAft>
-                <a:spcPts val="400"/>
-              </a:spcAft>
-            </a:pPr>
-            <a:r>
-              <a:rPr sz="1400" b="1" i="0">
-                <a:solidFill>
-                  <a:srgbClr val="1F7A4D"/>
-                </a:solidFill>
-                <a:latin typeface="Segoe UI"/>
-              </a:rPr>
-              <a:t>Kilit bulgu: iyileştirme turu aralık düzenini 24×300 ms tabanından 32×200 ms'ye taşıdı —</a:t>
-            </a:r>
-          </a:p>
-          <a:p>
-            <a:pPr algn="l">
-              <a:spcAft>
-                <a:spcPts val="400"/>
-              </a:spcAft>
-            </a:pPr>
-            <a:r>
-              <a:rPr sz="1300" b="0" i="0">
-                <a:solidFill>
-                  <a:srgbClr val="242B35"/>
-                </a:solidFill>
-                <a:latin typeface="Segoe UI"/>
-              </a:rPr>
-              <a:t>ödevin şart koştuğu bu iki hiperparametre, yöntemi birinciliğe taşıyan farkı yarattı.</a:t>
-            </a:r>
-          </a:p>
-        </p:txBody>
-      </p:sp>
-      <p:sp>
-        <p:nvSpPr>
-          <p:cNvPr id="22" name="Rectangle 21"/>
+              <a:t>Pencere ses üzerinde kayar, her durakta 'hangi frekanslar var?' ölçülür → harita sütun sütun dolar. (GIF sunum modunda otomatik oynar)</a:t>
+            </a:r>
+          </a:p>
+        </p:txBody>
+      </p:sp>
+      <p:sp>
+        <p:nvSpPr>
+          <p:cNvPr id="7" name="Rectangle 6"/>
           <p:cNvSpPr/>
           <p:nvPr/>
         </p:nvSpPr>
@@ -14399,7 +15414,7 @@
       </p:sp>
       <p:sp>
         <p:nvSpPr>
-          <p:cNvPr id="23" name="TextBox 22"/>
+          <p:cNvPr id="8" name="TextBox 7"/>
           <p:cNvSpPr txBox="1"/>
           <p:nvPr/>
         </p:nvSpPr>
@@ -14438,7 +15453,7 @@
       </p:sp>
       <p:sp>
         <p:nvSpPr>
-          <p:cNvPr id="24" name="TextBox 23"/>
+          <p:cNvPr id="9" name="TextBox 8"/>
           <p:cNvSpPr txBox="1"/>
           <p:nvPr/>
         </p:nvSpPr>
@@ -14615,7 +15630,7 @@
                 </a:solidFill>
                 <a:latin typeface="Segoe UI"/>
               </a:rPr>
-              <a:t>03 • DENEY SÜRECİ</a:t>
+              <a:t>02 • İKİ YÖNTEM</a:t>
             </a:r>
           </a:p>
           <a:p>
@@ -14631,7 +15646,7 @@
                 </a:solidFill>
                 <a:latin typeface="Segoe UI"/>
               </a:rPr>
-              <a:t>Eğitim Protokolü — Her İki Yöntem</a:t>
+              <a:t>Yöntem 2 — Aralık Öznitelik Serisi + BiGRU</a:t>
             </a:r>
           </a:p>
         </p:txBody>
@@ -14644,8 +15659,8 @@
         </p:nvSpPr>
         <p:spPr>
           <a:xfrm>
-            <a:off x="685800" y="1463040"/>
-            <a:ext cx="5257800" cy="4206240"/>
+            <a:off x="548640" y="1600200"/>
+            <a:ext cx="1954987" cy="1371600"/>
           </a:xfrm>
           <a:prstGeom prst="roundRect">
             <a:avLst>
@@ -14654,6 +15669,107 @@
           </a:prstGeom>
           <a:solidFill>
             <a:srgbClr val="F4F8FC"/>
+          </a:solidFill>
+          <a:ln w="12700">
+            <a:solidFill>
+              <a:srgbClr val="C8D6E6"/>
+            </a:solidFill>
+          </a:ln>
+          <a:effectLst/>
+        </p:spPr>
+        <p:style>
+          <a:lnRef idx="1">
+            <a:schemeClr val="accent1"/>
+          </a:lnRef>
+          <a:fillRef idx="3">
+            <a:schemeClr val="accent1"/>
+          </a:fillRef>
+          <a:effectRef idx="2">
+            <a:schemeClr val="accent1"/>
+          </a:effectRef>
+          <a:fontRef idx="minor">
+            <a:schemeClr val="lt1"/>
+          </a:fontRef>
+        </p:style>
+        <p:txBody>
+          <a:bodyPr rtlCol="0" anchor="ctr"/>
+          <a:lstStyle/>
+          <a:p>
+            <a:pPr algn="ctr"/>
+          </a:p>
+        </p:txBody>
+      </p:sp>
+      <p:sp>
+        <p:nvSpPr>
+          <p:cNvPr id="6" name="TextBox 5"/>
+          <p:cNvSpPr txBox="1"/>
+          <p:nvPr/>
+        </p:nvSpPr>
+        <p:spPr>
+          <a:xfrm>
+            <a:off x="658368" y="1728216"/>
+            <a:ext cx="1735531" cy="1143000"/>
+          </a:xfrm>
+          <a:prstGeom prst="rect">
+            <a:avLst/>
+          </a:prstGeom>
+          <a:noFill/>
+        </p:spPr>
+        <p:txBody>
+          <a:bodyPr wrap="square" anchor="t">
+            <a:spAutoFit/>
+          </a:bodyPr>
+          <a:lstStyle/>
+          <a:p>
+            <a:pPr algn="l">
+              <a:spcAft>
+                <a:spcPts val="400"/>
+              </a:spcAft>
+            </a:pPr>
+            <a:r>
+              <a:rPr sz="1350" b="1" i="0">
+                <a:solidFill>
+                  <a:srgbClr val="1F3B57"/>
+                </a:solidFill>
+                <a:latin typeface="Segoe UI"/>
+              </a:rPr>
+              <a:t>Ses (16 kHz)</a:t>
+            </a:r>
+          </a:p>
+          <a:p>
+            <a:pPr algn="l">
+              <a:spcAft>
+                <a:spcPts val="400"/>
+              </a:spcAft>
+            </a:pPr>
+            <a:r>
+              <a:rPr sz="1100" b="0" i="0">
+                <a:solidFill>
+                  <a:srgbClr val="6B7A90"/>
+                </a:solidFill>
+                <a:latin typeface="Segoe UI"/>
+              </a:rPr>
+              <a:t>mono, tam kayıt</a:t>
+            </a:r>
+          </a:p>
+        </p:txBody>
+      </p:sp>
+      <p:sp>
+        <p:nvSpPr>
+          <p:cNvPr id="7" name="Right Arrow 6"/>
+          <p:cNvSpPr/>
+          <p:nvPr/>
+        </p:nvSpPr>
+        <p:spPr>
+          <a:xfrm>
+            <a:off x="2544775" y="2157984"/>
+            <a:ext cx="246888" cy="274320"/>
+          </a:xfrm>
+          <a:prstGeom prst="rightArrow">
+            <a:avLst/>
+          </a:prstGeom>
+          <a:solidFill>
+            <a:srgbClr val="2F74C0"/>
           </a:solidFill>
           <a:ln>
             <a:noFill/>
@@ -14684,140 +15800,14 @@
       </p:sp>
       <p:sp>
         <p:nvSpPr>
-          <p:cNvPr id="6" name="TextBox 5"/>
-          <p:cNvSpPr txBox="1"/>
-          <p:nvPr/>
-        </p:nvSpPr>
-        <p:spPr>
-          <a:xfrm>
-            <a:off x="960120" y="1691640"/>
-            <a:ext cx="4754880" cy="457200"/>
-          </a:xfrm>
-          <a:prstGeom prst="rect">
-            <a:avLst/>
-          </a:prstGeom>
-          <a:noFill/>
-        </p:spPr>
-        <p:txBody>
-          <a:bodyPr wrap="square" anchor="t">
-            <a:spAutoFit/>
-          </a:bodyPr>
-          <a:lstStyle/>
-          <a:p>
-            <a:pPr algn="l">
-              <a:spcAft>
-                <a:spcPts val="400"/>
-              </a:spcAft>
-            </a:pPr>
-            <a:r>
-              <a:rPr sz="1700" b="1" i="0">
-                <a:solidFill>
-                  <a:srgbClr val="1F3B57"/>
-                </a:solidFill>
-                <a:latin typeface="Segoe UI"/>
-              </a:rPr>
-              <a:t>Optimizasyon</a:t>
-            </a:r>
-          </a:p>
-        </p:txBody>
-      </p:sp>
-      <p:sp>
-        <p:nvSpPr>
-          <p:cNvPr id="7" name="TextBox 6"/>
-          <p:cNvSpPr txBox="1"/>
-          <p:nvPr/>
-        </p:nvSpPr>
-        <p:spPr>
-          <a:xfrm>
-            <a:off x="960120" y="2240280"/>
-            <a:ext cx="4754880" cy="3291840"/>
-          </a:xfrm>
-          <a:prstGeom prst="rect">
-            <a:avLst/>
-          </a:prstGeom>
-          <a:noFill/>
-        </p:spPr>
-        <p:txBody>
-          <a:bodyPr wrap="square">
-            <a:spAutoFit/>
-          </a:bodyPr>
-          <a:lstStyle/>
-          <a:p>
-            <a:pPr>
-              <a:spcAft>
-                <a:spcPts val="900"/>
-              </a:spcAft>
-            </a:pPr>
-            <a:r>
-              <a:rPr sz="1350">
-                <a:solidFill>
-                  <a:srgbClr val="242B35"/>
-                </a:solidFill>
-                <a:latin typeface="Segoe UI"/>
-              </a:rPr>
-              <a:t>▪  AdamW + weight decay, gradyan kırpma (norm 5)</a:t>
-            </a:r>
-          </a:p>
-          <a:p>
-            <a:pPr>
-              <a:spcAft>
-                <a:spcPts val="900"/>
-              </a:spcAft>
-            </a:pPr>
-            <a:r>
-              <a:rPr sz="1350">
-                <a:solidFill>
-                  <a:srgbClr val="242B35"/>
-                </a:solidFill>
-                <a:latin typeface="Segoe UI"/>
-              </a:rPr>
-              <a:t>▪  Karışık hassasiyet (AMP) — GPU'da hızlı denemeler</a:t>
-            </a:r>
-          </a:p>
-          <a:p>
-            <a:pPr>
-              <a:spcAft>
-                <a:spcPts val="900"/>
-              </a:spcAft>
-            </a:pPr>
-            <a:r>
-              <a:rPr sz="1350">
-                <a:solidFill>
-                  <a:srgbClr val="242B35"/>
-                </a:solidFill>
-                <a:latin typeface="Segoe UI"/>
-              </a:rPr>
-              <a:t>▪  Sınıf sayısıyla ters orantılı ağırlıklı cross-entropy</a:t>
-            </a:r>
-          </a:p>
-          <a:p>
-            <a:pPr>
-              <a:spcAft>
-                <a:spcPts val="900"/>
-              </a:spcAft>
-            </a:pPr>
-            <a:r>
-              <a:rPr sz="1350">
-                <a:solidFill>
-                  <a:srgbClr val="242B35"/>
-                </a:solidFill>
-                <a:latin typeface="Segoe UI"/>
-              </a:rPr>
-              <a:t>▪  Erken durdurma: geçerleme macro-F1, sabır 8; en iyi epoch geri yüklenir</a:t>
-            </a:r>
-          </a:p>
-        </p:txBody>
-      </p:sp>
-      <p:sp>
-        <p:nvSpPr>
           <p:cNvPr id="8" name="Rounded Rectangle 7"/>
           <p:cNvSpPr/>
           <p:nvPr/>
         </p:nvSpPr>
         <p:spPr>
           <a:xfrm>
-            <a:off x="6309360" y="1463040"/>
-            <a:ext cx="5257800" cy="4206240"/>
+            <a:off x="2832811" y="1600200"/>
+            <a:ext cx="1954987" cy="1371600"/>
           </a:xfrm>
           <a:prstGeom prst="roundRect">
             <a:avLst>
@@ -14826,6 +15816,107 @@
           </a:prstGeom>
           <a:solidFill>
             <a:srgbClr val="F4F8FC"/>
+          </a:solidFill>
+          <a:ln w="12700">
+            <a:solidFill>
+              <a:srgbClr val="C8D6E6"/>
+            </a:solidFill>
+          </a:ln>
+          <a:effectLst/>
+        </p:spPr>
+        <p:style>
+          <a:lnRef idx="1">
+            <a:schemeClr val="accent1"/>
+          </a:lnRef>
+          <a:fillRef idx="3">
+            <a:schemeClr val="accent1"/>
+          </a:fillRef>
+          <a:effectRef idx="2">
+            <a:schemeClr val="accent1"/>
+          </a:effectRef>
+          <a:fontRef idx="minor">
+            <a:schemeClr val="lt1"/>
+          </a:fontRef>
+        </p:style>
+        <p:txBody>
+          <a:bodyPr rtlCol="0" anchor="ctr"/>
+          <a:lstStyle/>
+          <a:p>
+            <a:pPr algn="ctr"/>
+          </a:p>
+        </p:txBody>
+      </p:sp>
+      <p:sp>
+        <p:nvSpPr>
+          <p:cNvPr id="9" name="TextBox 8"/>
+          <p:cNvSpPr txBox="1"/>
+          <p:nvPr/>
+        </p:nvSpPr>
+        <p:spPr>
+          <a:xfrm>
+            <a:off x="2942539" y="1728216"/>
+            <a:ext cx="1735531" cy="1143000"/>
+          </a:xfrm>
+          <a:prstGeom prst="rect">
+            <a:avLst/>
+          </a:prstGeom>
+          <a:noFill/>
+        </p:spPr>
+        <p:txBody>
+          <a:bodyPr wrap="square" anchor="t">
+            <a:spAutoFit/>
+          </a:bodyPr>
+          <a:lstStyle/>
+          <a:p>
+            <a:pPr algn="l">
+              <a:spcAft>
+                <a:spcPts val="400"/>
+              </a:spcAft>
+            </a:pPr>
+            <a:r>
+              <a:rPr sz="1350" b="1" i="0">
+                <a:solidFill>
+                  <a:srgbClr val="1F3B57"/>
+                </a:solidFill>
+                <a:latin typeface="Segoe UI"/>
+              </a:rPr>
+              <a:t>32 aralık × 200 ms</a:t>
+            </a:r>
+          </a:p>
+          <a:p>
+            <a:pPr algn="l">
+              <a:spcAft>
+                <a:spcPts val="400"/>
+              </a:spcAft>
+            </a:pPr>
+            <a:r>
+              <a:rPr sz="1100" b="0" i="0">
+                <a:solidFill>
+                  <a:srgbClr val="6B7A90"/>
+                </a:solidFill>
+                <a:latin typeface="Segoe UI"/>
+              </a:rPr>
+              <a:t>sayı + genişlik HİPERPARAMETRE</a:t>
+            </a:r>
+          </a:p>
+        </p:txBody>
+      </p:sp>
+      <p:sp>
+        <p:nvSpPr>
+          <p:cNvPr id="10" name="Right Arrow 9"/>
+          <p:cNvSpPr/>
+          <p:nvPr/>
+        </p:nvSpPr>
+        <p:spPr>
+          <a:xfrm>
+            <a:off x="4828946" y="2157984"/>
+            <a:ext cx="246888" cy="274320"/>
+          </a:xfrm>
+          <a:prstGeom prst="rightArrow">
+            <a:avLst/>
+          </a:prstGeom>
+          <a:solidFill>
+            <a:srgbClr val="2F74C0"/>
           </a:solidFill>
           <a:ln>
             <a:noFill/>
@@ -14856,14 +15947,62 @@
       </p:sp>
       <p:sp>
         <p:nvSpPr>
-          <p:cNvPr id="9" name="TextBox 8"/>
+          <p:cNvPr id="11" name="Rounded Rectangle 10"/>
+          <p:cNvSpPr/>
+          <p:nvPr/>
+        </p:nvSpPr>
+        <p:spPr>
+          <a:xfrm>
+            <a:off x="5116982" y="1600200"/>
+            <a:ext cx="1954987" cy="1371600"/>
+          </a:xfrm>
+          <a:prstGeom prst="roundRect">
+            <a:avLst>
+              <a:gd name="adj" fmla="val 8000"/>
+            </a:avLst>
+          </a:prstGeom>
+          <a:solidFill>
+            <a:srgbClr val="F4F8FC"/>
+          </a:solidFill>
+          <a:ln w="12700">
+            <a:solidFill>
+              <a:srgbClr val="C8D6E6"/>
+            </a:solidFill>
+          </a:ln>
+          <a:effectLst/>
+        </p:spPr>
+        <p:style>
+          <a:lnRef idx="1">
+            <a:schemeClr val="accent1"/>
+          </a:lnRef>
+          <a:fillRef idx="3">
+            <a:schemeClr val="accent1"/>
+          </a:fillRef>
+          <a:effectRef idx="2">
+            <a:schemeClr val="accent1"/>
+          </a:effectRef>
+          <a:fontRef idx="minor">
+            <a:schemeClr val="lt1"/>
+          </a:fontRef>
+        </p:style>
+        <p:txBody>
+          <a:bodyPr rtlCol="0" anchor="ctr"/>
+          <a:lstStyle/>
+          <a:p>
+            <a:pPr algn="ctr"/>
+          </a:p>
+        </p:txBody>
+      </p:sp>
+      <p:sp>
+        <p:nvSpPr>
+          <p:cNvPr id="12" name="TextBox 11"/>
           <p:cNvSpPr txBox="1"/>
           <p:nvPr/>
         </p:nvSpPr>
         <p:spPr>
           <a:xfrm>
-            <a:off x="6583680" y="1691640"/>
-            <a:ext cx="4754880" cy="457200"/>
+            <a:off x="5226710" y="1728216"/>
+            <a:ext cx="1735531" cy="1143000"/>
           </a:xfrm>
           <a:prstGeom prst="rect">
             <a:avLst/>
@@ -14882,27 +16021,337 @@
               </a:spcAft>
             </a:pPr>
             <a:r>
-              <a:rPr sz="1700" b="1" i="0">
+              <a:rPr sz="1350" b="1" i="0">
                 <a:solidFill>
                   <a:srgbClr val="1F3B57"/>
                 </a:solidFill>
                 <a:latin typeface="Segoe UI"/>
               </a:rPr>
-              <a:t>Dürüstlük önlemleri</a:t>
-            </a:r>
-          </a:p>
-        </p:txBody>
-      </p:sp>
-      <p:sp>
-        <p:nvSpPr>
-          <p:cNvPr id="10" name="TextBox 9"/>
+              <a:t>44 öznitelik / aralık</a:t>
+            </a:r>
+          </a:p>
+          <a:p>
+            <a:pPr algn="l">
+              <a:spcAft>
+                <a:spcPts val="400"/>
+              </a:spcAft>
+            </a:pPr>
+            <a:r>
+              <a:rPr sz="1100" b="0" i="0">
+                <a:solidFill>
+                  <a:srgbClr val="6B7A90"/>
+                </a:solidFill>
+                <a:latin typeface="Segoe UI"/>
+              </a:rPr>
+              <a:t>MFCC μ/σ + ΔMFCC + RMS + ZCR + centroid/rolloff</a:t>
+            </a:r>
+          </a:p>
+        </p:txBody>
+      </p:sp>
+      <p:sp>
+        <p:nvSpPr>
+          <p:cNvPr id="13" name="Right Arrow 12"/>
+          <p:cNvSpPr/>
+          <p:nvPr/>
+        </p:nvSpPr>
+        <p:spPr>
+          <a:xfrm>
+            <a:off x="7113117" y="2157984"/>
+            <a:ext cx="246888" cy="274320"/>
+          </a:xfrm>
+          <a:prstGeom prst="rightArrow">
+            <a:avLst/>
+          </a:prstGeom>
+          <a:solidFill>
+            <a:srgbClr val="2F74C0"/>
+          </a:solidFill>
+          <a:ln>
+            <a:noFill/>
+          </a:ln>
+          <a:effectLst/>
+        </p:spPr>
+        <p:style>
+          <a:lnRef idx="1">
+            <a:schemeClr val="accent1"/>
+          </a:lnRef>
+          <a:fillRef idx="3">
+            <a:schemeClr val="accent1"/>
+          </a:fillRef>
+          <a:effectRef idx="2">
+            <a:schemeClr val="accent1"/>
+          </a:effectRef>
+          <a:fontRef idx="minor">
+            <a:schemeClr val="lt1"/>
+          </a:fontRef>
+        </p:style>
+        <p:txBody>
+          <a:bodyPr rtlCol="0" anchor="ctr"/>
+          <a:lstStyle/>
+          <a:p>
+            <a:pPr algn="ctr"/>
+          </a:p>
+        </p:txBody>
+      </p:sp>
+      <p:sp>
+        <p:nvSpPr>
+          <p:cNvPr id="14" name="Rounded Rectangle 13"/>
+          <p:cNvSpPr/>
+          <p:nvPr/>
+        </p:nvSpPr>
+        <p:spPr>
+          <a:xfrm>
+            <a:off x="7401153" y="1600200"/>
+            <a:ext cx="1954987" cy="1371600"/>
+          </a:xfrm>
+          <a:prstGeom prst="roundRect">
+            <a:avLst>
+              <a:gd name="adj" fmla="val 8000"/>
+            </a:avLst>
+          </a:prstGeom>
+          <a:solidFill>
+            <a:srgbClr val="F4F8FC"/>
+          </a:solidFill>
+          <a:ln w="12700">
+            <a:solidFill>
+              <a:srgbClr val="C8D6E6"/>
+            </a:solidFill>
+          </a:ln>
+          <a:effectLst/>
+        </p:spPr>
+        <p:style>
+          <a:lnRef idx="1">
+            <a:schemeClr val="accent1"/>
+          </a:lnRef>
+          <a:fillRef idx="3">
+            <a:schemeClr val="accent1"/>
+          </a:fillRef>
+          <a:effectRef idx="2">
+            <a:schemeClr val="accent1"/>
+          </a:effectRef>
+          <a:fontRef idx="minor">
+            <a:schemeClr val="lt1"/>
+          </a:fontRef>
+        </p:style>
+        <p:txBody>
+          <a:bodyPr rtlCol="0" anchor="ctr"/>
+          <a:lstStyle/>
+          <a:p>
+            <a:pPr algn="ctr"/>
+          </a:p>
+        </p:txBody>
+      </p:sp>
+      <p:sp>
+        <p:nvSpPr>
+          <p:cNvPr id="15" name="TextBox 14"/>
           <p:cNvSpPr txBox="1"/>
           <p:nvPr/>
         </p:nvSpPr>
         <p:spPr>
           <a:xfrm>
-            <a:off x="6583680" y="2240280"/>
-            <a:ext cx="4754880" cy="3291840"/>
+            <a:off x="7510881" y="1728216"/>
+            <a:ext cx="1735531" cy="1143000"/>
+          </a:xfrm>
+          <a:prstGeom prst="rect">
+            <a:avLst/>
+          </a:prstGeom>
+          <a:noFill/>
+        </p:spPr>
+        <p:txBody>
+          <a:bodyPr wrap="square" anchor="t">
+            <a:spAutoFit/>
+          </a:bodyPr>
+          <a:lstStyle/>
+          <a:p>
+            <a:pPr algn="l">
+              <a:spcAft>
+                <a:spcPts val="400"/>
+              </a:spcAft>
+            </a:pPr>
+            <a:r>
+              <a:rPr sz="1350" b="1" i="0">
+                <a:solidFill>
+                  <a:srgbClr val="1F3B57"/>
+                </a:solidFill>
+                <a:latin typeface="Segoe UI"/>
+              </a:rPr>
+              <a:t>GRU 192×2</a:t>
+            </a:r>
+          </a:p>
+          <a:p>
+            <a:pPr algn="l">
+              <a:spcAft>
+                <a:spcPts val="400"/>
+              </a:spcAft>
+            </a:pPr>
+            <a:r>
+              <a:rPr sz="1100" b="0" i="0">
+                <a:solidFill>
+                  <a:srgbClr val="6B7A90"/>
+                </a:solidFill>
+                <a:latin typeface="Segoe UI"/>
+              </a:rPr>
+              <a:t>çift yönlü</a:t>
+            </a:r>
+          </a:p>
+        </p:txBody>
+      </p:sp>
+      <p:sp>
+        <p:nvSpPr>
+          <p:cNvPr id="16" name="Right Arrow 15"/>
+          <p:cNvSpPr/>
+          <p:nvPr/>
+        </p:nvSpPr>
+        <p:spPr>
+          <a:xfrm>
+            <a:off x="9397288" y="2157984"/>
+            <a:ext cx="246888" cy="274320"/>
+          </a:xfrm>
+          <a:prstGeom prst="rightArrow">
+            <a:avLst/>
+          </a:prstGeom>
+          <a:solidFill>
+            <a:srgbClr val="2F74C0"/>
+          </a:solidFill>
+          <a:ln>
+            <a:noFill/>
+          </a:ln>
+          <a:effectLst/>
+        </p:spPr>
+        <p:style>
+          <a:lnRef idx="1">
+            <a:schemeClr val="accent1"/>
+          </a:lnRef>
+          <a:fillRef idx="3">
+            <a:schemeClr val="accent1"/>
+          </a:fillRef>
+          <a:effectRef idx="2">
+            <a:schemeClr val="accent1"/>
+          </a:effectRef>
+          <a:fontRef idx="minor">
+            <a:schemeClr val="lt1"/>
+          </a:fontRef>
+        </p:style>
+        <p:txBody>
+          <a:bodyPr rtlCol="0" anchor="ctr"/>
+          <a:lstStyle/>
+          <a:p>
+            <a:pPr algn="ctr"/>
+          </a:p>
+        </p:txBody>
+      </p:sp>
+      <p:sp>
+        <p:nvSpPr>
+          <p:cNvPr id="17" name="Rounded Rectangle 16"/>
+          <p:cNvSpPr/>
+          <p:nvPr/>
+        </p:nvSpPr>
+        <p:spPr>
+          <a:xfrm>
+            <a:off x="9685324" y="1600200"/>
+            <a:ext cx="1954987" cy="1371600"/>
+          </a:xfrm>
+          <a:prstGeom prst="roundRect">
+            <a:avLst>
+              <a:gd name="adj" fmla="val 8000"/>
+            </a:avLst>
+          </a:prstGeom>
+          <a:solidFill>
+            <a:srgbClr val="F4F8FC"/>
+          </a:solidFill>
+          <a:ln w="12700">
+            <a:solidFill>
+              <a:srgbClr val="C8D6E6"/>
+            </a:solidFill>
+          </a:ln>
+          <a:effectLst/>
+        </p:spPr>
+        <p:style>
+          <a:lnRef idx="1">
+            <a:schemeClr val="accent1"/>
+          </a:lnRef>
+          <a:fillRef idx="3">
+            <a:schemeClr val="accent1"/>
+          </a:fillRef>
+          <a:effectRef idx="2">
+            <a:schemeClr val="accent1"/>
+          </a:effectRef>
+          <a:fontRef idx="minor">
+            <a:schemeClr val="lt1"/>
+          </a:fontRef>
+        </p:style>
+        <p:txBody>
+          <a:bodyPr rtlCol="0" anchor="ctr"/>
+          <a:lstStyle/>
+          <a:p>
+            <a:pPr algn="ctr"/>
+          </a:p>
+        </p:txBody>
+      </p:sp>
+      <p:sp>
+        <p:nvSpPr>
+          <p:cNvPr id="18" name="TextBox 17"/>
+          <p:cNvSpPr txBox="1"/>
+          <p:nvPr/>
+        </p:nvSpPr>
+        <p:spPr>
+          <a:xfrm>
+            <a:off x="9795052" y="1728216"/>
+            <a:ext cx="1735531" cy="1143000"/>
+          </a:xfrm>
+          <a:prstGeom prst="rect">
+            <a:avLst/>
+          </a:prstGeom>
+          <a:noFill/>
+        </p:spPr>
+        <p:txBody>
+          <a:bodyPr wrap="square" anchor="t">
+            <a:spAutoFit/>
+          </a:bodyPr>
+          <a:lstStyle/>
+          <a:p>
+            <a:pPr algn="l">
+              <a:spcAft>
+                <a:spcPts val="400"/>
+              </a:spcAft>
+            </a:pPr>
+            <a:r>
+              <a:rPr sz="1350" b="1" i="0">
+                <a:solidFill>
+                  <a:srgbClr val="1F3B57"/>
+                </a:solidFill>
+                <a:latin typeface="Segoe UI"/>
+              </a:rPr>
+              <a:t>mean pooling → Softmax</a:t>
+            </a:r>
+          </a:p>
+          <a:p>
+            <a:pPr algn="l">
+              <a:spcAft>
+                <a:spcPts val="400"/>
+              </a:spcAft>
+            </a:pPr>
+            <a:r>
+              <a:rPr sz="1100" b="0" i="0">
+                <a:solidFill>
+                  <a:srgbClr val="6B7A90"/>
+                </a:solidFill>
+                <a:latin typeface="Segoe UI"/>
+              </a:rPr>
+              <a:t>zaman özeti + ağırlıklı CE</a:t>
+            </a:r>
+          </a:p>
+        </p:txBody>
+      </p:sp>
+      <p:sp>
+        <p:nvSpPr>
+          <p:cNvPr id="19" name="TextBox 18"/>
+          <p:cNvSpPr txBox="1"/>
+          <p:nvPr/>
+        </p:nvSpPr>
+        <p:spPr>
+          <a:xfrm>
+            <a:off x="685800" y="3429000"/>
+            <a:ext cx="10881360" cy="1371600"/>
           </a:xfrm>
           <a:prstGeom prst="rect">
             <a:avLst/>
@@ -14917,79 +16366,93 @@
           <a:p>
             <a:pPr>
               <a:spcAft>
-                <a:spcPts val="900"/>
-              </a:spcAft>
-            </a:pPr>
-            <a:r>
-              <a:rPr sz="1350">
+                <a:spcPts val="700"/>
+              </a:spcAft>
+            </a:pPr>
+            <a:r>
+              <a:rPr sz="1500">
                 <a:solidFill>
                   <a:srgbClr val="242B35"/>
                 </a:solidFill>
                 <a:latin typeface="Segoe UI"/>
               </a:rPr>
-              <a:t>▪  Z-skor normalizasyonu YALNIZ eğitim istatistikleriyle (sızıntı yok)</a:t>
+              <a:t>▪  Aralıklar eşit yayılır: kısa kayıtta örtüşür, uzun kayıtta boşluk bırakır → her kayıttan sabit uzunlukta seri.</a:t>
             </a:r>
           </a:p>
           <a:p>
             <a:pPr>
               <a:spcAft>
-                <a:spcPts val="900"/>
-              </a:spcAft>
-            </a:pPr>
-            <a:r>
-              <a:rPr sz="1350">
+                <a:spcPts val="700"/>
+              </a:spcAft>
+            </a:pPr>
+            <a:r>
+              <a:rPr sz="1500">
                 <a:solidFill>
                   <a:srgbClr val="242B35"/>
                 </a:solidFill>
                 <a:latin typeface="Segoe UI"/>
               </a:rPr>
-              <a:t>▪  Hiperparametre seçimi yalnız geçerlemede; test'e tek dokunuş</a:t>
-            </a:r>
-          </a:p>
-          <a:p>
-            <a:pPr>
-              <a:spcAft>
-                <a:spcPts val="900"/>
-              </a:spcAft>
-            </a:pPr>
-            <a:r>
-              <a:rPr sz="1350">
-                <a:solidFill>
-                  <a:srgbClr val="242B35"/>
-                </a:solidFill>
-                <a:latin typeface="Segoe UI"/>
-              </a:rPr>
-              <a:t>▪  Sabit tohum (42), deterministik aday listeleri</a:t>
-            </a:r>
-          </a:p>
-          <a:p>
-            <a:pPr>
-              <a:spcAft>
-                <a:spcPts val="900"/>
-              </a:spcAft>
-            </a:pPr>
-            <a:r>
-              <a:rPr sz="1350">
-                <a:solidFill>
-                  <a:srgbClr val="242B35"/>
-                </a:solidFill>
-                <a:latin typeface="Segoe UI"/>
-              </a:rPr>
-              <a:t>▪  Freeze aşaması yok: aktarmalı öğrenme yasak → sıfırdan eğitim, erken durdurma doğrudan</a:t>
-            </a:r>
-          </a:p>
-        </p:txBody>
-      </p:sp>
-      <p:sp>
-        <p:nvSpPr>
-          <p:cNvPr id="11" name="TextBox 10"/>
+              <a:t>▪  Dayanak: çerçeve-düzeyi akustik öznitelik + BLSTM şablonu [6, 7]; öznitelik seçimi eGeMAPS pratiği [9].</a:t>
+            </a:r>
+          </a:p>
+        </p:txBody>
+      </p:sp>
+      <p:sp>
+        <p:nvSpPr>
+          <p:cNvPr id="20" name="Rounded Rectangle 19"/>
+          <p:cNvSpPr/>
+          <p:nvPr/>
+        </p:nvSpPr>
+        <p:spPr>
+          <a:xfrm>
+            <a:off x="685800" y="4754880"/>
+            <a:ext cx="10881360" cy="1051560"/>
+          </a:xfrm>
+          <a:prstGeom prst="roundRect">
+            <a:avLst>
+              <a:gd name="adj" fmla="val 8000"/>
+            </a:avLst>
+          </a:prstGeom>
+          <a:solidFill>
+            <a:srgbClr val="E9F6EF"/>
+          </a:solidFill>
+          <a:ln>
+            <a:noFill/>
+          </a:ln>
+          <a:effectLst/>
+        </p:spPr>
+        <p:style>
+          <a:lnRef idx="1">
+            <a:schemeClr val="accent1"/>
+          </a:lnRef>
+          <a:fillRef idx="3">
+            <a:schemeClr val="accent1"/>
+          </a:fillRef>
+          <a:effectRef idx="2">
+            <a:schemeClr val="accent1"/>
+          </a:effectRef>
+          <a:fontRef idx="minor">
+            <a:schemeClr val="lt1"/>
+          </a:fontRef>
+        </p:style>
+        <p:txBody>
+          <a:bodyPr rtlCol="0" anchor="ctr"/>
+          <a:lstStyle/>
+          <a:p>
+            <a:pPr algn="ctr"/>
+          </a:p>
+        </p:txBody>
+      </p:sp>
+      <p:sp>
+        <p:nvSpPr>
+          <p:cNvPr id="21" name="TextBox 20"/>
           <p:cNvSpPr txBox="1"/>
           <p:nvPr/>
         </p:nvSpPr>
         <p:spPr>
           <a:xfrm>
-            <a:off x="685800" y="5852160"/>
-            <a:ext cx="10881360" cy="457200"/>
+            <a:off x="914400" y="4873752"/>
+            <a:ext cx="10515600" cy="822960"/>
           </a:xfrm>
           <a:prstGeom prst="rect">
             <a:avLst/>
@@ -15008,20 +16471,36 @@
               </a:spcAft>
             </a:pPr>
             <a:r>
-              <a:rPr sz="1350" b="0" i="1">
-                <a:solidFill>
-                  <a:srgbClr val="6B7A90"/>
-                </a:solidFill>
-                <a:latin typeface="Segoe UI"/>
-              </a:rPr>
-              <a:t>Toplam 43 aday eğitildi: 19 CNN + 24 RNN (arama + yerel iyileştirme + geliştirme aşaması).</a:t>
-            </a:r>
-          </a:p>
-        </p:txBody>
-      </p:sp>
-      <p:sp>
-        <p:nvSpPr>
-          <p:cNvPr id="12" name="Rectangle 11"/>
+              <a:rPr sz="1400" b="1" i="0">
+                <a:solidFill>
+                  <a:srgbClr val="1F7A4D"/>
+                </a:solidFill>
+                <a:latin typeface="Segoe UI"/>
+              </a:rPr>
+              <a:t>Kilit bulgu: iyileştirme turu aralık düzenini 24×300 ms tabanından 32×200 ms'ye taşıdı —</a:t>
+            </a:r>
+          </a:p>
+          <a:p>
+            <a:pPr algn="l">
+              <a:spcAft>
+                <a:spcPts val="400"/>
+              </a:spcAft>
+            </a:pPr>
+            <a:r>
+              <a:rPr sz="1300" b="0" i="0">
+                <a:solidFill>
+                  <a:srgbClr val="242B35"/>
+                </a:solidFill>
+                <a:latin typeface="Segoe UI"/>
+              </a:rPr>
+              <a:t>ödevin şart koştuğu bu iki hiperparametre, yöntemi birinciliğe taşıyan farkı yarattı.</a:t>
+            </a:r>
+          </a:p>
+        </p:txBody>
+      </p:sp>
+      <p:sp>
+        <p:nvSpPr>
+          <p:cNvPr id="22" name="Rectangle 21"/>
           <p:cNvSpPr/>
           <p:nvPr/>
         </p:nvSpPr>
@@ -15065,7 +16544,7 @@
       </p:sp>
       <p:sp>
         <p:nvSpPr>
-          <p:cNvPr id="13" name="TextBox 12"/>
+          <p:cNvPr id="23" name="TextBox 22"/>
           <p:cNvSpPr txBox="1"/>
           <p:nvPr/>
         </p:nvSpPr>
@@ -15104,7 +16583,7 @@
       </p:sp>
       <p:sp>
         <p:nvSpPr>
-          <p:cNvPr id="14" name="TextBox 13"/>
+          <p:cNvPr id="24" name="TextBox 23"/>
           <p:cNvSpPr txBox="1"/>
           <p:nvPr/>
         </p:nvSpPr>
@@ -15281,7 +16760,7 @@
                 </a:solidFill>
                 <a:latin typeface="Segoe UI"/>
               </a:rPr>
-              <a:t>04 • SONUÇLAR</a:t>
+              <a:t>02 • İKİ YÖNTEM</a:t>
             </a:r>
           </a:p>
           <a:p>
@@ -15297,111 +16776,45 @@
                 </a:solidFill>
                 <a:latin typeface="Segoe UI"/>
               </a:rPr>
-              <a:t>Sonuçlar — CREMA-D Test Kümesi</a:t>
-            </a:r>
-          </a:p>
-        </p:txBody>
-      </p:sp>
-      <p:sp>
-        <p:nvSpPr>
-          <p:cNvPr id="5" name="Rounded Rectangle 4"/>
-          <p:cNvSpPr/>
-          <p:nvPr/>
-        </p:nvSpPr>
-        <p:spPr>
-          <a:xfrm>
-            <a:off x="685800" y="1417320"/>
-            <a:ext cx="3429000" cy="1600200"/>
-          </a:xfrm>
-          <a:prstGeom prst="roundRect">
-            <a:avLst>
-              <a:gd name="adj" fmla="val 8000"/>
-            </a:avLst>
-          </a:prstGeom>
-          <a:solidFill>
-            <a:srgbClr val="F4F8FC"/>
-          </a:solidFill>
-          <a:ln>
-            <a:noFill/>
-          </a:ln>
-          <a:effectLst/>
-        </p:spPr>
-        <p:style>
-          <a:lnRef idx="1">
-            <a:schemeClr val="accent1"/>
-          </a:lnRef>
-          <a:fillRef idx="3">
-            <a:schemeClr val="accent1"/>
-          </a:fillRef>
-          <a:effectRef idx="2">
-            <a:schemeClr val="accent1"/>
-          </a:effectRef>
-          <a:fontRef idx="minor">
-            <a:schemeClr val="lt1"/>
-          </a:fontRef>
-        </p:style>
-        <p:txBody>
-          <a:bodyPr rtlCol="0" anchor="ctr"/>
-          <a:lstStyle/>
-          <a:p>
-            <a:pPr algn="ctr"/>
-          </a:p>
-        </p:txBody>
-      </p:sp>
-      <p:sp>
-        <p:nvSpPr>
-          <p:cNvPr id="6" name="Rectangle 5"/>
-          <p:cNvSpPr/>
-          <p:nvPr/>
-        </p:nvSpPr>
-        <p:spPr>
-          <a:xfrm>
-            <a:off x="685800" y="1417320"/>
-            <a:ext cx="82296" cy="1600200"/>
-          </a:xfrm>
-          <a:prstGeom prst="rect">
-            <a:avLst/>
-          </a:prstGeom>
-          <a:solidFill>
-            <a:srgbClr val="2F74C0"/>
-          </a:solidFill>
-          <a:ln>
-            <a:noFill/>
-          </a:ln>
-          <a:effectLst/>
-        </p:spPr>
-        <p:style>
-          <a:lnRef idx="1">
-            <a:schemeClr val="accent1"/>
-          </a:lnRef>
-          <a:fillRef idx="3">
-            <a:schemeClr val="accent1"/>
-          </a:fillRef>
-          <a:effectRef idx="2">
-            <a:schemeClr val="accent1"/>
-          </a:effectRef>
-          <a:fontRef idx="minor">
-            <a:schemeClr val="lt1"/>
-          </a:fontRef>
-        </p:style>
-        <p:txBody>
-          <a:bodyPr rtlCol="0" anchor="ctr"/>
-          <a:lstStyle/>
-          <a:p>
-            <a:pPr algn="ctr"/>
-          </a:p>
-        </p:txBody>
-      </p:sp>
-      <p:sp>
-        <p:nvSpPr>
-          <p:cNvPr id="7" name="TextBox 6"/>
+              <a:t>Aralık Pencereleri İş Başında — Canlı</a:t>
+            </a:r>
+          </a:p>
+        </p:txBody>
+      </p:sp>
+      <p:pic>
+        <p:nvPicPr>
+          <p:cNvPr id="5" name="Picture 4" descr="aralik_pencereleri.gif"/>
+          <p:cNvPicPr>
+            <a:picLocks noChangeAspect="1"/>
+          </p:cNvPicPr>
+          <p:nvPr/>
+        </p:nvPicPr>
+        <p:blipFill>
+          <a:blip r:embed="rId2"/>
+          <a:stretch>
+            <a:fillRect/>
+          </a:stretch>
+        </p:blipFill>
+        <p:spPr>
+          <a:xfrm>
+            <a:off x="1051560" y="1554480"/>
+            <a:ext cx="10058400" cy="3464560"/>
+          </a:xfrm>
+          <a:prstGeom prst="rect">
+            <a:avLst/>
+          </a:prstGeom>
+        </p:spPr>
+      </p:pic>
+      <p:sp>
+        <p:nvSpPr>
+          <p:cNvPr id="6" name="TextBox 5"/>
           <p:cNvSpPr txBox="1"/>
           <p:nvPr/>
         </p:nvSpPr>
         <p:spPr>
           <a:xfrm>
-            <a:off x="914400" y="1581912"/>
-            <a:ext cx="3063240" cy="1325880"/>
+            <a:off x="685800" y="5852160"/>
+            <a:ext cx="10881360" cy="502920"/>
           </a:xfrm>
           <a:prstGeom prst="rect">
             <a:avLst/>
@@ -15420,392 +16833,20 @@
               </a:spcAft>
             </a:pPr>
             <a:r>
-              <a:rPr sz="1250" b="1" i="0">
+              <a:rPr sz="1250" b="0" i="1">
                 <a:solidFill>
                   <a:srgbClr val="6B7A90"/>
                 </a:solidFill>
                 <a:latin typeface="Segoe UI"/>
               </a:rPr>
-              <a:t>YÖNTEM 1 • CNN</a:t>
-            </a:r>
-          </a:p>
-          <a:p>
-            <a:pPr algn="l">
-              <a:spcAft>
-                <a:spcPts val="400"/>
-              </a:spcAft>
-            </a:pPr>
-            <a:r>
-              <a:rPr sz="3000" b="1" i="0">
-                <a:solidFill>
-                  <a:srgbClr val="2F74C0"/>
-                </a:solidFill>
-                <a:latin typeface="Segoe UI"/>
-              </a:rPr>
-              <a:t>%62,6</a:t>
-            </a:r>
-          </a:p>
-          <a:p>
-            <a:pPr algn="l">
-              <a:spcAft>
-                <a:spcPts val="400"/>
-              </a:spcAft>
-            </a:pPr>
-            <a:r>
-              <a:rPr sz="1150" b="0" i="0">
-                <a:solidFill>
-                  <a:srgbClr val="242B35"/>
-                </a:solidFill>
-                <a:latin typeface="Segoe UI"/>
-              </a:rPr>
-              <a:t>macro-F1 0,6282</a:t>
-            </a:r>
-          </a:p>
-        </p:txBody>
-      </p:sp>
-      <p:sp>
-        <p:nvSpPr>
-          <p:cNvPr id="8" name="Rounded Rectangle 7"/>
-          <p:cNvSpPr/>
-          <p:nvPr/>
-        </p:nvSpPr>
-        <p:spPr>
-          <a:xfrm>
-            <a:off x="4389120" y="1417320"/>
-            <a:ext cx="3429000" cy="1600200"/>
-          </a:xfrm>
-          <a:prstGeom prst="roundRect">
-            <a:avLst>
-              <a:gd name="adj" fmla="val 8000"/>
-            </a:avLst>
-          </a:prstGeom>
-          <a:solidFill>
-            <a:srgbClr val="F4F8FC"/>
-          </a:solidFill>
-          <a:ln>
-            <a:noFill/>
-          </a:ln>
-          <a:effectLst/>
-        </p:spPr>
-        <p:style>
-          <a:lnRef idx="1">
-            <a:schemeClr val="accent1"/>
-          </a:lnRef>
-          <a:fillRef idx="3">
-            <a:schemeClr val="accent1"/>
-          </a:fillRef>
-          <a:effectRef idx="2">
-            <a:schemeClr val="accent1"/>
-          </a:effectRef>
-          <a:fontRef idx="minor">
-            <a:schemeClr val="lt1"/>
-          </a:fontRef>
-        </p:style>
-        <p:txBody>
-          <a:bodyPr rtlCol="0" anchor="ctr"/>
-          <a:lstStyle/>
-          <a:p>
-            <a:pPr algn="ctr"/>
-          </a:p>
-        </p:txBody>
-      </p:sp>
-      <p:sp>
-        <p:nvSpPr>
-          <p:cNvPr id="9" name="Rectangle 8"/>
-          <p:cNvSpPr/>
-          <p:nvPr/>
-        </p:nvSpPr>
-        <p:spPr>
-          <a:xfrm>
-            <a:off x="4389120" y="1417320"/>
-            <a:ext cx="82296" cy="1600200"/>
-          </a:xfrm>
-          <a:prstGeom prst="rect">
-            <a:avLst/>
-          </a:prstGeom>
-          <a:solidFill>
-            <a:srgbClr val="C26A1D"/>
-          </a:solidFill>
-          <a:ln>
-            <a:noFill/>
-          </a:ln>
-          <a:effectLst/>
-        </p:spPr>
-        <p:style>
-          <a:lnRef idx="1">
-            <a:schemeClr val="accent1"/>
-          </a:lnRef>
-          <a:fillRef idx="3">
-            <a:schemeClr val="accent1"/>
-          </a:fillRef>
-          <a:effectRef idx="2">
-            <a:schemeClr val="accent1"/>
-          </a:effectRef>
-          <a:fontRef idx="minor">
-            <a:schemeClr val="lt1"/>
-          </a:fontRef>
-        </p:style>
-        <p:txBody>
-          <a:bodyPr rtlCol="0" anchor="ctr"/>
-          <a:lstStyle/>
-          <a:p>
-            <a:pPr algn="ctr"/>
-          </a:p>
-        </p:txBody>
-      </p:sp>
-      <p:sp>
-        <p:nvSpPr>
-          <p:cNvPr id="10" name="TextBox 9"/>
-          <p:cNvSpPr txBox="1"/>
-          <p:nvPr/>
-        </p:nvSpPr>
-        <p:spPr>
-          <a:xfrm>
-            <a:off x="4617720" y="1581912"/>
-            <a:ext cx="3063240" cy="1325880"/>
-          </a:xfrm>
-          <a:prstGeom prst="rect">
-            <a:avLst/>
-          </a:prstGeom>
-          <a:noFill/>
-        </p:spPr>
-        <p:txBody>
-          <a:bodyPr wrap="square" anchor="t">
-            <a:spAutoFit/>
-          </a:bodyPr>
-          <a:lstStyle/>
-          <a:p>
-            <a:pPr algn="l">
-              <a:spcAft>
-                <a:spcPts val="400"/>
-              </a:spcAft>
-            </a:pPr>
-            <a:r>
-              <a:rPr sz="1250" b="1" i="0">
-                <a:solidFill>
-                  <a:srgbClr val="6B7A90"/>
-                </a:solidFill>
-                <a:latin typeface="Segoe UI"/>
-              </a:rPr>
-              <a:t>CNN + SPECAUGMENT</a:t>
-            </a:r>
-          </a:p>
-          <a:p>
-            <a:pPr algn="l">
-              <a:spcAft>
-                <a:spcPts val="400"/>
-              </a:spcAft>
-            </a:pPr>
-            <a:r>
-              <a:rPr sz="3000" b="1" i="0">
-                <a:solidFill>
-                  <a:srgbClr val="C26A1D"/>
-                </a:solidFill>
-                <a:latin typeface="Segoe UI"/>
-              </a:rPr>
-              <a:t>%62,9</a:t>
-            </a:r>
-          </a:p>
-          <a:p>
-            <a:pPr algn="l">
-              <a:spcAft>
-                <a:spcPts val="400"/>
-              </a:spcAft>
-            </a:pPr>
-            <a:r>
-              <a:rPr sz="1150" b="0" i="0">
-                <a:solidFill>
-                  <a:srgbClr val="242B35"/>
-                </a:solidFill>
-                <a:latin typeface="Segoe UI"/>
-              </a:rPr>
-              <a:t>macro-F1 0,6301</a:t>
-            </a:r>
-          </a:p>
-        </p:txBody>
-      </p:sp>
-      <p:sp>
-        <p:nvSpPr>
-          <p:cNvPr id="11" name="Rounded Rectangle 10"/>
-          <p:cNvSpPr/>
-          <p:nvPr/>
-        </p:nvSpPr>
-        <p:spPr>
-          <a:xfrm>
-            <a:off x="8092440" y="1417320"/>
-            <a:ext cx="3429000" cy="1600200"/>
-          </a:xfrm>
-          <a:prstGeom prst="roundRect">
-            <a:avLst>
-              <a:gd name="adj" fmla="val 8000"/>
-            </a:avLst>
-          </a:prstGeom>
-          <a:solidFill>
-            <a:srgbClr val="E9F6EF"/>
-          </a:solidFill>
-          <a:ln>
-            <a:noFill/>
-          </a:ln>
-          <a:effectLst/>
-        </p:spPr>
-        <p:style>
-          <a:lnRef idx="1">
-            <a:schemeClr val="accent1"/>
-          </a:lnRef>
-          <a:fillRef idx="3">
-            <a:schemeClr val="accent1"/>
-          </a:fillRef>
-          <a:effectRef idx="2">
-            <a:schemeClr val="accent1"/>
-          </a:effectRef>
-          <a:fontRef idx="minor">
-            <a:schemeClr val="lt1"/>
-          </a:fontRef>
-        </p:style>
-        <p:txBody>
-          <a:bodyPr rtlCol="0" anchor="ctr"/>
-          <a:lstStyle/>
-          <a:p>
-            <a:pPr algn="ctr"/>
-          </a:p>
-        </p:txBody>
-      </p:sp>
-      <p:sp>
-        <p:nvSpPr>
-          <p:cNvPr id="12" name="Rectangle 11"/>
-          <p:cNvSpPr/>
-          <p:nvPr/>
-        </p:nvSpPr>
-        <p:spPr>
-          <a:xfrm>
-            <a:off x="8092440" y="1417320"/>
-            <a:ext cx="82296" cy="1600200"/>
-          </a:xfrm>
-          <a:prstGeom prst="rect">
-            <a:avLst/>
-          </a:prstGeom>
-          <a:solidFill>
-            <a:srgbClr val="1F7A4D"/>
-          </a:solidFill>
-          <a:ln>
-            <a:noFill/>
-          </a:ln>
-          <a:effectLst/>
-        </p:spPr>
-        <p:style>
-          <a:lnRef idx="1">
-            <a:schemeClr val="accent1"/>
-          </a:lnRef>
-          <a:fillRef idx="3">
-            <a:schemeClr val="accent1"/>
-          </a:fillRef>
-          <a:effectRef idx="2">
-            <a:schemeClr val="accent1"/>
-          </a:effectRef>
-          <a:fontRef idx="minor">
-            <a:schemeClr val="lt1"/>
-          </a:fontRef>
-        </p:style>
-        <p:txBody>
-          <a:bodyPr rtlCol="0" anchor="ctr"/>
-          <a:lstStyle/>
-          <a:p>
-            <a:pPr algn="ctr"/>
-          </a:p>
-        </p:txBody>
-      </p:sp>
-      <p:sp>
-        <p:nvSpPr>
-          <p:cNvPr id="13" name="TextBox 12"/>
-          <p:cNvSpPr txBox="1"/>
-          <p:nvPr/>
-        </p:nvSpPr>
-        <p:spPr>
-          <a:xfrm>
-            <a:off x="8321040" y="1581912"/>
-            <a:ext cx="3063240" cy="1325880"/>
-          </a:xfrm>
-          <a:prstGeom prst="rect">
-            <a:avLst/>
-          </a:prstGeom>
-          <a:noFill/>
-        </p:spPr>
-        <p:txBody>
-          <a:bodyPr wrap="square" anchor="t">
-            <a:spAutoFit/>
-          </a:bodyPr>
-          <a:lstStyle/>
-          <a:p>
-            <a:pPr algn="l">
-              <a:spcAft>
-                <a:spcPts val="400"/>
-              </a:spcAft>
-            </a:pPr>
-            <a:r>
-              <a:rPr sz="1250" b="1" i="0">
-                <a:solidFill>
-                  <a:srgbClr val="6B7A90"/>
-                </a:solidFill>
-                <a:latin typeface="Segoe UI"/>
-              </a:rPr>
-              <a:t>YÖNTEM 2 • BiGRU  ★</a:t>
-            </a:r>
-          </a:p>
-          <a:p>
-            <a:pPr algn="l">
-              <a:spcAft>
-                <a:spcPts val="400"/>
-              </a:spcAft>
-            </a:pPr>
-            <a:r>
-              <a:rPr sz="3000" b="1" i="0">
-                <a:solidFill>
-                  <a:srgbClr val="1F7A4D"/>
-                </a:solidFill>
-                <a:latin typeface="Segoe UI"/>
-              </a:rPr>
-              <a:t>%63,8</a:t>
-            </a:r>
-          </a:p>
-          <a:p>
-            <a:pPr algn="l">
-              <a:spcAft>
-                <a:spcPts val="400"/>
-              </a:spcAft>
-            </a:pPr>
-            <a:r>
-              <a:rPr sz="1150" b="0" i="0">
-                <a:solidFill>
-                  <a:srgbClr val="242B35"/>
-                </a:solidFill>
-                <a:latin typeface="Segoe UI"/>
-              </a:rPr>
-              <a:t>macro-F1 0,6440</a:t>
-            </a:r>
-          </a:p>
-        </p:txBody>
-      </p:sp>
-      <p:graphicFrame>
-        <p:nvGraphicFramePr>
-          <p:cNvPr id="14" name="Chart 13"/>
-          <p:cNvGraphicFramePr>
-            <a:graphicFrameLocks noGrp="1"/>
-          </p:cNvGraphicFramePr>
-          <p:nvPr/>
-        </p:nvGraphicFramePr>
-        <p:xfrm>
-          <a:off x="685800" y="3246120"/>
-          <a:ext cx="10881360" cy="2834640"/>
-        </p:xfrm>
-        <a:graphic>
-          <a:graphicData uri="http://schemas.openxmlformats.org/drawingml/2006/chart">
-            <c:chart xmlns:c="http://schemas.openxmlformats.org/drawingml/2006/chart" r:id="rId2"/>
-          </a:graphicData>
-        </a:graphic>
-      </p:graphicFrame>
-      <p:sp>
-        <p:nvSpPr>
-          <p:cNvPr id="15" name="Rectangle 14"/>
+              <a:t>32 pencere × 200 ms kayda eşit yerleşir (örtüşerek); her pencereden 44 öznitelik çıkar → BiGRU'nun okuduğu 32 adımlık seri.</a:t>
+            </a:r>
+          </a:p>
+        </p:txBody>
+      </p:sp>
+      <p:sp>
+        <p:nvSpPr>
+          <p:cNvPr id="7" name="Rectangle 6"/>
           <p:cNvSpPr/>
           <p:nvPr/>
         </p:nvSpPr>
@@ -15849,7 +16890,7 @@
       </p:sp>
       <p:sp>
         <p:nvSpPr>
-          <p:cNvPr id="16" name="TextBox 15"/>
+          <p:cNvPr id="8" name="TextBox 7"/>
           <p:cNvSpPr txBox="1"/>
           <p:nvPr/>
         </p:nvSpPr>
@@ -15888,7 +16929,7 @@
       </p:sp>
       <p:sp>
         <p:nvSpPr>
-          <p:cNvPr id="17" name="TextBox 16"/>
+          <p:cNvPr id="9" name="TextBox 8"/>
           <p:cNvSpPr txBox="1"/>
           <p:nvPr/>
         </p:nvSpPr>

--- a/final/SUNUM_FINAL.pptx
+++ b/final/SUNUM_FINAL.pptx
@@ -3806,8 +3806,8 @@
         </p:blipFill>
         <p:spPr>
           <a:xfrm>
-            <a:off x="1523847" y="1554480"/>
-            <a:ext cx="9144000" cy="3657600"/>
+            <a:off x="1752447" y="1417320"/>
+            <a:ext cx="8686800" cy="3474720"/>
           </a:xfrm>
           <a:prstGeom prst="rect">
             <a:avLst/>
@@ -3816,7 +3816,297 @@
       </p:pic>
       <p:sp>
         <p:nvSpPr>
-          <p:cNvPr id="6" name="Rectangle 5"/>
+          <p:cNvPr id="6" name="Rounded Rectangle 5"/>
+          <p:cNvSpPr/>
+          <p:nvPr/>
+        </p:nvSpPr>
+        <p:spPr>
+          <a:xfrm>
+            <a:off x="548640" y="5577840"/>
+            <a:ext cx="5440680" cy="777240"/>
+          </a:xfrm>
+          <a:prstGeom prst="roundRect">
+            <a:avLst>
+              <a:gd name="adj" fmla="val 8000"/>
+            </a:avLst>
+          </a:prstGeom>
+          <a:solidFill>
+            <a:srgbClr val="E8F1FA"/>
+          </a:solidFill>
+          <a:ln>
+            <a:noFill/>
+          </a:ln>
+          <a:effectLst/>
+        </p:spPr>
+        <p:style>
+          <a:lnRef idx="1">
+            <a:schemeClr val="accent1"/>
+          </a:lnRef>
+          <a:fillRef idx="3">
+            <a:schemeClr val="accent1"/>
+          </a:fillRef>
+          <a:effectRef idx="2">
+            <a:schemeClr val="accent1"/>
+          </a:effectRef>
+          <a:fontRef idx="minor">
+            <a:schemeClr val="lt1"/>
+          </a:fontRef>
+        </p:style>
+        <p:txBody>
+          <a:bodyPr rtlCol="0" anchor="ctr"/>
+          <a:lstStyle/>
+          <a:p>
+            <a:pPr algn="ctr"/>
+          </a:p>
+        </p:txBody>
+      </p:sp>
+      <p:sp>
+        <p:nvSpPr>
+          <p:cNvPr id="7" name="Rectangle 6"/>
+          <p:cNvSpPr/>
+          <p:nvPr/>
+        </p:nvSpPr>
+        <p:spPr>
+          <a:xfrm>
+            <a:off x="548640" y="5577840"/>
+            <a:ext cx="82296" cy="777240"/>
+          </a:xfrm>
+          <a:prstGeom prst="rect">
+            <a:avLst/>
+          </a:prstGeom>
+          <a:solidFill>
+            <a:srgbClr val="2F74C0"/>
+          </a:solidFill>
+          <a:ln>
+            <a:noFill/>
+          </a:ln>
+          <a:effectLst/>
+        </p:spPr>
+        <p:style>
+          <a:lnRef idx="1">
+            <a:schemeClr val="accent1"/>
+          </a:lnRef>
+          <a:fillRef idx="3">
+            <a:schemeClr val="accent1"/>
+          </a:fillRef>
+          <a:effectRef idx="2">
+            <a:schemeClr val="accent1"/>
+          </a:effectRef>
+          <a:fontRef idx="minor">
+            <a:schemeClr val="lt1"/>
+          </a:fontRef>
+        </p:style>
+        <p:txBody>
+          <a:bodyPr rtlCol="0" anchor="ctr"/>
+          <a:lstStyle/>
+          <a:p>
+            <a:pPr algn="ctr"/>
+          </a:p>
+        </p:txBody>
+      </p:sp>
+      <p:sp>
+        <p:nvSpPr>
+          <p:cNvPr id="8" name="TextBox 7"/>
+          <p:cNvSpPr txBox="1"/>
+          <p:nvPr/>
+        </p:nvSpPr>
+        <p:spPr>
+          <a:xfrm>
+            <a:off x="777240" y="5632704"/>
+            <a:ext cx="5120640" cy="658368"/>
+          </a:xfrm>
+          <a:prstGeom prst="rect">
+            <a:avLst/>
+          </a:prstGeom>
+          <a:noFill/>
+        </p:spPr>
+        <p:txBody>
+          <a:bodyPr wrap="square" anchor="t">
+            <a:spAutoFit/>
+          </a:bodyPr>
+          <a:lstStyle/>
+          <a:p>
+            <a:pPr algn="l">
+              <a:spcAft>
+                <a:spcPts val="400"/>
+              </a:spcAft>
+            </a:pPr>
+            <a:r>
+              <a:rPr sz="1050" b="1" i="0">
+                <a:solidFill>
+                  <a:srgbClr val="2F74C0"/>
+                </a:solidFill>
+                <a:latin typeface="Segoe UI"/>
+              </a:rPr>
+              <a:t>⚙ NASIL ÇALIŞIR</a:t>
+            </a:r>
+          </a:p>
+          <a:p>
+            <a:pPr algn="l">
+              <a:spcAft>
+                <a:spcPts val="400"/>
+              </a:spcAft>
+            </a:pPr>
+            <a:r>
+              <a:rPr sz="1300" b="1" i="0">
+                <a:solidFill>
+                  <a:srgbClr val="1F3B57"/>
+                </a:solidFill>
+                <a:latin typeface="Segoe UI"/>
+              </a:rPr>
+              <a:t>Her bölgeden EN BÜYÜĞÜ al</a:t>
+            </a:r>
+          </a:p>
+        </p:txBody>
+      </p:sp>
+      <p:sp>
+        <p:nvSpPr>
+          <p:cNvPr id="9" name="Rounded Rectangle 8"/>
+          <p:cNvSpPr/>
+          <p:nvPr/>
+        </p:nvSpPr>
+        <p:spPr>
+          <a:xfrm>
+            <a:off x="6199632" y="5577840"/>
+            <a:ext cx="5440680" cy="777240"/>
+          </a:xfrm>
+          <a:prstGeom prst="roundRect">
+            <a:avLst>
+              <a:gd name="adj" fmla="val 8000"/>
+            </a:avLst>
+          </a:prstGeom>
+          <a:solidFill>
+            <a:srgbClr val="E9F6EF"/>
+          </a:solidFill>
+          <a:ln>
+            <a:noFill/>
+          </a:ln>
+          <a:effectLst/>
+        </p:spPr>
+        <p:style>
+          <a:lnRef idx="1">
+            <a:schemeClr val="accent1"/>
+          </a:lnRef>
+          <a:fillRef idx="3">
+            <a:schemeClr val="accent1"/>
+          </a:fillRef>
+          <a:effectRef idx="2">
+            <a:schemeClr val="accent1"/>
+          </a:effectRef>
+          <a:fontRef idx="minor">
+            <a:schemeClr val="lt1"/>
+          </a:fontRef>
+        </p:style>
+        <p:txBody>
+          <a:bodyPr rtlCol="0" anchor="ctr"/>
+          <a:lstStyle/>
+          <a:p>
+            <a:pPr algn="ctr"/>
+          </a:p>
+        </p:txBody>
+      </p:sp>
+      <p:sp>
+        <p:nvSpPr>
+          <p:cNvPr id="10" name="Rectangle 9"/>
+          <p:cNvSpPr/>
+          <p:nvPr/>
+        </p:nvSpPr>
+        <p:spPr>
+          <a:xfrm>
+            <a:off x="6199632" y="5577840"/>
+            <a:ext cx="82296" cy="777240"/>
+          </a:xfrm>
+          <a:prstGeom prst="rect">
+            <a:avLst/>
+          </a:prstGeom>
+          <a:solidFill>
+            <a:srgbClr val="1F7A4D"/>
+          </a:solidFill>
+          <a:ln>
+            <a:noFill/>
+          </a:ln>
+          <a:effectLst/>
+        </p:spPr>
+        <p:style>
+          <a:lnRef idx="1">
+            <a:schemeClr val="accent1"/>
+          </a:lnRef>
+          <a:fillRef idx="3">
+            <a:schemeClr val="accent1"/>
+          </a:fillRef>
+          <a:effectRef idx="2">
+            <a:schemeClr val="accent1"/>
+          </a:effectRef>
+          <a:fontRef idx="minor">
+            <a:schemeClr val="lt1"/>
+          </a:fontRef>
+        </p:style>
+        <p:txBody>
+          <a:bodyPr rtlCol="0" anchor="ctr"/>
+          <a:lstStyle/>
+          <a:p>
+            <a:pPr algn="ctr"/>
+          </a:p>
+        </p:txBody>
+      </p:sp>
+      <p:sp>
+        <p:nvSpPr>
+          <p:cNvPr id="11" name="TextBox 10"/>
+          <p:cNvSpPr txBox="1"/>
+          <p:nvPr/>
+        </p:nvSpPr>
+        <p:spPr>
+          <a:xfrm>
+            <a:off x="6428232" y="5632704"/>
+            <a:ext cx="5120640" cy="658368"/>
+          </a:xfrm>
+          <a:prstGeom prst="rect">
+            <a:avLst/>
+          </a:prstGeom>
+          <a:noFill/>
+        </p:spPr>
+        <p:txBody>
+          <a:bodyPr wrap="square" anchor="t">
+            <a:spAutoFit/>
+          </a:bodyPr>
+          <a:lstStyle/>
+          <a:p>
+            <a:pPr algn="l">
+              <a:spcAft>
+                <a:spcPts val="400"/>
+              </a:spcAft>
+            </a:pPr>
+            <a:r>
+              <a:rPr sz="1050" b="1" i="0">
+                <a:solidFill>
+                  <a:srgbClr val="1F7A4D"/>
+                </a:solidFill>
+                <a:latin typeface="Segoe UI"/>
+              </a:rPr>
+              <a:t>🎯 PROJEDEKİ ROLÜ</a:t>
+            </a:r>
+          </a:p>
+          <a:p>
+            <a:pPr algn="l">
+              <a:spcAft>
+                <a:spcPts val="400"/>
+              </a:spcAft>
+            </a:pPr>
+            <a:r>
+              <a:rPr sz="1300" b="1" i="0">
+                <a:solidFill>
+                  <a:srgbClr val="1F3B57"/>
+                </a:solidFill>
+                <a:latin typeface="Segoe UI"/>
+              </a:rPr>
+              <a:t>Küçült + kaymalara dayanıklılık</a:t>
+            </a:r>
+          </a:p>
+        </p:txBody>
+      </p:sp>
+      <p:sp>
+        <p:nvSpPr>
+          <p:cNvPr id="12" name="Rectangle 11"/>
           <p:cNvSpPr/>
           <p:nvPr/>
         </p:nvSpPr>
@@ -3860,7 +4150,7 @@
       </p:sp>
       <p:sp>
         <p:nvSpPr>
-          <p:cNvPr id="7" name="TextBox 6"/>
+          <p:cNvPr id="13" name="TextBox 12"/>
           <p:cNvSpPr txBox="1"/>
           <p:nvPr/>
         </p:nvSpPr>
@@ -3899,7 +4189,7 @@
       </p:sp>
       <p:sp>
         <p:nvSpPr>
-          <p:cNvPr id="8" name="TextBox 7"/>
+          <p:cNvPr id="14" name="TextBox 13"/>
           <p:cNvSpPr txBox="1"/>
           <p:nvPr/>
         </p:nvSpPr>
@@ -5198,7 +5488,297 @@
       </p:pic>
       <p:sp>
         <p:nvSpPr>
-          <p:cNvPr id="6" name="Rectangle 5"/>
+          <p:cNvPr id="6" name="Rounded Rectangle 5"/>
+          <p:cNvSpPr/>
+          <p:nvPr/>
+        </p:nvSpPr>
+        <p:spPr>
+          <a:xfrm>
+            <a:off x="548640" y="5577840"/>
+            <a:ext cx="5440680" cy="777240"/>
+          </a:xfrm>
+          <a:prstGeom prst="roundRect">
+            <a:avLst>
+              <a:gd name="adj" fmla="val 8000"/>
+            </a:avLst>
+          </a:prstGeom>
+          <a:solidFill>
+            <a:srgbClr val="E8F1FA"/>
+          </a:solidFill>
+          <a:ln>
+            <a:noFill/>
+          </a:ln>
+          <a:effectLst/>
+        </p:spPr>
+        <p:style>
+          <a:lnRef idx="1">
+            <a:schemeClr val="accent1"/>
+          </a:lnRef>
+          <a:fillRef idx="3">
+            <a:schemeClr val="accent1"/>
+          </a:fillRef>
+          <a:effectRef idx="2">
+            <a:schemeClr val="accent1"/>
+          </a:effectRef>
+          <a:fontRef idx="minor">
+            <a:schemeClr val="lt1"/>
+          </a:fontRef>
+        </p:style>
+        <p:txBody>
+          <a:bodyPr rtlCol="0" anchor="ctr"/>
+          <a:lstStyle/>
+          <a:p>
+            <a:pPr algn="ctr"/>
+          </a:p>
+        </p:txBody>
+      </p:sp>
+      <p:sp>
+        <p:nvSpPr>
+          <p:cNvPr id="7" name="Rectangle 6"/>
+          <p:cNvSpPr/>
+          <p:nvPr/>
+        </p:nvSpPr>
+        <p:spPr>
+          <a:xfrm>
+            <a:off x="548640" y="5577840"/>
+            <a:ext cx="82296" cy="777240"/>
+          </a:xfrm>
+          <a:prstGeom prst="rect">
+            <a:avLst/>
+          </a:prstGeom>
+          <a:solidFill>
+            <a:srgbClr val="2F74C0"/>
+          </a:solidFill>
+          <a:ln>
+            <a:noFill/>
+          </a:ln>
+          <a:effectLst/>
+        </p:spPr>
+        <p:style>
+          <a:lnRef idx="1">
+            <a:schemeClr val="accent1"/>
+          </a:lnRef>
+          <a:fillRef idx="3">
+            <a:schemeClr val="accent1"/>
+          </a:fillRef>
+          <a:effectRef idx="2">
+            <a:schemeClr val="accent1"/>
+          </a:effectRef>
+          <a:fontRef idx="minor">
+            <a:schemeClr val="lt1"/>
+          </a:fontRef>
+        </p:style>
+        <p:txBody>
+          <a:bodyPr rtlCol="0" anchor="ctr"/>
+          <a:lstStyle/>
+          <a:p>
+            <a:pPr algn="ctr"/>
+          </a:p>
+        </p:txBody>
+      </p:sp>
+      <p:sp>
+        <p:nvSpPr>
+          <p:cNvPr id="8" name="TextBox 7"/>
+          <p:cNvSpPr txBox="1"/>
+          <p:nvPr/>
+        </p:nvSpPr>
+        <p:spPr>
+          <a:xfrm>
+            <a:off x="777240" y="5632704"/>
+            <a:ext cx="5120640" cy="658368"/>
+          </a:xfrm>
+          <a:prstGeom prst="rect">
+            <a:avLst/>
+          </a:prstGeom>
+          <a:noFill/>
+        </p:spPr>
+        <p:txBody>
+          <a:bodyPr wrap="square" anchor="t">
+            <a:spAutoFit/>
+          </a:bodyPr>
+          <a:lstStyle/>
+          <a:p>
+            <a:pPr algn="l">
+              <a:spcAft>
+                <a:spcPts val="400"/>
+              </a:spcAft>
+            </a:pPr>
+            <a:r>
+              <a:rPr sz="1050" b="1" i="0">
+                <a:solidFill>
+                  <a:srgbClr val="2F74C0"/>
+                </a:solidFill>
+                <a:latin typeface="Segoe UI"/>
+              </a:rPr>
+              <a:t>⚙ NASIL ÇALIŞIR</a:t>
+            </a:r>
+          </a:p>
+          <a:p>
+            <a:pPr algn="l">
+              <a:spcAft>
+                <a:spcPts val="400"/>
+              </a:spcAft>
+            </a:pPr>
+            <a:r>
+              <a:rPr sz="1300" b="1" i="0">
+                <a:solidFill>
+                  <a:srgbClr val="1F3B57"/>
+                </a:solidFill>
+                <a:latin typeface="Segoe UI"/>
+              </a:rPr>
+              <a:t>32 pencere × 200 ms, eşit yerleşim</a:t>
+            </a:r>
+          </a:p>
+        </p:txBody>
+      </p:sp>
+      <p:sp>
+        <p:nvSpPr>
+          <p:cNvPr id="9" name="Rounded Rectangle 8"/>
+          <p:cNvSpPr/>
+          <p:nvPr/>
+        </p:nvSpPr>
+        <p:spPr>
+          <a:xfrm>
+            <a:off x="6199632" y="5577840"/>
+            <a:ext cx="5440680" cy="777240"/>
+          </a:xfrm>
+          <a:prstGeom prst="roundRect">
+            <a:avLst>
+              <a:gd name="adj" fmla="val 8000"/>
+            </a:avLst>
+          </a:prstGeom>
+          <a:solidFill>
+            <a:srgbClr val="E9F6EF"/>
+          </a:solidFill>
+          <a:ln>
+            <a:noFill/>
+          </a:ln>
+          <a:effectLst/>
+        </p:spPr>
+        <p:style>
+          <a:lnRef idx="1">
+            <a:schemeClr val="accent1"/>
+          </a:lnRef>
+          <a:fillRef idx="3">
+            <a:schemeClr val="accent1"/>
+          </a:fillRef>
+          <a:effectRef idx="2">
+            <a:schemeClr val="accent1"/>
+          </a:effectRef>
+          <a:fontRef idx="minor">
+            <a:schemeClr val="lt1"/>
+          </a:fontRef>
+        </p:style>
+        <p:txBody>
+          <a:bodyPr rtlCol="0" anchor="ctr"/>
+          <a:lstStyle/>
+          <a:p>
+            <a:pPr algn="ctr"/>
+          </a:p>
+        </p:txBody>
+      </p:sp>
+      <p:sp>
+        <p:nvSpPr>
+          <p:cNvPr id="10" name="Rectangle 9"/>
+          <p:cNvSpPr/>
+          <p:nvPr/>
+        </p:nvSpPr>
+        <p:spPr>
+          <a:xfrm>
+            <a:off x="6199632" y="5577840"/>
+            <a:ext cx="82296" cy="777240"/>
+          </a:xfrm>
+          <a:prstGeom prst="rect">
+            <a:avLst/>
+          </a:prstGeom>
+          <a:solidFill>
+            <a:srgbClr val="1F7A4D"/>
+          </a:solidFill>
+          <a:ln>
+            <a:noFill/>
+          </a:ln>
+          <a:effectLst/>
+        </p:spPr>
+        <p:style>
+          <a:lnRef idx="1">
+            <a:schemeClr val="accent1"/>
+          </a:lnRef>
+          <a:fillRef idx="3">
+            <a:schemeClr val="accent1"/>
+          </a:fillRef>
+          <a:effectRef idx="2">
+            <a:schemeClr val="accent1"/>
+          </a:effectRef>
+          <a:fontRef idx="minor">
+            <a:schemeClr val="lt1"/>
+          </a:fontRef>
+        </p:style>
+        <p:txBody>
+          <a:bodyPr rtlCol="0" anchor="ctr"/>
+          <a:lstStyle/>
+          <a:p>
+            <a:pPr algn="ctr"/>
+          </a:p>
+        </p:txBody>
+      </p:sp>
+      <p:sp>
+        <p:nvSpPr>
+          <p:cNvPr id="11" name="TextBox 10"/>
+          <p:cNvSpPr txBox="1"/>
+          <p:nvPr/>
+        </p:nvSpPr>
+        <p:spPr>
+          <a:xfrm>
+            <a:off x="6428232" y="5632704"/>
+            <a:ext cx="5120640" cy="658368"/>
+          </a:xfrm>
+          <a:prstGeom prst="rect">
+            <a:avLst/>
+          </a:prstGeom>
+          <a:noFill/>
+        </p:spPr>
+        <p:txBody>
+          <a:bodyPr wrap="square" anchor="t">
+            <a:spAutoFit/>
+          </a:bodyPr>
+          <a:lstStyle/>
+          <a:p>
+            <a:pPr algn="l">
+              <a:spcAft>
+                <a:spcPts val="400"/>
+              </a:spcAft>
+            </a:pPr>
+            <a:r>
+              <a:rPr sz="1050" b="1" i="0">
+                <a:solidFill>
+                  <a:srgbClr val="1F7A4D"/>
+                </a:solidFill>
+                <a:latin typeface="Segoe UI"/>
+              </a:rPr>
+              <a:t>🎯 PROJEDEKİ ROLÜ</a:t>
+            </a:r>
+          </a:p>
+          <a:p>
+            <a:pPr algn="l">
+              <a:spcAft>
+                <a:spcPts val="400"/>
+              </a:spcAft>
+            </a:pPr>
+            <a:r>
+              <a:rPr sz="1300" b="1" i="0">
+                <a:solidFill>
+                  <a:srgbClr val="1F3B57"/>
+                </a:solidFill>
+                <a:latin typeface="Segoe UI"/>
+              </a:rPr>
+              <a:t>Kazanan hiperparametre → %63,8</a:t>
+            </a:r>
+          </a:p>
+        </p:txBody>
+      </p:sp>
+      <p:sp>
+        <p:nvSpPr>
+          <p:cNvPr id="12" name="Rectangle 11"/>
           <p:cNvSpPr/>
           <p:nvPr/>
         </p:nvSpPr>
@@ -5242,7 +5822,7 @@
       </p:sp>
       <p:sp>
         <p:nvSpPr>
-          <p:cNvPr id="7" name="TextBox 6"/>
+          <p:cNvPr id="13" name="TextBox 12"/>
           <p:cNvSpPr txBox="1"/>
           <p:nvPr/>
         </p:nvSpPr>
@@ -5281,7 +5861,7 @@
       </p:sp>
       <p:sp>
         <p:nvSpPr>
-          <p:cNvPr id="8" name="TextBox 7"/>
+          <p:cNvPr id="14" name="TextBox 13"/>
           <p:cNvSpPr txBox="1"/>
           <p:nvPr/>
         </p:nvSpPr>
@@ -5495,8 +6075,8 @@
         </p:blipFill>
         <p:spPr>
           <a:xfrm>
-            <a:off x="1295247" y="1463040"/>
-            <a:ext cx="9601200" cy="4267200"/>
+            <a:off x="1706727" y="1280160"/>
+            <a:ext cx="8778240" cy="3901440"/>
           </a:xfrm>
           <a:prstGeom prst="rect">
             <a:avLst/>
@@ -5505,7 +6085,297 @@
       </p:pic>
       <p:sp>
         <p:nvSpPr>
-          <p:cNvPr id="6" name="Rectangle 5"/>
+          <p:cNvPr id="6" name="Rounded Rectangle 5"/>
+          <p:cNvSpPr/>
+          <p:nvPr/>
+        </p:nvSpPr>
+        <p:spPr>
+          <a:xfrm>
+            <a:off x="548640" y="5577840"/>
+            <a:ext cx="5440680" cy="777240"/>
+          </a:xfrm>
+          <a:prstGeom prst="roundRect">
+            <a:avLst>
+              <a:gd name="adj" fmla="val 8000"/>
+            </a:avLst>
+          </a:prstGeom>
+          <a:solidFill>
+            <a:srgbClr val="E8F1FA"/>
+          </a:solidFill>
+          <a:ln>
+            <a:noFill/>
+          </a:ln>
+          <a:effectLst/>
+        </p:spPr>
+        <p:style>
+          <a:lnRef idx="1">
+            <a:schemeClr val="accent1"/>
+          </a:lnRef>
+          <a:fillRef idx="3">
+            <a:schemeClr val="accent1"/>
+          </a:fillRef>
+          <a:effectRef idx="2">
+            <a:schemeClr val="accent1"/>
+          </a:effectRef>
+          <a:fontRef idx="minor">
+            <a:schemeClr val="lt1"/>
+          </a:fontRef>
+        </p:style>
+        <p:txBody>
+          <a:bodyPr rtlCol="0" anchor="ctr"/>
+          <a:lstStyle/>
+          <a:p>
+            <a:pPr algn="ctr"/>
+          </a:p>
+        </p:txBody>
+      </p:sp>
+      <p:sp>
+        <p:nvSpPr>
+          <p:cNvPr id="7" name="Rectangle 6"/>
+          <p:cNvSpPr/>
+          <p:nvPr/>
+        </p:nvSpPr>
+        <p:spPr>
+          <a:xfrm>
+            <a:off x="548640" y="5577840"/>
+            <a:ext cx="82296" cy="777240"/>
+          </a:xfrm>
+          <a:prstGeom prst="rect">
+            <a:avLst/>
+          </a:prstGeom>
+          <a:solidFill>
+            <a:srgbClr val="2F74C0"/>
+          </a:solidFill>
+          <a:ln>
+            <a:noFill/>
+          </a:ln>
+          <a:effectLst/>
+        </p:spPr>
+        <p:style>
+          <a:lnRef idx="1">
+            <a:schemeClr val="accent1"/>
+          </a:lnRef>
+          <a:fillRef idx="3">
+            <a:schemeClr val="accent1"/>
+          </a:fillRef>
+          <a:effectRef idx="2">
+            <a:schemeClr val="accent1"/>
+          </a:effectRef>
+          <a:fontRef idx="minor">
+            <a:schemeClr val="lt1"/>
+          </a:fontRef>
+        </p:style>
+        <p:txBody>
+          <a:bodyPr rtlCol="0" anchor="ctr"/>
+          <a:lstStyle/>
+          <a:p>
+            <a:pPr algn="ctr"/>
+          </a:p>
+        </p:txBody>
+      </p:sp>
+      <p:sp>
+        <p:nvSpPr>
+          <p:cNvPr id="8" name="TextBox 7"/>
+          <p:cNvSpPr txBox="1"/>
+          <p:nvPr/>
+        </p:nvSpPr>
+        <p:spPr>
+          <a:xfrm>
+            <a:off x="777240" y="5632704"/>
+            <a:ext cx="5120640" cy="658368"/>
+          </a:xfrm>
+          <a:prstGeom prst="rect">
+            <a:avLst/>
+          </a:prstGeom>
+          <a:noFill/>
+        </p:spPr>
+        <p:txBody>
+          <a:bodyPr wrap="square" anchor="t">
+            <a:spAutoFit/>
+          </a:bodyPr>
+          <a:lstStyle/>
+          <a:p>
+            <a:pPr algn="l">
+              <a:spcAft>
+                <a:spcPts val="400"/>
+              </a:spcAft>
+            </a:pPr>
+            <a:r>
+              <a:rPr sz="1050" b="1" i="0">
+                <a:solidFill>
+                  <a:srgbClr val="2F74C0"/>
+                </a:solidFill>
+                <a:latin typeface="Segoe UI"/>
+              </a:rPr>
+              <a:t>⚙ NASIL ÇALIŞIR</a:t>
+            </a:r>
+          </a:p>
+          <a:p>
+            <a:pPr algn="l">
+              <a:spcAft>
+                <a:spcPts val="400"/>
+              </a:spcAft>
+            </a:pPr>
+            <a:r>
+              <a:rPr sz="1300" b="1" i="0">
+                <a:solidFill>
+                  <a:srgbClr val="1F3B57"/>
+                </a:solidFill>
+                <a:latin typeface="Segoe UI"/>
+              </a:rPr>
+              <a:t>z kapısı: defterin ne kadarı güncellensin</a:t>
+            </a:r>
+          </a:p>
+        </p:txBody>
+      </p:sp>
+      <p:sp>
+        <p:nvSpPr>
+          <p:cNvPr id="9" name="Rounded Rectangle 8"/>
+          <p:cNvSpPr/>
+          <p:nvPr/>
+        </p:nvSpPr>
+        <p:spPr>
+          <a:xfrm>
+            <a:off x="6199632" y="5577840"/>
+            <a:ext cx="5440680" cy="777240"/>
+          </a:xfrm>
+          <a:prstGeom prst="roundRect">
+            <a:avLst>
+              <a:gd name="adj" fmla="val 8000"/>
+            </a:avLst>
+          </a:prstGeom>
+          <a:solidFill>
+            <a:srgbClr val="E9F6EF"/>
+          </a:solidFill>
+          <a:ln>
+            <a:noFill/>
+          </a:ln>
+          <a:effectLst/>
+        </p:spPr>
+        <p:style>
+          <a:lnRef idx="1">
+            <a:schemeClr val="accent1"/>
+          </a:lnRef>
+          <a:fillRef idx="3">
+            <a:schemeClr val="accent1"/>
+          </a:fillRef>
+          <a:effectRef idx="2">
+            <a:schemeClr val="accent1"/>
+          </a:effectRef>
+          <a:fontRef idx="minor">
+            <a:schemeClr val="lt1"/>
+          </a:fontRef>
+        </p:style>
+        <p:txBody>
+          <a:bodyPr rtlCol="0" anchor="ctr"/>
+          <a:lstStyle/>
+          <a:p>
+            <a:pPr algn="ctr"/>
+          </a:p>
+        </p:txBody>
+      </p:sp>
+      <p:sp>
+        <p:nvSpPr>
+          <p:cNvPr id="10" name="Rectangle 9"/>
+          <p:cNvSpPr/>
+          <p:nvPr/>
+        </p:nvSpPr>
+        <p:spPr>
+          <a:xfrm>
+            <a:off x="6199632" y="5577840"/>
+            <a:ext cx="82296" cy="777240"/>
+          </a:xfrm>
+          <a:prstGeom prst="rect">
+            <a:avLst/>
+          </a:prstGeom>
+          <a:solidFill>
+            <a:srgbClr val="1F7A4D"/>
+          </a:solidFill>
+          <a:ln>
+            <a:noFill/>
+          </a:ln>
+          <a:effectLst/>
+        </p:spPr>
+        <p:style>
+          <a:lnRef idx="1">
+            <a:schemeClr val="accent1"/>
+          </a:lnRef>
+          <a:fillRef idx="3">
+            <a:schemeClr val="accent1"/>
+          </a:fillRef>
+          <a:effectRef idx="2">
+            <a:schemeClr val="accent1"/>
+          </a:effectRef>
+          <a:fontRef idx="minor">
+            <a:schemeClr val="lt1"/>
+          </a:fontRef>
+        </p:style>
+        <p:txBody>
+          <a:bodyPr rtlCol="0" anchor="ctr"/>
+          <a:lstStyle/>
+          <a:p>
+            <a:pPr algn="ctr"/>
+          </a:p>
+        </p:txBody>
+      </p:sp>
+      <p:sp>
+        <p:nvSpPr>
+          <p:cNvPr id="11" name="TextBox 10"/>
+          <p:cNvSpPr txBox="1"/>
+          <p:nvPr/>
+        </p:nvSpPr>
+        <p:spPr>
+          <a:xfrm>
+            <a:off x="6428232" y="5632704"/>
+            <a:ext cx="5120640" cy="658368"/>
+          </a:xfrm>
+          <a:prstGeom prst="rect">
+            <a:avLst/>
+          </a:prstGeom>
+          <a:noFill/>
+        </p:spPr>
+        <p:txBody>
+          <a:bodyPr wrap="square" anchor="t">
+            <a:spAutoFit/>
+          </a:bodyPr>
+          <a:lstStyle/>
+          <a:p>
+            <a:pPr algn="l">
+              <a:spcAft>
+                <a:spcPts val="400"/>
+              </a:spcAft>
+            </a:pPr>
+            <a:r>
+              <a:rPr sz="1050" b="1" i="0">
+                <a:solidFill>
+                  <a:srgbClr val="1F7A4D"/>
+                </a:solidFill>
+                <a:latin typeface="Segoe UI"/>
+              </a:rPr>
+              <a:t>🎯 PROJEDEKİ ROLÜ</a:t>
+            </a:r>
+          </a:p>
+          <a:p>
+            <a:pPr algn="l">
+              <a:spcAft>
+                <a:spcPts val="400"/>
+              </a:spcAft>
+            </a:pPr>
+            <a:r>
+              <a:rPr sz="1300" b="1" i="0">
+                <a:solidFill>
+                  <a:srgbClr val="1F3B57"/>
+                </a:solidFill>
+                <a:latin typeface="Segoe UI"/>
+              </a:rPr>
+              <a:t>Duygunun zaman seyrini okur</a:t>
+            </a:r>
+          </a:p>
+        </p:txBody>
+      </p:sp>
+      <p:sp>
+        <p:nvSpPr>
+          <p:cNvPr id="12" name="Rectangle 11"/>
           <p:cNvSpPr/>
           <p:nvPr/>
         </p:nvSpPr>
@@ -5549,7 +6419,7 @@
       </p:sp>
       <p:sp>
         <p:nvSpPr>
-          <p:cNvPr id="7" name="TextBox 6"/>
+          <p:cNvPr id="13" name="TextBox 12"/>
           <p:cNvSpPr txBox="1"/>
           <p:nvPr/>
         </p:nvSpPr>
@@ -5588,7 +6458,7 @@
       </p:sp>
       <p:sp>
         <p:nvSpPr>
-          <p:cNvPr id="8" name="TextBox 7"/>
+          <p:cNvPr id="14" name="TextBox 13"/>
           <p:cNvSpPr txBox="1"/>
           <p:nvPr/>
         </p:nvSpPr>
@@ -6468,8 +7338,8 @@
         </p:blipFill>
         <p:spPr>
           <a:xfrm>
-            <a:off x="1295247" y="1645920"/>
-            <a:ext cx="9601200" cy="3840480"/>
+            <a:off x="1523847" y="1417320"/>
+            <a:ext cx="9144000" cy="3657600"/>
           </a:xfrm>
           <a:prstGeom prst="rect">
             <a:avLst/>
@@ -6478,7 +7348,297 @@
       </p:pic>
       <p:sp>
         <p:nvSpPr>
-          <p:cNvPr id="6" name="Rectangle 5"/>
+          <p:cNvPr id="6" name="Rounded Rectangle 5"/>
+          <p:cNvSpPr/>
+          <p:nvPr/>
+        </p:nvSpPr>
+        <p:spPr>
+          <a:xfrm>
+            <a:off x="548640" y="5577840"/>
+            <a:ext cx="5440680" cy="777240"/>
+          </a:xfrm>
+          <a:prstGeom prst="roundRect">
+            <a:avLst>
+              <a:gd name="adj" fmla="val 8000"/>
+            </a:avLst>
+          </a:prstGeom>
+          <a:solidFill>
+            <a:srgbClr val="E8F1FA"/>
+          </a:solidFill>
+          <a:ln>
+            <a:noFill/>
+          </a:ln>
+          <a:effectLst/>
+        </p:spPr>
+        <p:style>
+          <a:lnRef idx="1">
+            <a:schemeClr val="accent1"/>
+          </a:lnRef>
+          <a:fillRef idx="3">
+            <a:schemeClr val="accent1"/>
+          </a:fillRef>
+          <a:effectRef idx="2">
+            <a:schemeClr val="accent1"/>
+          </a:effectRef>
+          <a:fontRef idx="minor">
+            <a:schemeClr val="lt1"/>
+          </a:fontRef>
+        </p:style>
+        <p:txBody>
+          <a:bodyPr rtlCol="0" anchor="ctr"/>
+          <a:lstStyle/>
+          <a:p>
+            <a:pPr algn="ctr"/>
+          </a:p>
+        </p:txBody>
+      </p:sp>
+      <p:sp>
+        <p:nvSpPr>
+          <p:cNvPr id="7" name="Rectangle 6"/>
+          <p:cNvSpPr/>
+          <p:nvPr/>
+        </p:nvSpPr>
+        <p:spPr>
+          <a:xfrm>
+            <a:off x="548640" y="5577840"/>
+            <a:ext cx="82296" cy="777240"/>
+          </a:xfrm>
+          <a:prstGeom prst="rect">
+            <a:avLst/>
+          </a:prstGeom>
+          <a:solidFill>
+            <a:srgbClr val="2F74C0"/>
+          </a:solidFill>
+          <a:ln>
+            <a:noFill/>
+          </a:ln>
+          <a:effectLst/>
+        </p:spPr>
+        <p:style>
+          <a:lnRef idx="1">
+            <a:schemeClr val="accent1"/>
+          </a:lnRef>
+          <a:fillRef idx="3">
+            <a:schemeClr val="accent1"/>
+          </a:fillRef>
+          <a:effectRef idx="2">
+            <a:schemeClr val="accent1"/>
+          </a:effectRef>
+          <a:fontRef idx="minor">
+            <a:schemeClr val="lt1"/>
+          </a:fontRef>
+        </p:style>
+        <p:txBody>
+          <a:bodyPr rtlCol="0" anchor="ctr"/>
+          <a:lstStyle/>
+          <a:p>
+            <a:pPr algn="ctr"/>
+          </a:p>
+        </p:txBody>
+      </p:sp>
+      <p:sp>
+        <p:nvSpPr>
+          <p:cNvPr id="8" name="TextBox 7"/>
+          <p:cNvSpPr txBox="1"/>
+          <p:nvPr/>
+        </p:nvSpPr>
+        <p:spPr>
+          <a:xfrm>
+            <a:off x="777240" y="5632704"/>
+            <a:ext cx="5120640" cy="658368"/>
+          </a:xfrm>
+          <a:prstGeom prst="rect">
+            <a:avLst/>
+          </a:prstGeom>
+          <a:noFill/>
+        </p:spPr>
+        <p:txBody>
+          <a:bodyPr wrap="square" anchor="t">
+            <a:spAutoFit/>
+          </a:bodyPr>
+          <a:lstStyle/>
+          <a:p>
+            <a:pPr algn="l">
+              <a:spcAft>
+                <a:spcPts val="400"/>
+              </a:spcAft>
+            </a:pPr>
+            <a:r>
+              <a:rPr sz="1050" b="1" i="0">
+                <a:solidFill>
+                  <a:srgbClr val="2F74C0"/>
+                </a:solidFill>
+                <a:latin typeface="Segoe UI"/>
+              </a:rPr>
+              <a:t>⚙ NASIL ÇALIŞIR</a:t>
+            </a:r>
+          </a:p>
+          <a:p>
+            <a:pPr algn="l">
+              <a:spcAft>
+                <a:spcPts val="400"/>
+              </a:spcAft>
+            </a:pPr>
+            <a:r>
+              <a:rPr sz="1300" b="1" i="0">
+                <a:solidFill>
+                  <a:srgbClr val="1F3B57"/>
+                </a:solidFill>
+                <a:latin typeface="Segoe UI"/>
+              </a:rPr>
+              <a:t>w = n/(6·n_k): az sınıfa büyük ağırlık</a:t>
+            </a:r>
+          </a:p>
+        </p:txBody>
+      </p:sp>
+      <p:sp>
+        <p:nvSpPr>
+          <p:cNvPr id="9" name="Rounded Rectangle 8"/>
+          <p:cNvSpPr/>
+          <p:nvPr/>
+        </p:nvSpPr>
+        <p:spPr>
+          <a:xfrm>
+            <a:off x="6199632" y="5577840"/>
+            <a:ext cx="5440680" cy="777240"/>
+          </a:xfrm>
+          <a:prstGeom prst="roundRect">
+            <a:avLst>
+              <a:gd name="adj" fmla="val 8000"/>
+            </a:avLst>
+          </a:prstGeom>
+          <a:solidFill>
+            <a:srgbClr val="E9F6EF"/>
+          </a:solidFill>
+          <a:ln>
+            <a:noFill/>
+          </a:ln>
+          <a:effectLst/>
+        </p:spPr>
+        <p:style>
+          <a:lnRef idx="1">
+            <a:schemeClr val="accent1"/>
+          </a:lnRef>
+          <a:fillRef idx="3">
+            <a:schemeClr val="accent1"/>
+          </a:fillRef>
+          <a:effectRef idx="2">
+            <a:schemeClr val="accent1"/>
+          </a:effectRef>
+          <a:fontRef idx="minor">
+            <a:schemeClr val="lt1"/>
+          </a:fontRef>
+        </p:style>
+        <p:txBody>
+          <a:bodyPr rtlCol="0" anchor="ctr"/>
+          <a:lstStyle/>
+          <a:p>
+            <a:pPr algn="ctr"/>
+          </a:p>
+        </p:txBody>
+      </p:sp>
+      <p:sp>
+        <p:nvSpPr>
+          <p:cNvPr id="10" name="Rectangle 9"/>
+          <p:cNvSpPr/>
+          <p:nvPr/>
+        </p:nvSpPr>
+        <p:spPr>
+          <a:xfrm>
+            <a:off x="6199632" y="5577840"/>
+            <a:ext cx="82296" cy="777240"/>
+          </a:xfrm>
+          <a:prstGeom prst="rect">
+            <a:avLst/>
+          </a:prstGeom>
+          <a:solidFill>
+            <a:srgbClr val="1F7A4D"/>
+          </a:solidFill>
+          <a:ln>
+            <a:noFill/>
+          </a:ln>
+          <a:effectLst/>
+        </p:spPr>
+        <p:style>
+          <a:lnRef idx="1">
+            <a:schemeClr val="accent1"/>
+          </a:lnRef>
+          <a:fillRef idx="3">
+            <a:schemeClr val="accent1"/>
+          </a:fillRef>
+          <a:effectRef idx="2">
+            <a:schemeClr val="accent1"/>
+          </a:effectRef>
+          <a:fontRef idx="minor">
+            <a:schemeClr val="lt1"/>
+          </a:fontRef>
+        </p:style>
+        <p:txBody>
+          <a:bodyPr rtlCol="0" anchor="ctr"/>
+          <a:lstStyle/>
+          <a:p>
+            <a:pPr algn="ctr"/>
+          </a:p>
+        </p:txBody>
+      </p:sp>
+      <p:sp>
+        <p:nvSpPr>
+          <p:cNvPr id="11" name="TextBox 10"/>
+          <p:cNvSpPr txBox="1"/>
+          <p:nvPr/>
+        </p:nvSpPr>
+        <p:spPr>
+          <a:xfrm>
+            <a:off x="6428232" y="5632704"/>
+            <a:ext cx="5120640" cy="658368"/>
+          </a:xfrm>
+          <a:prstGeom prst="rect">
+            <a:avLst/>
+          </a:prstGeom>
+          <a:noFill/>
+        </p:spPr>
+        <p:txBody>
+          <a:bodyPr wrap="square" anchor="t">
+            <a:spAutoFit/>
+          </a:bodyPr>
+          <a:lstStyle/>
+          <a:p>
+            <a:pPr algn="l">
+              <a:spcAft>
+                <a:spcPts val="400"/>
+              </a:spcAft>
+            </a:pPr>
+            <a:r>
+              <a:rPr sz="1050" b="1" i="0">
+                <a:solidFill>
+                  <a:srgbClr val="1F7A4D"/>
+                </a:solidFill>
+                <a:latin typeface="Segoe UI"/>
+              </a:rPr>
+              <a:t>🎯 PROJEDEKİ ROLÜ</a:t>
+            </a:r>
+          </a:p>
+          <a:p>
+            <a:pPr algn="l">
+              <a:spcAft>
+                <a:spcPts val="400"/>
+              </a:spcAft>
+            </a:pPr>
+            <a:r>
+              <a:rPr sz="1300" b="1" i="0">
+                <a:solidFill>
+                  <a:srgbClr val="1F3B57"/>
+                </a:solidFill>
+                <a:latin typeface="Segoe UI"/>
+              </a:rPr>
+              <a:t>Nötr ihmalini engelledi (w=1,14)</a:t>
+            </a:r>
+          </a:p>
+        </p:txBody>
+      </p:sp>
+      <p:sp>
+        <p:nvSpPr>
+          <p:cNvPr id="12" name="Rectangle 11"/>
           <p:cNvSpPr/>
           <p:nvPr/>
         </p:nvSpPr>
@@ -6522,7 +7682,7 @@
       </p:sp>
       <p:sp>
         <p:nvSpPr>
-          <p:cNvPr id="7" name="TextBox 6"/>
+          <p:cNvPr id="13" name="TextBox 12"/>
           <p:cNvSpPr txBox="1"/>
           <p:nvPr/>
         </p:nvSpPr>
@@ -6561,7 +7721,7 @@
       </p:sp>
       <p:sp>
         <p:nvSpPr>
-          <p:cNvPr id="8" name="TextBox 7"/>
+          <p:cNvPr id="14" name="TextBox 13"/>
           <p:cNvSpPr txBox="1"/>
           <p:nvPr/>
         </p:nvSpPr>
@@ -6775,8 +7935,8 @@
         </p:blipFill>
         <p:spPr>
           <a:xfrm>
-            <a:off x="1295247" y="1645920"/>
-            <a:ext cx="9601200" cy="3627120"/>
+            <a:off x="1432407" y="1371600"/>
+            <a:ext cx="9326880" cy="3523488"/>
           </a:xfrm>
           <a:prstGeom prst="rect">
             <a:avLst/>
@@ -6785,7 +7945,297 @@
       </p:pic>
       <p:sp>
         <p:nvSpPr>
-          <p:cNvPr id="6" name="Rectangle 5"/>
+          <p:cNvPr id="6" name="Rounded Rectangle 5"/>
+          <p:cNvSpPr/>
+          <p:nvPr/>
+        </p:nvSpPr>
+        <p:spPr>
+          <a:xfrm>
+            <a:off x="548640" y="5577840"/>
+            <a:ext cx="5440680" cy="777240"/>
+          </a:xfrm>
+          <a:prstGeom prst="roundRect">
+            <a:avLst>
+              <a:gd name="adj" fmla="val 8000"/>
+            </a:avLst>
+          </a:prstGeom>
+          <a:solidFill>
+            <a:srgbClr val="E8F1FA"/>
+          </a:solidFill>
+          <a:ln>
+            <a:noFill/>
+          </a:ln>
+          <a:effectLst/>
+        </p:spPr>
+        <p:style>
+          <a:lnRef idx="1">
+            <a:schemeClr val="accent1"/>
+          </a:lnRef>
+          <a:fillRef idx="3">
+            <a:schemeClr val="accent1"/>
+          </a:fillRef>
+          <a:effectRef idx="2">
+            <a:schemeClr val="accent1"/>
+          </a:effectRef>
+          <a:fontRef idx="minor">
+            <a:schemeClr val="lt1"/>
+          </a:fontRef>
+        </p:style>
+        <p:txBody>
+          <a:bodyPr rtlCol="0" anchor="ctr"/>
+          <a:lstStyle/>
+          <a:p>
+            <a:pPr algn="ctr"/>
+          </a:p>
+        </p:txBody>
+      </p:sp>
+      <p:sp>
+        <p:nvSpPr>
+          <p:cNvPr id="7" name="Rectangle 6"/>
+          <p:cNvSpPr/>
+          <p:nvPr/>
+        </p:nvSpPr>
+        <p:spPr>
+          <a:xfrm>
+            <a:off x="548640" y="5577840"/>
+            <a:ext cx="82296" cy="777240"/>
+          </a:xfrm>
+          <a:prstGeom prst="rect">
+            <a:avLst/>
+          </a:prstGeom>
+          <a:solidFill>
+            <a:srgbClr val="2F74C0"/>
+          </a:solidFill>
+          <a:ln>
+            <a:noFill/>
+          </a:ln>
+          <a:effectLst/>
+        </p:spPr>
+        <p:style>
+          <a:lnRef idx="1">
+            <a:schemeClr val="accent1"/>
+          </a:lnRef>
+          <a:fillRef idx="3">
+            <a:schemeClr val="accent1"/>
+          </a:fillRef>
+          <a:effectRef idx="2">
+            <a:schemeClr val="accent1"/>
+          </a:effectRef>
+          <a:fontRef idx="minor">
+            <a:schemeClr val="lt1"/>
+          </a:fontRef>
+        </p:style>
+        <p:txBody>
+          <a:bodyPr rtlCol="0" anchor="ctr"/>
+          <a:lstStyle/>
+          <a:p>
+            <a:pPr algn="ctr"/>
+          </a:p>
+        </p:txBody>
+      </p:sp>
+      <p:sp>
+        <p:nvSpPr>
+          <p:cNvPr id="8" name="TextBox 7"/>
+          <p:cNvSpPr txBox="1"/>
+          <p:nvPr/>
+        </p:nvSpPr>
+        <p:spPr>
+          <a:xfrm>
+            <a:off x="777240" y="5632704"/>
+            <a:ext cx="5120640" cy="658368"/>
+          </a:xfrm>
+          <a:prstGeom prst="rect">
+            <a:avLst/>
+          </a:prstGeom>
+          <a:noFill/>
+        </p:spPr>
+        <p:txBody>
+          <a:bodyPr wrap="square" anchor="t">
+            <a:spAutoFit/>
+          </a:bodyPr>
+          <a:lstStyle/>
+          <a:p>
+            <a:pPr algn="l">
+              <a:spcAft>
+                <a:spcPts val="400"/>
+              </a:spcAft>
+            </a:pPr>
+            <a:r>
+              <a:rPr sz="1050" b="1" i="0">
+                <a:solidFill>
+                  <a:srgbClr val="2F74C0"/>
+                </a:solidFill>
+                <a:latin typeface="Segoe UI"/>
+              </a:rPr>
+              <a:t>⚙ NASIL ÇALIŞIR</a:t>
+            </a:r>
+          </a:p>
+          <a:p>
+            <a:pPr algn="l">
+              <a:spcAft>
+                <a:spcPts val="400"/>
+              </a:spcAft>
+            </a:pPr>
+            <a:r>
+              <a:rPr sz="1300" b="1" i="0">
+                <a:solidFill>
+                  <a:srgbClr val="1F3B57"/>
+                </a:solidFill>
+                <a:latin typeface="Segoe UI"/>
+              </a:rPr>
+              <a:t>e^puan / toplam → %100 dağılım</a:t>
+            </a:r>
+          </a:p>
+        </p:txBody>
+      </p:sp>
+      <p:sp>
+        <p:nvSpPr>
+          <p:cNvPr id="9" name="Rounded Rectangle 8"/>
+          <p:cNvSpPr/>
+          <p:nvPr/>
+        </p:nvSpPr>
+        <p:spPr>
+          <a:xfrm>
+            <a:off x="6199632" y="5577840"/>
+            <a:ext cx="5440680" cy="777240"/>
+          </a:xfrm>
+          <a:prstGeom prst="roundRect">
+            <a:avLst>
+              <a:gd name="adj" fmla="val 8000"/>
+            </a:avLst>
+          </a:prstGeom>
+          <a:solidFill>
+            <a:srgbClr val="E9F6EF"/>
+          </a:solidFill>
+          <a:ln>
+            <a:noFill/>
+          </a:ln>
+          <a:effectLst/>
+        </p:spPr>
+        <p:style>
+          <a:lnRef idx="1">
+            <a:schemeClr val="accent1"/>
+          </a:lnRef>
+          <a:fillRef idx="3">
+            <a:schemeClr val="accent1"/>
+          </a:fillRef>
+          <a:effectRef idx="2">
+            <a:schemeClr val="accent1"/>
+          </a:effectRef>
+          <a:fontRef idx="minor">
+            <a:schemeClr val="lt1"/>
+          </a:fontRef>
+        </p:style>
+        <p:txBody>
+          <a:bodyPr rtlCol="0" anchor="ctr"/>
+          <a:lstStyle/>
+          <a:p>
+            <a:pPr algn="ctr"/>
+          </a:p>
+        </p:txBody>
+      </p:sp>
+      <p:sp>
+        <p:nvSpPr>
+          <p:cNvPr id="10" name="Rectangle 9"/>
+          <p:cNvSpPr/>
+          <p:nvPr/>
+        </p:nvSpPr>
+        <p:spPr>
+          <a:xfrm>
+            <a:off x="6199632" y="5577840"/>
+            <a:ext cx="82296" cy="777240"/>
+          </a:xfrm>
+          <a:prstGeom prst="rect">
+            <a:avLst/>
+          </a:prstGeom>
+          <a:solidFill>
+            <a:srgbClr val="1F7A4D"/>
+          </a:solidFill>
+          <a:ln>
+            <a:noFill/>
+          </a:ln>
+          <a:effectLst/>
+        </p:spPr>
+        <p:style>
+          <a:lnRef idx="1">
+            <a:schemeClr val="accent1"/>
+          </a:lnRef>
+          <a:fillRef idx="3">
+            <a:schemeClr val="accent1"/>
+          </a:fillRef>
+          <a:effectRef idx="2">
+            <a:schemeClr val="accent1"/>
+          </a:effectRef>
+          <a:fontRef idx="minor">
+            <a:schemeClr val="lt1"/>
+          </a:fontRef>
+        </p:style>
+        <p:txBody>
+          <a:bodyPr rtlCol="0" anchor="ctr"/>
+          <a:lstStyle/>
+          <a:p>
+            <a:pPr algn="ctr"/>
+          </a:p>
+        </p:txBody>
+      </p:sp>
+      <p:sp>
+        <p:nvSpPr>
+          <p:cNvPr id="11" name="TextBox 10"/>
+          <p:cNvSpPr txBox="1"/>
+          <p:nvPr/>
+        </p:nvSpPr>
+        <p:spPr>
+          <a:xfrm>
+            <a:off x="6428232" y="5632704"/>
+            <a:ext cx="5120640" cy="658368"/>
+          </a:xfrm>
+          <a:prstGeom prst="rect">
+            <a:avLst/>
+          </a:prstGeom>
+          <a:noFill/>
+        </p:spPr>
+        <p:txBody>
+          <a:bodyPr wrap="square" anchor="t">
+            <a:spAutoFit/>
+          </a:bodyPr>
+          <a:lstStyle/>
+          <a:p>
+            <a:pPr algn="l">
+              <a:spcAft>
+                <a:spcPts val="400"/>
+              </a:spcAft>
+            </a:pPr>
+            <a:r>
+              <a:rPr sz="1050" b="1" i="0">
+                <a:solidFill>
+                  <a:srgbClr val="1F7A4D"/>
+                </a:solidFill>
+                <a:latin typeface="Segoe UI"/>
+              </a:rPr>
+              <a:t>🎯 PROJEDEKİ ROLÜ</a:t>
+            </a:r>
+          </a:p>
+          <a:p>
+            <a:pPr algn="l">
+              <a:spcAft>
+                <a:spcPts val="400"/>
+              </a:spcAft>
+            </a:pPr>
+            <a:r>
+              <a:rPr sz="1300" b="1" i="0">
+                <a:solidFill>
+                  <a:srgbClr val="1F3B57"/>
+                </a:solidFill>
+                <a:latin typeface="Segoe UI"/>
+              </a:rPr>
+              <a:t>6 duygu olasılığı; en yüksek = tahmin</a:t>
+            </a:r>
+          </a:p>
+        </p:txBody>
+      </p:sp>
+      <p:sp>
+        <p:nvSpPr>
+          <p:cNvPr id="12" name="Rectangle 11"/>
           <p:cNvSpPr/>
           <p:nvPr/>
         </p:nvSpPr>
@@ -6829,7 +8279,7 @@
       </p:sp>
       <p:sp>
         <p:nvSpPr>
-          <p:cNvPr id="7" name="TextBox 6"/>
+          <p:cNvPr id="13" name="TextBox 12"/>
           <p:cNvSpPr txBox="1"/>
           <p:nvPr/>
         </p:nvSpPr>
@@ -6868,7 +8318,7 @@
       </p:sp>
       <p:sp>
         <p:nvSpPr>
-          <p:cNvPr id="8" name="TextBox 7"/>
+          <p:cNvPr id="14" name="TextBox 13"/>
           <p:cNvSpPr txBox="1"/>
           <p:nvPr/>
         </p:nvSpPr>
@@ -8275,8 +9725,8 @@
         </p:blipFill>
         <p:spPr>
           <a:xfrm>
-            <a:off x="1066647" y="1554480"/>
-            <a:ext cx="10058400" cy="4023360"/>
+            <a:off x="1340967" y="1371600"/>
+            <a:ext cx="9509760" cy="3803904"/>
           </a:xfrm>
           <a:prstGeom prst="rect">
             <a:avLst/>
@@ -8285,7 +9735,297 @@
       </p:pic>
       <p:sp>
         <p:nvSpPr>
-          <p:cNvPr id="6" name="Rectangle 5"/>
+          <p:cNvPr id="6" name="Rounded Rectangle 5"/>
+          <p:cNvSpPr/>
+          <p:nvPr/>
+        </p:nvSpPr>
+        <p:spPr>
+          <a:xfrm>
+            <a:off x="548640" y="5577840"/>
+            <a:ext cx="5440680" cy="777240"/>
+          </a:xfrm>
+          <a:prstGeom prst="roundRect">
+            <a:avLst>
+              <a:gd name="adj" fmla="val 8000"/>
+            </a:avLst>
+          </a:prstGeom>
+          <a:solidFill>
+            <a:srgbClr val="E8F1FA"/>
+          </a:solidFill>
+          <a:ln>
+            <a:noFill/>
+          </a:ln>
+          <a:effectLst/>
+        </p:spPr>
+        <p:style>
+          <a:lnRef idx="1">
+            <a:schemeClr val="accent1"/>
+          </a:lnRef>
+          <a:fillRef idx="3">
+            <a:schemeClr val="accent1"/>
+          </a:fillRef>
+          <a:effectRef idx="2">
+            <a:schemeClr val="accent1"/>
+          </a:effectRef>
+          <a:fontRef idx="minor">
+            <a:schemeClr val="lt1"/>
+          </a:fontRef>
+        </p:style>
+        <p:txBody>
+          <a:bodyPr rtlCol="0" anchor="ctr"/>
+          <a:lstStyle/>
+          <a:p>
+            <a:pPr algn="ctr"/>
+          </a:p>
+        </p:txBody>
+      </p:sp>
+      <p:sp>
+        <p:nvSpPr>
+          <p:cNvPr id="7" name="Rectangle 6"/>
+          <p:cNvSpPr/>
+          <p:nvPr/>
+        </p:nvSpPr>
+        <p:spPr>
+          <a:xfrm>
+            <a:off x="548640" y="5577840"/>
+            <a:ext cx="82296" cy="777240"/>
+          </a:xfrm>
+          <a:prstGeom prst="rect">
+            <a:avLst/>
+          </a:prstGeom>
+          <a:solidFill>
+            <a:srgbClr val="2F74C0"/>
+          </a:solidFill>
+          <a:ln>
+            <a:noFill/>
+          </a:ln>
+          <a:effectLst/>
+        </p:spPr>
+        <p:style>
+          <a:lnRef idx="1">
+            <a:schemeClr val="accent1"/>
+          </a:lnRef>
+          <a:fillRef idx="3">
+            <a:schemeClr val="accent1"/>
+          </a:fillRef>
+          <a:effectRef idx="2">
+            <a:schemeClr val="accent1"/>
+          </a:effectRef>
+          <a:fontRef idx="minor">
+            <a:schemeClr val="lt1"/>
+          </a:fontRef>
+        </p:style>
+        <p:txBody>
+          <a:bodyPr rtlCol="0" anchor="ctr"/>
+          <a:lstStyle/>
+          <a:p>
+            <a:pPr algn="ctr"/>
+          </a:p>
+        </p:txBody>
+      </p:sp>
+      <p:sp>
+        <p:nvSpPr>
+          <p:cNvPr id="8" name="TextBox 7"/>
+          <p:cNvSpPr txBox="1"/>
+          <p:nvPr/>
+        </p:nvSpPr>
+        <p:spPr>
+          <a:xfrm>
+            <a:off x="777240" y="5632704"/>
+            <a:ext cx="5120640" cy="658368"/>
+          </a:xfrm>
+          <a:prstGeom prst="rect">
+            <a:avLst/>
+          </a:prstGeom>
+          <a:noFill/>
+        </p:spPr>
+        <p:txBody>
+          <a:bodyPr wrap="square" anchor="t">
+            <a:spAutoFit/>
+          </a:bodyPr>
+          <a:lstStyle/>
+          <a:p>
+            <a:pPr algn="l">
+              <a:spcAft>
+                <a:spcPts val="400"/>
+              </a:spcAft>
+            </a:pPr>
+            <a:r>
+              <a:rPr sz="1050" b="1" i="0">
+                <a:solidFill>
+                  <a:srgbClr val="2F74C0"/>
+                </a:solidFill>
+                <a:latin typeface="Segoe UI"/>
+              </a:rPr>
+              <a:t>⚙ NASIL ÇALIŞIR</a:t>
+            </a:r>
+          </a:p>
+          <a:p>
+            <a:pPr algn="l">
+              <a:spcAft>
+                <a:spcPts val="400"/>
+              </a:spcAft>
+            </a:pPr>
+            <a:r>
+              <a:rPr sz="1300" b="1" i="0">
+                <a:solidFill>
+                  <a:srgbClr val="1F3B57"/>
+                </a:solidFill>
+                <a:latin typeface="Segoe UI"/>
+              </a:rPr>
+              <a:t>8 epoch iyileşme yok → dur, ★'a dön</a:t>
+            </a:r>
+          </a:p>
+        </p:txBody>
+      </p:sp>
+      <p:sp>
+        <p:nvSpPr>
+          <p:cNvPr id="9" name="Rounded Rectangle 8"/>
+          <p:cNvSpPr/>
+          <p:nvPr/>
+        </p:nvSpPr>
+        <p:spPr>
+          <a:xfrm>
+            <a:off x="6199632" y="5577840"/>
+            <a:ext cx="5440680" cy="777240"/>
+          </a:xfrm>
+          <a:prstGeom prst="roundRect">
+            <a:avLst>
+              <a:gd name="adj" fmla="val 8000"/>
+            </a:avLst>
+          </a:prstGeom>
+          <a:solidFill>
+            <a:srgbClr val="E9F6EF"/>
+          </a:solidFill>
+          <a:ln>
+            <a:noFill/>
+          </a:ln>
+          <a:effectLst/>
+        </p:spPr>
+        <p:style>
+          <a:lnRef idx="1">
+            <a:schemeClr val="accent1"/>
+          </a:lnRef>
+          <a:fillRef idx="3">
+            <a:schemeClr val="accent1"/>
+          </a:fillRef>
+          <a:effectRef idx="2">
+            <a:schemeClr val="accent1"/>
+          </a:effectRef>
+          <a:fontRef idx="minor">
+            <a:schemeClr val="lt1"/>
+          </a:fontRef>
+        </p:style>
+        <p:txBody>
+          <a:bodyPr rtlCol="0" anchor="ctr"/>
+          <a:lstStyle/>
+          <a:p>
+            <a:pPr algn="ctr"/>
+          </a:p>
+        </p:txBody>
+      </p:sp>
+      <p:sp>
+        <p:nvSpPr>
+          <p:cNvPr id="10" name="Rectangle 9"/>
+          <p:cNvSpPr/>
+          <p:nvPr/>
+        </p:nvSpPr>
+        <p:spPr>
+          <a:xfrm>
+            <a:off x="6199632" y="5577840"/>
+            <a:ext cx="82296" cy="777240"/>
+          </a:xfrm>
+          <a:prstGeom prst="rect">
+            <a:avLst/>
+          </a:prstGeom>
+          <a:solidFill>
+            <a:srgbClr val="1F7A4D"/>
+          </a:solidFill>
+          <a:ln>
+            <a:noFill/>
+          </a:ln>
+          <a:effectLst/>
+        </p:spPr>
+        <p:style>
+          <a:lnRef idx="1">
+            <a:schemeClr val="accent1"/>
+          </a:lnRef>
+          <a:fillRef idx="3">
+            <a:schemeClr val="accent1"/>
+          </a:fillRef>
+          <a:effectRef idx="2">
+            <a:schemeClr val="accent1"/>
+          </a:effectRef>
+          <a:fontRef idx="minor">
+            <a:schemeClr val="lt1"/>
+          </a:fontRef>
+        </p:style>
+        <p:txBody>
+          <a:bodyPr rtlCol="0" anchor="ctr"/>
+          <a:lstStyle/>
+          <a:p>
+            <a:pPr algn="ctr"/>
+          </a:p>
+        </p:txBody>
+      </p:sp>
+      <p:sp>
+        <p:nvSpPr>
+          <p:cNvPr id="11" name="TextBox 10"/>
+          <p:cNvSpPr txBox="1"/>
+          <p:nvPr/>
+        </p:nvSpPr>
+        <p:spPr>
+          <a:xfrm>
+            <a:off x="6428232" y="5632704"/>
+            <a:ext cx="5120640" cy="658368"/>
+          </a:xfrm>
+          <a:prstGeom prst="rect">
+            <a:avLst/>
+          </a:prstGeom>
+          <a:noFill/>
+        </p:spPr>
+        <p:txBody>
+          <a:bodyPr wrap="square" anchor="t">
+            <a:spAutoFit/>
+          </a:bodyPr>
+          <a:lstStyle/>
+          <a:p>
+            <a:pPr algn="l">
+              <a:spcAft>
+                <a:spcPts val="400"/>
+              </a:spcAft>
+            </a:pPr>
+            <a:r>
+              <a:rPr sz="1050" b="1" i="0">
+                <a:solidFill>
+                  <a:srgbClr val="1F7A4D"/>
+                </a:solidFill>
+                <a:latin typeface="Segoe UI"/>
+              </a:rPr>
+              <a:t>🎯 PROJEDEKİ ROLÜ</a:t>
+            </a:r>
+          </a:p>
+          <a:p>
+            <a:pPr algn="l">
+              <a:spcAft>
+                <a:spcPts val="400"/>
+              </a:spcAft>
+            </a:pPr>
+            <a:r>
+              <a:rPr sz="1300" b="1" i="0">
+                <a:solidFill>
+                  <a:srgbClr val="1F3B57"/>
+                </a:solidFill>
+                <a:latin typeface="Segoe UI"/>
+              </a:rPr>
+              <a:t>Ezberi kesti (CNN: 37 koştu, 29 seçildi)</a:t>
+            </a:r>
+          </a:p>
+        </p:txBody>
+      </p:sp>
+      <p:sp>
+        <p:nvSpPr>
+          <p:cNvPr id="12" name="Rectangle 11"/>
           <p:cNvSpPr/>
           <p:nvPr/>
         </p:nvSpPr>
@@ -8329,7 +10069,7 @@
       </p:sp>
       <p:sp>
         <p:nvSpPr>
-          <p:cNvPr id="7" name="TextBox 6"/>
+          <p:cNvPr id="13" name="TextBox 12"/>
           <p:cNvSpPr txBox="1"/>
           <p:nvPr/>
         </p:nvSpPr>
@@ -8368,7 +10108,7 @@
       </p:sp>
       <p:sp>
         <p:nvSpPr>
-          <p:cNvPr id="8" name="TextBox 7"/>
+          <p:cNvPr id="14" name="TextBox 13"/>
           <p:cNvSpPr txBox="1"/>
           <p:nvPr/>
         </p:nvSpPr>
@@ -9662,8 +11402,8 @@
         </p:blipFill>
         <p:spPr>
           <a:xfrm>
-            <a:off x="1295247" y="1645920"/>
-            <a:ext cx="9601200" cy="3627120"/>
+            <a:off x="1523847" y="1371600"/>
+            <a:ext cx="9144000" cy="3454400"/>
           </a:xfrm>
           <a:prstGeom prst="rect">
             <a:avLst/>
@@ -9672,7 +11412,297 @@
       </p:pic>
       <p:sp>
         <p:nvSpPr>
-          <p:cNvPr id="6" name="Rectangle 5"/>
+          <p:cNvPr id="6" name="Rounded Rectangle 5"/>
+          <p:cNvSpPr/>
+          <p:nvPr/>
+        </p:nvSpPr>
+        <p:spPr>
+          <a:xfrm>
+            <a:off x="548640" y="5577840"/>
+            <a:ext cx="5440680" cy="777240"/>
+          </a:xfrm>
+          <a:prstGeom prst="roundRect">
+            <a:avLst>
+              <a:gd name="adj" fmla="val 8000"/>
+            </a:avLst>
+          </a:prstGeom>
+          <a:solidFill>
+            <a:srgbClr val="E8F1FA"/>
+          </a:solidFill>
+          <a:ln>
+            <a:noFill/>
+          </a:ln>
+          <a:effectLst/>
+        </p:spPr>
+        <p:style>
+          <a:lnRef idx="1">
+            <a:schemeClr val="accent1"/>
+          </a:lnRef>
+          <a:fillRef idx="3">
+            <a:schemeClr val="accent1"/>
+          </a:fillRef>
+          <a:effectRef idx="2">
+            <a:schemeClr val="accent1"/>
+          </a:effectRef>
+          <a:fontRef idx="minor">
+            <a:schemeClr val="lt1"/>
+          </a:fontRef>
+        </p:style>
+        <p:txBody>
+          <a:bodyPr rtlCol="0" anchor="ctr"/>
+          <a:lstStyle/>
+          <a:p>
+            <a:pPr algn="ctr"/>
+          </a:p>
+        </p:txBody>
+      </p:sp>
+      <p:sp>
+        <p:nvSpPr>
+          <p:cNvPr id="7" name="Rectangle 6"/>
+          <p:cNvSpPr/>
+          <p:nvPr/>
+        </p:nvSpPr>
+        <p:spPr>
+          <a:xfrm>
+            <a:off x="548640" y="5577840"/>
+            <a:ext cx="82296" cy="777240"/>
+          </a:xfrm>
+          <a:prstGeom prst="rect">
+            <a:avLst/>
+          </a:prstGeom>
+          <a:solidFill>
+            <a:srgbClr val="2F74C0"/>
+          </a:solidFill>
+          <a:ln>
+            <a:noFill/>
+          </a:ln>
+          <a:effectLst/>
+        </p:spPr>
+        <p:style>
+          <a:lnRef idx="1">
+            <a:schemeClr val="accent1"/>
+          </a:lnRef>
+          <a:fillRef idx="3">
+            <a:schemeClr val="accent1"/>
+          </a:fillRef>
+          <a:effectRef idx="2">
+            <a:schemeClr val="accent1"/>
+          </a:effectRef>
+          <a:fontRef idx="minor">
+            <a:schemeClr val="lt1"/>
+          </a:fontRef>
+        </p:style>
+        <p:txBody>
+          <a:bodyPr rtlCol="0" anchor="ctr"/>
+          <a:lstStyle/>
+          <a:p>
+            <a:pPr algn="ctr"/>
+          </a:p>
+        </p:txBody>
+      </p:sp>
+      <p:sp>
+        <p:nvSpPr>
+          <p:cNvPr id="8" name="TextBox 7"/>
+          <p:cNvSpPr txBox="1"/>
+          <p:nvPr/>
+        </p:nvSpPr>
+        <p:spPr>
+          <a:xfrm>
+            <a:off x="777240" y="5632704"/>
+            <a:ext cx="5120640" cy="658368"/>
+          </a:xfrm>
+          <a:prstGeom prst="rect">
+            <a:avLst/>
+          </a:prstGeom>
+          <a:noFill/>
+        </p:spPr>
+        <p:txBody>
+          <a:bodyPr wrap="square" anchor="t">
+            <a:spAutoFit/>
+          </a:bodyPr>
+          <a:lstStyle/>
+          <a:p>
+            <a:pPr algn="l">
+              <a:spcAft>
+                <a:spcPts val="400"/>
+              </a:spcAft>
+            </a:pPr>
+            <a:r>
+              <a:rPr sz="1050" b="1" i="0">
+                <a:solidFill>
+                  <a:srgbClr val="2F74C0"/>
+                </a:solidFill>
+                <a:latin typeface="Segoe UI"/>
+              </a:rPr>
+              <a:t>⚙ NASIL ÇALIŞIR</a:t>
+            </a:r>
+          </a:p>
+          <a:p>
+            <a:pPr algn="l">
+              <a:spcAft>
+                <a:spcPts val="400"/>
+              </a:spcAft>
+            </a:pPr>
+            <a:r>
+              <a:rPr sz="1300" b="1" i="0">
+                <a:solidFill>
+                  <a:srgbClr val="1F3B57"/>
+                </a:solidFill>
+                <a:latin typeface="Segoe UI"/>
+              </a:rPr>
+              <a:t>Doğruluk çoğunluğa kanar</a:t>
+            </a:r>
+          </a:p>
+        </p:txBody>
+      </p:sp>
+      <p:sp>
+        <p:nvSpPr>
+          <p:cNvPr id="9" name="Rounded Rectangle 8"/>
+          <p:cNvSpPr/>
+          <p:nvPr/>
+        </p:nvSpPr>
+        <p:spPr>
+          <a:xfrm>
+            <a:off x="6199632" y="5577840"/>
+            <a:ext cx="5440680" cy="777240"/>
+          </a:xfrm>
+          <a:prstGeom prst="roundRect">
+            <a:avLst>
+              <a:gd name="adj" fmla="val 8000"/>
+            </a:avLst>
+          </a:prstGeom>
+          <a:solidFill>
+            <a:srgbClr val="E9F6EF"/>
+          </a:solidFill>
+          <a:ln>
+            <a:noFill/>
+          </a:ln>
+          <a:effectLst/>
+        </p:spPr>
+        <p:style>
+          <a:lnRef idx="1">
+            <a:schemeClr val="accent1"/>
+          </a:lnRef>
+          <a:fillRef idx="3">
+            <a:schemeClr val="accent1"/>
+          </a:fillRef>
+          <a:effectRef idx="2">
+            <a:schemeClr val="accent1"/>
+          </a:effectRef>
+          <a:fontRef idx="minor">
+            <a:schemeClr val="lt1"/>
+          </a:fontRef>
+        </p:style>
+        <p:txBody>
+          <a:bodyPr rtlCol="0" anchor="ctr"/>
+          <a:lstStyle/>
+          <a:p>
+            <a:pPr algn="ctr"/>
+          </a:p>
+        </p:txBody>
+      </p:sp>
+      <p:sp>
+        <p:nvSpPr>
+          <p:cNvPr id="10" name="Rectangle 9"/>
+          <p:cNvSpPr/>
+          <p:nvPr/>
+        </p:nvSpPr>
+        <p:spPr>
+          <a:xfrm>
+            <a:off x="6199632" y="5577840"/>
+            <a:ext cx="82296" cy="777240"/>
+          </a:xfrm>
+          <a:prstGeom prst="rect">
+            <a:avLst/>
+          </a:prstGeom>
+          <a:solidFill>
+            <a:srgbClr val="1F7A4D"/>
+          </a:solidFill>
+          <a:ln>
+            <a:noFill/>
+          </a:ln>
+          <a:effectLst/>
+        </p:spPr>
+        <p:style>
+          <a:lnRef idx="1">
+            <a:schemeClr val="accent1"/>
+          </a:lnRef>
+          <a:fillRef idx="3">
+            <a:schemeClr val="accent1"/>
+          </a:fillRef>
+          <a:effectRef idx="2">
+            <a:schemeClr val="accent1"/>
+          </a:effectRef>
+          <a:fontRef idx="minor">
+            <a:schemeClr val="lt1"/>
+          </a:fontRef>
+        </p:style>
+        <p:txBody>
+          <a:bodyPr rtlCol="0" anchor="ctr"/>
+          <a:lstStyle/>
+          <a:p>
+            <a:pPr algn="ctr"/>
+          </a:p>
+        </p:txBody>
+      </p:sp>
+      <p:sp>
+        <p:nvSpPr>
+          <p:cNvPr id="11" name="TextBox 10"/>
+          <p:cNvSpPr txBox="1"/>
+          <p:nvPr/>
+        </p:nvSpPr>
+        <p:spPr>
+          <a:xfrm>
+            <a:off x="6428232" y="5632704"/>
+            <a:ext cx="5120640" cy="658368"/>
+          </a:xfrm>
+          <a:prstGeom prst="rect">
+            <a:avLst/>
+          </a:prstGeom>
+          <a:noFill/>
+        </p:spPr>
+        <p:txBody>
+          <a:bodyPr wrap="square" anchor="t">
+            <a:spAutoFit/>
+          </a:bodyPr>
+          <a:lstStyle/>
+          <a:p>
+            <a:pPr algn="l">
+              <a:spcAft>
+                <a:spcPts val="400"/>
+              </a:spcAft>
+            </a:pPr>
+            <a:r>
+              <a:rPr sz="1050" b="1" i="0">
+                <a:solidFill>
+                  <a:srgbClr val="1F7A4D"/>
+                </a:solidFill>
+                <a:latin typeface="Segoe UI"/>
+              </a:rPr>
+              <a:t>🎯 PROJEDEKİ ROLÜ</a:t>
+            </a:r>
+          </a:p>
+          <a:p>
+            <a:pPr algn="l">
+              <a:spcAft>
+                <a:spcPts val="400"/>
+              </a:spcAft>
+            </a:pPr>
+            <a:r>
+              <a:rPr sz="1300" b="1" i="0">
+                <a:solidFill>
+                  <a:srgbClr val="1F3B57"/>
+                </a:solidFill>
+                <a:latin typeface="Segoe UI"/>
+              </a:rPr>
+              <a:t>Model seçimini macro-F1 ile yaptık</a:t>
+            </a:r>
+          </a:p>
+        </p:txBody>
+      </p:sp>
+      <p:sp>
+        <p:nvSpPr>
+          <p:cNvPr id="12" name="Rectangle 11"/>
           <p:cNvSpPr/>
           <p:nvPr/>
         </p:nvSpPr>
@@ -9716,7 +11746,7 @@
       </p:sp>
       <p:sp>
         <p:nvSpPr>
-          <p:cNvPr id="7" name="TextBox 6"/>
+          <p:cNvPr id="13" name="TextBox 12"/>
           <p:cNvSpPr txBox="1"/>
           <p:nvPr/>
         </p:nvSpPr>
@@ -9755,7 +11785,7 @@
       </p:sp>
       <p:sp>
         <p:nvSpPr>
-          <p:cNvPr id="8" name="TextBox 7"/>
+          <p:cNvPr id="14" name="TextBox 13"/>
           <p:cNvSpPr txBox="1"/>
           <p:nvPr/>
         </p:nvSpPr>
@@ -17005,8 +19035,8 @@
         </p:blipFill>
         <p:spPr>
           <a:xfrm>
-            <a:off x="1249527" y="1371600"/>
-            <a:ext cx="9692640" cy="4307840"/>
+            <a:off x="1706727" y="1280160"/>
+            <a:ext cx="8778240" cy="3901440"/>
           </a:xfrm>
           <a:prstGeom prst="rect">
             <a:avLst/>
@@ -17015,7 +19045,297 @@
       </p:pic>
       <p:sp>
         <p:nvSpPr>
-          <p:cNvPr id="6" name="Rectangle 5"/>
+          <p:cNvPr id="6" name="Rounded Rectangle 5"/>
+          <p:cNvSpPr/>
+          <p:nvPr/>
+        </p:nvSpPr>
+        <p:spPr>
+          <a:xfrm>
+            <a:off x="548640" y="5577840"/>
+            <a:ext cx="5440680" cy="777240"/>
+          </a:xfrm>
+          <a:prstGeom prst="roundRect">
+            <a:avLst>
+              <a:gd name="adj" fmla="val 8000"/>
+            </a:avLst>
+          </a:prstGeom>
+          <a:solidFill>
+            <a:srgbClr val="E8F1FA"/>
+          </a:solidFill>
+          <a:ln>
+            <a:noFill/>
+          </a:ln>
+          <a:effectLst/>
+        </p:spPr>
+        <p:style>
+          <a:lnRef idx="1">
+            <a:schemeClr val="accent1"/>
+          </a:lnRef>
+          <a:fillRef idx="3">
+            <a:schemeClr val="accent1"/>
+          </a:fillRef>
+          <a:effectRef idx="2">
+            <a:schemeClr val="accent1"/>
+          </a:effectRef>
+          <a:fontRef idx="minor">
+            <a:schemeClr val="lt1"/>
+          </a:fontRef>
+        </p:style>
+        <p:txBody>
+          <a:bodyPr rtlCol="0" anchor="ctr"/>
+          <a:lstStyle/>
+          <a:p>
+            <a:pPr algn="ctr"/>
+          </a:p>
+        </p:txBody>
+      </p:sp>
+      <p:sp>
+        <p:nvSpPr>
+          <p:cNvPr id="7" name="Rectangle 6"/>
+          <p:cNvSpPr/>
+          <p:nvPr/>
+        </p:nvSpPr>
+        <p:spPr>
+          <a:xfrm>
+            <a:off x="548640" y="5577840"/>
+            <a:ext cx="82296" cy="777240"/>
+          </a:xfrm>
+          <a:prstGeom prst="rect">
+            <a:avLst/>
+          </a:prstGeom>
+          <a:solidFill>
+            <a:srgbClr val="2F74C0"/>
+          </a:solidFill>
+          <a:ln>
+            <a:noFill/>
+          </a:ln>
+          <a:effectLst/>
+        </p:spPr>
+        <p:style>
+          <a:lnRef idx="1">
+            <a:schemeClr val="accent1"/>
+          </a:lnRef>
+          <a:fillRef idx="3">
+            <a:schemeClr val="accent1"/>
+          </a:fillRef>
+          <a:effectRef idx="2">
+            <a:schemeClr val="accent1"/>
+          </a:effectRef>
+          <a:fontRef idx="minor">
+            <a:schemeClr val="lt1"/>
+          </a:fontRef>
+        </p:style>
+        <p:txBody>
+          <a:bodyPr rtlCol="0" anchor="ctr"/>
+          <a:lstStyle/>
+          <a:p>
+            <a:pPr algn="ctr"/>
+          </a:p>
+        </p:txBody>
+      </p:sp>
+      <p:sp>
+        <p:nvSpPr>
+          <p:cNvPr id="8" name="TextBox 7"/>
+          <p:cNvSpPr txBox="1"/>
+          <p:nvPr/>
+        </p:nvSpPr>
+        <p:spPr>
+          <a:xfrm>
+            <a:off x="777240" y="5632704"/>
+            <a:ext cx="5120640" cy="658368"/>
+          </a:xfrm>
+          <a:prstGeom prst="rect">
+            <a:avLst/>
+          </a:prstGeom>
+          <a:noFill/>
+        </p:spPr>
+        <p:txBody>
+          <a:bodyPr wrap="square" anchor="t">
+            <a:spAutoFit/>
+          </a:bodyPr>
+          <a:lstStyle/>
+          <a:p>
+            <a:pPr algn="l">
+              <a:spcAft>
+                <a:spcPts val="400"/>
+              </a:spcAft>
+            </a:pPr>
+            <a:r>
+              <a:rPr sz="1050" b="1" i="0">
+                <a:solidFill>
+                  <a:srgbClr val="2F74C0"/>
+                </a:solidFill>
+                <a:latin typeface="Segoe UI"/>
+              </a:rPr>
+              <a:t>⚙ NASIL ÇALIŞIR</a:t>
+            </a:r>
+          </a:p>
+          <a:p>
+            <a:pPr algn="l">
+              <a:spcAft>
+                <a:spcPts val="400"/>
+              </a:spcAft>
+            </a:pPr>
+            <a:r>
+              <a:rPr sz="1300" b="1" i="0">
+                <a:solidFill>
+                  <a:srgbClr val="1F3B57"/>
+                </a:solidFill>
+                <a:latin typeface="Segoe UI"/>
+              </a:rPr>
+              <a:t>Aktörün TÜM kayıtları tek kutuya</a:t>
+            </a:r>
+          </a:p>
+        </p:txBody>
+      </p:sp>
+      <p:sp>
+        <p:nvSpPr>
+          <p:cNvPr id="9" name="Rounded Rectangle 8"/>
+          <p:cNvSpPr/>
+          <p:nvPr/>
+        </p:nvSpPr>
+        <p:spPr>
+          <a:xfrm>
+            <a:off x="6199632" y="5577840"/>
+            <a:ext cx="5440680" cy="777240"/>
+          </a:xfrm>
+          <a:prstGeom prst="roundRect">
+            <a:avLst>
+              <a:gd name="adj" fmla="val 8000"/>
+            </a:avLst>
+          </a:prstGeom>
+          <a:solidFill>
+            <a:srgbClr val="E9F6EF"/>
+          </a:solidFill>
+          <a:ln>
+            <a:noFill/>
+          </a:ln>
+          <a:effectLst/>
+        </p:spPr>
+        <p:style>
+          <a:lnRef idx="1">
+            <a:schemeClr val="accent1"/>
+          </a:lnRef>
+          <a:fillRef idx="3">
+            <a:schemeClr val="accent1"/>
+          </a:fillRef>
+          <a:effectRef idx="2">
+            <a:schemeClr val="accent1"/>
+          </a:effectRef>
+          <a:fontRef idx="minor">
+            <a:schemeClr val="lt1"/>
+          </a:fontRef>
+        </p:style>
+        <p:txBody>
+          <a:bodyPr rtlCol="0" anchor="ctr"/>
+          <a:lstStyle/>
+          <a:p>
+            <a:pPr algn="ctr"/>
+          </a:p>
+        </p:txBody>
+      </p:sp>
+      <p:sp>
+        <p:nvSpPr>
+          <p:cNvPr id="10" name="Rectangle 9"/>
+          <p:cNvSpPr/>
+          <p:nvPr/>
+        </p:nvSpPr>
+        <p:spPr>
+          <a:xfrm>
+            <a:off x="6199632" y="5577840"/>
+            <a:ext cx="82296" cy="777240"/>
+          </a:xfrm>
+          <a:prstGeom prst="rect">
+            <a:avLst/>
+          </a:prstGeom>
+          <a:solidFill>
+            <a:srgbClr val="1F7A4D"/>
+          </a:solidFill>
+          <a:ln>
+            <a:noFill/>
+          </a:ln>
+          <a:effectLst/>
+        </p:spPr>
+        <p:style>
+          <a:lnRef idx="1">
+            <a:schemeClr val="accent1"/>
+          </a:lnRef>
+          <a:fillRef idx="3">
+            <a:schemeClr val="accent1"/>
+          </a:fillRef>
+          <a:effectRef idx="2">
+            <a:schemeClr val="accent1"/>
+          </a:effectRef>
+          <a:fontRef idx="minor">
+            <a:schemeClr val="lt1"/>
+          </a:fontRef>
+        </p:style>
+        <p:txBody>
+          <a:bodyPr rtlCol="0" anchor="ctr"/>
+          <a:lstStyle/>
+          <a:p>
+            <a:pPr algn="ctr"/>
+          </a:p>
+        </p:txBody>
+      </p:sp>
+      <p:sp>
+        <p:nvSpPr>
+          <p:cNvPr id="11" name="TextBox 10"/>
+          <p:cNvSpPr txBox="1"/>
+          <p:nvPr/>
+        </p:nvSpPr>
+        <p:spPr>
+          <a:xfrm>
+            <a:off x="6428232" y="5632704"/>
+            <a:ext cx="5120640" cy="658368"/>
+          </a:xfrm>
+          <a:prstGeom prst="rect">
+            <a:avLst/>
+          </a:prstGeom>
+          <a:noFill/>
+        </p:spPr>
+        <p:txBody>
+          <a:bodyPr wrap="square" anchor="t">
+            <a:spAutoFit/>
+          </a:bodyPr>
+          <a:lstStyle/>
+          <a:p>
+            <a:pPr algn="l">
+              <a:spcAft>
+                <a:spcPts val="400"/>
+              </a:spcAft>
+            </a:pPr>
+            <a:r>
+              <a:rPr sz="1050" b="1" i="0">
+                <a:solidFill>
+                  <a:srgbClr val="1F7A4D"/>
+                </a:solidFill>
+                <a:latin typeface="Segoe UI"/>
+              </a:rPr>
+              <a:t>🎯 PROJEDEKİ ROLÜ</a:t>
+            </a:r>
+          </a:p>
+          <a:p>
+            <a:pPr algn="l">
+              <a:spcAft>
+                <a:spcPts val="400"/>
+              </a:spcAft>
+            </a:pPr>
+            <a:r>
+              <a:rPr sz="1300" b="1" i="0">
+                <a:solidFill>
+                  <a:srgbClr val="1F3B57"/>
+                </a:solidFill>
+                <a:latin typeface="Segoe UI"/>
+              </a:rPr>
+              <a:t>Ses ezberi imkânsız → skor gerçek</a:t>
+            </a:r>
+          </a:p>
+        </p:txBody>
+      </p:sp>
+      <p:sp>
+        <p:nvSpPr>
+          <p:cNvPr id="12" name="Rectangle 11"/>
           <p:cNvSpPr/>
           <p:nvPr/>
         </p:nvSpPr>
@@ -17059,7 +19379,7 @@
       </p:sp>
       <p:sp>
         <p:nvSpPr>
-          <p:cNvPr id="7" name="TextBox 6"/>
+          <p:cNvPr id="13" name="TextBox 12"/>
           <p:cNvSpPr txBox="1"/>
           <p:nvPr/>
         </p:nvSpPr>
@@ -17098,7 +19418,7 @@
       </p:sp>
       <p:sp>
         <p:nvSpPr>
-          <p:cNvPr id="8" name="TextBox 7"/>
+          <p:cNvPr id="14" name="TextBox 13"/>
           <p:cNvSpPr txBox="1"/>
           <p:nvPr/>
         </p:nvSpPr>
@@ -18387,8 +20707,8 @@
         </p:blipFill>
         <p:spPr>
           <a:xfrm>
-            <a:off x="1295247" y="1371600"/>
-            <a:ext cx="9601200" cy="4693920"/>
+            <a:off x="1889607" y="1325880"/>
+            <a:ext cx="8412480" cy="4112768"/>
           </a:xfrm>
           <a:prstGeom prst="rect">
             <a:avLst/>
@@ -18397,7 +20717,297 @@
       </p:pic>
       <p:sp>
         <p:nvSpPr>
-          <p:cNvPr id="6" name="Rectangle 5"/>
+          <p:cNvPr id="6" name="Rounded Rectangle 5"/>
+          <p:cNvSpPr/>
+          <p:nvPr/>
+        </p:nvSpPr>
+        <p:spPr>
+          <a:xfrm>
+            <a:off x="548640" y="5577840"/>
+            <a:ext cx="5440680" cy="777240"/>
+          </a:xfrm>
+          <a:prstGeom prst="roundRect">
+            <a:avLst>
+              <a:gd name="adj" fmla="val 8000"/>
+            </a:avLst>
+          </a:prstGeom>
+          <a:solidFill>
+            <a:srgbClr val="E8F1FA"/>
+          </a:solidFill>
+          <a:ln>
+            <a:noFill/>
+          </a:ln>
+          <a:effectLst/>
+        </p:spPr>
+        <p:style>
+          <a:lnRef idx="1">
+            <a:schemeClr val="accent1"/>
+          </a:lnRef>
+          <a:fillRef idx="3">
+            <a:schemeClr val="accent1"/>
+          </a:fillRef>
+          <a:effectRef idx="2">
+            <a:schemeClr val="accent1"/>
+          </a:effectRef>
+          <a:fontRef idx="minor">
+            <a:schemeClr val="lt1"/>
+          </a:fontRef>
+        </p:style>
+        <p:txBody>
+          <a:bodyPr rtlCol="0" anchor="ctr"/>
+          <a:lstStyle/>
+          <a:p>
+            <a:pPr algn="ctr"/>
+          </a:p>
+        </p:txBody>
+      </p:sp>
+      <p:sp>
+        <p:nvSpPr>
+          <p:cNvPr id="7" name="Rectangle 6"/>
+          <p:cNvSpPr/>
+          <p:nvPr/>
+        </p:nvSpPr>
+        <p:spPr>
+          <a:xfrm>
+            <a:off x="548640" y="5577840"/>
+            <a:ext cx="82296" cy="777240"/>
+          </a:xfrm>
+          <a:prstGeom prst="rect">
+            <a:avLst/>
+          </a:prstGeom>
+          <a:solidFill>
+            <a:srgbClr val="2F74C0"/>
+          </a:solidFill>
+          <a:ln>
+            <a:noFill/>
+          </a:ln>
+          <a:effectLst/>
+        </p:spPr>
+        <p:style>
+          <a:lnRef idx="1">
+            <a:schemeClr val="accent1"/>
+          </a:lnRef>
+          <a:fillRef idx="3">
+            <a:schemeClr val="accent1"/>
+          </a:fillRef>
+          <a:effectRef idx="2">
+            <a:schemeClr val="accent1"/>
+          </a:effectRef>
+          <a:fontRef idx="minor">
+            <a:schemeClr val="lt1"/>
+          </a:fontRef>
+        </p:style>
+        <p:txBody>
+          <a:bodyPr rtlCol="0" anchor="ctr"/>
+          <a:lstStyle/>
+          <a:p>
+            <a:pPr algn="ctr"/>
+          </a:p>
+        </p:txBody>
+      </p:sp>
+      <p:sp>
+        <p:nvSpPr>
+          <p:cNvPr id="8" name="TextBox 7"/>
+          <p:cNvSpPr txBox="1"/>
+          <p:nvPr/>
+        </p:nvSpPr>
+        <p:spPr>
+          <a:xfrm>
+            <a:off x="777240" y="5632704"/>
+            <a:ext cx="5120640" cy="658368"/>
+          </a:xfrm>
+          <a:prstGeom prst="rect">
+            <a:avLst/>
+          </a:prstGeom>
+          <a:noFill/>
+        </p:spPr>
+        <p:txBody>
+          <a:bodyPr wrap="square" anchor="t">
+            <a:spAutoFit/>
+          </a:bodyPr>
+          <a:lstStyle/>
+          <a:p>
+            <a:pPr algn="l">
+              <a:spcAft>
+                <a:spcPts val="400"/>
+              </a:spcAft>
+            </a:pPr>
+            <a:r>
+              <a:rPr sz="1050" b="1" i="0">
+                <a:solidFill>
+                  <a:srgbClr val="2F74C0"/>
+                </a:solidFill>
+                <a:latin typeface="Segoe UI"/>
+              </a:rPr>
+              <a:t>⚙ NASIL ÇALIŞIR</a:t>
+            </a:r>
+          </a:p>
+          <a:p>
+            <a:pPr algn="l">
+              <a:spcAft>
+                <a:spcPts val="400"/>
+              </a:spcAft>
+            </a:pPr>
+            <a:r>
+              <a:rPr sz="1300" b="1" i="0">
+                <a:solidFill>
+                  <a:srgbClr val="1F3B57"/>
+                </a:solidFill>
+                <a:latin typeface="Segoe UI"/>
+              </a:rPr>
+              <a:t>Pencere kayar, frekanslar ölçülür</a:t>
+            </a:r>
+          </a:p>
+        </p:txBody>
+      </p:sp>
+      <p:sp>
+        <p:nvSpPr>
+          <p:cNvPr id="9" name="Rounded Rectangle 8"/>
+          <p:cNvSpPr/>
+          <p:nvPr/>
+        </p:nvSpPr>
+        <p:spPr>
+          <a:xfrm>
+            <a:off x="6199632" y="5577840"/>
+            <a:ext cx="5440680" cy="777240"/>
+          </a:xfrm>
+          <a:prstGeom prst="roundRect">
+            <a:avLst>
+              <a:gd name="adj" fmla="val 8000"/>
+            </a:avLst>
+          </a:prstGeom>
+          <a:solidFill>
+            <a:srgbClr val="E9F6EF"/>
+          </a:solidFill>
+          <a:ln>
+            <a:noFill/>
+          </a:ln>
+          <a:effectLst/>
+        </p:spPr>
+        <p:style>
+          <a:lnRef idx="1">
+            <a:schemeClr val="accent1"/>
+          </a:lnRef>
+          <a:fillRef idx="3">
+            <a:schemeClr val="accent1"/>
+          </a:fillRef>
+          <a:effectRef idx="2">
+            <a:schemeClr val="accent1"/>
+          </a:effectRef>
+          <a:fontRef idx="minor">
+            <a:schemeClr val="lt1"/>
+          </a:fontRef>
+        </p:style>
+        <p:txBody>
+          <a:bodyPr rtlCol="0" anchor="ctr"/>
+          <a:lstStyle/>
+          <a:p>
+            <a:pPr algn="ctr"/>
+          </a:p>
+        </p:txBody>
+      </p:sp>
+      <p:sp>
+        <p:nvSpPr>
+          <p:cNvPr id="10" name="Rectangle 9"/>
+          <p:cNvSpPr/>
+          <p:nvPr/>
+        </p:nvSpPr>
+        <p:spPr>
+          <a:xfrm>
+            <a:off x="6199632" y="5577840"/>
+            <a:ext cx="82296" cy="777240"/>
+          </a:xfrm>
+          <a:prstGeom prst="rect">
+            <a:avLst/>
+          </a:prstGeom>
+          <a:solidFill>
+            <a:srgbClr val="1F7A4D"/>
+          </a:solidFill>
+          <a:ln>
+            <a:noFill/>
+          </a:ln>
+          <a:effectLst/>
+        </p:spPr>
+        <p:style>
+          <a:lnRef idx="1">
+            <a:schemeClr val="accent1"/>
+          </a:lnRef>
+          <a:fillRef idx="3">
+            <a:schemeClr val="accent1"/>
+          </a:fillRef>
+          <a:effectRef idx="2">
+            <a:schemeClr val="accent1"/>
+          </a:effectRef>
+          <a:fontRef idx="minor">
+            <a:schemeClr val="lt1"/>
+          </a:fontRef>
+        </p:style>
+        <p:txBody>
+          <a:bodyPr rtlCol="0" anchor="ctr"/>
+          <a:lstStyle/>
+          <a:p>
+            <a:pPr algn="ctr"/>
+          </a:p>
+        </p:txBody>
+      </p:sp>
+      <p:sp>
+        <p:nvSpPr>
+          <p:cNvPr id="11" name="TextBox 10"/>
+          <p:cNvSpPr txBox="1"/>
+          <p:nvPr/>
+        </p:nvSpPr>
+        <p:spPr>
+          <a:xfrm>
+            <a:off x="6428232" y="5632704"/>
+            <a:ext cx="5120640" cy="658368"/>
+          </a:xfrm>
+          <a:prstGeom prst="rect">
+            <a:avLst/>
+          </a:prstGeom>
+          <a:noFill/>
+        </p:spPr>
+        <p:txBody>
+          <a:bodyPr wrap="square" anchor="t">
+            <a:spAutoFit/>
+          </a:bodyPr>
+          <a:lstStyle/>
+          <a:p>
+            <a:pPr algn="l">
+              <a:spcAft>
+                <a:spcPts val="400"/>
+              </a:spcAft>
+            </a:pPr>
+            <a:r>
+              <a:rPr sz="1050" b="1" i="0">
+                <a:solidFill>
+                  <a:srgbClr val="1F7A4D"/>
+                </a:solidFill>
+                <a:latin typeface="Segoe UI"/>
+              </a:rPr>
+              <a:t>🎯 PROJEDEKİ ROLÜ</a:t>
+            </a:r>
+          </a:p>
+          <a:p>
+            <a:pPr algn="l">
+              <a:spcAft>
+                <a:spcPts val="400"/>
+              </a:spcAft>
+            </a:pPr>
+            <a:r>
+              <a:rPr sz="1300" b="1" i="0">
+                <a:solidFill>
+                  <a:srgbClr val="1F3B57"/>
+                </a:solidFill>
+                <a:latin typeface="Segoe UI"/>
+              </a:rPr>
+              <a:t>CNN'in girdisi: 64×128 resim</a:t>
+            </a:r>
+          </a:p>
+        </p:txBody>
+      </p:sp>
+      <p:sp>
+        <p:nvSpPr>
+          <p:cNvPr id="12" name="Rectangle 11"/>
           <p:cNvSpPr/>
           <p:nvPr/>
         </p:nvSpPr>
@@ -18441,7 +21051,7 @@
       </p:sp>
       <p:sp>
         <p:nvSpPr>
-          <p:cNvPr id="7" name="TextBox 6"/>
+          <p:cNvPr id="13" name="TextBox 12"/>
           <p:cNvSpPr txBox="1"/>
           <p:nvPr/>
         </p:nvSpPr>
@@ -18480,7 +21090,7 @@
       </p:sp>
       <p:sp>
         <p:nvSpPr>
-          <p:cNvPr id="8" name="TextBox 7"/>
+          <p:cNvPr id="14" name="TextBox 13"/>
           <p:cNvSpPr txBox="1"/>
           <p:nvPr/>
         </p:nvSpPr>
@@ -18704,7 +21314,297 @@
       </p:pic>
       <p:sp>
         <p:nvSpPr>
-          <p:cNvPr id="6" name="Rectangle 5"/>
+          <p:cNvPr id="6" name="Rounded Rectangle 5"/>
+          <p:cNvSpPr/>
+          <p:nvPr/>
+        </p:nvSpPr>
+        <p:spPr>
+          <a:xfrm>
+            <a:off x="548640" y="5577840"/>
+            <a:ext cx="5440680" cy="777240"/>
+          </a:xfrm>
+          <a:prstGeom prst="roundRect">
+            <a:avLst>
+              <a:gd name="adj" fmla="val 8000"/>
+            </a:avLst>
+          </a:prstGeom>
+          <a:solidFill>
+            <a:srgbClr val="E8F1FA"/>
+          </a:solidFill>
+          <a:ln>
+            <a:noFill/>
+          </a:ln>
+          <a:effectLst/>
+        </p:spPr>
+        <p:style>
+          <a:lnRef idx="1">
+            <a:schemeClr val="accent1"/>
+          </a:lnRef>
+          <a:fillRef idx="3">
+            <a:schemeClr val="accent1"/>
+          </a:fillRef>
+          <a:effectRef idx="2">
+            <a:schemeClr val="accent1"/>
+          </a:effectRef>
+          <a:fontRef idx="minor">
+            <a:schemeClr val="lt1"/>
+          </a:fontRef>
+        </p:style>
+        <p:txBody>
+          <a:bodyPr rtlCol="0" anchor="ctr"/>
+          <a:lstStyle/>
+          <a:p>
+            <a:pPr algn="ctr"/>
+          </a:p>
+        </p:txBody>
+      </p:sp>
+      <p:sp>
+        <p:nvSpPr>
+          <p:cNvPr id="7" name="Rectangle 6"/>
+          <p:cNvSpPr/>
+          <p:nvPr/>
+        </p:nvSpPr>
+        <p:spPr>
+          <a:xfrm>
+            <a:off x="548640" y="5577840"/>
+            <a:ext cx="82296" cy="777240"/>
+          </a:xfrm>
+          <a:prstGeom prst="rect">
+            <a:avLst/>
+          </a:prstGeom>
+          <a:solidFill>
+            <a:srgbClr val="2F74C0"/>
+          </a:solidFill>
+          <a:ln>
+            <a:noFill/>
+          </a:ln>
+          <a:effectLst/>
+        </p:spPr>
+        <p:style>
+          <a:lnRef idx="1">
+            <a:schemeClr val="accent1"/>
+          </a:lnRef>
+          <a:fillRef idx="3">
+            <a:schemeClr val="accent1"/>
+          </a:fillRef>
+          <a:effectRef idx="2">
+            <a:schemeClr val="accent1"/>
+          </a:effectRef>
+          <a:fontRef idx="minor">
+            <a:schemeClr val="lt1"/>
+          </a:fontRef>
+        </p:style>
+        <p:txBody>
+          <a:bodyPr rtlCol="0" anchor="ctr"/>
+          <a:lstStyle/>
+          <a:p>
+            <a:pPr algn="ctr"/>
+          </a:p>
+        </p:txBody>
+      </p:sp>
+      <p:sp>
+        <p:nvSpPr>
+          <p:cNvPr id="8" name="TextBox 7"/>
+          <p:cNvSpPr txBox="1"/>
+          <p:nvPr/>
+        </p:nvSpPr>
+        <p:spPr>
+          <a:xfrm>
+            <a:off x="777240" y="5632704"/>
+            <a:ext cx="5120640" cy="658368"/>
+          </a:xfrm>
+          <a:prstGeom prst="rect">
+            <a:avLst/>
+          </a:prstGeom>
+          <a:noFill/>
+        </p:spPr>
+        <p:txBody>
+          <a:bodyPr wrap="square" anchor="t">
+            <a:spAutoFit/>
+          </a:bodyPr>
+          <a:lstStyle/>
+          <a:p>
+            <a:pPr algn="l">
+              <a:spcAft>
+                <a:spcPts val="400"/>
+              </a:spcAft>
+            </a:pPr>
+            <a:r>
+              <a:rPr sz="1050" b="1" i="0">
+                <a:solidFill>
+                  <a:srgbClr val="2F74C0"/>
+                </a:solidFill>
+                <a:latin typeface="Segoe UI"/>
+              </a:rPr>
+              <a:t>⚙ NASIL ÇALIŞIR</a:t>
+            </a:r>
+          </a:p>
+          <a:p>
+            <a:pPr algn="l">
+              <a:spcAft>
+                <a:spcPts val="400"/>
+              </a:spcAft>
+            </a:pPr>
+            <a:r>
+              <a:rPr sz="1300" b="1" i="0">
+                <a:solidFill>
+                  <a:srgbClr val="1F3B57"/>
+                </a:solidFill>
+                <a:latin typeface="Segoe UI"/>
+              </a:rPr>
+              <a:t>Filtre gezer: çarp + topla</a:t>
+            </a:r>
+          </a:p>
+        </p:txBody>
+      </p:sp>
+      <p:sp>
+        <p:nvSpPr>
+          <p:cNvPr id="9" name="Rounded Rectangle 8"/>
+          <p:cNvSpPr/>
+          <p:nvPr/>
+        </p:nvSpPr>
+        <p:spPr>
+          <a:xfrm>
+            <a:off x="6199632" y="5577840"/>
+            <a:ext cx="5440680" cy="777240"/>
+          </a:xfrm>
+          <a:prstGeom prst="roundRect">
+            <a:avLst>
+              <a:gd name="adj" fmla="val 8000"/>
+            </a:avLst>
+          </a:prstGeom>
+          <a:solidFill>
+            <a:srgbClr val="E9F6EF"/>
+          </a:solidFill>
+          <a:ln>
+            <a:noFill/>
+          </a:ln>
+          <a:effectLst/>
+        </p:spPr>
+        <p:style>
+          <a:lnRef idx="1">
+            <a:schemeClr val="accent1"/>
+          </a:lnRef>
+          <a:fillRef idx="3">
+            <a:schemeClr val="accent1"/>
+          </a:fillRef>
+          <a:effectRef idx="2">
+            <a:schemeClr val="accent1"/>
+          </a:effectRef>
+          <a:fontRef idx="minor">
+            <a:schemeClr val="lt1"/>
+          </a:fontRef>
+        </p:style>
+        <p:txBody>
+          <a:bodyPr rtlCol="0" anchor="ctr"/>
+          <a:lstStyle/>
+          <a:p>
+            <a:pPr algn="ctr"/>
+          </a:p>
+        </p:txBody>
+      </p:sp>
+      <p:sp>
+        <p:nvSpPr>
+          <p:cNvPr id="10" name="Rectangle 9"/>
+          <p:cNvSpPr/>
+          <p:nvPr/>
+        </p:nvSpPr>
+        <p:spPr>
+          <a:xfrm>
+            <a:off x="6199632" y="5577840"/>
+            <a:ext cx="82296" cy="777240"/>
+          </a:xfrm>
+          <a:prstGeom prst="rect">
+            <a:avLst/>
+          </a:prstGeom>
+          <a:solidFill>
+            <a:srgbClr val="1F7A4D"/>
+          </a:solidFill>
+          <a:ln>
+            <a:noFill/>
+          </a:ln>
+          <a:effectLst/>
+        </p:spPr>
+        <p:style>
+          <a:lnRef idx="1">
+            <a:schemeClr val="accent1"/>
+          </a:lnRef>
+          <a:fillRef idx="3">
+            <a:schemeClr val="accent1"/>
+          </a:fillRef>
+          <a:effectRef idx="2">
+            <a:schemeClr val="accent1"/>
+          </a:effectRef>
+          <a:fontRef idx="minor">
+            <a:schemeClr val="lt1"/>
+          </a:fontRef>
+        </p:style>
+        <p:txBody>
+          <a:bodyPr rtlCol="0" anchor="ctr"/>
+          <a:lstStyle/>
+          <a:p>
+            <a:pPr algn="ctr"/>
+          </a:p>
+        </p:txBody>
+      </p:sp>
+      <p:sp>
+        <p:nvSpPr>
+          <p:cNvPr id="11" name="TextBox 10"/>
+          <p:cNvSpPr txBox="1"/>
+          <p:nvPr/>
+        </p:nvSpPr>
+        <p:spPr>
+          <a:xfrm>
+            <a:off x="6428232" y="5632704"/>
+            <a:ext cx="5120640" cy="658368"/>
+          </a:xfrm>
+          <a:prstGeom prst="rect">
+            <a:avLst/>
+          </a:prstGeom>
+          <a:noFill/>
+        </p:spPr>
+        <p:txBody>
+          <a:bodyPr wrap="square" anchor="t">
+            <a:spAutoFit/>
+          </a:bodyPr>
+          <a:lstStyle/>
+          <a:p>
+            <a:pPr algn="l">
+              <a:spcAft>
+                <a:spcPts val="400"/>
+              </a:spcAft>
+            </a:pPr>
+            <a:r>
+              <a:rPr sz="1050" b="1" i="0">
+                <a:solidFill>
+                  <a:srgbClr val="1F7A4D"/>
+                </a:solidFill>
+                <a:latin typeface="Segoe UI"/>
+              </a:rPr>
+              <a:t>🎯 PROJEDEKİ ROLÜ</a:t>
+            </a:r>
+          </a:p>
+          <a:p>
+            <a:pPr algn="l">
+              <a:spcAft>
+                <a:spcPts val="400"/>
+              </a:spcAft>
+            </a:pPr>
+            <a:r>
+              <a:rPr sz="1300" b="1" i="0">
+                <a:solidFill>
+                  <a:srgbClr val="1F3B57"/>
+                </a:solidFill>
+                <a:latin typeface="Segoe UI"/>
+              </a:rPr>
+              <a:t>Duygu desenlerini bulan dedektör (öğrenilir)</a:t>
+            </a:r>
+          </a:p>
+        </p:txBody>
+      </p:sp>
+      <p:sp>
+        <p:nvSpPr>
+          <p:cNvPr id="12" name="Rectangle 11"/>
           <p:cNvSpPr/>
           <p:nvPr/>
         </p:nvSpPr>
@@ -18748,7 +21648,7 @@
       </p:sp>
       <p:sp>
         <p:nvSpPr>
-          <p:cNvPr id="7" name="TextBox 6"/>
+          <p:cNvPr id="13" name="TextBox 12"/>
           <p:cNvSpPr txBox="1"/>
           <p:nvPr/>
         </p:nvSpPr>
@@ -18787,7 +21687,7 @@
       </p:sp>
       <p:sp>
         <p:nvSpPr>
-          <p:cNvPr id="8" name="TextBox 7"/>
+          <p:cNvPr id="14" name="TextBox 13"/>
           <p:cNvSpPr txBox="1"/>
           <p:nvPr/>
         </p:nvSpPr>
